--- a/assets/libreoffice_impr_njc/12fd9a81-7fdf-4f21-b6ce-7388cd2f840c/The Golden Age of Arcade Games.pptx
+++ b/assets/libreoffice_impr_njc/12fd9a81-7fdf-4f21-b6ce-7388cd2f840c/The Golden Age of Arcade Games.pptx
@@ -311,7 +311,7 @@
             <a:pPr algn="r">
               <a:buNone/>
             </a:pPr>
-            <a:fld id="{B4B4C6EB-82C8-4C53-A992-868D62BBDEF4}" type="slidenum">
+            <a:fld id="{135C4E82-FFA8-483C-94C7-7037BDD5261D}" type="slidenum">
               <a:rPr b="0" lang="en-HK" sz="1400" spc="-1" strike="noStrike">
                 <a:latin typeface="Times New Roman"/>
               </a:rPr>
@@ -359,7 +359,7 @@
         <p:spPr>
           <a:xfrm>
             <a:off x="685800" y="1143000"/>
-            <a:ext cx="5485680" cy="3085560"/>
+            <a:ext cx="5485320" cy="3085200"/>
           </a:xfrm>
           <a:prstGeom prst="rect">
             <a:avLst/>
@@ -382,7 +382,7 @@
         <p:spPr>
           <a:xfrm>
             <a:off x="685800" y="4400640"/>
-            <a:ext cx="5485680" cy="3599640"/>
+            <a:ext cx="5485320" cy="3599280"/>
           </a:xfrm>
           <a:prstGeom prst="rect">
             <a:avLst/>
@@ -416,7 +416,7 @@
         <p:spPr>
           <a:xfrm>
             <a:off x="3884760" y="8685360"/>
-            <a:ext cx="2971080" cy="457920"/>
+            <a:ext cx="2970720" cy="457560"/>
           </a:xfrm>
           <a:prstGeom prst="rect">
             <a:avLst/>
@@ -448,7 +448,7 @@
               </a:lnSpc>
               <a:buNone/>
             </a:pPr>
-            <a:fld id="{58E8B831-FD8D-42BE-A2C4-99E3567034AA}" type="slidenum">
+            <a:fld id="{6D3589C2-3112-4FFE-8803-49E7DC64E527}" type="slidenum">
               <a:rPr b="0" lang="en-US" sz="1200" spc="-1" strike="noStrike">
                 <a:latin typeface="Times New Roman"/>
               </a:rPr>
@@ -495,7 +495,7 @@
         <p:spPr>
           <a:xfrm>
             <a:off x="685800" y="1143000"/>
-            <a:ext cx="5485680" cy="3085560"/>
+            <a:ext cx="5485320" cy="3085200"/>
           </a:xfrm>
           <a:prstGeom prst="rect">
             <a:avLst/>
@@ -518,7 +518,7 @@
         <p:spPr>
           <a:xfrm>
             <a:off x="685800" y="4400640"/>
-            <a:ext cx="5485680" cy="3599640"/>
+            <a:ext cx="5485320" cy="3599280"/>
           </a:xfrm>
           <a:prstGeom prst="rect">
             <a:avLst/>
@@ -552,7 +552,7 @@
         <p:spPr>
           <a:xfrm>
             <a:off x="3884760" y="8685360"/>
-            <a:ext cx="2971080" cy="457920"/>
+            <a:ext cx="2970720" cy="457560"/>
           </a:xfrm>
           <a:prstGeom prst="rect">
             <a:avLst/>
@@ -584,7 +584,7 @@
               </a:lnSpc>
               <a:buNone/>
             </a:pPr>
-            <a:fld id="{B8DF3F71-C122-4E29-9FC8-EBEEB8699BE6}" type="slidenum">
+            <a:fld id="{CE3349F7-7E0F-40E9-B4EB-76DD72C7D2E7}" type="slidenum">
               <a:rPr b="0" lang="en-US" sz="1200" spc="-1" strike="noStrike">
                 <a:latin typeface="Times New Roman"/>
               </a:rPr>
@@ -631,7 +631,7 @@
         <p:spPr>
           <a:xfrm>
             <a:off x="685800" y="1143000"/>
-            <a:ext cx="5485680" cy="3085560"/>
+            <a:ext cx="5485320" cy="3085200"/>
           </a:xfrm>
           <a:prstGeom prst="rect">
             <a:avLst/>
@@ -654,7 +654,7 @@
         <p:spPr>
           <a:xfrm>
             <a:off x="685800" y="4400640"/>
-            <a:ext cx="5485680" cy="3599640"/>
+            <a:ext cx="5485320" cy="3599280"/>
           </a:xfrm>
           <a:prstGeom prst="rect">
             <a:avLst/>
@@ -688,7 +688,7 @@
         <p:spPr>
           <a:xfrm>
             <a:off x="3884760" y="8685360"/>
-            <a:ext cx="2971080" cy="457920"/>
+            <a:ext cx="2970720" cy="457560"/>
           </a:xfrm>
           <a:prstGeom prst="rect">
             <a:avLst/>
@@ -720,7 +720,7 @@
               </a:lnSpc>
               <a:buNone/>
             </a:pPr>
-            <a:fld id="{55B40CC9-E39E-4904-8DFC-39F7D95E9CA5}" type="slidenum">
+            <a:fld id="{FCE9E023-2F74-4BAF-88B5-7FEF94E29584}" type="slidenum">
               <a:rPr b="0" lang="en-US" sz="1200" spc="-1" strike="noStrike">
                 <a:latin typeface="Times New Roman"/>
               </a:rPr>
@@ -767,7 +767,7 @@
         <p:spPr>
           <a:xfrm>
             <a:off x="685800" y="1143000"/>
-            <a:ext cx="5485680" cy="3085560"/>
+            <a:ext cx="5485320" cy="3085200"/>
           </a:xfrm>
           <a:prstGeom prst="rect">
             <a:avLst/>
@@ -790,7 +790,7 @@
         <p:spPr>
           <a:xfrm>
             <a:off x="685800" y="4400640"/>
-            <a:ext cx="5485680" cy="3599640"/>
+            <a:ext cx="5485320" cy="3599280"/>
           </a:xfrm>
           <a:prstGeom prst="rect">
             <a:avLst/>
@@ -824,7 +824,7 @@
         <p:spPr>
           <a:xfrm>
             <a:off x="3884760" y="8685360"/>
-            <a:ext cx="2971080" cy="457920"/>
+            <a:ext cx="2970720" cy="457560"/>
           </a:xfrm>
           <a:prstGeom prst="rect">
             <a:avLst/>
@@ -856,7 +856,7 @@
               </a:lnSpc>
               <a:buNone/>
             </a:pPr>
-            <a:fld id="{227E9380-ABA5-47E4-BCA6-0314F3BC9BD6}" type="slidenum">
+            <a:fld id="{60339EA4-FBF2-4B5B-BE0F-A8AEC42F00E5}" type="slidenum">
               <a:rPr b="0" lang="en-US" sz="1200" spc="-1" strike="noStrike">
                 <a:latin typeface="Times New Roman"/>
               </a:rPr>
@@ -903,7 +903,7 @@
         <p:spPr>
           <a:xfrm>
             <a:off x="685800" y="1143000"/>
-            <a:ext cx="5485680" cy="3085560"/>
+            <a:ext cx="5485320" cy="3085200"/>
           </a:xfrm>
           <a:prstGeom prst="rect">
             <a:avLst/>
@@ -926,7 +926,7 @@
         <p:spPr>
           <a:xfrm>
             <a:off x="685800" y="4400640"/>
-            <a:ext cx="5485680" cy="3599640"/>
+            <a:ext cx="5485320" cy="3599280"/>
           </a:xfrm>
           <a:prstGeom prst="rect">
             <a:avLst/>
@@ -960,7 +960,7 @@
         <p:spPr>
           <a:xfrm>
             <a:off x="3884760" y="8685360"/>
-            <a:ext cx="2971080" cy="457920"/>
+            <a:ext cx="2970720" cy="457560"/>
           </a:xfrm>
           <a:prstGeom prst="rect">
             <a:avLst/>
@@ -992,7 +992,7 @@
               </a:lnSpc>
               <a:buNone/>
             </a:pPr>
-            <a:fld id="{6B1E6B14-5E47-4A67-A74C-C3709FA79CFA}" type="slidenum">
+            <a:fld id="{7A28409A-F184-4502-B630-C3112548561E}" type="slidenum">
               <a:rPr b="0" lang="en-US" sz="1200" spc="-1" strike="noStrike">
                 <a:latin typeface="Times New Roman"/>
               </a:rPr>
@@ -1039,7 +1039,7 @@
         <p:spPr>
           <a:xfrm>
             <a:off x="685800" y="1143000"/>
-            <a:ext cx="5485680" cy="3085560"/>
+            <a:ext cx="5485320" cy="3085200"/>
           </a:xfrm>
           <a:prstGeom prst="rect">
             <a:avLst/>
@@ -1062,7 +1062,7 @@
         <p:spPr>
           <a:xfrm>
             <a:off x="685800" y="4400640"/>
-            <a:ext cx="5485680" cy="3599640"/>
+            <a:ext cx="5485320" cy="3599280"/>
           </a:xfrm>
           <a:prstGeom prst="rect">
             <a:avLst/>
@@ -1096,7 +1096,7 @@
         <p:spPr>
           <a:xfrm>
             <a:off x="3884760" y="8685360"/>
-            <a:ext cx="2971080" cy="457920"/>
+            <a:ext cx="2970720" cy="457560"/>
           </a:xfrm>
           <a:prstGeom prst="rect">
             <a:avLst/>
@@ -1128,7 +1128,7 @@
               </a:lnSpc>
               <a:buNone/>
             </a:pPr>
-            <a:fld id="{018202E4-F2BC-4664-B133-80C0C8CAFF33}" type="slidenum">
+            <a:fld id="{5A3565EE-F47B-4723-8235-F06E820FE9CB}" type="slidenum">
               <a:rPr b="0" lang="en-US" sz="1200" spc="-1" strike="noStrike">
                 <a:latin typeface="Times New Roman"/>
               </a:rPr>
@@ -1175,7 +1175,7 @@
         <p:spPr>
           <a:xfrm>
             <a:off x="685800" y="1143000"/>
-            <a:ext cx="5485680" cy="3085560"/>
+            <a:ext cx="5485320" cy="3085200"/>
           </a:xfrm>
           <a:prstGeom prst="rect">
             <a:avLst/>
@@ -1198,7 +1198,7 @@
         <p:spPr>
           <a:xfrm>
             <a:off x="685800" y="4400640"/>
-            <a:ext cx="5485680" cy="3599640"/>
+            <a:ext cx="5485320" cy="3599280"/>
           </a:xfrm>
           <a:prstGeom prst="rect">
             <a:avLst/>
@@ -1232,7 +1232,7 @@
         <p:spPr>
           <a:xfrm>
             <a:off x="3884760" y="8685360"/>
-            <a:ext cx="2971080" cy="457920"/>
+            <a:ext cx="2970720" cy="457560"/>
           </a:xfrm>
           <a:prstGeom prst="rect">
             <a:avLst/>
@@ -1264,7 +1264,7 @@
               </a:lnSpc>
               <a:buNone/>
             </a:pPr>
-            <a:fld id="{E0A91A2B-17AE-405E-A22F-D3889E93F529}" type="slidenum">
+            <a:fld id="{24FB2F09-ABD3-47CA-A7BD-98EFE8A15F0B}" type="slidenum">
               <a:rPr b="0" lang="en-US" sz="1200" spc="-1" strike="noStrike">
                 <a:latin typeface="Times New Roman"/>
               </a:rPr>
@@ -1311,7 +1311,7 @@
         <p:spPr>
           <a:xfrm>
             <a:off x="685800" y="1143000"/>
-            <a:ext cx="5485680" cy="3085560"/>
+            <a:ext cx="5485320" cy="3085200"/>
           </a:xfrm>
           <a:prstGeom prst="rect">
             <a:avLst/>
@@ -1334,7 +1334,7 @@
         <p:spPr>
           <a:xfrm>
             <a:off x="685800" y="4400640"/>
-            <a:ext cx="5485680" cy="3599640"/>
+            <a:ext cx="5485320" cy="3599280"/>
           </a:xfrm>
           <a:prstGeom prst="rect">
             <a:avLst/>
@@ -1368,7 +1368,7 @@
         <p:spPr>
           <a:xfrm>
             <a:off x="3884760" y="8685360"/>
-            <a:ext cx="2971080" cy="457920"/>
+            <a:ext cx="2970720" cy="457560"/>
           </a:xfrm>
           <a:prstGeom prst="rect">
             <a:avLst/>
@@ -1400,7 +1400,7 @@
               </a:lnSpc>
               <a:buNone/>
             </a:pPr>
-            <a:fld id="{4EC9F8BA-B545-409A-988C-159A7D9EFAD3}" type="slidenum">
+            <a:fld id="{3B667EDF-38F8-4E7E-822E-02D50B95DB5F}" type="slidenum">
               <a:rPr b="0" lang="en-US" sz="1200" spc="-1" strike="noStrike">
                 <a:latin typeface="Times New Roman"/>
               </a:rPr>
@@ -1447,7 +1447,7 @@
         <p:spPr>
           <a:xfrm>
             <a:off x="685800" y="1143000"/>
-            <a:ext cx="5485680" cy="3085560"/>
+            <a:ext cx="5485320" cy="3085200"/>
           </a:xfrm>
           <a:prstGeom prst="rect">
             <a:avLst/>
@@ -1470,7 +1470,7 @@
         <p:spPr>
           <a:xfrm>
             <a:off x="685800" y="4400640"/>
-            <a:ext cx="5485680" cy="3599640"/>
+            <a:ext cx="5485320" cy="3599280"/>
           </a:xfrm>
           <a:prstGeom prst="rect">
             <a:avLst/>
@@ -1504,7 +1504,7 @@
         <p:spPr>
           <a:xfrm>
             <a:off x="3884760" y="8685360"/>
-            <a:ext cx="2971080" cy="457920"/>
+            <a:ext cx="2970720" cy="457560"/>
           </a:xfrm>
           <a:prstGeom prst="rect">
             <a:avLst/>
@@ -1536,7 +1536,7 @@
               </a:lnSpc>
               <a:buNone/>
             </a:pPr>
-            <a:fld id="{E2CA7597-4910-4597-8792-6935F2235A5D}" type="slidenum">
+            <a:fld id="{ECE41C35-53B4-48A7-91D8-6840DB066899}" type="slidenum">
               <a:rPr b="0" lang="en-US" sz="1200" spc="-1" strike="noStrike">
                 <a:latin typeface="Times New Roman"/>
               </a:rPr>
@@ -1583,7 +1583,7 @@
         <p:spPr>
           <a:xfrm>
             <a:off x="685800" y="1143000"/>
-            <a:ext cx="5485680" cy="3085560"/>
+            <a:ext cx="5485320" cy="3085200"/>
           </a:xfrm>
           <a:prstGeom prst="rect">
             <a:avLst/>
@@ -1606,7 +1606,7 @@
         <p:spPr>
           <a:xfrm>
             <a:off x="685800" y="4400640"/>
-            <a:ext cx="5485680" cy="3599640"/>
+            <a:ext cx="5485320" cy="3599280"/>
           </a:xfrm>
           <a:prstGeom prst="rect">
             <a:avLst/>
@@ -1640,7 +1640,7 @@
         <p:spPr>
           <a:xfrm>
             <a:off x="3884760" y="8685360"/>
-            <a:ext cx="2971080" cy="457920"/>
+            <a:ext cx="2970720" cy="457560"/>
           </a:xfrm>
           <a:prstGeom prst="rect">
             <a:avLst/>
@@ -1672,7 +1672,7 @@
               </a:lnSpc>
               <a:buNone/>
             </a:pPr>
-            <a:fld id="{9C7C2AE1-F98F-4964-B213-653784ADCA4A}" type="slidenum">
+            <a:fld id="{43DD190A-180A-4784-BB03-F0123E551FF5}" type="slidenum">
               <a:rPr b="0" lang="en-US" sz="1200" spc="-1" strike="noStrike">
                 <a:latin typeface="Times New Roman"/>
               </a:rPr>
@@ -1719,7 +1719,7 @@
         <p:spPr>
           <a:xfrm>
             <a:off x="685800" y="1143000"/>
-            <a:ext cx="5485680" cy="3085560"/>
+            <a:ext cx="5485320" cy="3085200"/>
           </a:xfrm>
           <a:prstGeom prst="rect">
             <a:avLst/>
@@ -1742,7 +1742,7 @@
         <p:spPr>
           <a:xfrm>
             <a:off x="685800" y="4400640"/>
-            <a:ext cx="5485680" cy="3599640"/>
+            <a:ext cx="5485320" cy="3599280"/>
           </a:xfrm>
           <a:prstGeom prst="rect">
             <a:avLst/>
@@ -1776,7 +1776,7 @@
         <p:spPr>
           <a:xfrm>
             <a:off x="3884760" y="8685360"/>
-            <a:ext cx="2971080" cy="457920"/>
+            <a:ext cx="2970720" cy="457560"/>
           </a:xfrm>
           <a:prstGeom prst="rect">
             <a:avLst/>
@@ -1808,7 +1808,7 @@
               </a:lnSpc>
               <a:buNone/>
             </a:pPr>
-            <a:fld id="{9196277B-329A-4417-940C-636CF83F23F5}" type="slidenum">
+            <a:fld id="{D2B3D19D-A129-4C40-BB2D-7B1DF5C90EB1}" type="slidenum">
               <a:rPr b="0" lang="en-US" sz="1200" spc="-1" strike="noStrike">
                 <a:latin typeface="Times New Roman"/>
               </a:rPr>
@@ -1855,7 +1855,7 @@
         <p:spPr>
           <a:xfrm>
             <a:off x="685800" y="1143000"/>
-            <a:ext cx="5485680" cy="3085560"/>
+            <a:ext cx="5485320" cy="3085200"/>
           </a:xfrm>
           <a:prstGeom prst="rect">
             <a:avLst/>
@@ -1878,7 +1878,7 @@
         <p:spPr>
           <a:xfrm>
             <a:off x="685800" y="4400640"/>
-            <a:ext cx="5485680" cy="3599640"/>
+            <a:ext cx="5485320" cy="3599280"/>
           </a:xfrm>
           <a:prstGeom prst="rect">
             <a:avLst/>
@@ -1912,7 +1912,7 @@
         <p:spPr>
           <a:xfrm>
             <a:off x="3884760" y="8685360"/>
-            <a:ext cx="2971080" cy="457920"/>
+            <a:ext cx="2970720" cy="457560"/>
           </a:xfrm>
           <a:prstGeom prst="rect">
             <a:avLst/>
@@ -1944,7 +1944,7 @@
               </a:lnSpc>
               <a:buNone/>
             </a:pPr>
-            <a:fld id="{0772C516-FB2C-4A7A-9E77-D3F73C47E9DC}" type="slidenum">
+            <a:fld id="{A9C82BE3-CFB2-4580-BAD8-D5FAB6244A3F}" type="slidenum">
               <a:rPr b="0" lang="en-US" sz="1200" spc="-1" strike="noStrike">
                 <a:latin typeface="Times New Roman"/>
               </a:rPr>
@@ -1991,7 +1991,7 @@
         <p:spPr>
           <a:xfrm>
             <a:off x="685800" y="1143000"/>
-            <a:ext cx="5485680" cy="3085560"/>
+            <a:ext cx="5485320" cy="3085200"/>
           </a:xfrm>
           <a:prstGeom prst="rect">
             <a:avLst/>
@@ -2014,7 +2014,7 @@
         <p:spPr>
           <a:xfrm>
             <a:off x="685800" y="4400640"/>
-            <a:ext cx="5485680" cy="3599640"/>
+            <a:ext cx="5485320" cy="3599280"/>
           </a:xfrm>
           <a:prstGeom prst="rect">
             <a:avLst/>
@@ -2048,7 +2048,7 @@
         <p:spPr>
           <a:xfrm>
             <a:off x="3884760" y="8685360"/>
-            <a:ext cx="2971080" cy="457920"/>
+            <a:ext cx="2970720" cy="457560"/>
           </a:xfrm>
           <a:prstGeom prst="rect">
             <a:avLst/>
@@ -2080,7 +2080,7 @@
               </a:lnSpc>
               <a:buNone/>
             </a:pPr>
-            <a:fld id="{0C2045CD-5C69-4A77-A8F6-D1A22649B07C}" type="slidenum">
+            <a:fld id="{0596B357-CE7A-4C35-A9B1-51779722A498}" type="slidenum">
               <a:rPr b="0" lang="en-US" sz="1200" spc="-1" strike="noStrike">
                 <a:latin typeface="Times New Roman"/>
               </a:rPr>
@@ -2127,7 +2127,7 @@
         <p:spPr>
           <a:xfrm>
             <a:off x="685800" y="1143000"/>
-            <a:ext cx="5485680" cy="3085560"/>
+            <a:ext cx="5485320" cy="3085200"/>
           </a:xfrm>
           <a:prstGeom prst="rect">
             <a:avLst/>
@@ -2150,7 +2150,7 @@
         <p:spPr>
           <a:xfrm>
             <a:off x="685800" y="4400640"/>
-            <a:ext cx="5485680" cy="3599640"/>
+            <a:ext cx="5485320" cy="3599280"/>
           </a:xfrm>
           <a:prstGeom prst="rect">
             <a:avLst/>
@@ -2184,7 +2184,7 @@
         <p:spPr>
           <a:xfrm>
             <a:off x="3884760" y="8685360"/>
-            <a:ext cx="2971080" cy="457920"/>
+            <a:ext cx="2970720" cy="457560"/>
           </a:xfrm>
           <a:prstGeom prst="rect">
             <a:avLst/>
@@ -2216,7 +2216,7 @@
               </a:lnSpc>
               <a:buNone/>
             </a:pPr>
-            <a:fld id="{1401345F-4FA9-4DAA-94A6-A8778EC5A35D}" type="slidenum">
+            <a:fld id="{38356F6D-688E-4C80-A3EE-D3651747B422}" type="slidenum">
               <a:rPr b="0" lang="en-US" sz="1200" spc="-1" strike="noStrike">
                 <a:latin typeface="Times New Roman"/>
               </a:rPr>
@@ -2263,7 +2263,7 @@
         <p:spPr>
           <a:xfrm>
             <a:off x="685800" y="1143000"/>
-            <a:ext cx="5485680" cy="3085560"/>
+            <a:ext cx="5485320" cy="3085200"/>
           </a:xfrm>
           <a:prstGeom prst="rect">
             <a:avLst/>
@@ -2286,7 +2286,7 @@
         <p:spPr>
           <a:xfrm>
             <a:off x="685800" y="4400640"/>
-            <a:ext cx="5485680" cy="3599640"/>
+            <a:ext cx="5485320" cy="3599280"/>
           </a:xfrm>
           <a:prstGeom prst="rect">
             <a:avLst/>
@@ -2320,7 +2320,7 @@
         <p:spPr>
           <a:xfrm>
             <a:off x="3884760" y="8685360"/>
-            <a:ext cx="2971080" cy="457920"/>
+            <a:ext cx="2970720" cy="457560"/>
           </a:xfrm>
           <a:prstGeom prst="rect">
             <a:avLst/>
@@ -2352,7 +2352,7 @@
               </a:lnSpc>
               <a:buNone/>
             </a:pPr>
-            <a:fld id="{0F35FB59-3B4C-4EB2-BCF2-2087E95BD9E7}" type="slidenum">
+            <a:fld id="{D9DF5CCB-3AE5-49D9-BB55-BE9857E40167}" type="slidenum">
               <a:rPr b="0" lang="en-US" sz="1200" spc="-1" strike="noStrike">
                 <a:latin typeface="Times New Roman"/>
               </a:rPr>
@@ -2399,7 +2399,7 @@
         <p:spPr>
           <a:xfrm>
             <a:off x="685800" y="1143000"/>
-            <a:ext cx="5485680" cy="3085560"/>
+            <a:ext cx="5485320" cy="3085200"/>
           </a:xfrm>
           <a:prstGeom prst="rect">
             <a:avLst/>
@@ -2422,7 +2422,7 @@
         <p:spPr>
           <a:xfrm>
             <a:off x="685800" y="4400640"/>
-            <a:ext cx="5485680" cy="3599640"/>
+            <a:ext cx="5485320" cy="3599280"/>
           </a:xfrm>
           <a:prstGeom prst="rect">
             <a:avLst/>
@@ -2456,7 +2456,7 @@
         <p:spPr>
           <a:xfrm>
             <a:off x="3884760" y="8685360"/>
-            <a:ext cx="2971080" cy="457920"/>
+            <a:ext cx="2970720" cy="457560"/>
           </a:xfrm>
           <a:prstGeom prst="rect">
             <a:avLst/>
@@ -2488,7 +2488,7 @@
               </a:lnSpc>
               <a:buNone/>
             </a:pPr>
-            <a:fld id="{1F1DAFCC-8833-4C0F-8CA7-84540BCC5FF8}" type="slidenum">
+            <a:fld id="{D5C0685C-064A-4E93-8947-DAF53C1D2659}" type="slidenum">
               <a:rPr b="0" lang="en-US" sz="1200" spc="-1" strike="noStrike">
                 <a:latin typeface="Times New Roman"/>
               </a:rPr>
@@ -2535,7 +2535,7 @@
         <p:spPr>
           <a:xfrm>
             <a:off x="685800" y="1143000"/>
-            <a:ext cx="5485680" cy="3085560"/>
+            <a:ext cx="5485320" cy="3085200"/>
           </a:xfrm>
           <a:prstGeom prst="rect">
             <a:avLst/>
@@ -2558,7 +2558,7 @@
         <p:spPr>
           <a:xfrm>
             <a:off x="685800" y="4400640"/>
-            <a:ext cx="5485680" cy="3599640"/>
+            <a:ext cx="5485320" cy="3599280"/>
           </a:xfrm>
           <a:prstGeom prst="rect">
             <a:avLst/>
@@ -2592,7 +2592,7 @@
         <p:spPr>
           <a:xfrm>
             <a:off x="3884760" y="8685360"/>
-            <a:ext cx="2971080" cy="457920"/>
+            <a:ext cx="2970720" cy="457560"/>
           </a:xfrm>
           <a:prstGeom prst="rect">
             <a:avLst/>
@@ -2624,7 +2624,7 @@
               </a:lnSpc>
               <a:buNone/>
             </a:pPr>
-            <a:fld id="{563B1EB8-5E69-4121-A7A3-6F9CE37B5676}" type="slidenum">
+            <a:fld id="{7EBEE803-AD70-4CC5-8F99-46A32F821024}" type="slidenum">
               <a:rPr b="0" lang="en-US" sz="1200" spc="-1" strike="noStrike">
                 <a:latin typeface="Times New Roman"/>
               </a:rPr>
@@ -2671,7 +2671,7 @@
         <p:spPr>
           <a:xfrm>
             <a:off x="685800" y="1143000"/>
-            <a:ext cx="5485680" cy="3085560"/>
+            <a:ext cx="5485320" cy="3085200"/>
           </a:xfrm>
           <a:prstGeom prst="rect">
             <a:avLst/>
@@ -2694,7 +2694,7 @@
         <p:spPr>
           <a:xfrm>
             <a:off x="685800" y="4400640"/>
-            <a:ext cx="5485680" cy="3599640"/>
+            <a:ext cx="5485320" cy="3599280"/>
           </a:xfrm>
           <a:prstGeom prst="rect">
             <a:avLst/>
@@ -2728,7 +2728,7 @@
         <p:spPr>
           <a:xfrm>
             <a:off x="3884760" y="8685360"/>
-            <a:ext cx="2971080" cy="457920"/>
+            <a:ext cx="2970720" cy="457560"/>
           </a:xfrm>
           <a:prstGeom prst="rect">
             <a:avLst/>
@@ -2760,7 +2760,7 @@
               </a:lnSpc>
               <a:buNone/>
             </a:pPr>
-            <a:fld id="{D90E5507-1E1E-4E6D-86AA-72D9613FDE09}" type="slidenum">
+            <a:fld id="{D504031F-0665-4E5E-9CE8-09462FE5DD5B}" type="slidenum">
               <a:rPr b="0" lang="en-US" sz="1200" spc="-1" strike="noStrike">
                 <a:latin typeface="Times New Roman"/>
               </a:rPr>
@@ -2807,7 +2807,7 @@
         <p:spPr>
           <a:xfrm>
             <a:off x="685800" y="1143000"/>
-            <a:ext cx="5485680" cy="3085560"/>
+            <a:ext cx="5485320" cy="3085200"/>
           </a:xfrm>
           <a:prstGeom prst="rect">
             <a:avLst/>
@@ -2830,7 +2830,7 @@
         <p:spPr>
           <a:xfrm>
             <a:off x="685800" y="4400640"/>
-            <a:ext cx="5485680" cy="3599640"/>
+            <a:ext cx="5485320" cy="3599280"/>
           </a:xfrm>
           <a:prstGeom prst="rect">
             <a:avLst/>
@@ -2864,7 +2864,7 @@
         <p:spPr>
           <a:xfrm>
             <a:off x="3884760" y="8685360"/>
-            <a:ext cx="2971080" cy="457920"/>
+            <a:ext cx="2970720" cy="457560"/>
           </a:xfrm>
           <a:prstGeom prst="rect">
             <a:avLst/>
@@ -2896,7 +2896,7 @@
               </a:lnSpc>
               <a:buNone/>
             </a:pPr>
-            <a:fld id="{C56054B7-07C9-44D0-AAA3-DCEF3C106511}" type="slidenum">
+            <a:fld id="{C2C024B0-5BF0-44B4-BD34-02B68497512F}" type="slidenum">
               <a:rPr b="0" lang="en-US" sz="1200" spc="-1" strike="noStrike">
                 <a:latin typeface="Times New Roman"/>
               </a:rPr>
@@ -2943,7 +2943,7 @@
         <p:spPr>
           <a:xfrm>
             <a:off x="685800" y="1143000"/>
-            <a:ext cx="5485680" cy="3085560"/>
+            <a:ext cx="5485320" cy="3085200"/>
           </a:xfrm>
           <a:prstGeom prst="rect">
             <a:avLst/>
@@ -2966,7 +2966,7 @@
         <p:spPr>
           <a:xfrm>
             <a:off x="685800" y="4400640"/>
-            <a:ext cx="5485680" cy="3599640"/>
+            <a:ext cx="5485320" cy="3599280"/>
           </a:xfrm>
           <a:prstGeom prst="rect">
             <a:avLst/>
@@ -3000,7 +3000,7 @@
         <p:spPr>
           <a:xfrm>
             <a:off x="3884760" y="8685360"/>
-            <a:ext cx="2971080" cy="457920"/>
+            <a:ext cx="2970720" cy="457560"/>
           </a:xfrm>
           <a:prstGeom prst="rect">
             <a:avLst/>
@@ -3032,7 +3032,7 @@
               </a:lnSpc>
               <a:buNone/>
             </a:pPr>
-            <a:fld id="{9D82E70A-64CF-46A6-ACC8-CC6F6DF2B3E1}" type="slidenum">
+            <a:fld id="{A701DD23-57AD-41D9-BB0B-F7F0C2A22EC6}" type="slidenum">
               <a:rPr b="0" lang="en-US" sz="1200" spc="-1" strike="noStrike">
                 <a:latin typeface="Times New Roman"/>
               </a:rPr>
@@ -4876,7 +4876,7 @@
         <p:spPr>
           <a:xfrm>
             <a:off x="0" y="0"/>
-            <a:ext cx="12191400" cy="6857280"/>
+            <a:ext cx="12191040" cy="6856920"/>
           </a:xfrm>
           <a:prstGeom prst="roundRect">
             <a:avLst>
@@ -4908,7 +4908,7 @@
         <p:spPr>
           <a:xfrm>
             <a:off x="0" y="0"/>
-            <a:ext cx="12191400" cy="6857280"/>
+            <a:ext cx="12191040" cy="6856920"/>
           </a:xfrm>
           <a:custGeom>
             <a:avLst/>
@@ -4971,7 +4971,7 @@
         <p:spPr>
           <a:xfrm>
             <a:off x="5667480" y="1276200"/>
-            <a:ext cx="856440" cy="570960"/>
+            <a:ext cx="856080" cy="570600"/>
           </a:xfrm>
           <a:prstGeom prst="rect">
             <a:avLst/>
@@ -4999,16 +4999,21 @@
               <a:buNone/>
             </a:pPr>
             <a:r>
-              <a:rPr b="0" lang="en-US" sz="4500" spc="-1" strike="noStrike">
-                <a:solidFill>
-                  <a:srgbClr val="f4f4f4"/>
-                </a:solidFill>
+              <a:rPr b="1" lang="en-US" sz="4500" spc="-1" strike="noStrike" u="sng">
+                <a:solidFill>
+                  <a:srgbClr val="ffff00"/>
+                </a:solidFill>
+                <a:uFillTx/>
                 <a:latin typeface="Jersey 15"/>
                 <a:ea typeface="Jersey 15"/>
               </a:rPr>
               <a:t>👾</a:t>
             </a:r>
-            <a:endParaRPr b="0" lang="en-HK" sz="4500" spc="-1" strike="noStrike">
+            <a:endParaRPr b="1" lang="en-HK" sz="4500" spc="-1" strike="noStrike" u="sng">
+              <a:solidFill>
+                <a:srgbClr val="ffff00"/>
+              </a:solidFill>
+              <a:uFillTx/>
               <a:latin typeface="Arial"/>
             </a:endParaRPr>
           </a:p>
@@ -5023,7 +5028,7 @@
         <p:spPr>
           <a:xfrm>
             <a:off x="3164400" y="2305080"/>
-            <a:ext cx="5866560" cy="913680"/>
+            <a:ext cx="5866200" cy="913320"/>
           </a:xfrm>
           <a:prstGeom prst="rect">
             <a:avLst/>
@@ -5051,7 +5056,7 @@
               <a:buNone/>
             </a:pPr>
             <a:r>
-              <a:rPr b="0" i="1" lang="en-US" sz="7200" spc="-1" strike="noStrike" u="sng">
+              <a:rPr b="1" i="1" lang="en-US" sz="7200" spc="-1" strike="noStrike" u="sng">
                 <a:solidFill>
                   <a:srgbClr val="ffff00"/>
                 </a:solidFill>
@@ -5061,10 +5066,11 @@
               </a:rPr>
               <a:t>THE GOLDEN AGE</a:t>
             </a:r>
-            <a:endParaRPr b="0" lang="en-HK" sz="7200" spc="-1" strike="noStrike">
+            <a:endParaRPr b="1" lang="en-HK" sz="7200" spc="-1" strike="noStrike" u="sng">
               <a:solidFill>
                 <a:srgbClr val="ffff00"/>
               </a:solidFill>
+              <a:uFillTx/>
               <a:latin typeface="Arial"/>
             </a:endParaRPr>
           </a:p>
@@ -5079,7 +5085,7 @@
         <p:spPr>
           <a:xfrm>
             <a:off x="4154040" y="3448080"/>
-            <a:ext cx="3885480" cy="570960"/>
+            <a:ext cx="3885120" cy="570600"/>
           </a:xfrm>
           <a:prstGeom prst="rect">
             <a:avLst/>
@@ -5107,57 +5113,21 @@
               <a:buNone/>
             </a:pPr>
             <a:r>
-              <a:rPr b="1" lang="en-US" sz="4500" spc="-1" strike="noStrike">
+              <a:rPr b="1" lang="en-US" sz="4500" spc="-1" strike="noStrike" u="sng">
                 <a:solidFill>
                   <a:srgbClr val="ffff00"/>
-                </a:solidFill>
-                <a:latin typeface="Jersey 15"/>
-                <a:ea typeface="Jersey 15"/>
-              </a:rPr>
-              <a:t>OF</a:t>
-            </a:r>
-            <a:r>
-              <a:rPr b="1" lang="en-US" sz="4500" spc="-1" strike="noStrike">
-                <a:solidFill>
-                  <a:srgbClr val="f4f4f4"/>
-                </a:solidFill>
-                <a:latin typeface="Jersey 15"/>
-                <a:ea typeface="Jersey 15"/>
-              </a:rPr>
-              <a:t> </a:t>
-            </a:r>
-            <a:r>
-              <a:rPr b="1" lang="en-US" sz="4500" spc="-1" strike="noStrike" u="sng">
-                <a:solidFill>
-                  <a:srgbClr val="ffbf00"/>
                 </a:solidFill>
                 <a:uFillTx/>
                 <a:latin typeface="Jersey 15"/>
                 <a:ea typeface="Jersey 15"/>
               </a:rPr>
-              <a:t>ARCADE</a:t>
-            </a:r>
-            <a:r>
-              <a:rPr b="1" lang="en-US" sz="4500" spc="-1" strike="noStrike">
-                <a:solidFill>
-                  <a:srgbClr val="f4f4f4"/>
-                </a:solidFill>
-                <a:latin typeface="Jersey 15"/>
-                <a:ea typeface="Jersey 15"/>
-              </a:rPr>
-              <a:t> </a:t>
-            </a:r>
-            <a:r>
-              <a:rPr b="1" lang="en-US" sz="4500" spc="-1" strike="noStrike">
-                <a:solidFill>
-                  <a:srgbClr val="ffff00"/>
-                </a:solidFill>
-                <a:latin typeface="Jersey 15"/>
-                <a:ea typeface="Jersey 15"/>
-              </a:rPr>
-              <a:t>GAMES</a:t>
-            </a:r>
-            <a:endParaRPr b="0" lang="en-HK" sz="4500" spc="-1" strike="noStrike">
+              <a:t>OF ARCADE GAMES</a:t>
+            </a:r>
+            <a:endParaRPr b="1" lang="en-HK" sz="4500" spc="-1" strike="noStrike" u="sng">
+              <a:solidFill>
+                <a:srgbClr val="ffff00"/>
+              </a:solidFill>
+              <a:uFillTx/>
               <a:latin typeface="Arial"/>
             </a:endParaRPr>
           </a:p>
@@ -5172,7 +5142,7 @@
         <p:spPr>
           <a:xfrm>
             <a:off x="5486400" y="4324320"/>
-            <a:ext cx="1218600" cy="75600"/>
+            <a:ext cx="1218240" cy="75240"/>
           </a:xfrm>
           <a:custGeom>
             <a:avLst/>
@@ -5223,7 +5193,7 @@
         <p:spPr>
           <a:xfrm>
             <a:off x="5400720" y="4705200"/>
-            <a:ext cx="1389960" cy="380160"/>
+            <a:ext cx="1389600" cy="379800"/>
           </a:xfrm>
           <a:prstGeom prst="rect">
             <a:avLst/>
@@ -5261,7 +5231,11 @@
               </a:rPr>
               <a:t>1978-1983</a:t>
             </a:r>
-            <a:endParaRPr b="0" lang="en-HK" sz="2700" spc="-1" strike="noStrike">
+            <a:endParaRPr b="1" lang="en-HK" sz="2700" spc="-1" strike="noStrike" u="sng">
+              <a:solidFill>
+                <a:srgbClr val="ffff00"/>
+              </a:solidFill>
+              <a:uFillTx/>
               <a:latin typeface="Arial"/>
             </a:endParaRPr>
           </a:p>
@@ -5276,7 +5250,7 @@
         <p:spPr>
           <a:xfrm>
             <a:off x="4384080" y="5238720"/>
-            <a:ext cx="3418920" cy="342360"/>
+            <a:ext cx="3418560" cy="342000"/>
           </a:xfrm>
           <a:prstGeom prst="rect">
             <a:avLst/>
@@ -5314,7 +5288,11 @@
               </a:rPr>
               <a:t>When Quarters Ruled the World</a:t>
             </a:r>
-            <a:endParaRPr b="0" lang="en-HK" sz="2250" spc="-1" strike="noStrike">
+            <a:endParaRPr b="1" lang="en-HK" sz="2250" spc="-1" strike="noStrike" u="sng">
+              <a:solidFill>
+                <a:srgbClr val="ffff00"/>
+              </a:solidFill>
+              <a:uFillTx/>
               <a:latin typeface="Arial"/>
             </a:endParaRPr>
           </a:p>
@@ -5329,7 +5307,7 @@
         <p:spPr>
           <a:xfrm>
             <a:off x="5715000" y="5867280"/>
-            <a:ext cx="151560" cy="151560"/>
+            <a:ext cx="151200" cy="151200"/>
           </a:xfrm>
           <a:custGeom>
             <a:avLst/>
@@ -5380,7 +5358,7 @@
         <p:spPr>
           <a:xfrm>
             <a:off x="6019920" y="5867280"/>
-            <a:ext cx="151560" cy="151560"/>
+            <a:ext cx="151200" cy="151200"/>
           </a:xfrm>
           <a:custGeom>
             <a:avLst/>
@@ -5431,7 +5409,7 @@
         <p:spPr>
           <a:xfrm>
             <a:off x="6324480" y="5867280"/>
-            <a:ext cx="151560" cy="151560"/>
+            <a:ext cx="151200" cy="151200"/>
           </a:xfrm>
           <a:custGeom>
             <a:avLst/>
@@ -5514,7 +5492,7 @@
         <p:spPr>
           <a:xfrm>
             <a:off x="0" y="0"/>
-            <a:ext cx="12191400" cy="6857280"/>
+            <a:ext cx="12191040" cy="6856920"/>
           </a:xfrm>
           <a:custGeom>
             <a:avLst/>
@@ -5577,7 +5555,7 @@
         <p:spPr>
           <a:xfrm>
             <a:off x="380880" y="380880"/>
-            <a:ext cx="11657880" cy="456480"/>
+            <a:ext cx="11657520" cy="456120"/>
           </a:xfrm>
           <a:prstGeom prst="rect">
             <a:avLst/>
@@ -5629,7 +5607,7 @@
         <p:spPr>
           <a:xfrm>
             <a:off x="380880" y="952560"/>
-            <a:ext cx="11543760" cy="304200"/>
+            <a:ext cx="11543400" cy="303840"/>
           </a:xfrm>
           <a:prstGeom prst="rect">
             <a:avLst/>
@@ -5681,7 +5659,7 @@
         <p:spPr>
           <a:xfrm>
             <a:off x="380880" y="1371600"/>
-            <a:ext cx="913680" cy="37440"/>
+            <a:ext cx="913320" cy="37080"/>
           </a:xfrm>
           <a:custGeom>
             <a:avLst/>
@@ -5732,7 +5710,7 @@
         <p:spPr>
           <a:xfrm>
             <a:off x="395280" y="1576440"/>
-            <a:ext cx="5609520" cy="751680"/>
+            <a:ext cx="5609160" cy="751320"/>
           </a:xfrm>
           <a:custGeom>
             <a:avLst/>
@@ -5788,7 +5766,7 @@
         <p:spPr>
           <a:xfrm>
             <a:off x="523800" y="1762200"/>
-            <a:ext cx="399240" cy="380160"/>
+            <a:ext cx="398880" cy="379800"/>
           </a:xfrm>
           <a:prstGeom prst="rect">
             <a:avLst/>
@@ -5840,7 +5818,7 @@
         <p:spPr>
           <a:xfrm>
             <a:off x="905040" y="1704960"/>
-            <a:ext cx="5066640" cy="266040"/>
+            <a:ext cx="5066280" cy="265680"/>
           </a:xfrm>
           <a:prstGeom prst="rect">
             <a:avLst/>
@@ -5892,7 +5870,7 @@
         <p:spPr>
           <a:xfrm>
             <a:off x="905040" y="1971720"/>
-            <a:ext cx="5047560" cy="227880"/>
+            <a:ext cx="5047200" cy="227520"/>
           </a:xfrm>
           <a:prstGeom prst="rect">
             <a:avLst/>
@@ -5946,7 +5924,7 @@
         <p:spPr>
           <a:xfrm>
             <a:off x="395280" y="2471760"/>
-            <a:ext cx="5609520" cy="751680"/>
+            <a:ext cx="5609160" cy="751320"/>
           </a:xfrm>
           <a:custGeom>
             <a:avLst/>
@@ -6002,7 +5980,7 @@
         <p:spPr>
           <a:xfrm>
             <a:off x="523800" y="2657520"/>
-            <a:ext cx="465840" cy="380160"/>
+            <a:ext cx="465480" cy="379800"/>
           </a:xfrm>
           <a:prstGeom prst="rect">
             <a:avLst/>
@@ -6054,7 +6032,7 @@
         <p:spPr>
           <a:xfrm>
             <a:off x="968400" y="2600280"/>
-            <a:ext cx="5000040" cy="266040"/>
+            <a:ext cx="4999680" cy="265680"/>
           </a:xfrm>
           <a:prstGeom prst="rect">
             <a:avLst/>
@@ -6106,7 +6084,7 @@
         <p:spPr>
           <a:xfrm>
             <a:off x="968400" y="2867040"/>
-            <a:ext cx="4980960" cy="227880"/>
+            <a:ext cx="4980600" cy="227520"/>
           </a:xfrm>
           <a:prstGeom prst="rect">
             <a:avLst/>
@@ -6160,7 +6138,7 @@
         <p:spPr>
           <a:xfrm>
             <a:off x="395280" y="3367080"/>
-            <a:ext cx="5609520" cy="751680"/>
+            <a:ext cx="5609160" cy="751320"/>
           </a:xfrm>
           <a:custGeom>
             <a:avLst/>
@@ -6216,7 +6194,7 @@
         <p:spPr>
           <a:xfrm>
             <a:off x="523800" y="3552840"/>
-            <a:ext cx="465840" cy="380160"/>
+            <a:ext cx="465480" cy="379800"/>
           </a:xfrm>
           <a:prstGeom prst="rect">
             <a:avLst/>
@@ -6268,7 +6246,7 @@
         <p:spPr>
           <a:xfrm>
             <a:off x="968400" y="3495600"/>
-            <a:ext cx="5000040" cy="266040"/>
+            <a:ext cx="4999680" cy="265680"/>
           </a:xfrm>
           <a:prstGeom prst="rect">
             <a:avLst/>
@@ -6320,7 +6298,7 @@
         <p:spPr>
           <a:xfrm>
             <a:off x="968400" y="3762360"/>
-            <a:ext cx="4980960" cy="227880"/>
+            <a:ext cx="4980600" cy="227520"/>
           </a:xfrm>
           <a:prstGeom prst="rect">
             <a:avLst/>
@@ -6374,7 +6352,7 @@
         <p:spPr>
           <a:xfrm>
             <a:off x="395280" y="4262400"/>
-            <a:ext cx="5609520" cy="751680"/>
+            <a:ext cx="5609160" cy="751320"/>
           </a:xfrm>
           <a:custGeom>
             <a:avLst/>
@@ -6430,7 +6408,7 @@
         <p:spPr>
           <a:xfrm>
             <a:off x="523800" y="4448160"/>
-            <a:ext cx="447120" cy="380160"/>
+            <a:ext cx="446760" cy="379800"/>
           </a:xfrm>
           <a:prstGeom prst="rect">
             <a:avLst/>
@@ -6482,7 +6460,7 @@
         <p:spPr>
           <a:xfrm>
             <a:off x="955800" y="4390920"/>
-            <a:ext cx="5019120" cy="266040"/>
+            <a:ext cx="5018760" cy="265680"/>
           </a:xfrm>
           <a:prstGeom prst="rect">
             <a:avLst/>
@@ -6534,7 +6512,7 @@
         <p:spPr>
           <a:xfrm>
             <a:off x="955800" y="4657680"/>
-            <a:ext cx="5000040" cy="227880"/>
+            <a:ext cx="4999680" cy="227520"/>
           </a:xfrm>
           <a:prstGeom prst="rect">
             <a:avLst/>
@@ -6588,7 +6566,7 @@
         <p:spPr>
           <a:xfrm>
             <a:off x="395280" y="5157720"/>
-            <a:ext cx="5609520" cy="751680"/>
+            <a:ext cx="5609160" cy="751320"/>
           </a:xfrm>
           <a:custGeom>
             <a:avLst/>
@@ -6644,7 +6622,7 @@
         <p:spPr>
           <a:xfrm>
             <a:off x="523800" y="5343480"/>
-            <a:ext cx="447120" cy="380160"/>
+            <a:ext cx="446760" cy="379800"/>
           </a:xfrm>
           <a:prstGeom prst="rect">
             <a:avLst/>
@@ -6696,7 +6674,7 @@
         <p:spPr>
           <a:xfrm>
             <a:off x="955800" y="5286240"/>
-            <a:ext cx="5019120" cy="266040"/>
+            <a:ext cx="5018760" cy="265680"/>
           </a:xfrm>
           <a:prstGeom prst="rect">
             <a:avLst/>
@@ -6748,7 +6726,7 @@
         <p:spPr>
           <a:xfrm>
             <a:off x="955800" y="5553000"/>
-            <a:ext cx="5000040" cy="227880"/>
+            <a:ext cx="4999680" cy="227520"/>
           </a:xfrm>
           <a:prstGeom prst="rect">
             <a:avLst/>
@@ -6802,7 +6780,7 @@
         <p:spPr>
           <a:xfrm>
             <a:off x="6186600" y="1576440"/>
-            <a:ext cx="5609520" cy="751680"/>
+            <a:ext cx="5609160" cy="751320"/>
           </a:xfrm>
           <a:custGeom>
             <a:avLst/>
@@ -6858,7 +6836,7 @@
         <p:spPr>
           <a:xfrm>
             <a:off x="6315120" y="1762200"/>
-            <a:ext cx="465840" cy="380160"/>
+            <a:ext cx="465480" cy="379800"/>
           </a:xfrm>
           <a:prstGeom prst="rect">
             <a:avLst/>
@@ -6910,7 +6888,7 @@
         <p:spPr>
           <a:xfrm>
             <a:off x="6759720" y="1704960"/>
-            <a:ext cx="5000040" cy="266040"/>
+            <a:ext cx="4999680" cy="265680"/>
           </a:xfrm>
           <a:prstGeom prst="rect">
             <a:avLst/>
@@ -6962,7 +6940,7 @@
         <p:spPr>
           <a:xfrm>
             <a:off x="6759720" y="1971720"/>
-            <a:ext cx="4980960" cy="227880"/>
+            <a:ext cx="4980600" cy="227520"/>
           </a:xfrm>
           <a:prstGeom prst="rect">
             <a:avLst/>
@@ -7016,7 +6994,7 @@
         <p:spPr>
           <a:xfrm>
             <a:off x="6186600" y="2471760"/>
-            <a:ext cx="5609520" cy="751680"/>
+            <a:ext cx="5609160" cy="751320"/>
           </a:xfrm>
           <a:custGeom>
             <a:avLst/>
@@ -7072,7 +7050,7 @@
         <p:spPr>
           <a:xfrm>
             <a:off x="6315120" y="2657520"/>
-            <a:ext cx="447120" cy="380160"/>
+            <a:ext cx="446760" cy="379800"/>
           </a:xfrm>
           <a:prstGeom prst="rect">
             <a:avLst/>
@@ -7124,7 +7102,7 @@
         <p:spPr>
           <a:xfrm>
             <a:off x="6746760" y="2600280"/>
-            <a:ext cx="5019120" cy="266040"/>
+            <a:ext cx="5018760" cy="265680"/>
           </a:xfrm>
           <a:prstGeom prst="rect">
             <a:avLst/>
@@ -7176,7 +7154,7 @@
         <p:spPr>
           <a:xfrm>
             <a:off x="6746760" y="2867040"/>
-            <a:ext cx="5000040" cy="227880"/>
+            <a:ext cx="4999680" cy="227520"/>
           </a:xfrm>
           <a:prstGeom prst="rect">
             <a:avLst/>
@@ -7230,7 +7208,7 @@
         <p:spPr>
           <a:xfrm>
             <a:off x="6186600" y="3367080"/>
-            <a:ext cx="5609520" cy="751680"/>
+            <a:ext cx="5609160" cy="751320"/>
           </a:xfrm>
           <a:custGeom>
             <a:avLst/>
@@ -7286,7 +7264,7 @@
         <p:spPr>
           <a:xfrm>
             <a:off x="6315120" y="3552840"/>
-            <a:ext cx="465840" cy="380160"/>
+            <a:ext cx="465480" cy="379800"/>
           </a:xfrm>
           <a:prstGeom prst="rect">
             <a:avLst/>
@@ -7338,7 +7316,7 @@
         <p:spPr>
           <a:xfrm>
             <a:off x="6759720" y="3495600"/>
-            <a:ext cx="5000040" cy="266040"/>
+            <a:ext cx="4999680" cy="265680"/>
           </a:xfrm>
           <a:prstGeom prst="rect">
             <a:avLst/>
@@ -7390,7 +7368,7 @@
         <p:spPr>
           <a:xfrm>
             <a:off x="6759720" y="3762360"/>
-            <a:ext cx="4980960" cy="227880"/>
+            <a:ext cx="4980600" cy="227520"/>
           </a:xfrm>
           <a:prstGeom prst="rect">
             <a:avLst/>
@@ -7444,7 +7422,7 @@
         <p:spPr>
           <a:xfrm>
             <a:off x="6186600" y="4262400"/>
-            <a:ext cx="5609520" cy="751680"/>
+            <a:ext cx="5609160" cy="751320"/>
           </a:xfrm>
           <a:custGeom>
             <a:avLst/>
@@ -7500,7 +7478,7 @@
         <p:spPr>
           <a:xfrm>
             <a:off x="6315120" y="4448160"/>
-            <a:ext cx="465840" cy="380160"/>
+            <a:ext cx="465480" cy="379800"/>
           </a:xfrm>
           <a:prstGeom prst="rect">
             <a:avLst/>
@@ -7552,7 +7530,7 @@
         <p:spPr>
           <a:xfrm>
             <a:off x="6759720" y="4390920"/>
-            <a:ext cx="5000040" cy="266040"/>
+            <a:ext cx="4999680" cy="265680"/>
           </a:xfrm>
           <a:prstGeom prst="rect">
             <a:avLst/>
@@ -7604,7 +7582,7 @@
         <p:spPr>
           <a:xfrm>
             <a:off x="6759720" y="4657680"/>
-            <a:ext cx="4980960" cy="227880"/>
+            <a:ext cx="4980600" cy="227520"/>
           </a:xfrm>
           <a:prstGeom prst="rect">
             <a:avLst/>
@@ -7658,7 +7636,7 @@
         <p:spPr>
           <a:xfrm>
             <a:off x="6186600" y="5157720"/>
-            <a:ext cx="5609520" cy="751680"/>
+            <a:ext cx="5609160" cy="751320"/>
           </a:xfrm>
           <a:custGeom>
             <a:avLst/>
@@ -7714,7 +7692,7 @@
         <p:spPr>
           <a:xfrm>
             <a:off x="6315120" y="5343480"/>
-            <a:ext cx="399240" cy="380160"/>
+            <a:ext cx="398880" cy="379800"/>
           </a:xfrm>
           <a:prstGeom prst="rect">
             <a:avLst/>
@@ -7766,7 +7744,7 @@
         <p:spPr>
           <a:xfrm>
             <a:off x="6696000" y="5286240"/>
-            <a:ext cx="5066640" cy="266040"/>
+            <a:ext cx="5066280" cy="265680"/>
           </a:xfrm>
           <a:prstGeom prst="rect">
             <a:avLst/>
@@ -7818,7 +7796,7 @@
         <p:spPr>
           <a:xfrm>
             <a:off x="6696000" y="5553000"/>
-            <a:ext cx="5047560" cy="227880"/>
+            <a:ext cx="5047200" cy="227520"/>
           </a:xfrm>
           <a:prstGeom prst="rect">
             <a:avLst/>
@@ -7872,7 +7850,7 @@
         <p:spPr>
           <a:xfrm>
             <a:off x="395280" y="6091200"/>
-            <a:ext cx="11400840" cy="599400"/>
+            <a:ext cx="11400480" cy="599040"/>
           </a:xfrm>
           <a:custGeom>
             <a:avLst/>
@@ -7928,7 +7906,7 @@
         <p:spPr>
           <a:xfrm>
             <a:off x="514440" y="6257880"/>
-            <a:ext cx="11162520" cy="266040"/>
+            <a:ext cx="11162160" cy="265680"/>
           </a:xfrm>
           <a:prstGeom prst="rect">
             <a:avLst/>
@@ -8032,7 +8010,7 @@
         <p:spPr>
           <a:xfrm>
             <a:off x="0" y="0"/>
-            <a:ext cx="12191400" cy="6857280"/>
+            <a:ext cx="12191040" cy="6856920"/>
           </a:xfrm>
           <a:prstGeom prst="roundRect">
             <a:avLst>
@@ -8064,7 +8042,7 @@
         <p:spPr>
           <a:xfrm>
             <a:off x="0" y="0"/>
-            <a:ext cx="12191400" cy="6857280"/>
+            <a:ext cx="12191040" cy="6856920"/>
           </a:xfrm>
           <a:custGeom>
             <a:avLst/>
@@ -8127,7 +8105,7 @@
         <p:spPr>
           <a:xfrm>
             <a:off x="380880" y="1542960"/>
-            <a:ext cx="1866240" cy="608760"/>
+            <a:ext cx="1865880" cy="608400"/>
           </a:xfrm>
           <a:custGeom>
             <a:avLst/>
@@ -8178,7 +8156,7 @@
         <p:spPr>
           <a:xfrm>
             <a:off x="609480" y="1676520"/>
-            <a:ext cx="1580400" cy="342360"/>
+            <a:ext cx="1580040" cy="342000"/>
           </a:xfrm>
           <a:prstGeom prst="rect">
             <a:avLst/>
@@ -8230,7 +8208,7 @@
         <p:spPr>
           <a:xfrm>
             <a:off x="380880" y="2381400"/>
-            <a:ext cx="11772360" cy="1713960"/>
+            <a:ext cx="11772000" cy="1713600"/>
           </a:xfrm>
           <a:prstGeom prst="rect">
             <a:avLst/>
@@ -8303,7 +8281,7 @@
         <p:spPr>
           <a:xfrm>
             <a:off x="380880" y="4324320"/>
-            <a:ext cx="1523160" cy="75600"/>
+            <a:ext cx="1522800" cy="75240"/>
           </a:xfrm>
           <a:custGeom>
             <a:avLst/>
@@ -8354,7 +8332,7 @@
         <p:spPr>
           <a:xfrm>
             <a:off x="380880" y="4629240"/>
-            <a:ext cx="7457400" cy="685080"/>
+            <a:ext cx="7457040" cy="684720"/>
           </a:xfrm>
           <a:prstGeom prst="rect">
             <a:avLst/>
@@ -8427,7 +8405,7 @@
         <p:spPr>
           <a:xfrm>
             <a:off x="10591920" y="5867280"/>
-            <a:ext cx="151560" cy="151560"/>
+            <a:ext cx="151200" cy="151200"/>
           </a:xfrm>
           <a:custGeom>
             <a:avLst/>
@@ -8478,7 +8456,7 @@
         <p:spPr>
           <a:xfrm>
             <a:off x="10896480" y="5867280"/>
-            <a:ext cx="151560" cy="151560"/>
+            <a:ext cx="151200" cy="151200"/>
           </a:xfrm>
           <a:custGeom>
             <a:avLst/>
@@ -8529,7 +8507,7 @@
         <p:spPr>
           <a:xfrm>
             <a:off x="11201400" y="5867280"/>
-            <a:ext cx="151560" cy="151560"/>
+            <a:ext cx="151200" cy="151200"/>
           </a:xfrm>
           <a:custGeom>
             <a:avLst/>
@@ -8612,7 +8590,7 @@
         <p:spPr>
           <a:xfrm>
             <a:off x="0" y="0"/>
-            <a:ext cx="12191400" cy="6855120"/>
+            <a:ext cx="12191040" cy="6854760"/>
           </a:xfrm>
           <a:custGeom>
             <a:avLst/>
@@ -8675,7 +8653,7 @@
         <p:spPr>
           <a:xfrm>
             <a:off x="345240" y="345240"/>
-            <a:ext cx="11707920" cy="413640"/>
+            <a:ext cx="11707560" cy="413280"/>
           </a:xfrm>
           <a:prstGeom prst="rect">
             <a:avLst/>
@@ -8727,7 +8705,7 @@
         <p:spPr>
           <a:xfrm>
             <a:off x="345240" y="863280"/>
-            <a:ext cx="11604240" cy="275760"/>
+            <a:ext cx="11603880" cy="275400"/>
           </a:xfrm>
           <a:prstGeom prst="rect">
             <a:avLst/>
@@ -8779,7 +8757,7 @@
         <p:spPr>
           <a:xfrm>
             <a:off x="345240" y="1243440"/>
-            <a:ext cx="828360" cy="33840"/>
+            <a:ext cx="828000" cy="33480"/>
           </a:xfrm>
           <a:custGeom>
             <a:avLst/>
@@ -8830,7 +8808,7 @@
         <p:spPr>
           <a:xfrm>
             <a:off x="358200" y="1429200"/>
-            <a:ext cx="5620320" cy="2753640"/>
+            <a:ext cx="5619960" cy="2753280"/>
           </a:xfrm>
           <a:custGeom>
             <a:avLst/>
@@ -8886,7 +8864,7 @@
         <p:spPr>
           <a:xfrm>
             <a:off x="492120" y="1614600"/>
-            <a:ext cx="5352840" cy="275760"/>
+            <a:ext cx="5352480" cy="275400"/>
           </a:xfrm>
           <a:prstGeom prst="rect">
             <a:avLst/>
@@ -8938,7 +8916,7 @@
         <p:spPr>
           <a:xfrm>
             <a:off x="440280" y="2028960"/>
-            <a:ext cx="5456160" cy="413640"/>
+            <a:ext cx="5455800" cy="413280"/>
           </a:xfrm>
           <a:prstGeom prst="rect">
             <a:avLst/>
@@ -8990,7 +8968,7 @@
         <p:spPr>
           <a:xfrm>
             <a:off x="505080" y="2478240"/>
-            <a:ext cx="5326920" cy="241200"/>
+            <a:ext cx="5326560" cy="240840"/>
           </a:xfrm>
           <a:prstGeom prst="rect">
             <a:avLst/>
@@ -9042,7 +9020,7 @@
         <p:spPr>
           <a:xfrm>
             <a:off x="543960" y="2858040"/>
-            <a:ext cx="5249160" cy="413640"/>
+            <a:ext cx="5248800" cy="413280"/>
           </a:xfrm>
           <a:custGeom>
             <a:avLst/>
@@ -9095,7 +9073,7 @@
         <p:spPr>
           <a:xfrm>
             <a:off x="613080" y="2961720"/>
-            <a:ext cx="5110920" cy="206640"/>
+            <a:ext cx="5110560" cy="206280"/>
           </a:xfrm>
           <a:prstGeom prst="rect">
             <a:avLst/>
@@ -9167,7 +9145,7 @@
         <p:spPr>
           <a:xfrm>
             <a:off x="543960" y="3410640"/>
-            <a:ext cx="2572200" cy="586440"/>
+            <a:ext cx="2571840" cy="586080"/>
           </a:xfrm>
           <a:custGeom>
             <a:avLst/>
@@ -9220,7 +9198,7 @@
         <p:spPr>
           <a:xfrm>
             <a:off x="561240" y="3479760"/>
-            <a:ext cx="2538000" cy="275760"/>
+            <a:ext cx="2537640" cy="275400"/>
           </a:xfrm>
           <a:prstGeom prst="rect">
             <a:avLst/>
@@ -9272,7 +9250,7 @@
         <p:spPr>
           <a:xfrm>
             <a:off x="582840" y="3755880"/>
-            <a:ext cx="2494800" cy="172080"/>
+            <a:ext cx="2494440" cy="171720"/>
           </a:xfrm>
           <a:prstGeom prst="rect">
             <a:avLst/>
@@ -9324,7 +9302,7 @@
         <p:spPr>
           <a:xfrm>
             <a:off x="3219840" y="3410640"/>
-            <a:ext cx="2572200" cy="586440"/>
+            <a:ext cx="2571840" cy="586080"/>
           </a:xfrm>
           <a:custGeom>
             <a:avLst/>
@@ -9377,7 +9355,7 @@
         <p:spPr>
           <a:xfrm>
             <a:off x="3237120" y="3479760"/>
-            <a:ext cx="2538000" cy="275760"/>
+            <a:ext cx="2537640" cy="275400"/>
           </a:xfrm>
           <a:prstGeom prst="rect">
             <a:avLst/>
@@ -9429,7 +9407,7 @@
         <p:spPr>
           <a:xfrm>
             <a:off x="3258360" y="3755880"/>
-            <a:ext cx="2494800" cy="172080"/>
+            <a:ext cx="2494440" cy="171720"/>
           </a:xfrm>
           <a:prstGeom prst="rect">
             <a:avLst/>
@@ -9481,7 +9459,7 @@
         <p:spPr>
           <a:xfrm>
             <a:off x="6210720" y="1429200"/>
-            <a:ext cx="5620320" cy="2753640"/>
+            <a:ext cx="5619960" cy="2753280"/>
           </a:xfrm>
           <a:custGeom>
             <a:avLst/>
@@ -9537,7 +9515,7 @@
         <p:spPr>
           <a:xfrm>
             <a:off x="6344280" y="1614600"/>
-            <a:ext cx="5352840" cy="275760"/>
+            <a:ext cx="5352480" cy="275400"/>
           </a:xfrm>
           <a:prstGeom prst="rect">
             <a:avLst/>
@@ -9589,7 +9567,7 @@
         <p:spPr>
           <a:xfrm>
             <a:off x="6292800" y="2028960"/>
-            <a:ext cx="5456160" cy="413640"/>
+            <a:ext cx="5455800" cy="413280"/>
           </a:xfrm>
           <a:prstGeom prst="rect">
             <a:avLst/>
@@ -9641,7 +9619,7 @@
         <p:spPr>
           <a:xfrm>
             <a:off x="6357240" y="2478240"/>
-            <a:ext cx="5326920" cy="241200"/>
+            <a:ext cx="5326560" cy="240840"/>
           </a:xfrm>
           <a:prstGeom prst="rect">
             <a:avLst/>
@@ -9693,7 +9671,7 @@
         <p:spPr>
           <a:xfrm>
             <a:off x="6396120" y="2858040"/>
-            <a:ext cx="5249160" cy="413640"/>
+            <a:ext cx="5248800" cy="413280"/>
           </a:xfrm>
           <a:custGeom>
             <a:avLst/>
@@ -9746,7 +9724,7 @@
         <p:spPr>
           <a:xfrm>
             <a:off x="6465240" y="2961720"/>
-            <a:ext cx="5110920" cy="206640"/>
+            <a:ext cx="5110560" cy="206280"/>
           </a:xfrm>
           <a:prstGeom prst="rect">
             <a:avLst/>
@@ -9808,7 +9786,7 @@
         <p:spPr>
           <a:xfrm>
             <a:off x="6396120" y="3410640"/>
-            <a:ext cx="2572200" cy="586440"/>
+            <a:ext cx="2571840" cy="586080"/>
           </a:xfrm>
           <a:custGeom>
             <a:avLst/>
@@ -9861,7 +9839,7 @@
         <p:spPr>
           <a:xfrm>
             <a:off x="6413400" y="3479760"/>
-            <a:ext cx="2538000" cy="275760"/>
+            <a:ext cx="2537640" cy="275400"/>
           </a:xfrm>
           <a:prstGeom prst="rect">
             <a:avLst/>
@@ -9913,7 +9891,7 @@
         <p:spPr>
           <a:xfrm>
             <a:off x="6435000" y="3755880"/>
-            <a:ext cx="2494800" cy="172080"/>
+            <a:ext cx="2494440" cy="171720"/>
           </a:xfrm>
           <a:prstGeom prst="rect">
             <a:avLst/>
@@ -9965,7 +9943,7 @@
         <p:spPr>
           <a:xfrm>
             <a:off x="9072000" y="3410640"/>
-            <a:ext cx="2572200" cy="586440"/>
+            <a:ext cx="2571840" cy="586080"/>
           </a:xfrm>
           <a:custGeom>
             <a:avLst/>
@@ -10018,7 +9996,7 @@
         <p:spPr>
           <a:xfrm>
             <a:off x="9089280" y="3479760"/>
-            <a:ext cx="2538000" cy="275760"/>
+            <a:ext cx="2537640" cy="275400"/>
           </a:xfrm>
           <a:prstGeom prst="rect">
             <a:avLst/>
@@ -10070,7 +10048,7 @@
         <p:spPr>
           <a:xfrm>
             <a:off x="9110880" y="3755880"/>
-            <a:ext cx="2494800" cy="172080"/>
+            <a:ext cx="2494440" cy="171720"/>
           </a:xfrm>
           <a:prstGeom prst="rect">
             <a:avLst/>
@@ -10122,7 +10100,7 @@
         <p:spPr>
           <a:xfrm>
             <a:off x="362520" y="4351680"/>
-            <a:ext cx="11466000" cy="2486160"/>
+            <a:ext cx="11465640" cy="2485800"/>
           </a:xfrm>
           <a:custGeom>
             <a:avLst/>
@@ -10178,7 +10156,7 @@
         <p:spPr>
           <a:xfrm>
             <a:off x="500760" y="4541760"/>
-            <a:ext cx="11189520" cy="275760"/>
+            <a:ext cx="11189160" cy="275400"/>
           </a:xfrm>
           <a:prstGeom prst="rect">
             <a:avLst/>
@@ -10230,7 +10208,7 @@
         <p:spPr>
           <a:xfrm>
             <a:off x="552600" y="4921560"/>
-            <a:ext cx="9946440" cy="1726200"/>
+            <a:ext cx="9946080" cy="1725840"/>
           </a:xfrm>
           <a:prstGeom prst="roundRect">
             <a:avLst>
@@ -10294,7 +10272,7 @@
         <p:spPr>
           <a:xfrm>
             <a:off x="0" y="0"/>
-            <a:ext cx="12191400" cy="6857280"/>
+            <a:ext cx="12191040" cy="6856920"/>
           </a:xfrm>
           <a:custGeom>
             <a:avLst/>
@@ -10357,7 +10335,7 @@
         <p:spPr>
           <a:xfrm>
             <a:off x="380880" y="380880"/>
-            <a:ext cx="11657880" cy="456480"/>
+            <a:ext cx="11657520" cy="456120"/>
           </a:xfrm>
           <a:prstGeom prst="rect">
             <a:avLst/>
@@ -10409,7 +10387,7 @@
         <p:spPr>
           <a:xfrm>
             <a:off x="380880" y="952560"/>
-            <a:ext cx="11543760" cy="304200"/>
+            <a:ext cx="11543400" cy="303840"/>
           </a:xfrm>
           <a:prstGeom prst="rect">
             <a:avLst/>
@@ -10461,7 +10439,7 @@
         <p:spPr>
           <a:xfrm>
             <a:off x="380880" y="1371600"/>
-            <a:ext cx="913680" cy="37440"/>
+            <a:ext cx="913320" cy="37080"/>
           </a:xfrm>
           <a:custGeom>
             <a:avLst/>
@@ -10512,7 +10490,7 @@
         <p:spPr>
           <a:xfrm>
             <a:off x="395280" y="1576440"/>
-            <a:ext cx="3675960" cy="2351880"/>
+            <a:ext cx="3675600" cy="2351520"/>
           </a:xfrm>
           <a:custGeom>
             <a:avLst/>
@@ -10568,7 +10546,7 @@
         <p:spPr>
           <a:xfrm>
             <a:off x="564480" y="1752480"/>
-            <a:ext cx="356400" cy="285120"/>
+            <a:ext cx="356040" cy="284760"/>
           </a:xfrm>
           <a:custGeom>
             <a:avLst/>
@@ -10749,7 +10727,7 @@
         <p:spPr>
           <a:xfrm>
             <a:off x="1033560" y="1743120"/>
-            <a:ext cx="551880" cy="304200"/>
+            <a:ext cx="551520" cy="303840"/>
           </a:xfrm>
           <a:prstGeom prst="rect">
             <a:avLst/>
@@ -10801,7 +10779,7 @@
         <p:spPr>
           <a:xfrm>
             <a:off x="561960" y="2200320"/>
-            <a:ext cx="702000" cy="151560"/>
+            <a:ext cx="701640" cy="151200"/>
           </a:xfrm>
           <a:prstGeom prst="rect">
             <a:avLst/>
@@ -10853,7 +10831,7 @@
         <p:spPr>
           <a:xfrm>
             <a:off x="714240" y="2467080"/>
-            <a:ext cx="3266280" cy="227880"/>
+            <a:ext cx="3265920" cy="227520"/>
           </a:xfrm>
           <a:prstGeom prst="rect">
             <a:avLst/>
@@ -10915,7 +10893,7 @@
         <p:spPr>
           <a:xfrm>
             <a:off x="714240" y="2771640"/>
-            <a:ext cx="3266280" cy="227880"/>
+            <a:ext cx="3265920" cy="227520"/>
           </a:xfrm>
           <a:prstGeom prst="rect">
             <a:avLst/>
@@ -10977,7 +10955,7 @@
         <p:spPr>
           <a:xfrm>
             <a:off x="714240" y="3076560"/>
-            <a:ext cx="3266280" cy="227880"/>
+            <a:ext cx="3265920" cy="227520"/>
           </a:xfrm>
           <a:prstGeom prst="rect">
             <a:avLst/>
@@ -11039,7 +11017,7 @@
         <p:spPr>
           <a:xfrm>
             <a:off x="561960" y="3419640"/>
-            <a:ext cx="3342600" cy="342360"/>
+            <a:ext cx="3342240" cy="342000"/>
           </a:xfrm>
           <a:custGeom>
             <a:avLst/>
@@ -11092,7 +11070,7 @@
         <p:spPr>
           <a:xfrm>
             <a:off x="604800" y="3495600"/>
-            <a:ext cx="3256920" cy="189720"/>
+            <a:ext cx="3256560" cy="189360"/>
           </a:xfrm>
           <a:prstGeom prst="rect">
             <a:avLst/>
@@ -11144,7 +11122,7 @@
         <p:spPr>
           <a:xfrm>
             <a:off x="4255920" y="1576440"/>
-            <a:ext cx="3675960" cy="2351880"/>
+            <a:ext cx="3675600" cy="2351520"/>
           </a:xfrm>
           <a:custGeom>
             <a:avLst/>
@@ -11200,7 +11178,7 @@
         <p:spPr>
           <a:xfrm>
             <a:off x="4496400" y="1752480"/>
-            <a:ext cx="213480" cy="285120"/>
+            <a:ext cx="213120" cy="284760"/>
           </a:xfrm>
           <a:custGeom>
             <a:avLst/>
@@ -11376,7 +11354,7 @@
         <p:spPr>
           <a:xfrm>
             <a:off x="4894200" y="1743120"/>
-            <a:ext cx="675720" cy="304200"/>
+            <a:ext cx="675360" cy="303840"/>
           </a:xfrm>
           <a:prstGeom prst="rect">
             <a:avLst/>
@@ -11428,7 +11406,7 @@
         <p:spPr>
           <a:xfrm>
             <a:off x="4422600" y="2200320"/>
-            <a:ext cx="702000" cy="151560"/>
+            <a:ext cx="701640" cy="151200"/>
           </a:xfrm>
           <a:prstGeom prst="rect">
             <a:avLst/>
@@ -11480,7 +11458,7 @@
         <p:spPr>
           <a:xfrm>
             <a:off x="4575240" y="2467080"/>
-            <a:ext cx="3266280" cy="227880"/>
+            <a:ext cx="3265920" cy="227520"/>
           </a:xfrm>
           <a:prstGeom prst="rect">
             <a:avLst/>
@@ -11542,7 +11520,7 @@
         <p:spPr>
           <a:xfrm>
             <a:off x="4575240" y="2771640"/>
-            <a:ext cx="3266280" cy="227880"/>
+            <a:ext cx="3265920" cy="227520"/>
           </a:xfrm>
           <a:prstGeom prst="rect">
             <a:avLst/>
@@ -11604,7 +11582,7 @@
         <p:spPr>
           <a:xfrm>
             <a:off x="4575240" y="3076560"/>
-            <a:ext cx="3266280" cy="227880"/>
+            <a:ext cx="3265920" cy="227520"/>
           </a:xfrm>
           <a:prstGeom prst="rect">
             <a:avLst/>
@@ -11666,7 +11644,7 @@
         <p:spPr>
           <a:xfrm>
             <a:off x="4422600" y="3419640"/>
-            <a:ext cx="3342600" cy="342360"/>
+            <a:ext cx="3342240" cy="342000"/>
           </a:xfrm>
           <a:custGeom>
             <a:avLst/>
@@ -11719,7 +11697,7 @@
         <p:spPr>
           <a:xfrm>
             <a:off x="4465440" y="3495600"/>
-            <a:ext cx="3256920" cy="189720"/>
+            <a:ext cx="3256560" cy="189360"/>
           </a:xfrm>
           <a:prstGeom prst="rect">
             <a:avLst/>
@@ -11771,7 +11749,7 @@
         <p:spPr>
           <a:xfrm>
             <a:off x="8116920" y="1576440"/>
-            <a:ext cx="3675960" cy="2351880"/>
+            <a:ext cx="3675600" cy="2351520"/>
           </a:xfrm>
           <a:custGeom>
             <a:avLst/>
@@ -11827,7 +11805,7 @@
         <p:spPr>
           <a:xfrm>
             <a:off x="8321760" y="1752480"/>
-            <a:ext cx="285120" cy="285120"/>
+            <a:ext cx="284760" cy="284760"/>
           </a:xfrm>
           <a:custGeom>
             <a:avLst/>
@@ -11951,7 +11929,7 @@
         <p:spPr>
           <a:xfrm>
             <a:off x="8755200" y="1743120"/>
-            <a:ext cx="542160" cy="304200"/>
+            <a:ext cx="541800" cy="303840"/>
           </a:xfrm>
           <a:prstGeom prst="rect">
             <a:avLst/>
@@ -12003,7 +11981,7 @@
         <p:spPr>
           <a:xfrm>
             <a:off x="8283600" y="2200320"/>
-            <a:ext cx="702000" cy="151560"/>
+            <a:ext cx="701640" cy="151200"/>
           </a:xfrm>
           <a:prstGeom prst="rect">
             <a:avLst/>
@@ -12055,7 +12033,7 @@
         <p:spPr>
           <a:xfrm>
             <a:off x="8435880" y="2467080"/>
-            <a:ext cx="3266280" cy="227880"/>
+            <a:ext cx="3265920" cy="227520"/>
           </a:xfrm>
           <a:prstGeom prst="rect">
             <a:avLst/>
@@ -12117,7 +12095,7 @@
         <p:spPr>
           <a:xfrm>
             <a:off x="8435880" y="2771640"/>
-            <a:ext cx="3266280" cy="227880"/>
+            <a:ext cx="3265920" cy="227520"/>
           </a:xfrm>
           <a:prstGeom prst="rect">
             <a:avLst/>
@@ -12179,7 +12157,7 @@
         <p:spPr>
           <a:xfrm>
             <a:off x="8435880" y="3076560"/>
-            <a:ext cx="3266280" cy="227880"/>
+            <a:ext cx="3265920" cy="227520"/>
           </a:xfrm>
           <a:prstGeom prst="rect">
             <a:avLst/>
@@ -12241,7 +12219,7 @@
         <p:spPr>
           <a:xfrm>
             <a:off x="8283600" y="3419640"/>
-            <a:ext cx="3342600" cy="342360"/>
+            <a:ext cx="3342240" cy="342000"/>
           </a:xfrm>
           <a:custGeom>
             <a:avLst/>
@@ -12294,7 +12272,7 @@
         <p:spPr>
           <a:xfrm>
             <a:off x="8326440" y="3495600"/>
-            <a:ext cx="3256920" cy="189720"/>
+            <a:ext cx="3256560" cy="189360"/>
           </a:xfrm>
           <a:prstGeom prst="rect">
             <a:avLst/>
@@ -12346,7 +12324,7 @@
         <p:spPr>
           <a:xfrm>
             <a:off x="395280" y="4110120"/>
-            <a:ext cx="3675960" cy="2351880"/>
+            <a:ext cx="3675600" cy="2351520"/>
           </a:xfrm>
           <a:custGeom>
             <a:avLst/>
@@ -12402,7 +12380,7 @@
         <p:spPr>
           <a:xfrm>
             <a:off x="600120" y="4286160"/>
-            <a:ext cx="285120" cy="285120"/>
+            <a:ext cx="284760" cy="284760"/>
           </a:xfrm>
           <a:custGeom>
             <a:avLst/>
@@ -12515,7 +12493,7 @@
         <p:spPr>
           <a:xfrm>
             <a:off x="1033560" y="4276800"/>
-            <a:ext cx="875520" cy="304200"/>
+            <a:ext cx="875160" cy="303840"/>
           </a:xfrm>
           <a:prstGeom prst="rect">
             <a:avLst/>
@@ -12567,7 +12545,7 @@
         <p:spPr>
           <a:xfrm>
             <a:off x="561960" y="4734000"/>
-            <a:ext cx="702000" cy="151560"/>
+            <a:ext cx="701640" cy="151200"/>
           </a:xfrm>
           <a:prstGeom prst="rect">
             <a:avLst/>
@@ -12619,7 +12597,7 @@
         <p:spPr>
           <a:xfrm>
             <a:off x="714240" y="5000760"/>
-            <a:ext cx="3266280" cy="227880"/>
+            <a:ext cx="3265920" cy="227520"/>
           </a:xfrm>
           <a:prstGeom prst="rect">
             <a:avLst/>
@@ -12681,7 +12659,7 @@
         <p:spPr>
           <a:xfrm>
             <a:off x="714240" y="5305320"/>
-            <a:ext cx="3266280" cy="227880"/>
+            <a:ext cx="3265920" cy="227520"/>
           </a:xfrm>
           <a:prstGeom prst="rect">
             <a:avLst/>
@@ -12743,7 +12721,7 @@
         <p:spPr>
           <a:xfrm>
             <a:off x="714240" y="5610240"/>
-            <a:ext cx="3266280" cy="227880"/>
+            <a:ext cx="3265920" cy="227520"/>
           </a:xfrm>
           <a:prstGeom prst="rect">
             <a:avLst/>
@@ -12805,7 +12783,7 @@
         <p:spPr>
           <a:xfrm>
             <a:off x="561960" y="5952960"/>
-            <a:ext cx="3342600" cy="342360"/>
+            <a:ext cx="3342240" cy="342000"/>
           </a:xfrm>
           <a:custGeom>
             <a:avLst/>
@@ -12858,7 +12836,7 @@
         <p:spPr>
           <a:xfrm>
             <a:off x="604800" y="6029280"/>
-            <a:ext cx="3256920" cy="189720"/>
+            <a:ext cx="3256560" cy="189360"/>
           </a:xfrm>
           <a:prstGeom prst="rect">
             <a:avLst/>
@@ -12910,7 +12888,7 @@
         <p:spPr>
           <a:xfrm>
             <a:off x="4255920" y="4110120"/>
-            <a:ext cx="3675960" cy="2351880"/>
+            <a:ext cx="3675600" cy="2351520"/>
           </a:xfrm>
           <a:custGeom>
             <a:avLst/>
@@ -12966,7 +12944,7 @@
         <p:spPr>
           <a:xfrm>
             <a:off x="4443120" y="4286160"/>
-            <a:ext cx="320760" cy="285120"/>
+            <a:ext cx="320400" cy="284760"/>
           </a:xfrm>
           <a:custGeom>
             <a:avLst/>
@@ -13163,7 +13141,7 @@
         <p:spPr>
           <a:xfrm>
             <a:off x="4894200" y="4276800"/>
-            <a:ext cx="761400" cy="304200"/>
+            <a:ext cx="761040" cy="303840"/>
           </a:xfrm>
           <a:prstGeom prst="rect">
             <a:avLst/>
@@ -13215,7 +13193,7 @@
         <p:spPr>
           <a:xfrm>
             <a:off x="4422600" y="4734000"/>
-            <a:ext cx="702000" cy="151560"/>
+            <a:ext cx="701640" cy="151200"/>
           </a:xfrm>
           <a:prstGeom prst="rect">
             <a:avLst/>
@@ -13267,7 +13245,7 @@
         <p:spPr>
           <a:xfrm>
             <a:off x="4575240" y="5000760"/>
-            <a:ext cx="3266280" cy="227880"/>
+            <a:ext cx="3265920" cy="227520"/>
           </a:xfrm>
           <a:prstGeom prst="rect">
             <a:avLst/>
@@ -13329,7 +13307,7 @@
         <p:spPr>
           <a:xfrm>
             <a:off x="4575240" y="5305320"/>
-            <a:ext cx="3266280" cy="227880"/>
+            <a:ext cx="3265920" cy="227520"/>
           </a:xfrm>
           <a:prstGeom prst="rect">
             <a:avLst/>
@@ -13391,7 +13369,7 @@
         <p:spPr>
           <a:xfrm>
             <a:off x="4575240" y="5610240"/>
-            <a:ext cx="3266280" cy="227880"/>
+            <a:ext cx="3265920" cy="227520"/>
           </a:xfrm>
           <a:prstGeom prst="rect">
             <a:avLst/>
@@ -13453,7 +13431,7 @@
         <p:spPr>
           <a:xfrm>
             <a:off x="4422600" y="5952960"/>
-            <a:ext cx="3342600" cy="342360"/>
+            <a:ext cx="3342240" cy="342000"/>
           </a:xfrm>
           <a:custGeom>
             <a:avLst/>
@@ -13506,7 +13484,7 @@
         <p:spPr>
           <a:xfrm>
             <a:off x="4465440" y="6029280"/>
-            <a:ext cx="3256920" cy="189720"/>
+            <a:ext cx="3256560" cy="189360"/>
           </a:xfrm>
           <a:prstGeom prst="rect">
             <a:avLst/>
@@ -13558,7 +13536,7 @@
         <p:spPr>
           <a:xfrm>
             <a:off x="8116920" y="4110120"/>
-            <a:ext cx="3675960" cy="2351880"/>
+            <a:ext cx="3675600" cy="2351520"/>
           </a:xfrm>
           <a:custGeom>
             <a:avLst/>
@@ -13614,7 +13592,7 @@
         <p:spPr>
           <a:xfrm>
             <a:off x="8321760" y="4286160"/>
-            <a:ext cx="285120" cy="285120"/>
+            <a:ext cx="284760" cy="284760"/>
           </a:xfrm>
           <a:custGeom>
             <a:avLst/>
@@ -13712,7 +13690,7 @@
         <p:spPr>
           <a:xfrm>
             <a:off x="8755200" y="4276800"/>
-            <a:ext cx="866160" cy="304200"/>
+            <a:ext cx="865800" cy="303840"/>
           </a:xfrm>
           <a:prstGeom prst="rect">
             <a:avLst/>
@@ -13764,7 +13742,7 @@
         <p:spPr>
           <a:xfrm>
             <a:off x="8283600" y="4734000"/>
-            <a:ext cx="702000" cy="151560"/>
+            <a:ext cx="701640" cy="151200"/>
           </a:xfrm>
           <a:prstGeom prst="rect">
             <a:avLst/>
@@ -13816,7 +13794,7 @@
         <p:spPr>
           <a:xfrm>
             <a:off x="8435880" y="5000760"/>
-            <a:ext cx="3266280" cy="227880"/>
+            <a:ext cx="3265920" cy="227520"/>
           </a:xfrm>
           <a:prstGeom prst="rect">
             <a:avLst/>
@@ -13878,7 +13856,7 @@
         <p:spPr>
           <a:xfrm>
             <a:off x="8435880" y="5305320"/>
-            <a:ext cx="3266280" cy="227880"/>
+            <a:ext cx="3265920" cy="227520"/>
           </a:xfrm>
           <a:prstGeom prst="rect">
             <a:avLst/>
@@ -13940,7 +13918,7 @@
         <p:spPr>
           <a:xfrm>
             <a:off x="8435880" y="5610240"/>
-            <a:ext cx="3266280" cy="227880"/>
+            <a:ext cx="3265920" cy="227520"/>
           </a:xfrm>
           <a:prstGeom prst="rect">
             <a:avLst/>
@@ -14002,7 +13980,7 @@
         <p:spPr>
           <a:xfrm>
             <a:off x="8283600" y="5952960"/>
-            <a:ext cx="3342600" cy="342360"/>
+            <a:ext cx="3342240" cy="342000"/>
           </a:xfrm>
           <a:custGeom>
             <a:avLst/>
@@ -14055,7 +14033,7 @@
         <p:spPr>
           <a:xfrm>
             <a:off x="8326440" y="6029280"/>
-            <a:ext cx="3256920" cy="189720"/>
+            <a:ext cx="3256560" cy="189360"/>
           </a:xfrm>
           <a:prstGeom prst="rect">
             <a:avLst/>
@@ -14139,7 +14117,7 @@
         <p:spPr>
           <a:xfrm>
             <a:off x="0" y="0"/>
-            <a:ext cx="12191400" cy="6857280"/>
+            <a:ext cx="12191040" cy="6856920"/>
           </a:xfrm>
           <a:prstGeom prst="roundRect">
             <a:avLst>
@@ -14171,7 +14149,7 @@
         <p:spPr>
           <a:xfrm>
             <a:off x="0" y="0"/>
-            <a:ext cx="12191400" cy="6857280"/>
+            <a:ext cx="12191040" cy="6856920"/>
           </a:xfrm>
           <a:custGeom>
             <a:avLst/>
@@ -14234,7 +14212,7 @@
         <p:spPr>
           <a:xfrm>
             <a:off x="380880" y="1542960"/>
-            <a:ext cx="1856520" cy="608760"/>
+            <a:ext cx="1856160" cy="608400"/>
           </a:xfrm>
           <a:custGeom>
             <a:avLst/>
@@ -14285,7 +14263,7 @@
         <p:spPr>
           <a:xfrm>
             <a:off x="609480" y="1676520"/>
-            <a:ext cx="1567800" cy="342360"/>
+            <a:ext cx="1567440" cy="342000"/>
           </a:xfrm>
           <a:prstGeom prst="rect">
             <a:avLst/>
@@ -14337,7 +14315,7 @@
         <p:spPr>
           <a:xfrm>
             <a:off x="380880" y="2381400"/>
-            <a:ext cx="11772360" cy="1713960"/>
+            <a:ext cx="11772000" cy="1713600"/>
           </a:xfrm>
           <a:prstGeom prst="rect">
             <a:avLst/>
@@ -14410,7 +14388,7 @@
         <p:spPr>
           <a:xfrm>
             <a:off x="380880" y="4324320"/>
-            <a:ext cx="1523160" cy="75600"/>
+            <a:ext cx="1522800" cy="75240"/>
           </a:xfrm>
           <a:custGeom>
             <a:avLst/>
@@ -14461,7 +14439,7 @@
         <p:spPr>
           <a:xfrm>
             <a:off x="380880" y="4629240"/>
-            <a:ext cx="7457400" cy="685080"/>
+            <a:ext cx="7457040" cy="684720"/>
           </a:xfrm>
           <a:prstGeom prst="rect">
             <a:avLst/>
@@ -14534,7 +14512,7 @@
         <p:spPr>
           <a:xfrm>
             <a:off x="10591920" y="5867280"/>
-            <a:ext cx="151560" cy="151560"/>
+            <a:ext cx="151200" cy="151200"/>
           </a:xfrm>
           <a:custGeom>
             <a:avLst/>
@@ -14585,7 +14563,7 @@
         <p:spPr>
           <a:xfrm>
             <a:off x="10896480" y="5867280"/>
-            <a:ext cx="151560" cy="151560"/>
+            <a:ext cx="151200" cy="151200"/>
           </a:xfrm>
           <a:custGeom>
             <a:avLst/>
@@ -14636,7 +14614,7 @@
         <p:spPr>
           <a:xfrm>
             <a:off x="11201400" y="5867280"/>
-            <a:ext cx="151560" cy="151560"/>
+            <a:ext cx="151200" cy="151200"/>
           </a:xfrm>
           <a:custGeom>
             <a:avLst/>
@@ -14719,7 +14697,7 @@
         <p:spPr>
           <a:xfrm>
             <a:off x="0" y="0"/>
-            <a:ext cx="12191400" cy="6855120"/>
+            <a:ext cx="12191040" cy="6854760"/>
           </a:xfrm>
           <a:custGeom>
             <a:avLst/>
@@ -14782,7 +14760,7 @@
         <p:spPr>
           <a:xfrm>
             <a:off x="353520" y="353520"/>
-            <a:ext cx="11696400" cy="423360"/>
+            <a:ext cx="11696040" cy="423000"/>
           </a:xfrm>
           <a:prstGeom prst="rect">
             <a:avLst/>
@@ -14834,7 +14812,7 @@
         <p:spPr>
           <a:xfrm>
             <a:off x="353520" y="883440"/>
-            <a:ext cx="11590560" cy="281880"/>
+            <a:ext cx="11590200" cy="281520"/>
           </a:xfrm>
           <a:prstGeom prst="rect">
             <a:avLst/>
@@ -14886,7 +14864,7 @@
         <p:spPr>
           <a:xfrm>
             <a:off x="353520" y="1272240"/>
-            <a:ext cx="847440" cy="34560"/>
+            <a:ext cx="847080" cy="34200"/>
           </a:xfrm>
           <a:custGeom>
             <a:avLst/>
@@ -14937,7 +14915,7 @@
         <p:spPr>
           <a:xfrm>
             <a:off x="366480" y="1462320"/>
-            <a:ext cx="3709800" cy="2110680"/>
+            <a:ext cx="3709440" cy="2110320"/>
           </a:xfrm>
           <a:custGeom>
             <a:avLst/>
@@ -14993,7 +14971,7 @@
         <p:spPr>
           <a:xfrm>
             <a:off x="1954800" y="1652040"/>
-            <a:ext cx="529200" cy="423360"/>
+            <a:ext cx="528840" cy="423000"/>
           </a:xfrm>
           <a:custGeom>
             <a:avLst/>
@@ -15209,7 +15187,7 @@
         <p:spPr>
           <a:xfrm>
             <a:off x="503640" y="2217600"/>
-            <a:ext cx="3435840" cy="281880"/>
+            <a:ext cx="3435480" cy="281520"/>
           </a:xfrm>
           <a:prstGeom prst="rect">
             <a:avLst/>
@@ -15261,7 +15239,7 @@
         <p:spPr>
           <a:xfrm>
             <a:off x="516960" y="2606400"/>
-            <a:ext cx="3409560" cy="776880"/>
+            <a:ext cx="3409200" cy="776520"/>
           </a:xfrm>
           <a:prstGeom prst="rect">
             <a:avLst/>
@@ -15333,7 +15311,7 @@
         <p:spPr>
           <a:xfrm>
             <a:off x="4240800" y="1462320"/>
-            <a:ext cx="3709800" cy="2110680"/>
+            <a:ext cx="3709440" cy="2110320"/>
           </a:xfrm>
           <a:custGeom>
             <a:avLst/>
@@ -15389,7 +15367,7 @@
         <p:spPr>
           <a:xfrm>
             <a:off x="5882040" y="1652040"/>
-            <a:ext cx="423360" cy="423360"/>
+            <a:ext cx="423000" cy="423000"/>
           </a:xfrm>
           <a:custGeom>
             <a:avLst/>
@@ -15566,7 +15544,7 @@
         <p:spPr>
           <a:xfrm>
             <a:off x="4377600" y="2217600"/>
-            <a:ext cx="3435840" cy="281880"/>
+            <a:ext cx="3435480" cy="281520"/>
           </a:xfrm>
           <a:prstGeom prst="rect">
             <a:avLst/>
@@ -15618,7 +15596,7 @@
         <p:spPr>
           <a:xfrm>
             <a:off x="4390920" y="2606400"/>
-            <a:ext cx="3409560" cy="776880"/>
+            <a:ext cx="3409200" cy="776520"/>
           </a:xfrm>
           <a:prstGeom prst="rect">
             <a:avLst/>
@@ -15690,7 +15668,7 @@
         <p:spPr>
           <a:xfrm>
             <a:off x="8115120" y="1462320"/>
-            <a:ext cx="3709800" cy="2110680"/>
+            <a:ext cx="3709440" cy="2110320"/>
           </a:xfrm>
           <a:custGeom>
             <a:avLst/>
@@ -15746,7 +15724,7 @@
         <p:spPr>
           <a:xfrm>
             <a:off x="9756000" y="1652040"/>
-            <a:ext cx="423360" cy="423360"/>
+            <a:ext cx="423000" cy="423000"/>
           </a:xfrm>
           <a:custGeom>
             <a:avLst/>
@@ -15867,7 +15845,7 @@
         <p:spPr>
           <a:xfrm>
             <a:off x="8251920" y="2217600"/>
-            <a:ext cx="3435840" cy="281880"/>
+            <a:ext cx="3435480" cy="281520"/>
           </a:xfrm>
           <a:prstGeom prst="rect">
             <a:avLst/>
@@ -15919,7 +15897,7 @@
         <p:spPr>
           <a:xfrm>
             <a:off x="8265240" y="2606400"/>
-            <a:ext cx="3409560" cy="520560"/>
+            <a:ext cx="3409200" cy="520200"/>
           </a:xfrm>
           <a:prstGeom prst="rect">
             <a:avLst/>
@@ -15991,7 +15969,7 @@
         <p:spPr>
           <a:xfrm>
             <a:off x="366480" y="3739320"/>
-            <a:ext cx="5609520" cy="3100320"/>
+            <a:ext cx="5609160" cy="3099960"/>
           </a:xfrm>
           <a:custGeom>
             <a:avLst/>
@@ -16047,7 +16025,7 @@
         <p:spPr>
           <a:xfrm>
             <a:off x="503640" y="3929400"/>
-            <a:ext cx="5335560" cy="281880"/>
+            <a:ext cx="5335200" cy="281520"/>
           </a:xfrm>
           <a:prstGeom prst="rect">
             <a:avLst/>
@@ -16099,7 +16077,7 @@
         <p:spPr>
           <a:xfrm>
             <a:off x="556560" y="4353480"/>
-            <a:ext cx="5229360" cy="493920"/>
+            <a:ext cx="5229000" cy="493560"/>
           </a:xfrm>
           <a:custGeom>
             <a:avLst/>
@@ -16152,7 +16130,7 @@
         <p:spPr>
           <a:xfrm>
             <a:off x="662760" y="4476960"/>
-            <a:ext cx="1625040" cy="246600"/>
+            <a:ext cx="1624680" cy="246240"/>
           </a:xfrm>
           <a:prstGeom prst="rect">
             <a:avLst/>
@@ -16204,7 +16182,7 @@
         <p:spPr>
           <a:xfrm>
             <a:off x="5293800" y="4459320"/>
-            <a:ext cx="493920" cy="281880"/>
+            <a:ext cx="493560" cy="281520"/>
           </a:xfrm>
           <a:prstGeom prst="rect">
             <a:avLst/>
@@ -16256,7 +16234,7 @@
         <p:spPr>
           <a:xfrm>
             <a:off x="556560" y="4953960"/>
-            <a:ext cx="5229360" cy="493920"/>
+            <a:ext cx="5229000" cy="493560"/>
           </a:xfrm>
           <a:custGeom>
             <a:avLst/>
@@ -16309,7 +16287,7 @@
         <p:spPr>
           <a:xfrm>
             <a:off x="662760" y="5077800"/>
-            <a:ext cx="1625040" cy="246600"/>
+            <a:ext cx="1624680" cy="246240"/>
           </a:xfrm>
           <a:prstGeom prst="rect">
             <a:avLst/>
@@ -16361,7 +16339,7 @@
         <p:spPr>
           <a:xfrm>
             <a:off x="5136840" y="5060160"/>
-            <a:ext cx="644040" cy="281880"/>
+            <a:ext cx="643680" cy="281520"/>
           </a:xfrm>
           <a:prstGeom prst="rect">
             <a:avLst/>
@@ -16413,7 +16391,7 @@
         <p:spPr>
           <a:xfrm>
             <a:off x="556560" y="5554800"/>
-            <a:ext cx="5229360" cy="493920"/>
+            <a:ext cx="5229000" cy="493560"/>
           </a:xfrm>
           <a:custGeom>
             <a:avLst/>
@@ -16466,7 +16444,7 @@
         <p:spPr>
           <a:xfrm>
             <a:off x="662760" y="5678640"/>
-            <a:ext cx="1156680" cy="246600"/>
+            <a:ext cx="1156320" cy="246240"/>
           </a:xfrm>
           <a:prstGeom prst="rect">
             <a:avLst/>
@@ -16518,7 +16496,7 @@
         <p:spPr>
           <a:xfrm>
             <a:off x="5199840" y="5661000"/>
-            <a:ext cx="582480" cy="281880"/>
+            <a:ext cx="582120" cy="281520"/>
           </a:xfrm>
           <a:prstGeom prst="rect">
             <a:avLst/>
@@ -16570,7 +16548,7 @@
         <p:spPr>
           <a:xfrm>
             <a:off x="556560" y="6155640"/>
-            <a:ext cx="5229360" cy="493920"/>
+            <a:ext cx="5229000" cy="493560"/>
           </a:xfrm>
           <a:custGeom>
             <a:avLst/>
@@ -16623,7 +16601,7 @@
         <p:spPr>
           <a:xfrm>
             <a:off x="662760" y="6279480"/>
-            <a:ext cx="1413000" cy="246600"/>
+            <a:ext cx="1412640" cy="246240"/>
           </a:xfrm>
           <a:prstGeom prst="rect">
             <a:avLst/>
@@ -16675,7 +16653,7 @@
         <p:spPr>
           <a:xfrm>
             <a:off x="4971960" y="6261480"/>
-            <a:ext cx="812160" cy="281880"/>
+            <a:ext cx="811800" cy="281520"/>
           </a:xfrm>
           <a:prstGeom prst="rect">
             <a:avLst/>
@@ -16727,7 +16705,7 @@
         <p:spPr>
           <a:xfrm>
             <a:off x="6213240" y="3739320"/>
-            <a:ext cx="5609520" cy="3100320"/>
+            <a:ext cx="5609160" cy="3099960"/>
           </a:xfrm>
           <a:custGeom>
             <a:avLst/>
@@ -16783,7 +16761,7 @@
         <p:spPr>
           <a:xfrm>
             <a:off x="6350040" y="3929400"/>
-            <a:ext cx="5335560" cy="281880"/>
+            <a:ext cx="5335200" cy="281520"/>
           </a:xfrm>
           <a:prstGeom prst="rect">
             <a:avLst/>
@@ -16835,7 +16813,7 @@
         <p:spPr>
           <a:xfrm>
             <a:off x="6403320" y="4353480"/>
-            <a:ext cx="5229360" cy="458640"/>
+            <a:ext cx="5229000" cy="458280"/>
           </a:xfrm>
           <a:custGeom>
             <a:avLst/>
@@ -16888,7 +16866,7 @@
         <p:spPr>
           <a:xfrm>
             <a:off x="6520320" y="4494600"/>
-            <a:ext cx="198000" cy="176040"/>
+            <a:ext cx="197640" cy="175680"/>
           </a:xfrm>
           <a:custGeom>
             <a:avLst/>
@@ -17007,7 +16985,7 @@
         <p:spPr>
           <a:xfrm>
             <a:off x="6836040" y="4459320"/>
-            <a:ext cx="2419920" cy="246600"/>
+            <a:ext cx="2419560" cy="246240"/>
           </a:xfrm>
           <a:prstGeom prst="rect">
             <a:avLst/>
@@ -17069,7 +17047,7 @@
         <p:spPr>
           <a:xfrm>
             <a:off x="6403320" y="4918680"/>
-            <a:ext cx="5229360" cy="458640"/>
+            <a:ext cx="5229000" cy="458280"/>
           </a:xfrm>
           <a:custGeom>
             <a:avLst/>
@@ -17122,7 +17100,7 @@
         <p:spPr>
           <a:xfrm>
             <a:off x="6520320" y="5060160"/>
-            <a:ext cx="198000" cy="176040"/>
+            <a:ext cx="197640" cy="175680"/>
           </a:xfrm>
           <a:custGeom>
             <a:avLst/>
@@ -17247,7 +17225,7 @@
         <p:spPr>
           <a:xfrm>
             <a:off x="6836040" y="5024880"/>
-            <a:ext cx="2057760" cy="246600"/>
+            <a:ext cx="2057400" cy="246240"/>
           </a:xfrm>
           <a:prstGeom prst="rect">
             <a:avLst/>
@@ -17309,7 +17287,7 @@
         <p:spPr>
           <a:xfrm>
             <a:off x="6403320" y="5484240"/>
-            <a:ext cx="5229360" cy="458640"/>
+            <a:ext cx="5229000" cy="458280"/>
           </a:xfrm>
           <a:custGeom>
             <a:avLst/>
@@ -17362,7 +17340,7 @@
         <p:spPr>
           <a:xfrm>
             <a:off x="6520320" y="5625720"/>
-            <a:ext cx="198000" cy="176040"/>
+            <a:ext cx="197640" cy="175680"/>
           </a:xfrm>
           <a:custGeom>
             <a:avLst/>
@@ -17559,7 +17537,7 @@
         <p:spPr>
           <a:xfrm>
             <a:off x="6836040" y="5590080"/>
-            <a:ext cx="2455200" cy="246600"/>
+            <a:ext cx="2454840" cy="246240"/>
           </a:xfrm>
           <a:prstGeom prst="rect">
             <a:avLst/>
@@ -17621,7 +17599,7 @@
         <p:spPr>
           <a:xfrm>
             <a:off x="6403320" y="6049440"/>
-            <a:ext cx="5229360" cy="458640"/>
+            <a:ext cx="5229000" cy="458280"/>
           </a:xfrm>
           <a:custGeom>
             <a:avLst/>
@@ -17674,7 +17652,7 @@
         <p:spPr>
           <a:xfrm>
             <a:off x="6542280" y="6190920"/>
-            <a:ext cx="153720" cy="176040"/>
+            <a:ext cx="153360" cy="175680"/>
           </a:xfrm>
           <a:custGeom>
             <a:avLst/>
@@ -17835,7 +17813,7 @@
         <p:spPr>
           <a:xfrm>
             <a:off x="6836040" y="6155640"/>
-            <a:ext cx="2296440" cy="246600"/>
+            <a:ext cx="2296080" cy="246240"/>
           </a:xfrm>
           <a:prstGeom prst="rect">
             <a:avLst/>
@@ -17929,7 +17907,7 @@
         <p:spPr>
           <a:xfrm>
             <a:off x="0" y="0"/>
-            <a:ext cx="12191400" cy="6857280"/>
+            <a:ext cx="12191040" cy="6856920"/>
           </a:xfrm>
           <a:custGeom>
             <a:avLst/>
@@ -17992,7 +17970,7 @@
         <p:spPr>
           <a:xfrm>
             <a:off x="354240" y="354240"/>
-            <a:ext cx="11694960" cy="424440"/>
+            <a:ext cx="11694600" cy="424080"/>
           </a:xfrm>
           <a:prstGeom prst="rect">
             <a:avLst/>
@@ -18044,7 +18022,7 @@
         <p:spPr>
           <a:xfrm>
             <a:off x="354240" y="885960"/>
-            <a:ext cx="11588760" cy="282960"/>
+            <a:ext cx="11588400" cy="282600"/>
           </a:xfrm>
           <a:prstGeom prst="rect">
             <a:avLst/>
@@ -18096,7 +18074,7 @@
         <p:spPr>
           <a:xfrm>
             <a:off x="354240" y="1275840"/>
-            <a:ext cx="849960" cy="34560"/>
+            <a:ext cx="849600" cy="34200"/>
           </a:xfrm>
           <a:custGeom>
             <a:avLst/>
@@ -18147,7 +18125,7 @@
         <p:spPr>
           <a:xfrm>
             <a:off x="367560" y="1466280"/>
-            <a:ext cx="5608080" cy="3180240"/>
+            <a:ext cx="5607720" cy="3179880"/>
           </a:xfrm>
           <a:custGeom>
             <a:avLst/>
@@ -18203,7 +18181,7 @@
         <p:spPr>
           <a:xfrm>
             <a:off x="618120" y="1657080"/>
-            <a:ext cx="278280" cy="318240"/>
+            <a:ext cx="277920" cy="317880"/>
           </a:xfrm>
           <a:custGeom>
             <a:avLst/>
@@ -18490,7 +18468,7 @@
         <p:spPr>
           <a:xfrm>
             <a:off x="1063080" y="1657080"/>
-            <a:ext cx="1213200" cy="318240"/>
+            <a:ext cx="1212840" cy="317880"/>
           </a:xfrm>
           <a:prstGeom prst="rect">
             <a:avLst/>
@@ -18542,7 +18520,7 @@
         <p:spPr>
           <a:xfrm>
             <a:off x="558360" y="2117520"/>
-            <a:ext cx="5226840" cy="708120"/>
+            <a:ext cx="5226480" cy="707760"/>
           </a:xfrm>
           <a:custGeom>
             <a:avLst/>
@@ -18595,7 +18573,7 @@
         <p:spPr>
           <a:xfrm>
             <a:off x="664560" y="2224080"/>
-            <a:ext cx="5094000" cy="247320"/>
+            <a:ext cx="5093640" cy="246960"/>
           </a:xfrm>
           <a:prstGeom prst="rect">
             <a:avLst/>
@@ -18647,7 +18625,7 @@
         <p:spPr>
           <a:xfrm>
             <a:off x="664560" y="2507400"/>
-            <a:ext cx="5085360" cy="212040"/>
+            <a:ext cx="5085000" cy="211680"/>
           </a:xfrm>
           <a:prstGeom prst="rect">
             <a:avLst/>
@@ -18701,7 +18679,7 @@
         <p:spPr>
           <a:xfrm>
             <a:off x="558360" y="2932920"/>
-            <a:ext cx="5226840" cy="708120"/>
+            <a:ext cx="5226480" cy="707760"/>
           </a:xfrm>
           <a:custGeom>
             <a:avLst/>
@@ -18754,7 +18732,7 @@
         <p:spPr>
           <a:xfrm>
             <a:off x="664560" y="3039120"/>
-            <a:ext cx="5094000" cy="247320"/>
+            <a:ext cx="5093640" cy="246960"/>
           </a:xfrm>
           <a:prstGeom prst="rect">
             <a:avLst/>
@@ -18806,7 +18784,7 @@
         <p:spPr>
           <a:xfrm>
             <a:off x="664560" y="3322800"/>
-            <a:ext cx="5085360" cy="212040"/>
+            <a:ext cx="5085000" cy="211680"/>
           </a:xfrm>
           <a:prstGeom prst="rect">
             <a:avLst/>
@@ -18860,7 +18838,7 @@
         <p:spPr>
           <a:xfrm>
             <a:off x="558360" y="3747960"/>
-            <a:ext cx="5226840" cy="708120"/>
+            <a:ext cx="5226480" cy="707760"/>
           </a:xfrm>
           <a:custGeom>
             <a:avLst/>
@@ -18913,7 +18891,7 @@
         <p:spPr>
           <a:xfrm>
             <a:off x="664560" y="3854160"/>
-            <a:ext cx="5094000" cy="247320"/>
+            <a:ext cx="5093640" cy="246960"/>
           </a:xfrm>
           <a:prstGeom prst="rect">
             <a:avLst/>
@@ -18965,7 +18943,7 @@
         <p:spPr>
           <a:xfrm>
             <a:off x="664560" y="4137840"/>
-            <a:ext cx="5085360" cy="212040"/>
+            <a:ext cx="5085000" cy="211680"/>
           </a:xfrm>
           <a:prstGeom prst="rect">
             <a:avLst/>
@@ -19019,7 +18997,7 @@
         <p:spPr>
           <a:xfrm>
             <a:off x="6215760" y="1466280"/>
-            <a:ext cx="5608080" cy="1292760"/>
+            <a:ext cx="5607720" cy="1292400"/>
           </a:xfrm>
           <a:custGeom>
             <a:avLst/>
@@ -19075,7 +19053,7 @@
         <p:spPr>
           <a:xfrm>
             <a:off x="6441480" y="1665720"/>
-            <a:ext cx="264960" cy="264960"/>
+            <a:ext cx="264600" cy="264600"/>
           </a:xfrm>
           <a:custGeom>
             <a:avLst/>
@@ -19187,7 +19165,7 @@
         <p:spPr>
           <a:xfrm>
             <a:off x="6844680" y="1657080"/>
-            <a:ext cx="982800" cy="282960"/>
+            <a:ext cx="982440" cy="282600"/>
           </a:xfrm>
           <a:prstGeom prst="rect">
             <a:avLst/>
@@ -19239,7 +19217,7 @@
         <p:spPr>
           <a:xfrm>
             <a:off x="6406200" y="2046600"/>
-            <a:ext cx="5306760" cy="522000"/>
+            <a:ext cx="5306400" cy="521640"/>
           </a:xfrm>
           <a:prstGeom prst="rect">
             <a:avLst/>
@@ -19331,7 +19309,7 @@
         <p:spPr>
           <a:xfrm>
             <a:off x="6215760" y="2923920"/>
-            <a:ext cx="5608080" cy="1292760"/>
+            <a:ext cx="5607720" cy="1292400"/>
           </a:xfrm>
           <a:custGeom>
             <a:avLst/>
@@ -19387,7 +19365,7 @@
         <p:spPr>
           <a:xfrm>
             <a:off x="6408360" y="3123360"/>
-            <a:ext cx="331560" cy="264960"/>
+            <a:ext cx="331200" cy="264600"/>
           </a:xfrm>
           <a:custGeom>
             <a:avLst/>
@@ -19509,7 +19487,7 @@
         <p:spPr>
           <a:xfrm>
             <a:off x="6844680" y="3114360"/>
-            <a:ext cx="708120" cy="282960"/>
+            <a:ext cx="707760" cy="282600"/>
           </a:xfrm>
           <a:prstGeom prst="rect">
             <a:avLst/>
@@ -19561,7 +19539,7 @@
         <p:spPr>
           <a:xfrm>
             <a:off x="6406200" y="3504240"/>
-            <a:ext cx="5306760" cy="522000"/>
+            <a:ext cx="5306400" cy="521640"/>
           </a:xfrm>
           <a:prstGeom prst="rect">
             <a:avLst/>
@@ -19633,7 +19611,7 @@
         <p:spPr>
           <a:xfrm>
             <a:off x="367560" y="4815720"/>
-            <a:ext cx="2737080" cy="1266480"/>
+            <a:ext cx="2736720" cy="1266120"/>
           </a:xfrm>
           <a:custGeom>
             <a:avLst/>
@@ -19689,7 +19667,7 @@
         <p:spPr>
           <a:xfrm>
             <a:off x="1577160" y="4970880"/>
-            <a:ext cx="318240" cy="318240"/>
+            <a:ext cx="317880" cy="317880"/>
           </a:xfrm>
           <a:custGeom>
             <a:avLst/>
@@ -19932,7 +19910,7 @@
         <p:spPr>
           <a:xfrm>
             <a:off x="478440" y="5396040"/>
-            <a:ext cx="2515680" cy="247320"/>
+            <a:ext cx="2515320" cy="246960"/>
           </a:xfrm>
           <a:prstGeom prst="rect">
             <a:avLst/>
@@ -19984,7 +19962,7 @@
         <p:spPr>
           <a:xfrm>
             <a:off x="487440" y="5715000"/>
-            <a:ext cx="2498040" cy="212040"/>
+            <a:ext cx="2497680" cy="211680"/>
           </a:xfrm>
           <a:prstGeom prst="rect">
             <a:avLst/>
@@ -20036,7 +20014,7 @@
         <p:spPr>
           <a:xfrm>
             <a:off x="3273840" y="4815720"/>
-            <a:ext cx="2737080" cy="1266480"/>
+            <a:ext cx="2736720" cy="1266120"/>
           </a:xfrm>
           <a:custGeom>
             <a:avLst/>
@@ -20092,7 +20070,7 @@
         <p:spPr>
           <a:xfrm>
             <a:off x="4503240" y="4970880"/>
-            <a:ext cx="278280" cy="318240"/>
+            <a:ext cx="277920" cy="317880"/>
           </a:xfrm>
           <a:custGeom>
             <a:avLst/>
@@ -20262,7 +20240,7 @@
         <p:spPr>
           <a:xfrm>
             <a:off x="3384720" y="5396040"/>
-            <a:ext cx="2515680" cy="247320"/>
+            <a:ext cx="2515320" cy="246960"/>
           </a:xfrm>
           <a:prstGeom prst="rect">
             <a:avLst/>
@@ -20314,7 +20292,7 @@
         <p:spPr>
           <a:xfrm>
             <a:off x="3393720" y="5715000"/>
-            <a:ext cx="2498040" cy="212040"/>
+            <a:ext cx="2497680" cy="211680"/>
           </a:xfrm>
           <a:prstGeom prst="rect">
             <a:avLst/>
@@ -20366,7 +20344,7 @@
         <p:spPr>
           <a:xfrm>
             <a:off x="6180120" y="4815720"/>
-            <a:ext cx="2737080" cy="1266480"/>
+            <a:ext cx="2736720" cy="1266120"/>
           </a:xfrm>
           <a:custGeom>
             <a:avLst/>
@@ -20422,7 +20400,7 @@
         <p:spPr>
           <a:xfrm>
             <a:off x="7389720" y="4970880"/>
-            <a:ext cx="318240" cy="318240"/>
+            <a:ext cx="317880" cy="317880"/>
           </a:xfrm>
           <a:custGeom>
             <a:avLst/>
@@ -20626,7 +20604,7 @@
         <p:spPr>
           <a:xfrm>
             <a:off x="6291000" y="5396040"/>
-            <a:ext cx="2515680" cy="247320"/>
+            <a:ext cx="2515320" cy="246960"/>
           </a:xfrm>
           <a:prstGeom prst="rect">
             <a:avLst/>
@@ -20678,7 +20656,7 @@
         <p:spPr>
           <a:xfrm>
             <a:off x="6299640" y="5715000"/>
-            <a:ext cx="2498040" cy="212040"/>
+            <a:ext cx="2497680" cy="211680"/>
           </a:xfrm>
           <a:prstGeom prst="rect">
             <a:avLst/>
@@ -20730,7 +20708,7 @@
         <p:spPr>
           <a:xfrm>
             <a:off x="9086400" y="4815720"/>
-            <a:ext cx="2737080" cy="1266480"/>
+            <a:ext cx="2736720" cy="1266120"/>
           </a:xfrm>
           <a:custGeom>
             <a:avLst/>
@@ -20786,7 +20764,7 @@
         <p:spPr>
           <a:xfrm>
             <a:off x="10296000" y="4970880"/>
-            <a:ext cx="318240" cy="318240"/>
+            <a:ext cx="317880" cy="317880"/>
           </a:xfrm>
           <a:custGeom>
             <a:avLst/>
@@ -21009,7 +20987,7 @@
         <p:spPr>
           <a:xfrm>
             <a:off x="9197280" y="5396040"/>
-            <a:ext cx="2515680" cy="247320"/>
+            <a:ext cx="2515320" cy="246960"/>
           </a:xfrm>
           <a:prstGeom prst="rect">
             <a:avLst/>
@@ -21061,7 +21039,7 @@
         <p:spPr>
           <a:xfrm>
             <a:off x="9205920" y="5715000"/>
-            <a:ext cx="2498040" cy="212040"/>
+            <a:ext cx="2497680" cy="211680"/>
           </a:xfrm>
           <a:prstGeom prst="rect">
             <a:avLst/>
@@ -21113,7 +21091,7 @@
         <p:spPr>
           <a:xfrm>
             <a:off x="367560" y="6251040"/>
-            <a:ext cx="11455920" cy="592920"/>
+            <a:ext cx="11455560" cy="592560"/>
           </a:xfrm>
           <a:custGeom>
             <a:avLst/>
@@ -21169,7 +21147,7 @@
         <p:spPr>
           <a:xfrm>
             <a:off x="469440" y="6406200"/>
-            <a:ext cx="11252160" cy="282960"/>
+            <a:ext cx="11251800" cy="282600"/>
           </a:xfrm>
           <a:prstGeom prst="rect">
             <a:avLst/>
@@ -21283,7 +21261,7 @@
         <p:spPr>
           <a:xfrm>
             <a:off x="0" y="0"/>
-            <a:ext cx="12191400" cy="6857280"/>
+            <a:ext cx="12191040" cy="6856920"/>
           </a:xfrm>
           <a:prstGeom prst="roundRect">
             <a:avLst>
@@ -21315,7 +21293,7 @@
         <p:spPr>
           <a:xfrm>
             <a:off x="0" y="0"/>
-            <a:ext cx="12191400" cy="6857280"/>
+            <a:ext cx="12191040" cy="6856920"/>
           </a:xfrm>
           <a:custGeom>
             <a:avLst/>
@@ -21378,7 +21356,7 @@
         <p:spPr>
           <a:xfrm>
             <a:off x="380880" y="1714680"/>
-            <a:ext cx="1856520" cy="608760"/>
+            <a:ext cx="1856160" cy="608400"/>
           </a:xfrm>
           <a:custGeom>
             <a:avLst/>
@@ -21429,7 +21407,7 @@
         <p:spPr>
           <a:xfrm>
             <a:off x="609480" y="1847880"/>
-            <a:ext cx="1567800" cy="342360"/>
+            <a:ext cx="1567440" cy="342000"/>
           </a:xfrm>
           <a:prstGeom prst="rect">
             <a:avLst/>
@@ -21481,7 +21459,7 @@
         <p:spPr>
           <a:xfrm>
             <a:off x="380880" y="2552760"/>
-            <a:ext cx="11772360" cy="1713960"/>
+            <a:ext cx="11772000" cy="1713600"/>
           </a:xfrm>
           <a:prstGeom prst="rect">
             <a:avLst/>
@@ -21554,7 +21532,7 @@
         <p:spPr>
           <a:xfrm>
             <a:off x="380880" y="4495680"/>
-            <a:ext cx="1523160" cy="75600"/>
+            <a:ext cx="1522800" cy="75240"/>
           </a:xfrm>
           <a:custGeom>
             <a:avLst/>
@@ -21605,7 +21583,7 @@
         <p:spPr>
           <a:xfrm>
             <a:off x="380880" y="4800600"/>
-            <a:ext cx="7457400" cy="342360"/>
+            <a:ext cx="7457040" cy="342000"/>
           </a:xfrm>
           <a:prstGeom prst="rect">
             <a:avLst/>
@@ -21657,7 +21635,7 @@
         <p:spPr>
           <a:xfrm>
             <a:off x="10591920" y="5867280"/>
-            <a:ext cx="151560" cy="151560"/>
+            <a:ext cx="151200" cy="151200"/>
           </a:xfrm>
           <a:custGeom>
             <a:avLst/>
@@ -21708,7 +21686,7 @@
         <p:spPr>
           <a:xfrm>
             <a:off x="10896480" y="5867280"/>
-            <a:ext cx="151560" cy="151560"/>
+            <a:ext cx="151200" cy="151200"/>
           </a:xfrm>
           <a:custGeom>
             <a:avLst/>
@@ -21759,7 +21737,7 @@
         <p:spPr>
           <a:xfrm>
             <a:off x="11201400" y="5867280"/>
-            <a:ext cx="151560" cy="151560"/>
+            <a:ext cx="151200" cy="151200"/>
           </a:xfrm>
           <a:custGeom>
             <a:avLst/>
@@ -21842,7 +21820,7 @@
         <p:spPr>
           <a:xfrm>
             <a:off x="0" y="0"/>
-            <a:ext cx="12191400" cy="6856200"/>
+            <a:ext cx="12191040" cy="6855840"/>
           </a:xfrm>
           <a:custGeom>
             <a:avLst/>
@@ -21905,7 +21883,7 @@
         <p:spPr>
           <a:xfrm>
             <a:off x="327240" y="327240"/>
-            <a:ext cx="11733120" cy="392040"/>
+            <a:ext cx="11732760" cy="391680"/>
           </a:xfrm>
           <a:prstGeom prst="rect">
             <a:avLst/>
@@ -21957,7 +21935,7 @@
         <p:spPr>
           <a:xfrm>
             <a:off x="327240" y="818280"/>
-            <a:ext cx="11634840" cy="261000"/>
+            <a:ext cx="11634480" cy="260640"/>
           </a:xfrm>
           <a:prstGeom prst="rect">
             <a:avLst/>
@@ -22009,7 +21987,7 @@
         <p:spPr>
           <a:xfrm>
             <a:off x="327240" y="1178280"/>
-            <a:ext cx="784800" cy="32040"/>
+            <a:ext cx="784440" cy="31680"/>
           </a:xfrm>
           <a:custGeom>
             <a:avLst/>
@@ -22060,7 +22038,7 @@
         <p:spPr>
           <a:xfrm>
             <a:off x="339480" y="1354320"/>
-            <a:ext cx="5645160" cy="3493080"/>
+            <a:ext cx="5644800" cy="3492720"/>
           </a:xfrm>
           <a:custGeom>
             <a:avLst/>
@@ -22116,7 +22094,7 @@
         <p:spPr>
           <a:xfrm>
             <a:off x="453960" y="1530000"/>
-            <a:ext cx="5416200" cy="293760"/>
+            <a:ext cx="5415840" cy="293400"/>
           </a:xfrm>
           <a:prstGeom prst="rect">
             <a:avLst/>
@@ -22168,7 +22146,7 @@
         <p:spPr>
           <a:xfrm>
             <a:off x="515520" y="1955520"/>
-            <a:ext cx="5293440" cy="621000"/>
+            <a:ext cx="5293080" cy="620640"/>
           </a:xfrm>
           <a:custGeom>
             <a:avLst/>
@@ -22221,7 +22199,7 @@
         <p:spPr>
           <a:xfrm>
             <a:off x="634320" y="2086560"/>
-            <a:ext cx="163080" cy="163080"/>
+            <a:ext cx="162720" cy="162720"/>
           </a:xfrm>
           <a:custGeom>
             <a:avLst/>
@@ -22363,7 +22341,7 @@
         <p:spPr>
           <a:xfrm>
             <a:off x="916560" y="2053800"/>
-            <a:ext cx="2404800" cy="228240"/>
+            <a:ext cx="2404440" cy="227880"/>
           </a:xfrm>
           <a:prstGeom prst="rect">
             <a:avLst/>
@@ -22415,7 +22393,7 @@
         <p:spPr>
           <a:xfrm>
             <a:off x="916560" y="2282760"/>
-            <a:ext cx="2396880" cy="195840"/>
+            <a:ext cx="2396520" cy="195480"/>
           </a:xfrm>
           <a:prstGeom prst="rect">
             <a:avLst/>
@@ -22469,7 +22447,7 @@
         <p:spPr>
           <a:xfrm>
             <a:off x="515520" y="2675520"/>
-            <a:ext cx="5293440" cy="621000"/>
+            <a:ext cx="5293080" cy="620640"/>
           </a:xfrm>
           <a:custGeom>
             <a:avLst/>
@@ -22522,7 +22500,7 @@
         <p:spPr>
           <a:xfrm>
             <a:off x="634320" y="2806560"/>
-            <a:ext cx="163080" cy="163080"/>
+            <a:ext cx="162720" cy="162720"/>
           </a:xfrm>
           <a:custGeom>
             <a:avLst/>
@@ -22649,7 +22627,7 @@
         <p:spPr>
           <a:xfrm>
             <a:off x="916560" y="2773800"/>
-            <a:ext cx="2044800" cy="228240"/>
+            <a:ext cx="2044440" cy="227880"/>
           </a:xfrm>
           <a:prstGeom prst="rect">
             <a:avLst/>
@@ -22701,7 +22679,7 @@
         <p:spPr>
           <a:xfrm>
             <a:off x="916560" y="3003120"/>
-            <a:ext cx="2036880" cy="195840"/>
+            <a:ext cx="2036520" cy="195480"/>
           </a:xfrm>
           <a:prstGeom prst="rect">
             <a:avLst/>
@@ -22755,7 +22733,7 @@
         <p:spPr>
           <a:xfrm>
             <a:off x="515520" y="3395880"/>
-            <a:ext cx="5293440" cy="621000"/>
+            <a:ext cx="5293080" cy="620640"/>
           </a:xfrm>
           <a:custGeom>
             <a:avLst/>
@@ -22808,7 +22786,7 @@
         <p:spPr>
           <a:xfrm>
             <a:off x="634320" y="3526560"/>
-            <a:ext cx="163080" cy="163080"/>
+            <a:ext cx="162720" cy="162720"/>
           </a:xfrm>
           <a:custGeom>
             <a:avLst/>
@@ -22953,7 +22931,7 @@
         <p:spPr>
           <a:xfrm>
             <a:off x="916560" y="3493800"/>
-            <a:ext cx="1963080" cy="228240"/>
+            <a:ext cx="1962720" cy="227880"/>
           </a:xfrm>
           <a:prstGeom prst="rect">
             <a:avLst/>
@@ -23005,7 +22983,7 @@
         <p:spPr>
           <a:xfrm>
             <a:off x="916560" y="3723120"/>
-            <a:ext cx="1954800" cy="195840"/>
+            <a:ext cx="1954440" cy="195480"/>
           </a:xfrm>
           <a:prstGeom prst="rect">
             <a:avLst/>
@@ -23059,7 +23037,7 @@
         <p:spPr>
           <a:xfrm>
             <a:off x="6205680" y="1354320"/>
-            <a:ext cx="5645160" cy="3493080"/>
+            <a:ext cx="5644800" cy="3492720"/>
           </a:xfrm>
           <a:custGeom>
             <a:avLst/>
@@ -23115,7 +23093,7 @@
         <p:spPr>
           <a:xfrm>
             <a:off x="6320160" y="1530000"/>
-            <a:ext cx="5416200" cy="293760"/>
+            <a:ext cx="5415840" cy="293400"/>
           </a:xfrm>
           <a:prstGeom prst="rect">
             <a:avLst/>
@@ -23167,7 +23145,7 @@
         <p:spPr>
           <a:xfrm>
             <a:off x="6381360" y="1955520"/>
-            <a:ext cx="5293440" cy="1144800"/>
+            <a:ext cx="5293080" cy="1144440"/>
           </a:xfrm>
           <a:custGeom>
             <a:avLst/>
@@ -23220,7 +23198,7 @@
         <p:spPr>
           <a:xfrm>
             <a:off x="6414120" y="2086560"/>
-            <a:ext cx="5227920" cy="392040"/>
+            <a:ext cx="5227560" cy="391680"/>
           </a:xfrm>
           <a:prstGeom prst="rect">
             <a:avLst/>
@@ -23272,7 +23250,7 @@
         <p:spPr>
           <a:xfrm>
             <a:off x="6475680" y="2544840"/>
-            <a:ext cx="5105160" cy="228240"/>
+            <a:ext cx="5104800" cy="227880"/>
           </a:xfrm>
           <a:prstGeom prst="rect">
             <a:avLst/>
@@ -23324,7 +23302,7 @@
         <p:spPr>
           <a:xfrm>
             <a:off x="6479640" y="2773800"/>
-            <a:ext cx="5096880" cy="195840"/>
+            <a:ext cx="5096520" cy="195480"/>
           </a:xfrm>
           <a:prstGeom prst="rect">
             <a:avLst/>
@@ -23378,7 +23356,7 @@
         <p:spPr>
           <a:xfrm>
             <a:off x="6381360" y="3232080"/>
-            <a:ext cx="5293440" cy="653760"/>
+            <a:ext cx="5293080" cy="653400"/>
           </a:xfrm>
           <a:custGeom>
             <a:avLst/>
@@ -23431,7 +23409,7 @@
         <p:spPr>
           <a:xfrm>
             <a:off x="6479640" y="3330360"/>
-            <a:ext cx="5170680" cy="228240"/>
+            <a:ext cx="5170320" cy="227880"/>
           </a:xfrm>
           <a:prstGeom prst="rect">
             <a:avLst/>
@@ -23483,7 +23461,7 @@
         <p:spPr>
           <a:xfrm>
             <a:off x="6479640" y="3592080"/>
-            <a:ext cx="5162400" cy="195840"/>
+            <a:ext cx="5162040" cy="195480"/>
           </a:xfrm>
           <a:prstGeom prst="rect">
             <a:avLst/>
@@ -23549,7 +23527,7 @@
         <p:spPr>
           <a:xfrm>
             <a:off x="6381360" y="4017600"/>
-            <a:ext cx="5293440" cy="653760"/>
+            <a:ext cx="5293080" cy="653400"/>
           </a:xfrm>
           <a:custGeom>
             <a:avLst/>
@@ -23602,7 +23580,7 @@
         <p:spPr>
           <a:xfrm>
             <a:off x="6479640" y="4115880"/>
-            <a:ext cx="5170680" cy="228240"/>
+            <a:ext cx="5170320" cy="227880"/>
           </a:xfrm>
           <a:prstGeom prst="rect">
             <a:avLst/>
@@ -23654,7 +23632,7 @@
         <p:spPr>
           <a:xfrm>
             <a:off x="6479640" y="4377600"/>
-            <a:ext cx="5162400" cy="195840"/>
+            <a:ext cx="5162040" cy="195480"/>
           </a:xfrm>
           <a:prstGeom prst="rect">
             <a:avLst/>
@@ -23720,7 +23698,7 @@
         <p:spPr>
           <a:xfrm>
             <a:off x="339480" y="5003640"/>
-            <a:ext cx="3730680" cy="1169280"/>
+            <a:ext cx="3730320" cy="1168920"/>
           </a:xfrm>
           <a:custGeom>
             <a:avLst/>
@@ -23776,7 +23754,7 @@
         <p:spPr>
           <a:xfrm>
             <a:off x="2095920" y="5146920"/>
-            <a:ext cx="220320" cy="293760"/>
+            <a:ext cx="219960" cy="293400"/>
           </a:xfrm>
           <a:custGeom>
             <a:avLst/>
@@ -24017,7 +23995,7 @@
         <p:spPr>
           <a:xfrm>
             <a:off x="441720" y="5539680"/>
-            <a:ext cx="3525840" cy="228240"/>
+            <a:ext cx="3525480" cy="227880"/>
           </a:xfrm>
           <a:prstGeom prst="rect">
             <a:avLst/>
@@ -24069,7 +24047,7 @@
         <p:spPr>
           <a:xfrm>
             <a:off x="450000" y="5834160"/>
-            <a:ext cx="3509640" cy="195840"/>
+            <a:ext cx="3509280" cy="195480"/>
           </a:xfrm>
           <a:prstGeom prst="rect">
             <a:avLst/>
@@ -24121,7 +24099,7 @@
         <p:spPr>
           <a:xfrm>
             <a:off x="4228560" y="5003640"/>
-            <a:ext cx="3730680" cy="1169280"/>
+            <a:ext cx="3730320" cy="1168920"/>
           </a:xfrm>
           <a:custGeom>
             <a:avLst/>
@@ -24177,7 +24155,7 @@
         <p:spPr>
           <a:xfrm>
             <a:off x="5929200" y="5146920"/>
-            <a:ext cx="330840" cy="293760"/>
+            <a:ext cx="330480" cy="293400"/>
           </a:xfrm>
           <a:custGeom>
             <a:avLst/>
@@ -24280,7 +24258,7 @@
         <p:spPr>
           <a:xfrm>
             <a:off x="4330800" y="5539680"/>
-            <a:ext cx="3525840" cy="228240"/>
+            <a:ext cx="3525480" cy="227880"/>
           </a:xfrm>
           <a:prstGeom prst="rect">
             <a:avLst/>
@@ -24332,7 +24310,7 @@
         <p:spPr>
           <a:xfrm>
             <a:off x="4338720" y="5834160"/>
-            <a:ext cx="3509640" cy="195840"/>
+            <a:ext cx="3509280" cy="195480"/>
           </a:xfrm>
           <a:prstGeom prst="rect">
             <a:avLst/>
@@ -24384,7 +24362,7 @@
         <p:spPr>
           <a:xfrm>
             <a:off x="8117280" y="5003640"/>
-            <a:ext cx="3730680" cy="1169280"/>
+            <a:ext cx="3730320" cy="1168920"/>
           </a:xfrm>
           <a:custGeom>
             <a:avLst/>
@@ -24440,7 +24418,7 @@
         <p:spPr>
           <a:xfrm>
             <a:off x="9818280" y="5146920"/>
-            <a:ext cx="330840" cy="293760"/>
+            <a:ext cx="330480" cy="293400"/>
           </a:xfrm>
           <a:custGeom>
             <a:avLst/>
@@ -24630,7 +24608,7 @@
         <p:spPr>
           <a:xfrm>
             <a:off x="8219520" y="5539680"/>
-            <a:ext cx="3525840" cy="228240"/>
+            <a:ext cx="3525480" cy="227880"/>
           </a:xfrm>
           <a:prstGeom prst="rect">
             <a:avLst/>
@@ -24682,7 +24660,7 @@
         <p:spPr>
           <a:xfrm>
             <a:off x="8227800" y="5834160"/>
-            <a:ext cx="3509640" cy="195840"/>
+            <a:ext cx="3509280" cy="195480"/>
           </a:xfrm>
           <a:prstGeom prst="rect">
             <a:avLst/>
@@ -24734,7 +24712,7 @@
         <p:spPr>
           <a:xfrm>
             <a:off x="339480" y="6329160"/>
-            <a:ext cx="11512080" cy="514800"/>
+            <a:ext cx="11511720" cy="514440"/>
           </a:xfrm>
           <a:custGeom>
             <a:avLst/>
@@ -24790,7 +24768,7 @@
         <p:spPr>
           <a:xfrm>
             <a:off x="441720" y="6472440"/>
-            <a:ext cx="11307600" cy="228240"/>
+            <a:ext cx="11307240" cy="227880"/>
           </a:xfrm>
           <a:prstGeom prst="rect">
             <a:avLst/>
@@ -24894,7 +24872,7 @@
         <p:spPr>
           <a:xfrm>
             <a:off x="0" y="0"/>
-            <a:ext cx="12191400" cy="6859440"/>
+            <a:ext cx="12191040" cy="6859080"/>
           </a:xfrm>
           <a:custGeom>
             <a:avLst/>
@@ -24957,7 +24935,7 @@
         <p:spPr>
           <a:xfrm>
             <a:off x="372960" y="372960"/>
-            <a:ext cx="11669400" cy="446760"/>
+            <a:ext cx="11669040" cy="446400"/>
           </a:xfrm>
           <a:prstGeom prst="rect">
             <a:avLst/>
@@ -25009,7 +24987,7 @@
         <p:spPr>
           <a:xfrm>
             <a:off x="372960" y="932040"/>
-            <a:ext cx="11557440" cy="297720"/>
+            <a:ext cx="11557080" cy="297360"/>
           </a:xfrm>
           <a:prstGeom prst="rect">
             <a:avLst/>
@@ -25061,7 +25039,7 @@
         <p:spPr>
           <a:xfrm>
             <a:off x="372960" y="1342080"/>
-            <a:ext cx="894240" cy="36720"/>
+            <a:ext cx="893880" cy="36360"/>
           </a:xfrm>
           <a:custGeom>
             <a:avLst/>
@@ -25112,7 +25090,7 @@
         <p:spPr>
           <a:xfrm>
             <a:off x="387000" y="1542600"/>
-            <a:ext cx="5582520" cy="2012760"/>
+            <a:ext cx="5582160" cy="2012400"/>
           </a:xfrm>
           <a:custGeom>
             <a:avLst/>
@@ -25168,7 +25146,7 @@
         <p:spPr>
           <a:xfrm>
             <a:off x="587160" y="1743120"/>
-            <a:ext cx="5293800" cy="297720"/>
+            <a:ext cx="5293440" cy="297360"/>
           </a:xfrm>
           <a:prstGeom prst="rect">
             <a:avLst/>
@@ -25220,7 +25198,7 @@
         <p:spPr>
           <a:xfrm>
             <a:off x="587160" y="2153160"/>
-            <a:ext cx="5265720" cy="549360"/>
+            <a:ext cx="5265360" cy="549000"/>
           </a:xfrm>
           <a:prstGeom prst="rect">
             <a:avLst/>
@@ -25312,7 +25290,7 @@
         <p:spPr>
           <a:xfrm>
             <a:off x="587160" y="2810160"/>
-            <a:ext cx="5265720" cy="549360"/>
+            <a:ext cx="5265360" cy="549000"/>
           </a:xfrm>
           <a:prstGeom prst="rect">
             <a:avLst/>
@@ -25384,7 +25362,7 @@
         <p:spPr>
           <a:xfrm>
             <a:off x="387000" y="3733200"/>
-            <a:ext cx="5582520" cy="1928880"/>
+            <a:ext cx="5582160" cy="1928520"/>
           </a:xfrm>
           <a:custGeom>
             <a:avLst/>
@@ -25440,7 +25418,7 @@
         <p:spPr>
           <a:xfrm>
             <a:off x="587160" y="3933360"/>
-            <a:ext cx="5293800" cy="297720"/>
+            <a:ext cx="5293440" cy="297360"/>
           </a:xfrm>
           <a:prstGeom prst="rect">
             <a:avLst/>
@@ -25492,7 +25470,7 @@
         <p:spPr>
           <a:xfrm>
             <a:off x="610560" y="4380840"/>
-            <a:ext cx="167040" cy="167040"/>
+            <a:ext cx="166680" cy="166680"/>
           </a:xfrm>
           <a:custGeom>
             <a:avLst/>
@@ -25597,7 +25575,7 @@
         <p:spPr>
           <a:xfrm>
             <a:off x="908640" y="4343760"/>
-            <a:ext cx="3149640" cy="222840"/>
+            <a:ext cx="3149280" cy="222480"/>
           </a:xfrm>
           <a:prstGeom prst="rect">
             <a:avLst/>
@@ -25659,7 +25637,7 @@
         <p:spPr>
           <a:xfrm>
             <a:off x="610560" y="4679280"/>
-            <a:ext cx="167040" cy="167040"/>
+            <a:ext cx="166680" cy="166680"/>
           </a:xfrm>
           <a:custGeom>
             <a:avLst/>
@@ -25764,7 +25742,7 @@
         <p:spPr>
           <a:xfrm>
             <a:off x="908640" y="4641840"/>
-            <a:ext cx="2777040" cy="222840"/>
+            <a:ext cx="2776680" cy="222480"/>
           </a:xfrm>
           <a:prstGeom prst="rect">
             <a:avLst/>
@@ -25826,7 +25804,7 @@
         <p:spPr>
           <a:xfrm>
             <a:off x="610560" y="4977360"/>
-            <a:ext cx="167040" cy="167040"/>
+            <a:ext cx="166680" cy="166680"/>
           </a:xfrm>
           <a:custGeom>
             <a:avLst/>
@@ -25931,7 +25909,7 @@
         <p:spPr>
           <a:xfrm>
             <a:off x="908640" y="4940280"/>
-            <a:ext cx="3187080" cy="222840"/>
+            <a:ext cx="3186720" cy="222480"/>
           </a:xfrm>
           <a:prstGeom prst="rect">
             <a:avLst/>
@@ -25993,7 +25971,7 @@
         <p:spPr>
           <a:xfrm>
             <a:off x="610560" y="5275800"/>
-            <a:ext cx="167040" cy="167040"/>
+            <a:ext cx="166680" cy="166680"/>
           </a:xfrm>
           <a:custGeom>
             <a:avLst/>
@@ -26098,7 +26076,7 @@
         <p:spPr>
           <a:xfrm>
             <a:off x="908640" y="5238360"/>
-            <a:ext cx="2981880" cy="222840"/>
+            <a:ext cx="2981520" cy="222480"/>
           </a:xfrm>
           <a:prstGeom prst="rect">
             <a:avLst/>
@@ -26160,7 +26138,7 @@
         <p:spPr>
           <a:xfrm>
             <a:off x="6224040" y="1542600"/>
-            <a:ext cx="5582520" cy="3942000"/>
+            <a:ext cx="5582160" cy="3941640"/>
           </a:xfrm>
           <a:custGeom>
             <a:avLst/>
@@ -26216,7 +26194,7 @@
         <p:spPr>
           <a:xfrm>
             <a:off x="6368400" y="1743120"/>
-            <a:ext cx="5293800" cy="297720"/>
+            <a:ext cx="5293440" cy="297360"/>
           </a:xfrm>
           <a:prstGeom prst="rect">
             <a:avLst/>
@@ -26268,7 +26246,7 @@
         <p:spPr>
           <a:xfrm>
             <a:off x="6424200" y="2190600"/>
-            <a:ext cx="5181840" cy="1080360"/>
+            <a:ext cx="5181480" cy="1080000"/>
           </a:xfrm>
           <a:custGeom>
             <a:avLst/>
@@ -26321,7 +26299,7 @@
         <p:spPr>
           <a:xfrm>
             <a:off x="6461640" y="2339640"/>
-            <a:ext cx="5107320" cy="446760"/>
+            <a:ext cx="5106960" cy="446400"/>
           </a:xfrm>
           <a:prstGeom prst="rect">
             <a:avLst/>
@@ -26373,7 +26351,7 @@
         <p:spPr>
           <a:xfrm>
             <a:off x="6531480" y="2861640"/>
-            <a:ext cx="4967280" cy="260280"/>
+            <a:ext cx="4966920" cy="259920"/>
           </a:xfrm>
           <a:prstGeom prst="rect">
             <a:avLst/>
@@ -26425,7 +26403,7 @@
         <p:spPr>
           <a:xfrm>
             <a:off x="6424200" y="3420720"/>
-            <a:ext cx="5181840" cy="856800"/>
+            <a:ext cx="5181480" cy="856440"/>
           </a:xfrm>
           <a:custGeom>
             <a:avLst/>
@@ -26478,7 +26456,7 @@
         <p:spPr>
           <a:xfrm>
             <a:off x="6573240" y="3570120"/>
-            <a:ext cx="4967280" cy="260280"/>
+            <a:ext cx="4966920" cy="259920"/>
           </a:xfrm>
           <a:prstGeom prst="rect">
             <a:avLst/>
@@ -26530,7 +26508,7 @@
         <p:spPr>
           <a:xfrm>
             <a:off x="6573240" y="3905640"/>
-            <a:ext cx="4958280" cy="222840"/>
+            <a:ext cx="4957920" cy="222480"/>
           </a:xfrm>
           <a:prstGeom prst="rect">
             <a:avLst/>
@@ -26584,7 +26562,7 @@
         <p:spPr>
           <a:xfrm>
             <a:off x="6424200" y="4427640"/>
-            <a:ext cx="5181840" cy="856800"/>
+            <a:ext cx="5181480" cy="856440"/>
           </a:xfrm>
           <a:custGeom>
             <a:avLst/>
@@ -26637,7 +26615,7 @@
         <p:spPr>
           <a:xfrm>
             <a:off x="6573240" y="4576680"/>
-            <a:ext cx="4967280" cy="260280"/>
+            <a:ext cx="4966920" cy="259920"/>
           </a:xfrm>
           <a:prstGeom prst="rect">
             <a:avLst/>
@@ -26689,7 +26667,7 @@
         <p:spPr>
           <a:xfrm>
             <a:off x="6573240" y="4912200"/>
-            <a:ext cx="4958280" cy="222840"/>
+            <a:ext cx="4957920" cy="222480"/>
           </a:xfrm>
           <a:prstGeom prst="rect">
             <a:avLst/>
@@ -26743,7 +26721,7 @@
         <p:spPr>
           <a:xfrm>
             <a:off x="6224040" y="5662440"/>
-            <a:ext cx="5582520" cy="1182960"/>
+            <a:ext cx="5582160" cy="1182600"/>
           </a:xfrm>
           <a:custGeom>
             <a:avLst/>
@@ -26799,7 +26777,7 @@
         <p:spPr>
           <a:xfrm>
             <a:off x="6340320" y="5825520"/>
-            <a:ext cx="5349600" cy="260280"/>
+            <a:ext cx="5349240" cy="259920"/>
           </a:xfrm>
           <a:prstGeom prst="rect">
             <a:avLst/>
@@ -26851,7 +26829,7 @@
         <p:spPr>
           <a:xfrm>
             <a:off x="6349680" y="6198480"/>
-            <a:ext cx="5330880" cy="483840"/>
+            <a:ext cx="5330520" cy="483480"/>
           </a:xfrm>
           <a:prstGeom prst="rect">
             <a:avLst/>
@@ -26975,7 +26953,7 @@
         <p:spPr>
           <a:xfrm>
             <a:off x="0" y="0"/>
-            <a:ext cx="12191400" cy="6857280"/>
+            <a:ext cx="12191040" cy="6856920"/>
           </a:xfrm>
           <a:custGeom>
             <a:avLst/>
@@ -27038,7 +27016,7 @@
         <p:spPr>
           <a:xfrm>
             <a:off x="380880" y="380880"/>
-            <a:ext cx="11715120" cy="570960"/>
+            <a:ext cx="11714760" cy="570600"/>
           </a:xfrm>
           <a:prstGeom prst="rect">
             <a:avLst/>
@@ -27090,7 +27068,7 @@
         <p:spPr>
           <a:xfrm>
             <a:off x="380880" y="1104840"/>
-            <a:ext cx="913680" cy="75600"/>
+            <a:ext cx="913320" cy="75240"/>
           </a:xfrm>
           <a:custGeom>
             <a:avLst/>
@@ -27141,7 +27119,7 @@
         <p:spPr>
           <a:xfrm>
             <a:off x="399960" y="1504800"/>
-            <a:ext cx="5447520" cy="1342440"/>
+            <a:ext cx="5447160" cy="1342080"/>
           </a:xfrm>
           <a:custGeom>
             <a:avLst/>
@@ -27197,7 +27175,7 @@
         <p:spPr>
           <a:xfrm>
             <a:off x="647640" y="1752480"/>
-            <a:ext cx="666000" cy="570960"/>
+            <a:ext cx="665640" cy="570600"/>
           </a:xfrm>
           <a:prstGeom prst="rect">
             <a:avLst/>
@@ -27249,7 +27227,7 @@
         <p:spPr>
           <a:xfrm>
             <a:off x="1257480" y="1752480"/>
-            <a:ext cx="4485600" cy="342360"/>
+            <a:ext cx="4485240" cy="342000"/>
           </a:xfrm>
           <a:prstGeom prst="rect">
             <a:avLst/>
@@ -27301,7 +27279,7 @@
         <p:spPr>
           <a:xfrm>
             <a:off x="1257480" y="2171880"/>
-            <a:ext cx="4438080" cy="266040"/>
+            <a:ext cx="4437720" cy="265680"/>
           </a:xfrm>
           <a:prstGeom prst="rect">
             <a:avLst/>
@@ -27355,7 +27333,7 @@
         <p:spPr>
           <a:xfrm>
             <a:off x="6343560" y="1504800"/>
-            <a:ext cx="5447520" cy="1342440"/>
+            <a:ext cx="5447160" cy="1342080"/>
           </a:xfrm>
           <a:custGeom>
             <a:avLst/>
@@ -27411,7 +27389,7 @@
         <p:spPr>
           <a:xfrm>
             <a:off x="6591240" y="1752480"/>
-            <a:ext cx="770760" cy="570960"/>
+            <a:ext cx="770400" cy="570600"/>
           </a:xfrm>
           <a:prstGeom prst="rect">
             <a:avLst/>
@@ -27463,7 +27441,7 @@
         <p:spPr>
           <a:xfrm>
             <a:off x="7306920" y="1752480"/>
-            <a:ext cx="4380840" cy="342360"/>
+            <a:ext cx="4380480" cy="342000"/>
           </a:xfrm>
           <a:prstGeom prst="rect">
             <a:avLst/>
@@ -27515,7 +27493,7 @@
         <p:spPr>
           <a:xfrm>
             <a:off x="7306920" y="2171880"/>
-            <a:ext cx="4333320" cy="266040"/>
+            <a:ext cx="4332960" cy="265680"/>
           </a:xfrm>
           <a:prstGeom prst="rect">
             <a:avLst/>
@@ -27569,7 +27547,7 @@
         <p:spPr>
           <a:xfrm>
             <a:off x="399960" y="3117960"/>
-            <a:ext cx="5447520" cy="1342440"/>
+            <a:ext cx="5447160" cy="1342080"/>
           </a:xfrm>
           <a:custGeom>
             <a:avLst/>
@@ -27625,7 +27603,7 @@
         <p:spPr>
           <a:xfrm>
             <a:off x="647640" y="3365280"/>
-            <a:ext cx="770760" cy="570960"/>
+            <a:ext cx="770400" cy="570600"/>
           </a:xfrm>
           <a:prstGeom prst="rect">
             <a:avLst/>
@@ -27677,7 +27655,7 @@
         <p:spPr>
           <a:xfrm>
             <a:off x="1363320" y="3365280"/>
-            <a:ext cx="4380840" cy="342360"/>
+            <a:ext cx="4380480" cy="342000"/>
           </a:xfrm>
           <a:prstGeom prst="rect">
             <a:avLst/>
@@ -27729,7 +27707,7 @@
         <p:spPr>
           <a:xfrm>
             <a:off x="1363320" y="3784680"/>
-            <a:ext cx="4333320" cy="266040"/>
+            <a:ext cx="4332960" cy="265680"/>
           </a:xfrm>
           <a:prstGeom prst="rect">
             <a:avLst/>
@@ -27783,7 +27761,7 @@
         <p:spPr>
           <a:xfrm>
             <a:off x="6343560" y="3117960"/>
-            <a:ext cx="5447520" cy="1342440"/>
+            <a:ext cx="5447160" cy="1342080"/>
           </a:xfrm>
           <a:custGeom>
             <a:avLst/>
@@ -27839,7 +27817,7 @@
         <p:spPr>
           <a:xfrm>
             <a:off x="6591240" y="3365280"/>
-            <a:ext cx="751680" cy="570960"/>
+            <a:ext cx="751320" cy="570600"/>
           </a:xfrm>
           <a:prstGeom prst="rect">
             <a:avLst/>
@@ -27891,7 +27869,7 @@
         <p:spPr>
           <a:xfrm>
             <a:off x="7285680" y="3365280"/>
-            <a:ext cx="4399920" cy="342360"/>
+            <a:ext cx="4399560" cy="342000"/>
           </a:xfrm>
           <a:prstGeom prst="rect">
             <a:avLst/>
@@ -27943,7 +27921,7 @@
         <p:spPr>
           <a:xfrm>
             <a:off x="7285680" y="3784680"/>
-            <a:ext cx="4352040" cy="266040"/>
+            <a:ext cx="4351680" cy="265680"/>
           </a:xfrm>
           <a:prstGeom prst="rect">
             <a:avLst/>
@@ -27997,7 +27975,7 @@
         <p:spPr>
           <a:xfrm>
             <a:off x="399960" y="4730760"/>
-            <a:ext cx="11391120" cy="1342440"/>
+            <a:ext cx="11390760" cy="1342080"/>
           </a:xfrm>
           <a:custGeom>
             <a:avLst/>
@@ -28053,7 +28031,7 @@
         <p:spPr>
           <a:xfrm>
             <a:off x="647640" y="4978440"/>
-            <a:ext cx="751680" cy="570960"/>
+            <a:ext cx="751320" cy="570600"/>
           </a:xfrm>
           <a:prstGeom prst="rect">
             <a:avLst/>
@@ -28105,7 +28083,7 @@
         <p:spPr>
           <a:xfrm>
             <a:off x="1342080" y="4978440"/>
-            <a:ext cx="10343520" cy="342360"/>
+            <a:ext cx="10343160" cy="342000"/>
           </a:xfrm>
           <a:prstGeom prst="rect">
             <a:avLst/>
@@ -28157,7 +28135,7 @@
         <p:spPr>
           <a:xfrm>
             <a:off x="1342080" y="5397480"/>
-            <a:ext cx="10295640" cy="266040"/>
+            <a:ext cx="10295280" cy="265680"/>
           </a:xfrm>
           <a:prstGeom prst="rect">
             <a:avLst/>
@@ -28211,7 +28189,7 @@
         <p:spPr>
           <a:xfrm>
             <a:off x="5715000" y="6324480"/>
-            <a:ext cx="151560" cy="151560"/>
+            <a:ext cx="151200" cy="151200"/>
           </a:xfrm>
           <a:custGeom>
             <a:avLst/>
@@ -28262,7 +28240,7 @@
         <p:spPr>
           <a:xfrm>
             <a:off x="6019920" y="6324480"/>
-            <a:ext cx="151560" cy="151560"/>
+            <a:ext cx="151200" cy="151200"/>
           </a:xfrm>
           <a:custGeom>
             <a:avLst/>
@@ -28313,7 +28291,7 @@
         <p:spPr>
           <a:xfrm>
             <a:off x="6324480" y="6324480"/>
-            <a:ext cx="151560" cy="151560"/>
+            <a:ext cx="151200" cy="151200"/>
           </a:xfrm>
           <a:custGeom>
             <a:avLst/>
@@ -28396,7 +28374,7 @@
         <p:spPr>
           <a:xfrm>
             <a:off x="0" y="0"/>
-            <a:ext cx="12191400" cy="6855480"/>
+            <a:ext cx="12191040" cy="6855120"/>
           </a:xfrm>
           <a:prstGeom prst="roundRect">
             <a:avLst>
@@ -28428,7 +28406,7 @@
         <p:spPr>
           <a:xfrm>
             <a:off x="0" y="0"/>
-            <a:ext cx="12191400" cy="6855480"/>
+            <a:ext cx="12191040" cy="6855120"/>
           </a:xfrm>
           <a:custGeom>
             <a:avLst/>
@@ -28491,7 +28469,7 @@
         <p:spPr>
           <a:xfrm>
             <a:off x="5608440" y="-186840"/>
-            <a:ext cx="970920" cy="647280"/>
+            <a:ext cx="970560" cy="646920"/>
           </a:xfrm>
           <a:prstGeom prst="rect">
             <a:avLst/>
@@ -28543,7 +28521,7 @@
         <p:spPr>
           <a:xfrm>
             <a:off x="4541400" y="821160"/>
-            <a:ext cx="3103560" cy="1618920"/>
+            <a:ext cx="3103200" cy="1618560"/>
           </a:xfrm>
           <a:prstGeom prst="rect">
             <a:avLst/>
@@ -28616,7 +28594,7 @@
         <p:spPr>
           <a:xfrm>
             <a:off x="5374800" y="2656440"/>
-            <a:ext cx="1438920" cy="360"/>
+            <a:ext cx="1438560" cy="360"/>
           </a:xfrm>
           <a:custGeom>
             <a:avLst/>
@@ -28667,7 +28645,7 @@
         <p:spPr>
           <a:xfrm>
             <a:off x="2201400" y="2944440"/>
-            <a:ext cx="7782480" cy="350280"/>
+            <a:ext cx="7782120" cy="349920"/>
           </a:xfrm>
           <a:prstGeom prst="rect">
             <a:avLst/>
@@ -28719,7 +28697,7 @@
         <p:spPr>
           <a:xfrm>
             <a:off x="2268720" y="3524760"/>
-            <a:ext cx="3742200" cy="943920"/>
+            <a:ext cx="3741840" cy="943560"/>
           </a:xfrm>
           <a:custGeom>
             <a:avLst/>
@@ -28775,7 +28753,7 @@
         <p:spPr>
           <a:xfrm>
             <a:off x="4006080" y="3682440"/>
-            <a:ext cx="269280" cy="269280"/>
+            <a:ext cx="268920" cy="268920"/>
           </a:xfrm>
           <a:custGeom>
             <a:avLst/>
@@ -28952,7 +28930,7 @@
         <p:spPr>
           <a:xfrm>
             <a:off x="2385720" y="4060080"/>
-            <a:ext cx="3508560" cy="251280"/>
+            <a:ext cx="3508200" cy="250920"/>
           </a:xfrm>
           <a:prstGeom prst="rect">
             <a:avLst/>
@@ -29004,7 +28982,7 @@
         <p:spPr>
           <a:xfrm>
             <a:off x="6179760" y="3524760"/>
-            <a:ext cx="3742200" cy="943920"/>
+            <a:ext cx="3741840" cy="943560"/>
           </a:xfrm>
           <a:custGeom>
             <a:avLst/>
@@ -29060,7 +29038,7 @@
         <p:spPr>
           <a:xfrm>
             <a:off x="7883640" y="3682440"/>
-            <a:ext cx="336600" cy="269280"/>
+            <a:ext cx="336240" cy="268920"/>
           </a:xfrm>
           <a:custGeom>
             <a:avLst/>
@@ -29276,7 +29254,7 @@
         <p:spPr>
           <a:xfrm>
             <a:off x="6296760" y="4060080"/>
-            <a:ext cx="3508560" cy="251280"/>
+            <a:ext cx="3508200" cy="250920"/>
           </a:xfrm>
           <a:prstGeom prst="rect">
             <a:avLst/>
@@ -29328,7 +29306,7 @@
         <p:spPr>
           <a:xfrm>
             <a:off x="2268720" y="4640760"/>
-            <a:ext cx="3742200" cy="943920"/>
+            <a:ext cx="3741840" cy="943560"/>
           </a:xfrm>
           <a:custGeom>
             <a:avLst/>
@@ -29384,7 +29362,7 @@
         <p:spPr>
           <a:xfrm>
             <a:off x="4039920" y="4798080"/>
-            <a:ext cx="201600" cy="269280"/>
+            <a:ext cx="201240" cy="268920"/>
           </a:xfrm>
           <a:custGeom>
             <a:avLst/>
@@ -29560,7 +29538,7 @@
         <p:spPr>
           <a:xfrm>
             <a:off x="2385720" y="5176080"/>
-            <a:ext cx="3508560" cy="251280"/>
+            <a:ext cx="3508200" cy="250920"/>
           </a:xfrm>
           <a:prstGeom prst="rect">
             <a:avLst/>
@@ -29612,7 +29590,7 @@
         <p:spPr>
           <a:xfrm>
             <a:off x="6179760" y="4640760"/>
-            <a:ext cx="3742200" cy="943920"/>
+            <a:ext cx="3741840" cy="943560"/>
           </a:xfrm>
           <a:custGeom>
             <a:avLst/>
@@ -29668,7 +29646,7 @@
         <p:spPr>
           <a:xfrm>
             <a:off x="7917120" y="4798080"/>
-            <a:ext cx="269280" cy="269280"/>
+            <a:ext cx="268920" cy="268920"/>
           </a:xfrm>
           <a:custGeom>
             <a:avLst/>
@@ -29759,7 +29737,7 @@
         <p:spPr>
           <a:xfrm>
             <a:off x="6296760" y="5176080"/>
-            <a:ext cx="3508560" cy="251280"/>
+            <a:ext cx="3508200" cy="250920"/>
           </a:xfrm>
           <a:prstGeom prst="rect">
             <a:avLst/>
@@ -29811,7 +29789,7 @@
         <p:spPr>
           <a:xfrm>
             <a:off x="2210400" y="5814720"/>
-            <a:ext cx="7764480" cy="296280"/>
+            <a:ext cx="7764120" cy="295920"/>
           </a:xfrm>
           <a:prstGeom prst="rect">
             <a:avLst/>
@@ -29883,7 +29861,7 @@
         <p:spPr>
           <a:xfrm>
             <a:off x="2187720" y="6395040"/>
-            <a:ext cx="7809480" cy="323280"/>
+            <a:ext cx="7809120" cy="322920"/>
           </a:xfrm>
           <a:prstGeom prst="rect">
             <a:avLst/>
@@ -29935,7 +29913,7 @@
         <p:spPr>
           <a:xfrm>
             <a:off x="2210400" y="6791040"/>
-            <a:ext cx="7764480" cy="251280"/>
+            <a:ext cx="7764120" cy="250920"/>
           </a:xfrm>
           <a:prstGeom prst="rect">
             <a:avLst/>
@@ -29987,7 +29965,7 @@
         <p:spPr>
           <a:xfrm>
             <a:off x="5734440" y="5920560"/>
-            <a:ext cx="143280" cy="143280"/>
+            <a:ext cx="142920" cy="142920"/>
           </a:xfrm>
           <a:custGeom>
             <a:avLst/>
@@ -30038,7 +30016,7 @@
         <p:spPr>
           <a:xfrm>
             <a:off x="6022440" y="5920560"/>
-            <a:ext cx="143280" cy="143280"/>
+            <a:ext cx="142920" cy="142920"/>
           </a:xfrm>
           <a:custGeom>
             <a:avLst/>
@@ -30089,7 +30067,7 @@
         <p:spPr>
           <a:xfrm>
             <a:off x="6310440" y="5920560"/>
-            <a:ext cx="143280" cy="143280"/>
+            <a:ext cx="142920" cy="142920"/>
           </a:xfrm>
           <a:custGeom>
             <a:avLst/>
@@ -30172,7 +30150,7 @@
         <p:spPr>
           <a:xfrm>
             <a:off x="0" y="0"/>
-            <a:ext cx="12191400" cy="6857280"/>
+            <a:ext cx="12191040" cy="6856920"/>
           </a:xfrm>
           <a:prstGeom prst="roundRect">
             <a:avLst>
@@ -30204,7 +30182,7 @@
         <p:spPr>
           <a:xfrm>
             <a:off x="0" y="0"/>
-            <a:ext cx="12191400" cy="6857280"/>
+            <a:ext cx="12191040" cy="6856920"/>
           </a:xfrm>
           <a:custGeom>
             <a:avLst/>
@@ -30267,7 +30245,7 @@
         <p:spPr>
           <a:xfrm>
             <a:off x="380880" y="1542960"/>
-            <a:ext cx="1799640" cy="608760"/>
+            <a:ext cx="1799280" cy="608400"/>
           </a:xfrm>
           <a:custGeom>
             <a:avLst/>
@@ -30318,7 +30296,7 @@
         <p:spPr>
           <a:xfrm>
             <a:off x="609480" y="1676520"/>
-            <a:ext cx="1517040" cy="342360"/>
+            <a:ext cx="1516680" cy="342000"/>
           </a:xfrm>
           <a:prstGeom prst="rect">
             <a:avLst/>
@@ -30370,7 +30348,7 @@
         <p:spPr>
           <a:xfrm>
             <a:off x="380880" y="2381400"/>
-            <a:ext cx="11772360" cy="1713960"/>
+            <a:ext cx="11772000" cy="1713600"/>
           </a:xfrm>
           <a:prstGeom prst="rect">
             <a:avLst/>
@@ -30443,7 +30421,7 @@
         <p:spPr>
           <a:xfrm>
             <a:off x="380880" y="4324320"/>
-            <a:ext cx="1523160" cy="75600"/>
+            <a:ext cx="1522800" cy="75240"/>
           </a:xfrm>
           <a:custGeom>
             <a:avLst/>
@@ -30494,7 +30472,7 @@
         <p:spPr>
           <a:xfrm>
             <a:off x="380880" y="4629240"/>
-            <a:ext cx="7457400" cy="685080"/>
+            <a:ext cx="7457040" cy="684720"/>
           </a:xfrm>
           <a:prstGeom prst="rect">
             <a:avLst/>
@@ -30567,7 +30545,7 @@
         <p:spPr>
           <a:xfrm>
             <a:off x="10591920" y="5867280"/>
-            <a:ext cx="151560" cy="151560"/>
+            <a:ext cx="151200" cy="151200"/>
           </a:xfrm>
           <a:custGeom>
             <a:avLst/>
@@ -30618,7 +30596,7 @@
         <p:spPr>
           <a:xfrm>
             <a:off x="10896480" y="5867280"/>
-            <a:ext cx="151560" cy="151560"/>
+            <a:ext cx="151200" cy="151200"/>
           </a:xfrm>
           <a:custGeom>
             <a:avLst/>
@@ -30669,7 +30647,7 @@
         <p:spPr>
           <a:xfrm>
             <a:off x="11201400" y="5867280"/>
-            <a:ext cx="151560" cy="151560"/>
+            <a:ext cx="151200" cy="151200"/>
           </a:xfrm>
           <a:custGeom>
             <a:avLst/>
@@ -30752,7 +30730,7 @@
         <p:spPr>
           <a:xfrm>
             <a:off x="0" y="0"/>
-            <a:ext cx="12191400" cy="6857280"/>
+            <a:ext cx="12191040" cy="6856920"/>
           </a:xfrm>
           <a:custGeom>
             <a:avLst/>
@@ -30815,7 +30793,7 @@
         <p:spPr>
           <a:xfrm>
             <a:off x="380880" y="380880"/>
-            <a:ext cx="11657880" cy="456480"/>
+            <a:ext cx="11657520" cy="456120"/>
           </a:xfrm>
           <a:prstGeom prst="rect">
             <a:avLst/>
@@ -30867,7 +30845,7 @@
         <p:spPr>
           <a:xfrm>
             <a:off x="380880" y="952560"/>
-            <a:ext cx="11543760" cy="304200"/>
+            <a:ext cx="11543400" cy="303840"/>
           </a:xfrm>
           <a:prstGeom prst="rect">
             <a:avLst/>
@@ -30919,7 +30897,7 @@
         <p:spPr>
           <a:xfrm>
             <a:off x="380880" y="1371600"/>
-            <a:ext cx="913680" cy="37440"/>
+            <a:ext cx="913320" cy="37080"/>
           </a:xfrm>
           <a:custGeom>
             <a:avLst/>
@@ -30970,7 +30948,7 @@
         <p:spPr>
           <a:xfrm>
             <a:off x="395280" y="1576440"/>
-            <a:ext cx="5609520" cy="1666080"/>
+            <a:ext cx="5609160" cy="1665720"/>
           </a:xfrm>
           <a:custGeom>
             <a:avLst/>
@@ -31026,7 +31004,7 @@
         <p:spPr>
           <a:xfrm>
             <a:off x="600120" y="1781280"/>
-            <a:ext cx="5314320" cy="304200"/>
+            <a:ext cx="5313960" cy="303840"/>
           </a:xfrm>
           <a:prstGeom prst="rect">
             <a:avLst/>
@@ -31078,7 +31056,7 @@
         <p:spPr>
           <a:xfrm>
             <a:off x="600120" y="2200320"/>
-            <a:ext cx="5285520" cy="837360"/>
+            <a:ext cx="5285160" cy="837000"/>
           </a:xfrm>
           <a:prstGeom prst="rect">
             <a:avLst/>
@@ -31150,7 +31128,7 @@
         <p:spPr>
           <a:xfrm>
             <a:off x="6186600" y="1576440"/>
-            <a:ext cx="5609520" cy="1666080"/>
+            <a:ext cx="5609160" cy="1665720"/>
           </a:xfrm>
           <a:custGeom>
             <a:avLst/>
@@ -31206,7 +31184,7 @@
         <p:spPr>
           <a:xfrm>
             <a:off x="6391440" y="1781280"/>
-            <a:ext cx="5314320" cy="304200"/>
+            <a:ext cx="5313960" cy="303840"/>
           </a:xfrm>
           <a:prstGeom prst="rect">
             <a:avLst/>
@@ -31258,7 +31236,7 @@
         <p:spPr>
           <a:xfrm>
             <a:off x="6391440" y="2200320"/>
-            <a:ext cx="5285520" cy="561240"/>
+            <a:ext cx="5285160" cy="560880"/>
           </a:xfrm>
           <a:prstGeom prst="rect">
             <a:avLst/>
@@ -31320,7 +31298,7 @@
         <p:spPr>
           <a:xfrm>
             <a:off x="399960" y="3426480"/>
-            <a:ext cx="11391120" cy="3314160"/>
+            <a:ext cx="11390760" cy="3313800"/>
           </a:xfrm>
           <a:custGeom>
             <a:avLst/>
@@ -31376,7 +31354,7 @@
         <p:spPr>
           <a:xfrm>
             <a:off x="552600" y="3636000"/>
-            <a:ext cx="11086560" cy="304200"/>
+            <a:ext cx="11086200" cy="303840"/>
           </a:xfrm>
           <a:prstGeom prst="rect">
             <a:avLst/>
@@ -31428,7 +31406,7 @@
         <p:spPr>
           <a:xfrm>
             <a:off x="609480" y="4055400"/>
-            <a:ext cx="10972080" cy="2475720"/>
+            <a:ext cx="10971720" cy="2475360"/>
           </a:xfrm>
           <a:prstGeom prst="roundRect">
             <a:avLst>
@@ -31492,7 +31470,7 @@
         <p:spPr>
           <a:xfrm>
             <a:off x="0" y="0"/>
-            <a:ext cx="12191400" cy="6855120"/>
+            <a:ext cx="12191040" cy="6854760"/>
           </a:xfrm>
           <a:custGeom>
             <a:avLst/>
@@ -31555,7 +31533,7 @@
         <p:spPr>
           <a:xfrm>
             <a:off x="349200" y="349200"/>
-            <a:ext cx="11702160" cy="418320"/>
+            <a:ext cx="11701800" cy="417960"/>
           </a:xfrm>
           <a:prstGeom prst="rect">
             <a:avLst/>
@@ -31607,7 +31585,7 @@
         <p:spPr>
           <a:xfrm>
             <a:off x="349200" y="873360"/>
-            <a:ext cx="11597400" cy="278640"/>
+            <a:ext cx="11597040" cy="278280"/>
           </a:xfrm>
           <a:prstGeom prst="rect">
             <a:avLst/>
@@ -31659,7 +31637,7 @@
         <p:spPr>
           <a:xfrm>
             <a:off x="349200" y="1257480"/>
-            <a:ext cx="837720" cy="34200"/>
+            <a:ext cx="837360" cy="33840"/>
           </a:xfrm>
           <a:custGeom>
             <a:avLst/>
@@ -31710,7 +31688,7 @@
         <p:spPr>
           <a:xfrm>
             <a:off x="362520" y="1445400"/>
-            <a:ext cx="5047200" cy="4191480"/>
+            <a:ext cx="5046840" cy="4191120"/>
           </a:xfrm>
           <a:custGeom>
             <a:avLst/>
@@ -31766,7 +31744,7 @@
         <p:spPr>
           <a:xfrm>
             <a:off x="515160" y="1598400"/>
-            <a:ext cx="4741560" cy="1676160"/>
+            <a:ext cx="4741200" cy="1675800"/>
           </a:xfrm>
           <a:prstGeom prst="roundRect">
             <a:avLst>
@@ -31798,7 +31776,7 @@
         <p:spPr>
           <a:xfrm>
             <a:off x="384120" y="3380040"/>
-            <a:ext cx="5003640" cy="523440"/>
+            <a:ext cx="5003280" cy="523080"/>
           </a:xfrm>
           <a:prstGeom prst="rect">
             <a:avLst/>
@@ -31850,7 +31828,7 @@
         <p:spPr>
           <a:xfrm>
             <a:off x="471600" y="3973680"/>
-            <a:ext cx="4829040" cy="243720"/>
+            <a:ext cx="4828680" cy="243360"/>
           </a:xfrm>
           <a:prstGeom prst="rect">
             <a:avLst/>
@@ -31902,7 +31880,7 @@
         <p:spPr>
           <a:xfrm>
             <a:off x="362520" y="5801400"/>
-            <a:ext cx="5047200" cy="1038600"/>
+            <a:ext cx="5046840" cy="1038240"/>
           </a:xfrm>
           <a:custGeom>
             <a:avLst/>
@@ -31958,7 +31936,7 @@
         <p:spPr>
           <a:xfrm>
             <a:off x="410400" y="5954040"/>
-            <a:ext cx="4951080" cy="418320"/>
+            <a:ext cx="4950720" cy="417960"/>
           </a:xfrm>
           <a:prstGeom prst="rect">
             <a:avLst/>
@@ -32010,7 +31988,7 @@
         <p:spPr>
           <a:xfrm>
             <a:off x="475920" y="6443280"/>
-            <a:ext cx="4820040" cy="243720"/>
+            <a:ext cx="4819680" cy="243360"/>
           </a:xfrm>
           <a:prstGeom prst="rect">
             <a:avLst/>
@@ -32062,7 +32040,7 @@
         <p:spPr>
           <a:xfrm>
             <a:off x="5648040" y="1445400"/>
-            <a:ext cx="6174000" cy="1885680"/>
+            <a:ext cx="6173640" cy="1885320"/>
           </a:xfrm>
           <a:custGeom>
             <a:avLst/>
@@ -32118,7 +32096,7 @@
         <p:spPr>
           <a:xfrm>
             <a:off x="5835600" y="1633320"/>
-            <a:ext cx="5903280" cy="278640"/>
+            <a:ext cx="5902920" cy="278280"/>
           </a:xfrm>
           <a:prstGeom prst="rect">
             <a:avLst/>
@@ -32170,7 +32148,7 @@
         <p:spPr>
           <a:xfrm>
             <a:off x="5835600" y="2017440"/>
-            <a:ext cx="5877000" cy="514440"/>
+            <a:ext cx="5876640" cy="514080"/>
           </a:xfrm>
           <a:prstGeom prst="rect">
             <a:avLst/>
@@ -32252,7 +32230,7 @@
         <p:spPr>
           <a:xfrm>
             <a:off x="5835600" y="2633040"/>
-            <a:ext cx="5877000" cy="514440"/>
+            <a:ext cx="5876640" cy="514080"/>
           </a:xfrm>
           <a:prstGeom prst="rect">
             <a:avLst/>
@@ -32304,7 +32282,7 @@
         <p:spPr>
           <a:xfrm>
             <a:off x="5648040" y="3497760"/>
-            <a:ext cx="6174000" cy="1527480"/>
+            <a:ext cx="6173640" cy="1527120"/>
           </a:xfrm>
           <a:custGeom>
             <a:avLst/>
@@ -32360,7 +32338,7 @@
         <p:spPr>
           <a:xfrm>
             <a:off x="5835600" y="3685680"/>
-            <a:ext cx="5903280" cy="278640"/>
+            <a:ext cx="5902920" cy="278280"/>
           </a:xfrm>
           <a:prstGeom prst="rect">
             <a:avLst/>
@@ -32412,7 +32390,7 @@
         <p:spPr>
           <a:xfrm>
             <a:off x="5835600" y="4069800"/>
-            <a:ext cx="5877000" cy="767880"/>
+            <a:ext cx="5876640" cy="767520"/>
           </a:xfrm>
           <a:prstGeom prst="rect">
             <a:avLst/>
@@ -32484,7 +32462,7 @@
         <p:spPr>
           <a:xfrm>
             <a:off x="5643720" y="5185440"/>
-            <a:ext cx="3029760" cy="767880"/>
+            <a:ext cx="3029400" cy="767520"/>
           </a:xfrm>
           <a:custGeom>
             <a:avLst/>
@@ -32540,7 +32518,7 @@
         <p:spPr>
           <a:xfrm>
             <a:off x="7030800" y="5299200"/>
-            <a:ext cx="261360" cy="261360"/>
+            <a:ext cx="261000" cy="261000"/>
           </a:xfrm>
           <a:custGeom>
             <a:avLst/>
@@ -32717,7 +32695,7 @@
         <p:spPr>
           <a:xfrm>
             <a:off x="5722200" y="5631120"/>
-            <a:ext cx="2872440" cy="208800"/>
+            <a:ext cx="2872080" cy="208440"/>
           </a:xfrm>
           <a:prstGeom prst="rect">
             <a:avLst/>
@@ -32769,7 +32747,7 @@
         <p:spPr>
           <a:xfrm>
             <a:off x="8798040" y="5185440"/>
-            <a:ext cx="3029760" cy="767880"/>
+            <a:ext cx="3029400" cy="767520"/>
           </a:xfrm>
           <a:custGeom>
             <a:avLst/>
@@ -32825,7 +32803,7 @@
         <p:spPr>
           <a:xfrm>
             <a:off x="10185120" y="5299200"/>
-            <a:ext cx="261360" cy="261360"/>
+            <a:ext cx="261000" cy="261000"/>
           </a:xfrm>
           <a:custGeom>
             <a:avLst/>
@@ -32916,7 +32894,7 @@
         <p:spPr>
           <a:xfrm>
             <a:off x="8876520" y="5631120"/>
-            <a:ext cx="2872440" cy="208800"/>
+            <a:ext cx="2872080" cy="208440"/>
           </a:xfrm>
           <a:prstGeom prst="rect">
             <a:avLst/>
@@ -32968,7 +32946,7 @@
         <p:spPr>
           <a:xfrm>
             <a:off x="5643720" y="6076440"/>
-            <a:ext cx="3029760" cy="767880"/>
+            <a:ext cx="3029400" cy="767520"/>
           </a:xfrm>
           <a:custGeom>
             <a:avLst/>
@@ -33024,7 +33002,7 @@
         <p:spPr>
           <a:xfrm>
             <a:off x="7030800" y="6189840"/>
-            <a:ext cx="261360" cy="261360"/>
+            <a:ext cx="261000" cy="261000"/>
           </a:xfrm>
           <a:custGeom>
             <a:avLst/>
@@ -33122,7 +33100,7 @@
         <p:spPr>
           <a:xfrm>
             <a:off x="5722200" y="6521760"/>
-            <a:ext cx="2872440" cy="208800"/>
+            <a:ext cx="2872080" cy="208440"/>
           </a:xfrm>
           <a:prstGeom prst="rect">
             <a:avLst/>
@@ -33174,7 +33152,7 @@
         <p:spPr>
           <a:xfrm>
             <a:off x="8798040" y="6076440"/>
-            <a:ext cx="3029760" cy="767880"/>
+            <a:ext cx="3029400" cy="767520"/>
           </a:xfrm>
           <a:custGeom>
             <a:avLst/>
@@ -33230,7 +33208,7 @@
         <p:spPr>
           <a:xfrm>
             <a:off x="10185120" y="6189840"/>
-            <a:ext cx="261360" cy="261360"/>
+            <a:ext cx="261000" cy="261000"/>
           </a:xfrm>
           <a:custGeom>
             <a:avLst/>
@@ -33342,7 +33320,7 @@
         <p:spPr>
           <a:xfrm>
             <a:off x="8876520" y="6521760"/>
-            <a:ext cx="2872440" cy="208800"/>
+            <a:ext cx="2872080" cy="208440"/>
           </a:xfrm>
           <a:prstGeom prst="rect">
             <a:avLst/>
@@ -33426,7 +33404,7 @@
         <p:spPr>
           <a:xfrm>
             <a:off x="0" y="0"/>
-            <a:ext cx="12191400" cy="6858000"/>
+            <a:ext cx="12191040" cy="6857640"/>
           </a:xfrm>
           <a:custGeom>
             <a:avLst/>
@@ -33489,7 +33467,7 @@
         <p:spPr>
           <a:xfrm>
             <a:off x="369720" y="369720"/>
-            <a:ext cx="11673720" cy="442800"/>
+            <a:ext cx="11673360" cy="442440"/>
           </a:xfrm>
           <a:prstGeom prst="rect">
             <a:avLst/>
@@ -33541,7 +33519,7 @@
         <p:spPr>
           <a:xfrm>
             <a:off x="369720" y="924480"/>
-            <a:ext cx="11562840" cy="295200"/>
+            <a:ext cx="11562480" cy="294840"/>
           </a:xfrm>
           <a:prstGeom prst="rect">
             <a:avLst/>
@@ -33593,7 +33571,7 @@
         <p:spPr>
           <a:xfrm>
             <a:off x="369720" y="1330920"/>
-            <a:ext cx="886680" cy="36360"/>
+            <a:ext cx="886320" cy="36000"/>
           </a:xfrm>
           <a:custGeom>
             <a:avLst/>
@@ -33644,7 +33622,7 @@
         <p:spPr>
           <a:xfrm>
             <a:off x="383760" y="1529640"/>
-            <a:ext cx="5591520" cy="2837160"/>
+            <a:ext cx="5591160" cy="2836800"/>
           </a:xfrm>
           <a:custGeom>
             <a:avLst/>
@@ -33700,7 +33678,7 @@
         <p:spPr>
           <a:xfrm>
             <a:off x="527040" y="1728360"/>
-            <a:ext cx="5304960" cy="295200"/>
+            <a:ext cx="5304600" cy="294840"/>
           </a:xfrm>
           <a:prstGeom prst="rect">
             <a:avLst/>
@@ -33752,7 +33730,7 @@
         <p:spPr>
           <a:xfrm>
             <a:off x="582480" y="2246040"/>
-            <a:ext cx="110160" cy="110160"/>
+            <a:ext cx="109800" cy="109800"/>
           </a:xfrm>
           <a:custGeom>
             <a:avLst/>
@@ -33803,7 +33781,7 @@
         <p:spPr>
           <a:xfrm>
             <a:off x="804240" y="2172240"/>
-            <a:ext cx="1875600" cy="258120"/>
+            <a:ext cx="1875240" cy="257760"/>
           </a:xfrm>
           <a:prstGeom prst="rect">
             <a:avLst/>
@@ -33855,7 +33833,7 @@
         <p:spPr>
           <a:xfrm>
             <a:off x="582480" y="2615760"/>
-            <a:ext cx="110160" cy="110160"/>
+            <a:ext cx="109800" cy="109800"/>
           </a:xfrm>
           <a:custGeom>
             <a:avLst/>
@@ -33906,7 +33884,7 @@
         <p:spPr>
           <a:xfrm>
             <a:off x="804240" y="2541960"/>
-            <a:ext cx="1459800" cy="258120"/>
+            <a:ext cx="1459440" cy="257760"/>
           </a:xfrm>
           <a:prstGeom prst="rect">
             <a:avLst/>
@@ -33958,7 +33936,7 @@
         <p:spPr>
           <a:xfrm>
             <a:off x="582480" y="2985480"/>
-            <a:ext cx="110160" cy="110160"/>
+            <a:ext cx="109800" cy="109800"/>
           </a:xfrm>
           <a:custGeom>
             <a:avLst/>
@@ -34009,7 +33987,7 @@
         <p:spPr>
           <a:xfrm>
             <a:off x="804240" y="2911680"/>
-            <a:ext cx="1219320" cy="258120"/>
+            <a:ext cx="1218960" cy="257760"/>
           </a:xfrm>
           <a:prstGeom prst="rect">
             <a:avLst/>
@@ -34061,7 +34039,7 @@
         <p:spPr>
           <a:xfrm>
             <a:off x="582480" y="3355200"/>
-            <a:ext cx="110160" cy="110160"/>
+            <a:ext cx="109800" cy="109800"/>
           </a:xfrm>
           <a:custGeom>
             <a:avLst/>
@@ -34112,7 +34090,7 @@
         <p:spPr>
           <a:xfrm>
             <a:off x="804240" y="3281400"/>
-            <a:ext cx="1922040" cy="258120"/>
+            <a:ext cx="1921680" cy="257760"/>
           </a:xfrm>
           <a:prstGeom prst="rect">
             <a:avLst/>
@@ -34164,7 +34142,7 @@
         <p:spPr>
           <a:xfrm>
             <a:off x="582480" y="3688200"/>
-            <a:ext cx="5194080" cy="479880"/>
+            <a:ext cx="5193720" cy="479520"/>
           </a:xfrm>
           <a:custGeom>
             <a:avLst/>
@@ -34217,7 +34195,7 @@
         <p:spPr>
           <a:xfrm>
             <a:off x="646920" y="3799080"/>
-            <a:ext cx="5064480" cy="258120"/>
+            <a:ext cx="5064120" cy="257760"/>
           </a:xfrm>
           <a:prstGeom prst="rect">
             <a:avLst/>
@@ -34269,7 +34247,7 @@
         <p:spPr>
           <a:xfrm>
             <a:off x="6221160" y="1529640"/>
-            <a:ext cx="5591520" cy="2837160"/>
+            <a:ext cx="5591160" cy="2836800"/>
           </a:xfrm>
           <a:custGeom>
             <a:avLst/>
@@ -34325,7 +34303,7 @@
         <p:spPr>
           <a:xfrm>
             <a:off x="6364440" y="1728360"/>
-            <a:ext cx="5304960" cy="295200"/>
+            <a:ext cx="5304600" cy="294840"/>
           </a:xfrm>
           <a:prstGeom prst="rect">
             <a:avLst/>
@@ -34377,7 +34355,7 @@
         <p:spPr>
           <a:xfrm>
             <a:off x="6419880" y="2246040"/>
-            <a:ext cx="110160" cy="110160"/>
+            <a:ext cx="109800" cy="109800"/>
           </a:xfrm>
           <a:custGeom>
             <a:avLst/>
@@ -34428,7 +34406,7 @@
         <p:spPr>
           <a:xfrm>
             <a:off x="6642000" y="2172240"/>
-            <a:ext cx="1857240" cy="258120"/>
+            <a:ext cx="1856880" cy="257760"/>
           </a:xfrm>
           <a:prstGeom prst="rect">
             <a:avLst/>
@@ -34490,7 +34468,7 @@
         <p:spPr>
           <a:xfrm>
             <a:off x="6419880" y="2615760"/>
-            <a:ext cx="110160" cy="110160"/>
+            <a:ext cx="109800" cy="109800"/>
           </a:xfrm>
           <a:custGeom>
             <a:avLst/>
@@ -34541,7 +34519,7 @@
         <p:spPr>
           <a:xfrm>
             <a:off x="6642000" y="2541960"/>
-            <a:ext cx="1653840" cy="258120"/>
+            <a:ext cx="1653480" cy="257760"/>
           </a:xfrm>
           <a:prstGeom prst="rect">
             <a:avLst/>
@@ -34603,7 +34581,7 @@
         <p:spPr>
           <a:xfrm>
             <a:off x="6419880" y="2985480"/>
-            <a:ext cx="110160" cy="110160"/>
+            <a:ext cx="109800" cy="109800"/>
           </a:xfrm>
           <a:custGeom>
             <a:avLst/>
@@ -34654,7 +34632,7 @@
         <p:spPr>
           <a:xfrm>
             <a:off x="6642000" y="2957760"/>
-            <a:ext cx="1315080" cy="165600"/>
+            <a:ext cx="1314720" cy="165240"/>
           </a:xfrm>
           <a:prstGeom prst="rect">
             <a:avLst/>
@@ -34706,7 +34684,7 @@
         <p:spPr>
           <a:xfrm>
             <a:off x="6419880" y="3355200"/>
-            <a:ext cx="110160" cy="110160"/>
+            <a:ext cx="109800" cy="109800"/>
           </a:xfrm>
           <a:custGeom>
             <a:avLst/>
@@ -34757,7 +34735,7 @@
         <p:spPr>
           <a:xfrm>
             <a:off x="6642000" y="3281400"/>
-            <a:ext cx="1487520" cy="258120"/>
+            <a:ext cx="1487160" cy="257760"/>
           </a:xfrm>
           <a:prstGeom prst="rect">
             <a:avLst/>
@@ -34819,7 +34797,7 @@
         <p:spPr>
           <a:xfrm>
             <a:off x="6419880" y="3688200"/>
-            <a:ext cx="5194080" cy="479880"/>
+            <a:ext cx="5193720" cy="479520"/>
           </a:xfrm>
           <a:custGeom>
             <a:avLst/>
@@ -34872,7 +34850,7 @@
         <p:spPr>
           <a:xfrm>
             <a:off x="6484680" y="3799080"/>
-            <a:ext cx="5064480" cy="258120"/>
+            <a:ext cx="5064120" cy="257760"/>
           </a:xfrm>
           <a:prstGeom prst="rect">
             <a:avLst/>
@@ -34924,7 +34902,7 @@
         <p:spPr>
           <a:xfrm>
             <a:off x="383760" y="4543200"/>
-            <a:ext cx="3687480" cy="1542960"/>
+            <a:ext cx="3687120" cy="1542600"/>
           </a:xfrm>
           <a:custGeom>
             <a:avLst/>
@@ -34980,7 +34958,7 @@
         <p:spPr>
           <a:xfrm>
             <a:off x="2062800" y="4704840"/>
-            <a:ext cx="331920" cy="331920"/>
+            <a:ext cx="331560" cy="331560"/>
           </a:xfrm>
           <a:custGeom>
             <a:avLst/>
@@ -35307,7 +35285,7 @@
         <p:spPr>
           <a:xfrm>
             <a:off x="499320" y="5148720"/>
-            <a:ext cx="3456360" cy="258120"/>
+            <a:ext cx="3456000" cy="257760"/>
           </a:xfrm>
           <a:prstGeom prst="rect">
             <a:avLst/>
@@ -35359,7 +35337,7 @@
         <p:spPr>
           <a:xfrm>
             <a:off x="508320" y="5481360"/>
-            <a:ext cx="3437640" cy="442800"/>
+            <a:ext cx="3437280" cy="442440"/>
           </a:xfrm>
           <a:prstGeom prst="rect">
             <a:avLst/>
@@ -35411,7 +35389,7 @@
         <p:spPr>
           <a:xfrm>
             <a:off x="4250880" y="4543200"/>
-            <a:ext cx="3687480" cy="1542960"/>
+            <a:ext cx="3687120" cy="1542600"/>
           </a:xfrm>
           <a:custGeom>
             <a:avLst/>
@@ -35467,7 +35445,7 @@
         <p:spPr>
           <a:xfrm>
             <a:off x="5909400" y="4704840"/>
-            <a:ext cx="373680" cy="331920"/>
+            <a:ext cx="373320" cy="331560"/>
           </a:xfrm>
           <a:custGeom>
             <a:avLst/>
@@ -35584,7 +35562,7 @@
         <p:spPr>
           <a:xfrm>
             <a:off x="4366440" y="5148720"/>
-            <a:ext cx="3456360" cy="258120"/>
+            <a:ext cx="3456000" cy="257760"/>
           </a:xfrm>
           <a:prstGeom prst="rect">
             <a:avLst/>
@@ -35636,7 +35614,7 @@
         <p:spPr>
           <a:xfrm>
             <a:off x="4375440" y="5481360"/>
-            <a:ext cx="3437640" cy="221040"/>
+            <a:ext cx="3437280" cy="220680"/>
           </a:xfrm>
           <a:prstGeom prst="rect">
             <a:avLst/>
@@ -35688,7 +35666,7 @@
         <p:spPr>
           <a:xfrm>
             <a:off x="8118000" y="4543200"/>
-            <a:ext cx="3687480" cy="1542960"/>
+            <a:ext cx="3687120" cy="1542600"/>
           </a:xfrm>
           <a:custGeom>
             <a:avLst/>
@@ -35744,7 +35722,7 @@
         <p:spPr>
           <a:xfrm>
             <a:off x="9755640" y="4704840"/>
-            <a:ext cx="415080" cy="331920"/>
+            <a:ext cx="414720" cy="331560"/>
           </a:xfrm>
           <a:custGeom>
             <a:avLst/>
@@ -35963,7 +35941,7 @@
         <p:spPr>
           <a:xfrm>
             <a:off x="8233560" y="5148720"/>
-            <a:ext cx="3456360" cy="258120"/>
+            <a:ext cx="3456000" cy="257760"/>
           </a:xfrm>
           <a:prstGeom prst="rect">
             <a:avLst/>
@@ -36015,7 +35993,7 @@
         <p:spPr>
           <a:xfrm>
             <a:off x="8242560" y="5481360"/>
-            <a:ext cx="3437640" cy="221040"/>
+            <a:ext cx="3437280" cy="220680"/>
           </a:xfrm>
           <a:prstGeom prst="rect">
             <a:avLst/>
@@ -36067,7 +36045,7 @@
         <p:spPr>
           <a:xfrm>
             <a:off x="383760" y="6262560"/>
-            <a:ext cx="11424240" cy="581760"/>
+            <a:ext cx="11423880" cy="581400"/>
           </a:xfrm>
           <a:custGeom>
             <a:avLst/>
@@ -36123,7 +36101,7 @@
         <p:spPr>
           <a:xfrm>
             <a:off x="499320" y="6424200"/>
-            <a:ext cx="11193120" cy="258120"/>
+            <a:ext cx="11192760" cy="257760"/>
           </a:xfrm>
           <a:prstGeom prst="rect">
             <a:avLst/>
@@ -36237,7 +36215,7 @@
         <p:spPr>
           <a:xfrm>
             <a:off x="0" y="0"/>
-            <a:ext cx="12191400" cy="6857280"/>
+            <a:ext cx="12191040" cy="6856920"/>
           </a:xfrm>
           <a:prstGeom prst="roundRect">
             <a:avLst>
@@ -36269,7 +36247,7 @@
         <p:spPr>
           <a:xfrm>
             <a:off x="0" y="0"/>
-            <a:ext cx="12191400" cy="6857280"/>
+            <a:ext cx="12191040" cy="6856920"/>
           </a:xfrm>
           <a:custGeom>
             <a:avLst/>
@@ -36332,7 +36310,7 @@
         <p:spPr>
           <a:xfrm>
             <a:off x="380880" y="1114560"/>
-            <a:ext cx="1866240" cy="608760"/>
+            <a:ext cx="1865880" cy="608400"/>
           </a:xfrm>
           <a:custGeom>
             <a:avLst/>
@@ -36383,7 +36361,7 @@
         <p:spPr>
           <a:xfrm>
             <a:off x="609480" y="1247760"/>
-            <a:ext cx="1580400" cy="342360"/>
+            <a:ext cx="1580040" cy="342000"/>
           </a:xfrm>
           <a:prstGeom prst="rect">
             <a:avLst/>
@@ -36435,7 +36413,7 @@
         <p:spPr>
           <a:xfrm>
             <a:off x="380880" y="1952640"/>
-            <a:ext cx="11772360" cy="2571120"/>
+            <a:ext cx="11772000" cy="2570760"/>
           </a:xfrm>
           <a:prstGeom prst="rect">
             <a:avLst/>
@@ -36529,7 +36507,7 @@
         <p:spPr>
           <a:xfrm>
             <a:off x="380880" y="4753080"/>
-            <a:ext cx="1523160" cy="75600"/>
+            <a:ext cx="1522800" cy="75240"/>
           </a:xfrm>
           <a:custGeom>
             <a:avLst/>
@@ -36580,7 +36558,7 @@
         <p:spPr>
           <a:xfrm>
             <a:off x="380880" y="5057640"/>
-            <a:ext cx="7457400" cy="685080"/>
+            <a:ext cx="7457040" cy="684720"/>
           </a:xfrm>
           <a:prstGeom prst="rect">
             <a:avLst/>
@@ -36653,7 +36631,7 @@
         <p:spPr>
           <a:xfrm>
             <a:off x="10591920" y="5867280"/>
-            <a:ext cx="151560" cy="151560"/>
+            <a:ext cx="151200" cy="151200"/>
           </a:xfrm>
           <a:custGeom>
             <a:avLst/>
@@ -36704,7 +36682,7 @@
         <p:spPr>
           <a:xfrm>
             <a:off x="10896480" y="5867280"/>
-            <a:ext cx="151560" cy="151560"/>
+            <a:ext cx="151200" cy="151200"/>
           </a:xfrm>
           <a:custGeom>
             <a:avLst/>
@@ -36755,7 +36733,7 @@
         <p:spPr>
           <a:xfrm>
             <a:off x="11201400" y="5867280"/>
-            <a:ext cx="151560" cy="151560"/>
+            <a:ext cx="151200" cy="151200"/>
           </a:xfrm>
           <a:custGeom>
             <a:avLst/>
@@ -36838,7 +36816,7 @@
         <p:spPr>
           <a:xfrm>
             <a:off x="0" y="0"/>
-            <a:ext cx="12191400" cy="6858000"/>
+            <a:ext cx="12191040" cy="6857640"/>
           </a:xfrm>
           <a:custGeom>
             <a:avLst/>
@@ -36901,7 +36879,7 @@
         <p:spPr>
           <a:xfrm>
             <a:off x="379080" y="379080"/>
-            <a:ext cx="11660760" cy="453960"/>
+            <a:ext cx="11660400" cy="453600"/>
           </a:xfrm>
           <a:prstGeom prst="rect">
             <a:avLst/>
@@ -36953,7 +36931,7 @@
         <p:spPr>
           <a:xfrm>
             <a:off x="379080" y="947160"/>
-            <a:ext cx="11547000" cy="302400"/>
+            <a:ext cx="11546640" cy="302040"/>
           </a:xfrm>
           <a:prstGeom prst="rect">
             <a:avLst/>
@@ -37005,7 +36983,7 @@
         <p:spPr>
           <a:xfrm>
             <a:off x="379080" y="1364040"/>
-            <a:ext cx="908640" cy="37080"/>
+            <a:ext cx="908280" cy="36720"/>
           </a:xfrm>
           <a:custGeom>
             <a:avLst/>
@@ -37056,7 +37034,7 @@
         <p:spPr>
           <a:xfrm>
             <a:off x="393120" y="1567800"/>
-            <a:ext cx="4451760" cy="4233960"/>
+            <a:ext cx="4451400" cy="4233600"/>
           </a:xfrm>
           <a:custGeom>
             <a:avLst/>
@@ -37112,7 +37090,7 @@
         <p:spPr>
           <a:xfrm>
             <a:off x="559080" y="1733760"/>
-            <a:ext cx="4120200" cy="2121120"/>
+            <a:ext cx="4119840" cy="2120760"/>
           </a:xfrm>
           <a:prstGeom prst="roundRect">
             <a:avLst>
@@ -37144,7 +37122,7 @@
         <p:spPr>
           <a:xfrm>
             <a:off x="416880" y="3969360"/>
-            <a:ext cx="4404240" cy="567720"/>
+            <a:ext cx="4403880" cy="567360"/>
           </a:xfrm>
           <a:prstGeom prst="rect">
             <a:avLst/>
@@ -37196,7 +37174,7 @@
         <p:spPr>
           <a:xfrm>
             <a:off x="511560" y="4613400"/>
-            <a:ext cx="4214880" cy="264600"/>
+            <a:ext cx="4214520" cy="264240"/>
           </a:xfrm>
           <a:prstGeom prst="rect">
             <a:avLst/>
@@ -37248,7 +37226,7 @@
         <p:spPr>
           <a:xfrm>
             <a:off x="520920" y="4954320"/>
-            <a:ext cx="4195800" cy="226800"/>
+            <a:ext cx="4195440" cy="226440"/>
           </a:xfrm>
           <a:prstGeom prst="rect">
             <a:avLst/>
@@ -37302,7 +37280,7 @@
         <p:spPr>
           <a:xfrm>
             <a:off x="393120" y="5982480"/>
-            <a:ext cx="4451760" cy="861480"/>
+            <a:ext cx="4451400" cy="861120"/>
           </a:xfrm>
           <a:custGeom>
             <a:avLst/>
@@ -37358,7 +37336,7 @@
         <p:spPr>
           <a:xfrm>
             <a:off x="516240" y="6148080"/>
-            <a:ext cx="4205520" cy="264600"/>
+            <a:ext cx="4205160" cy="264240"/>
           </a:xfrm>
           <a:prstGeom prst="rect">
             <a:avLst/>
@@ -37420,7 +37398,7 @@
         <p:spPr>
           <a:xfrm>
             <a:off x="516240" y="6413400"/>
-            <a:ext cx="4205520" cy="264600"/>
+            <a:ext cx="4205160" cy="264240"/>
           </a:xfrm>
           <a:prstGeom prst="rect">
             <a:avLst/>
@@ -37482,7 +37460,7 @@
         <p:spPr>
           <a:xfrm>
             <a:off x="5103720" y="1567800"/>
-            <a:ext cx="6696720" cy="2045520"/>
+            <a:ext cx="6696360" cy="2045160"/>
           </a:xfrm>
           <a:custGeom>
             <a:avLst/>
@@ -37538,7 +37516,7 @@
         <p:spPr>
           <a:xfrm>
             <a:off x="5307120" y="1771560"/>
-            <a:ext cx="6403320" cy="302400"/>
+            <a:ext cx="6402960" cy="302040"/>
           </a:xfrm>
           <a:prstGeom prst="rect">
             <a:avLst/>
@@ -37590,7 +37568,7 @@
         <p:spPr>
           <a:xfrm>
             <a:off x="5307120" y="2188440"/>
-            <a:ext cx="6374880" cy="558360"/>
+            <a:ext cx="6374520" cy="558000"/>
           </a:xfrm>
           <a:prstGeom prst="rect">
             <a:avLst/>
@@ -37662,7 +37640,7 @@
         <p:spPr>
           <a:xfrm>
             <a:off x="5307120" y="2856240"/>
-            <a:ext cx="6374880" cy="558360"/>
+            <a:ext cx="6374520" cy="558000"/>
           </a:xfrm>
           <a:prstGeom prst="rect">
             <a:avLst/>
@@ -37734,7 +37712,7 @@
         <p:spPr>
           <a:xfrm>
             <a:off x="5103720" y="3794040"/>
-            <a:ext cx="6696720" cy="2045520"/>
+            <a:ext cx="6696360" cy="2045160"/>
           </a:xfrm>
           <a:custGeom>
             <a:avLst/>
@@ -37790,7 +37768,7 @@
         <p:spPr>
           <a:xfrm>
             <a:off x="5307120" y="3997800"/>
-            <a:ext cx="6403320" cy="302400"/>
+            <a:ext cx="6402960" cy="302040"/>
           </a:xfrm>
           <a:prstGeom prst="rect">
             <a:avLst/>
@@ -37842,7 +37820,7 @@
         <p:spPr>
           <a:xfrm>
             <a:off x="5307120" y="4414680"/>
-            <a:ext cx="6374880" cy="558360"/>
+            <a:ext cx="6374520" cy="558000"/>
           </a:xfrm>
           <a:prstGeom prst="rect">
             <a:avLst/>
@@ -37934,7 +37912,7 @@
         <p:spPr>
           <a:xfrm>
             <a:off x="5307120" y="5082480"/>
-            <a:ext cx="6374880" cy="558360"/>
+            <a:ext cx="6374520" cy="558000"/>
           </a:xfrm>
           <a:prstGeom prst="rect">
             <a:avLst/>
@@ -38006,7 +37984,7 @@
         <p:spPr>
           <a:xfrm>
             <a:off x="5099040" y="6015600"/>
-            <a:ext cx="2149560" cy="833040"/>
+            <a:ext cx="2149200" cy="832680"/>
           </a:xfrm>
           <a:custGeom>
             <a:avLst/>
@@ -38062,7 +38040,7 @@
         <p:spPr>
           <a:xfrm>
             <a:off x="6068160" y="6138720"/>
-            <a:ext cx="212400" cy="283320"/>
+            <a:ext cx="212040" cy="282960"/>
           </a:xfrm>
           <a:custGeom>
             <a:avLst/>
@@ -38209,7 +38187,7 @@
         <p:spPr>
           <a:xfrm>
             <a:off x="5184000" y="6498720"/>
-            <a:ext cx="1979280" cy="226800"/>
+            <a:ext cx="1978920" cy="226440"/>
           </a:xfrm>
           <a:prstGeom prst="rect">
             <a:avLst/>
@@ -38261,7 +38239,7 @@
         <p:spPr>
           <a:xfrm>
             <a:off x="7378200" y="6015600"/>
-            <a:ext cx="2149560" cy="833040"/>
+            <a:ext cx="2149200" cy="832680"/>
           </a:xfrm>
           <a:custGeom>
             <a:avLst/>
@@ -38317,7 +38295,7 @@
         <p:spPr>
           <a:xfrm>
             <a:off x="8276400" y="6138720"/>
-            <a:ext cx="354600" cy="283320"/>
+            <a:ext cx="354240" cy="282960"/>
           </a:xfrm>
           <a:custGeom>
             <a:avLst/>
@@ -38533,7 +38511,7 @@
         <p:spPr>
           <a:xfrm>
             <a:off x="7463520" y="6498720"/>
-            <a:ext cx="1979280" cy="226800"/>
+            <a:ext cx="1978920" cy="226440"/>
           </a:xfrm>
           <a:prstGeom prst="rect">
             <a:avLst/>
@@ -38585,7 +38563,7 @@
         <p:spPr>
           <a:xfrm>
             <a:off x="9657720" y="6015600"/>
-            <a:ext cx="2149560" cy="833040"/>
+            <a:ext cx="2149200" cy="832680"/>
           </a:xfrm>
           <a:custGeom>
             <a:avLst/>
@@ -38641,7 +38619,7 @@
         <p:spPr>
           <a:xfrm>
             <a:off x="10591560" y="6138720"/>
-            <a:ext cx="283320" cy="283320"/>
+            <a:ext cx="282960" cy="282960"/>
           </a:xfrm>
           <a:custGeom>
             <a:avLst/>
@@ -38818,7 +38796,7 @@
         <p:spPr>
           <a:xfrm>
             <a:off x="9743040" y="6498720"/>
-            <a:ext cx="1979280" cy="226800"/>
+            <a:ext cx="1978920" cy="226440"/>
           </a:xfrm>
           <a:prstGeom prst="rect">
             <a:avLst/>
@@ -38902,7 +38880,7 @@
         <p:spPr>
           <a:xfrm>
             <a:off x="0" y="0"/>
-            <a:ext cx="12191400" cy="6857280"/>
+            <a:ext cx="12191040" cy="6856920"/>
           </a:xfrm>
           <a:custGeom>
             <a:avLst/>
@@ -38965,7 +38943,7 @@
         <p:spPr>
           <a:xfrm>
             <a:off x="334800" y="334800"/>
-            <a:ext cx="11722320" cy="401040"/>
+            <a:ext cx="11721960" cy="400680"/>
           </a:xfrm>
           <a:prstGeom prst="rect">
             <a:avLst/>
@@ -39017,7 +38995,7 @@
         <p:spPr>
           <a:xfrm>
             <a:off x="334800" y="837360"/>
-            <a:ext cx="11621880" cy="267120"/>
+            <a:ext cx="11621520" cy="266760"/>
           </a:xfrm>
           <a:prstGeom prst="rect">
             <a:avLst/>
@@ -39069,7 +39047,7 @@
         <p:spPr>
           <a:xfrm>
             <a:off x="334800" y="1205640"/>
-            <a:ext cx="803160" cy="32760"/>
+            <a:ext cx="802800" cy="32400"/>
           </a:xfrm>
           <a:custGeom>
             <a:avLst/>
@@ -39120,7 +39098,7 @@
         <p:spPr>
           <a:xfrm>
             <a:off x="347400" y="1386000"/>
-            <a:ext cx="5065200" cy="4320000"/>
+            <a:ext cx="5064840" cy="4319640"/>
           </a:xfrm>
           <a:custGeom>
             <a:avLst/>
@@ -39176,7 +39154,7 @@
         <p:spPr>
           <a:xfrm>
             <a:off x="493920" y="1532520"/>
-            <a:ext cx="4772160" cy="1740960"/>
+            <a:ext cx="4771800" cy="1740600"/>
           </a:xfrm>
           <a:prstGeom prst="roundRect">
             <a:avLst>
@@ -39208,7 +39186,7 @@
         <p:spPr>
           <a:xfrm>
             <a:off x="368280" y="3374640"/>
-            <a:ext cx="5023440" cy="501840"/>
+            <a:ext cx="5023080" cy="501480"/>
           </a:xfrm>
           <a:prstGeom prst="rect">
             <a:avLst/>
@@ -39260,7 +39238,7 @@
         <p:spPr>
           <a:xfrm>
             <a:off x="452160" y="3943800"/>
-            <a:ext cx="4856040" cy="233640"/>
+            <a:ext cx="4855680" cy="233280"/>
           </a:xfrm>
           <a:prstGeom prst="rect">
             <a:avLst/>
@@ -39312,7 +39290,7 @@
         <p:spPr>
           <a:xfrm>
             <a:off x="460440" y="4245480"/>
-            <a:ext cx="4839120" cy="200160"/>
+            <a:ext cx="4838760" cy="199800"/>
           </a:xfrm>
           <a:prstGeom prst="rect">
             <a:avLst/>
@@ -39366,7 +39344,7 @@
         <p:spPr>
           <a:xfrm>
             <a:off x="347400" y="5867640"/>
-            <a:ext cx="5065200" cy="761400"/>
+            <a:ext cx="5064840" cy="761040"/>
           </a:xfrm>
           <a:custGeom>
             <a:avLst/>
@@ -39422,7 +39400,7 @@
         <p:spPr>
           <a:xfrm>
             <a:off x="456480" y="6014520"/>
-            <a:ext cx="4847760" cy="233640"/>
+            <a:ext cx="4847400" cy="233280"/>
           </a:xfrm>
           <a:prstGeom prst="rect">
             <a:avLst/>
@@ -39484,7 +39462,7 @@
         <p:spPr>
           <a:xfrm>
             <a:off x="456480" y="6248880"/>
-            <a:ext cx="4847760" cy="233640"/>
+            <a:ext cx="4847400" cy="233280"/>
           </a:xfrm>
           <a:prstGeom prst="rect">
             <a:avLst/>
@@ -39546,7 +39524,7 @@
         <p:spPr>
           <a:xfrm>
             <a:off x="5643000" y="1386000"/>
-            <a:ext cx="6204240" cy="1807920"/>
+            <a:ext cx="6203880" cy="1807560"/>
           </a:xfrm>
           <a:custGeom>
             <a:avLst/>
@@ -39602,7 +39580,7 @@
         <p:spPr>
           <a:xfrm>
             <a:off x="5823000" y="1566000"/>
-            <a:ext cx="5944680" cy="267120"/>
+            <a:ext cx="5944320" cy="266760"/>
           </a:xfrm>
           <a:prstGeom prst="rect">
             <a:avLst/>
@@ -39654,7 +39632,7 @@
         <p:spPr>
           <a:xfrm>
             <a:off x="5823000" y="1934280"/>
-            <a:ext cx="5919480" cy="493200"/>
+            <a:ext cx="5919120" cy="492840"/>
           </a:xfrm>
           <a:prstGeom prst="rect">
             <a:avLst/>
@@ -39746,7 +39724,7 @@
         <p:spPr>
           <a:xfrm>
             <a:off x="5823000" y="2524680"/>
-            <a:ext cx="5919480" cy="493200"/>
+            <a:ext cx="5919120" cy="492840"/>
           </a:xfrm>
           <a:prstGeom prst="rect">
             <a:avLst/>
@@ -39818,7 +39796,7 @@
         <p:spPr>
           <a:xfrm>
             <a:off x="5643000" y="3353760"/>
-            <a:ext cx="6204240" cy="2050920"/>
+            <a:ext cx="6203880" cy="2050560"/>
           </a:xfrm>
           <a:custGeom>
             <a:avLst/>
@@ -39874,7 +39852,7 @@
         <p:spPr>
           <a:xfrm>
             <a:off x="5823000" y="3533760"/>
-            <a:ext cx="5944680" cy="267120"/>
+            <a:ext cx="5944320" cy="266760"/>
           </a:xfrm>
           <a:prstGeom prst="rect">
             <a:avLst/>
@@ -39926,7 +39904,7 @@
         <p:spPr>
           <a:xfrm>
             <a:off x="5823000" y="3902040"/>
-            <a:ext cx="5919480" cy="736200"/>
+            <a:ext cx="5919120" cy="735840"/>
           </a:xfrm>
           <a:prstGeom prst="rect">
             <a:avLst/>
@@ -39998,7 +39976,7 @@
         <p:spPr>
           <a:xfrm>
             <a:off x="5823000" y="4737240"/>
-            <a:ext cx="5919480" cy="493200"/>
+            <a:ext cx="5919120" cy="492840"/>
           </a:xfrm>
           <a:prstGeom prst="rect">
             <a:avLst/>
@@ -40060,7 +40038,7 @@
         <p:spPr>
           <a:xfrm>
             <a:off x="5643000" y="5566320"/>
-            <a:ext cx="6204240" cy="1062720"/>
+            <a:ext cx="6203880" cy="1062360"/>
           </a:xfrm>
           <a:custGeom>
             <a:avLst/>
@@ -40116,7 +40094,7 @@
         <p:spPr>
           <a:xfrm>
             <a:off x="5789520" y="5712840"/>
-            <a:ext cx="5994720" cy="233640"/>
+            <a:ext cx="5994360" cy="233280"/>
           </a:xfrm>
           <a:prstGeom prst="rect">
             <a:avLst/>
@@ -40168,7 +40146,7 @@
         <p:spPr>
           <a:xfrm>
             <a:off x="5789520" y="6048000"/>
-            <a:ext cx="5978160" cy="434880"/>
+            <a:ext cx="5977800" cy="434520"/>
           </a:xfrm>
           <a:prstGeom prst="rect">
             <a:avLst/>

--- a/assets/libreoffice_impr_njc/12fd9a81-7fdf-4f21-b6ce-7388cd2f840c/The Golden Age of Arcade Games.pptx
+++ b/assets/libreoffice_impr_njc/12fd9a81-7fdf-4f21-b6ce-7388cd2f840c/The Golden Age of Arcade Games.pptx
@@ -311,7 +311,7 @@
             <a:pPr algn="r">
               <a:buNone/>
             </a:pPr>
-            <a:fld id="{135C4E82-FFA8-483C-94C7-7037BDD5261D}" type="slidenum">
+            <a:fld id="{4C16F46D-1F36-40E9-9935-64F3CEB9101B}" type="slidenum">
               <a:rPr b="0" lang="en-HK" sz="1400" spc="-1" strike="noStrike">
                 <a:latin typeface="Times New Roman"/>
               </a:rPr>
@@ -359,7 +359,7 @@
         <p:spPr>
           <a:xfrm>
             <a:off x="685800" y="1143000"/>
-            <a:ext cx="5485320" cy="3085200"/>
+            <a:ext cx="5484600" cy="3084480"/>
           </a:xfrm>
           <a:prstGeom prst="rect">
             <a:avLst/>
@@ -382,7 +382,7 @@
         <p:spPr>
           <a:xfrm>
             <a:off x="685800" y="4400640"/>
-            <a:ext cx="5485320" cy="3599280"/>
+            <a:ext cx="5484600" cy="3598560"/>
           </a:xfrm>
           <a:prstGeom prst="rect">
             <a:avLst/>
@@ -416,7 +416,7 @@
         <p:spPr>
           <a:xfrm>
             <a:off x="3884760" y="8685360"/>
-            <a:ext cx="2970720" cy="457560"/>
+            <a:ext cx="2970000" cy="456840"/>
           </a:xfrm>
           <a:prstGeom prst="rect">
             <a:avLst/>
@@ -448,7 +448,7 @@
               </a:lnSpc>
               <a:buNone/>
             </a:pPr>
-            <a:fld id="{6D3589C2-3112-4FFE-8803-49E7DC64E527}" type="slidenum">
+            <a:fld id="{DC41B31C-21BA-41CC-AB48-E5D1BCED4E3F}" type="slidenum">
               <a:rPr b="0" lang="en-US" sz="1200" spc="-1" strike="noStrike">
                 <a:latin typeface="Times New Roman"/>
               </a:rPr>
@@ -495,7 +495,7 @@
         <p:spPr>
           <a:xfrm>
             <a:off x="685800" y="1143000"/>
-            <a:ext cx="5485320" cy="3085200"/>
+            <a:ext cx="5484600" cy="3084480"/>
           </a:xfrm>
           <a:prstGeom prst="rect">
             <a:avLst/>
@@ -518,7 +518,7 @@
         <p:spPr>
           <a:xfrm>
             <a:off x="685800" y="4400640"/>
-            <a:ext cx="5485320" cy="3599280"/>
+            <a:ext cx="5484600" cy="3598560"/>
           </a:xfrm>
           <a:prstGeom prst="rect">
             <a:avLst/>
@@ -552,7 +552,7 @@
         <p:spPr>
           <a:xfrm>
             <a:off x="3884760" y="8685360"/>
-            <a:ext cx="2970720" cy="457560"/>
+            <a:ext cx="2970000" cy="456840"/>
           </a:xfrm>
           <a:prstGeom prst="rect">
             <a:avLst/>
@@ -584,7 +584,7 @@
               </a:lnSpc>
               <a:buNone/>
             </a:pPr>
-            <a:fld id="{CE3349F7-7E0F-40E9-B4EB-76DD72C7D2E7}" type="slidenum">
+            <a:fld id="{0F6D0104-3151-4552-92C2-DAD45454C123}" type="slidenum">
               <a:rPr b="0" lang="en-US" sz="1200" spc="-1" strike="noStrike">
                 <a:latin typeface="Times New Roman"/>
               </a:rPr>
@@ -631,7 +631,7 @@
         <p:spPr>
           <a:xfrm>
             <a:off x="685800" y="1143000"/>
-            <a:ext cx="5485320" cy="3085200"/>
+            <a:ext cx="5484600" cy="3084480"/>
           </a:xfrm>
           <a:prstGeom prst="rect">
             <a:avLst/>
@@ -654,7 +654,7 @@
         <p:spPr>
           <a:xfrm>
             <a:off x="685800" y="4400640"/>
-            <a:ext cx="5485320" cy="3599280"/>
+            <a:ext cx="5484600" cy="3598560"/>
           </a:xfrm>
           <a:prstGeom prst="rect">
             <a:avLst/>
@@ -688,7 +688,7 @@
         <p:spPr>
           <a:xfrm>
             <a:off x="3884760" y="8685360"/>
-            <a:ext cx="2970720" cy="457560"/>
+            <a:ext cx="2970000" cy="456840"/>
           </a:xfrm>
           <a:prstGeom prst="rect">
             <a:avLst/>
@@ -720,7 +720,7 @@
               </a:lnSpc>
               <a:buNone/>
             </a:pPr>
-            <a:fld id="{FCE9E023-2F74-4BAF-88B5-7FEF94E29584}" type="slidenum">
+            <a:fld id="{454B4653-49DE-499D-96B2-AD896B0E1E91}" type="slidenum">
               <a:rPr b="0" lang="en-US" sz="1200" spc="-1" strike="noStrike">
                 <a:latin typeface="Times New Roman"/>
               </a:rPr>
@@ -767,7 +767,7 @@
         <p:spPr>
           <a:xfrm>
             <a:off x="685800" y="1143000"/>
-            <a:ext cx="5485320" cy="3085200"/>
+            <a:ext cx="5484600" cy="3084480"/>
           </a:xfrm>
           <a:prstGeom prst="rect">
             <a:avLst/>
@@ -790,7 +790,7 @@
         <p:spPr>
           <a:xfrm>
             <a:off x="685800" y="4400640"/>
-            <a:ext cx="5485320" cy="3599280"/>
+            <a:ext cx="5484600" cy="3598560"/>
           </a:xfrm>
           <a:prstGeom prst="rect">
             <a:avLst/>
@@ -824,7 +824,7 @@
         <p:spPr>
           <a:xfrm>
             <a:off x="3884760" y="8685360"/>
-            <a:ext cx="2970720" cy="457560"/>
+            <a:ext cx="2970000" cy="456840"/>
           </a:xfrm>
           <a:prstGeom prst="rect">
             <a:avLst/>
@@ -856,7 +856,7 @@
               </a:lnSpc>
               <a:buNone/>
             </a:pPr>
-            <a:fld id="{60339EA4-FBF2-4B5B-BE0F-A8AEC42F00E5}" type="slidenum">
+            <a:fld id="{E3DE2C35-4166-43B3-B263-92A5A6E94A2E}" type="slidenum">
               <a:rPr b="0" lang="en-US" sz="1200" spc="-1" strike="noStrike">
                 <a:latin typeface="Times New Roman"/>
               </a:rPr>
@@ -903,7 +903,7 @@
         <p:spPr>
           <a:xfrm>
             <a:off x="685800" y="1143000"/>
-            <a:ext cx="5485320" cy="3085200"/>
+            <a:ext cx="5484600" cy="3084480"/>
           </a:xfrm>
           <a:prstGeom prst="rect">
             <a:avLst/>
@@ -926,7 +926,7 @@
         <p:spPr>
           <a:xfrm>
             <a:off x="685800" y="4400640"/>
-            <a:ext cx="5485320" cy="3599280"/>
+            <a:ext cx="5484600" cy="3598560"/>
           </a:xfrm>
           <a:prstGeom prst="rect">
             <a:avLst/>
@@ -960,7 +960,7 @@
         <p:spPr>
           <a:xfrm>
             <a:off x="3884760" y="8685360"/>
-            <a:ext cx="2970720" cy="457560"/>
+            <a:ext cx="2970000" cy="456840"/>
           </a:xfrm>
           <a:prstGeom prst="rect">
             <a:avLst/>
@@ -992,7 +992,7 @@
               </a:lnSpc>
               <a:buNone/>
             </a:pPr>
-            <a:fld id="{7A28409A-F184-4502-B630-C3112548561E}" type="slidenum">
+            <a:fld id="{5C8EEE3F-8D14-46F5-8C52-8B91F591F46C}" type="slidenum">
               <a:rPr b="0" lang="en-US" sz="1200" spc="-1" strike="noStrike">
                 <a:latin typeface="Times New Roman"/>
               </a:rPr>
@@ -1039,7 +1039,7 @@
         <p:spPr>
           <a:xfrm>
             <a:off x="685800" y="1143000"/>
-            <a:ext cx="5485320" cy="3085200"/>
+            <a:ext cx="5484600" cy="3084480"/>
           </a:xfrm>
           <a:prstGeom prst="rect">
             <a:avLst/>
@@ -1062,7 +1062,7 @@
         <p:spPr>
           <a:xfrm>
             <a:off x="685800" y="4400640"/>
-            <a:ext cx="5485320" cy="3599280"/>
+            <a:ext cx="5484600" cy="3598560"/>
           </a:xfrm>
           <a:prstGeom prst="rect">
             <a:avLst/>
@@ -1096,7 +1096,7 @@
         <p:spPr>
           <a:xfrm>
             <a:off x="3884760" y="8685360"/>
-            <a:ext cx="2970720" cy="457560"/>
+            <a:ext cx="2970000" cy="456840"/>
           </a:xfrm>
           <a:prstGeom prst="rect">
             <a:avLst/>
@@ -1128,7 +1128,7 @@
               </a:lnSpc>
               <a:buNone/>
             </a:pPr>
-            <a:fld id="{5A3565EE-F47B-4723-8235-F06E820FE9CB}" type="slidenum">
+            <a:fld id="{0964F61D-548C-46C2-9781-F564069B1382}" type="slidenum">
               <a:rPr b="0" lang="en-US" sz="1200" spc="-1" strike="noStrike">
                 <a:latin typeface="Times New Roman"/>
               </a:rPr>
@@ -1175,7 +1175,7 @@
         <p:spPr>
           <a:xfrm>
             <a:off x="685800" y="1143000"/>
-            <a:ext cx="5485320" cy="3085200"/>
+            <a:ext cx="5484600" cy="3084480"/>
           </a:xfrm>
           <a:prstGeom prst="rect">
             <a:avLst/>
@@ -1198,7 +1198,7 @@
         <p:spPr>
           <a:xfrm>
             <a:off x="685800" y="4400640"/>
-            <a:ext cx="5485320" cy="3599280"/>
+            <a:ext cx="5484600" cy="3598560"/>
           </a:xfrm>
           <a:prstGeom prst="rect">
             <a:avLst/>
@@ -1232,7 +1232,7 @@
         <p:spPr>
           <a:xfrm>
             <a:off x="3884760" y="8685360"/>
-            <a:ext cx="2970720" cy="457560"/>
+            <a:ext cx="2970000" cy="456840"/>
           </a:xfrm>
           <a:prstGeom prst="rect">
             <a:avLst/>
@@ -1264,7 +1264,7 @@
               </a:lnSpc>
               <a:buNone/>
             </a:pPr>
-            <a:fld id="{24FB2F09-ABD3-47CA-A7BD-98EFE8A15F0B}" type="slidenum">
+            <a:fld id="{70ECDED6-17AA-4F29-A056-C9904ED4A2E2}" type="slidenum">
               <a:rPr b="0" lang="en-US" sz="1200" spc="-1" strike="noStrike">
                 <a:latin typeface="Times New Roman"/>
               </a:rPr>
@@ -1311,7 +1311,7 @@
         <p:spPr>
           <a:xfrm>
             <a:off x="685800" y="1143000"/>
-            <a:ext cx="5485320" cy="3085200"/>
+            <a:ext cx="5484600" cy="3084480"/>
           </a:xfrm>
           <a:prstGeom prst="rect">
             <a:avLst/>
@@ -1334,7 +1334,7 @@
         <p:spPr>
           <a:xfrm>
             <a:off x="685800" y="4400640"/>
-            <a:ext cx="5485320" cy="3599280"/>
+            <a:ext cx="5484600" cy="3598560"/>
           </a:xfrm>
           <a:prstGeom prst="rect">
             <a:avLst/>
@@ -1368,7 +1368,7 @@
         <p:spPr>
           <a:xfrm>
             <a:off x="3884760" y="8685360"/>
-            <a:ext cx="2970720" cy="457560"/>
+            <a:ext cx="2970000" cy="456840"/>
           </a:xfrm>
           <a:prstGeom prst="rect">
             <a:avLst/>
@@ -1400,7 +1400,7 @@
               </a:lnSpc>
               <a:buNone/>
             </a:pPr>
-            <a:fld id="{3B667EDF-38F8-4E7E-822E-02D50B95DB5F}" type="slidenum">
+            <a:fld id="{E99AB686-AF25-4E46-9F7F-4DB8221C770E}" type="slidenum">
               <a:rPr b="0" lang="en-US" sz="1200" spc="-1" strike="noStrike">
                 <a:latin typeface="Times New Roman"/>
               </a:rPr>
@@ -1447,7 +1447,7 @@
         <p:spPr>
           <a:xfrm>
             <a:off x="685800" y="1143000"/>
-            <a:ext cx="5485320" cy="3085200"/>
+            <a:ext cx="5484600" cy="3084480"/>
           </a:xfrm>
           <a:prstGeom prst="rect">
             <a:avLst/>
@@ -1470,7 +1470,7 @@
         <p:spPr>
           <a:xfrm>
             <a:off x="685800" y="4400640"/>
-            <a:ext cx="5485320" cy="3599280"/>
+            <a:ext cx="5484600" cy="3598560"/>
           </a:xfrm>
           <a:prstGeom prst="rect">
             <a:avLst/>
@@ -1504,7 +1504,7 @@
         <p:spPr>
           <a:xfrm>
             <a:off x="3884760" y="8685360"/>
-            <a:ext cx="2970720" cy="457560"/>
+            <a:ext cx="2970000" cy="456840"/>
           </a:xfrm>
           <a:prstGeom prst="rect">
             <a:avLst/>
@@ -1536,7 +1536,7 @@
               </a:lnSpc>
               <a:buNone/>
             </a:pPr>
-            <a:fld id="{ECE41C35-53B4-48A7-91D8-6840DB066899}" type="slidenum">
+            <a:fld id="{BB566932-6D24-4013-B792-6950CD841723}" type="slidenum">
               <a:rPr b="0" lang="en-US" sz="1200" spc="-1" strike="noStrike">
                 <a:latin typeface="Times New Roman"/>
               </a:rPr>
@@ -1583,7 +1583,7 @@
         <p:spPr>
           <a:xfrm>
             <a:off x="685800" y="1143000"/>
-            <a:ext cx="5485320" cy="3085200"/>
+            <a:ext cx="5484600" cy="3084480"/>
           </a:xfrm>
           <a:prstGeom prst="rect">
             <a:avLst/>
@@ -1606,7 +1606,7 @@
         <p:spPr>
           <a:xfrm>
             <a:off x="685800" y="4400640"/>
-            <a:ext cx="5485320" cy="3599280"/>
+            <a:ext cx="5484600" cy="3598560"/>
           </a:xfrm>
           <a:prstGeom prst="rect">
             <a:avLst/>
@@ -1640,7 +1640,7 @@
         <p:spPr>
           <a:xfrm>
             <a:off x="3884760" y="8685360"/>
-            <a:ext cx="2970720" cy="457560"/>
+            <a:ext cx="2970000" cy="456840"/>
           </a:xfrm>
           <a:prstGeom prst="rect">
             <a:avLst/>
@@ -1672,7 +1672,7 @@
               </a:lnSpc>
               <a:buNone/>
             </a:pPr>
-            <a:fld id="{43DD190A-180A-4784-BB03-F0123E551FF5}" type="slidenum">
+            <a:fld id="{13CBC57C-20EE-4684-9000-1439DB58B5D1}" type="slidenum">
               <a:rPr b="0" lang="en-US" sz="1200" spc="-1" strike="noStrike">
                 <a:latin typeface="Times New Roman"/>
               </a:rPr>
@@ -1719,7 +1719,7 @@
         <p:spPr>
           <a:xfrm>
             <a:off x="685800" y="1143000"/>
-            <a:ext cx="5485320" cy="3085200"/>
+            <a:ext cx="5484600" cy="3084480"/>
           </a:xfrm>
           <a:prstGeom prst="rect">
             <a:avLst/>
@@ -1742,7 +1742,7 @@
         <p:spPr>
           <a:xfrm>
             <a:off x="685800" y="4400640"/>
-            <a:ext cx="5485320" cy="3599280"/>
+            <a:ext cx="5484600" cy="3598560"/>
           </a:xfrm>
           <a:prstGeom prst="rect">
             <a:avLst/>
@@ -1776,7 +1776,7 @@
         <p:spPr>
           <a:xfrm>
             <a:off x="3884760" y="8685360"/>
-            <a:ext cx="2970720" cy="457560"/>
+            <a:ext cx="2970000" cy="456840"/>
           </a:xfrm>
           <a:prstGeom prst="rect">
             <a:avLst/>
@@ -1808,7 +1808,7 @@
               </a:lnSpc>
               <a:buNone/>
             </a:pPr>
-            <a:fld id="{D2B3D19D-A129-4C40-BB2D-7B1DF5C90EB1}" type="slidenum">
+            <a:fld id="{B8BD5A2E-2FA1-41AE-B834-C759D04C2350}" type="slidenum">
               <a:rPr b="0" lang="en-US" sz="1200" spc="-1" strike="noStrike">
                 <a:latin typeface="Times New Roman"/>
               </a:rPr>
@@ -1855,7 +1855,7 @@
         <p:spPr>
           <a:xfrm>
             <a:off x="685800" y="1143000"/>
-            <a:ext cx="5485320" cy="3085200"/>
+            <a:ext cx="5484600" cy="3084480"/>
           </a:xfrm>
           <a:prstGeom prst="rect">
             <a:avLst/>
@@ -1878,7 +1878,7 @@
         <p:spPr>
           <a:xfrm>
             <a:off x="685800" y="4400640"/>
-            <a:ext cx="5485320" cy="3599280"/>
+            <a:ext cx="5484600" cy="3598560"/>
           </a:xfrm>
           <a:prstGeom prst="rect">
             <a:avLst/>
@@ -1912,7 +1912,7 @@
         <p:spPr>
           <a:xfrm>
             <a:off x="3884760" y="8685360"/>
-            <a:ext cx="2970720" cy="457560"/>
+            <a:ext cx="2970000" cy="456840"/>
           </a:xfrm>
           <a:prstGeom prst="rect">
             <a:avLst/>
@@ -1944,7 +1944,7 @@
               </a:lnSpc>
               <a:buNone/>
             </a:pPr>
-            <a:fld id="{A9C82BE3-CFB2-4580-BAD8-D5FAB6244A3F}" type="slidenum">
+            <a:fld id="{33CB2960-66E5-4456-9E60-E2B4CCD0536C}" type="slidenum">
               <a:rPr b="0" lang="en-US" sz="1200" spc="-1" strike="noStrike">
                 <a:latin typeface="Times New Roman"/>
               </a:rPr>
@@ -1991,7 +1991,7 @@
         <p:spPr>
           <a:xfrm>
             <a:off x="685800" y="1143000"/>
-            <a:ext cx="5485320" cy="3085200"/>
+            <a:ext cx="5484600" cy="3084480"/>
           </a:xfrm>
           <a:prstGeom prst="rect">
             <a:avLst/>
@@ -2014,7 +2014,7 @@
         <p:spPr>
           <a:xfrm>
             <a:off x="685800" y="4400640"/>
-            <a:ext cx="5485320" cy="3599280"/>
+            <a:ext cx="5484600" cy="3598560"/>
           </a:xfrm>
           <a:prstGeom prst="rect">
             <a:avLst/>
@@ -2048,7 +2048,7 @@
         <p:spPr>
           <a:xfrm>
             <a:off x="3884760" y="8685360"/>
-            <a:ext cx="2970720" cy="457560"/>
+            <a:ext cx="2970000" cy="456840"/>
           </a:xfrm>
           <a:prstGeom prst="rect">
             <a:avLst/>
@@ -2080,7 +2080,7 @@
               </a:lnSpc>
               <a:buNone/>
             </a:pPr>
-            <a:fld id="{0596B357-CE7A-4C35-A9B1-51779722A498}" type="slidenum">
+            <a:fld id="{006814EB-055D-4B84-AC0F-AFF3B2121147}" type="slidenum">
               <a:rPr b="0" lang="en-US" sz="1200" spc="-1" strike="noStrike">
                 <a:latin typeface="Times New Roman"/>
               </a:rPr>
@@ -2127,7 +2127,7 @@
         <p:spPr>
           <a:xfrm>
             <a:off x="685800" y="1143000"/>
-            <a:ext cx="5485320" cy="3085200"/>
+            <a:ext cx="5484600" cy="3084480"/>
           </a:xfrm>
           <a:prstGeom prst="rect">
             <a:avLst/>
@@ -2150,7 +2150,7 @@
         <p:spPr>
           <a:xfrm>
             <a:off x="685800" y="4400640"/>
-            <a:ext cx="5485320" cy="3599280"/>
+            <a:ext cx="5484600" cy="3598560"/>
           </a:xfrm>
           <a:prstGeom prst="rect">
             <a:avLst/>
@@ -2184,7 +2184,7 @@
         <p:spPr>
           <a:xfrm>
             <a:off x="3884760" y="8685360"/>
-            <a:ext cx="2970720" cy="457560"/>
+            <a:ext cx="2970000" cy="456840"/>
           </a:xfrm>
           <a:prstGeom prst="rect">
             <a:avLst/>
@@ -2216,7 +2216,7 @@
               </a:lnSpc>
               <a:buNone/>
             </a:pPr>
-            <a:fld id="{38356F6D-688E-4C80-A3EE-D3651747B422}" type="slidenum">
+            <a:fld id="{C5B6FA06-B952-42CA-A770-6A0F91BCF657}" type="slidenum">
               <a:rPr b="0" lang="en-US" sz="1200" spc="-1" strike="noStrike">
                 <a:latin typeface="Times New Roman"/>
               </a:rPr>
@@ -2263,7 +2263,7 @@
         <p:spPr>
           <a:xfrm>
             <a:off x="685800" y="1143000"/>
-            <a:ext cx="5485320" cy="3085200"/>
+            <a:ext cx="5484600" cy="3084480"/>
           </a:xfrm>
           <a:prstGeom prst="rect">
             <a:avLst/>
@@ -2286,7 +2286,7 @@
         <p:spPr>
           <a:xfrm>
             <a:off x="685800" y="4400640"/>
-            <a:ext cx="5485320" cy="3599280"/>
+            <a:ext cx="5484600" cy="3598560"/>
           </a:xfrm>
           <a:prstGeom prst="rect">
             <a:avLst/>
@@ -2320,7 +2320,7 @@
         <p:spPr>
           <a:xfrm>
             <a:off x="3884760" y="8685360"/>
-            <a:ext cx="2970720" cy="457560"/>
+            <a:ext cx="2970000" cy="456840"/>
           </a:xfrm>
           <a:prstGeom prst="rect">
             <a:avLst/>
@@ -2352,7 +2352,7 @@
               </a:lnSpc>
               <a:buNone/>
             </a:pPr>
-            <a:fld id="{D9DF5CCB-3AE5-49D9-BB55-BE9857E40167}" type="slidenum">
+            <a:fld id="{4CABB6F6-8DB1-48A2-8724-B8E1D18544DD}" type="slidenum">
               <a:rPr b="0" lang="en-US" sz="1200" spc="-1" strike="noStrike">
                 <a:latin typeface="Times New Roman"/>
               </a:rPr>
@@ -2399,7 +2399,7 @@
         <p:spPr>
           <a:xfrm>
             <a:off x="685800" y="1143000"/>
-            <a:ext cx="5485320" cy="3085200"/>
+            <a:ext cx="5484600" cy="3084480"/>
           </a:xfrm>
           <a:prstGeom prst="rect">
             <a:avLst/>
@@ -2422,7 +2422,7 @@
         <p:spPr>
           <a:xfrm>
             <a:off x="685800" y="4400640"/>
-            <a:ext cx="5485320" cy="3599280"/>
+            <a:ext cx="5484600" cy="3598560"/>
           </a:xfrm>
           <a:prstGeom prst="rect">
             <a:avLst/>
@@ -2456,7 +2456,7 @@
         <p:spPr>
           <a:xfrm>
             <a:off x="3884760" y="8685360"/>
-            <a:ext cx="2970720" cy="457560"/>
+            <a:ext cx="2970000" cy="456840"/>
           </a:xfrm>
           <a:prstGeom prst="rect">
             <a:avLst/>
@@ -2488,7 +2488,7 @@
               </a:lnSpc>
               <a:buNone/>
             </a:pPr>
-            <a:fld id="{D5C0685C-064A-4E93-8947-DAF53C1D2659}" type="slidenum">
+            <a:fld id="{5F43F71E-39D3-47E8-BD15-C34034813DE6}" type="slidenum">
               <a:rPr b="0" lang="en-US" sz="1200" spc="-1" strike="noStrike">
                 <a:latin typeface="Times New Roman"/>
               </a:rPr>
@@ -2535,7 +2535,7 @@
         <p:spPr>
           <a:xfrm>
             <a:off x="685800" y="1143000"/>
-            <a:ext cx="5485320" cy="3085200"/>
+            <a:ext cx="5484600" cy="3084480"/>
           </a:xfrm>
           <a:prstGeom prst="rect">
             <a:avLst/>
@@ -2558,7 +2558,7 @@
         <p:spPr>
           <a:xfrm>
             <a:off x="685800" y="4400640"/>
-            <a:ext cx="5485320" cy="3599280"/>
+            <a:ext cx="5484600" cy="3598560"/>
           </a:xfrm>
           <a:prstGeom prst="rect">
             <a:avLst/>
@@ -2592,7 +2592,7 @@
         <p:spPr>
           <a:xfrm>
             <a:off x="3884760" y="8685360"/>
-            <a:ext cx="2970720" cy="457560"/>
+            <a:ext cx="2970000" cy="456840"/>
           </a:xfrm>
           <a:prstGeom prst="rect">
             <a:avLst/>
@@ -2624,7 +2624,7 @@
               </a:lnSpc>
               <a:buNone/>
             </a:pPr>
-            <a:fld id="{7EBEE803-AD70-4CC5-8F99-46A32F821024}" type="slidenum">
+            <a:fld id="{A5127634-D1EA-4948-AC10-134E6EEDAC23}" type="slidenum">
               <a:rPr b="0" lang="en-US" sz="1200" spc="-1" strike="noStrike">
                 <a:latin typeface="Times New Roman"/>
               </a:rPr>
@@ -2671,7 +2671,7 @@
         <p:spPr>
           <a:xfrm>
             <a:off x="685800" y="1143000"/>
-            <a:ext cx="5485320" cy="3085200"/>
+            <a:ext cx="5484600" cy="3084480"/>
           </a:xfrm>
           <a:prstGeom prst="rect">
             <a:avLst/>
@@ -2694,7 +2694,7 @@
         <p:spPr>
           <a:xfrm>
             <a:off x="685800" y="4400640"/>
-            <a:ext cx="5485320" cy="3599280"/>
+            <a:ext cx="5484600" cy="3598560"/>
           </a:xfrm>
           <a:prstGeom prst="rect">
             <a:avLst/>
@@ -2728,7 +2728,7 @@
         <p:spPr>
           <a:xfrm>
             <a:off x="3884760" y="8685360"/>
-            <a:ext cx="2970720" cy="457560"/>
+            <a:ext cx="2970000" cy="456840"/>
           </a:xfrm>
           <a:prstGeom prst="rect">
             <a:avLst/>
@@ -2760,7 +2760,7 @@
               </a:lnSpc>
               <a:buNone/>
             </a:pPr>
-            <a:fld id="{D504031F-0665-4E5E-9CE8-09462FE5DD5B}" type="slidenum">
+            <a:fld id="{FA709C96-0368-4108-8B32-6F53F1E524A9}" type="slidenum">
               <a:rPr b="0" lang="en-US" sz="1200" spc="-1" strike="noStrike">
                 <a:latin typeface="Times New Roman"/>
               </a:rPr>
@@ -2807,7 +2807,7 @@
         <p:spPr>
           <a:xfrm>
             <a:off x="685800" y="1143000"/>
-            <a:ext cx="5485320" cy="3085200"/>
+            <a:ext cx="5484600" cy="3084480"/>
           </a:xfrm>
           <a:prstGeom prst="rect">
             <a:avLst/>
@@ -2830,7 +2830,7 @@
         <p:spPr>
           <a:xfrm>
             <a:off x="685800" y="4400640"/>
-            <a:ext cx="5485320" cy="3599280"/>
+            <a:ext cx="5484600" cy="3598560"/>
           </a:xfrm>
           <a:prstGeom prst="rect">
             <a:avLst/>
@@ -2864,7 +2864,7 @@
         <p:spPr>
           <a:xfrm>
             <a:off x="3884760" y="8685360"/>
-            <a:ext cx="2970720" cy="457560"/>
+            <a:ext cx="2970000" cy="456840"/>
           </a:xfrm>
           <a:prstGeom prst="rect">
             <a:avLst/>
@@ -2896,7 +2896,7 @@
               </a:lnSpc>
               <a:buNone/>
             </a:pPr>
-            <a:fld id="{C2C024B0-5BF0-44B4-BD34-02B68497512F}" type="slidenum">
+            <a:fld id="{567715E9-A064-4998-8ADF-D26A7A83BD69}" type="slidenum">
               <a:rPr b="0" lang="en-US" sz="1200" spc="-1" strike="noStrike">
                 <a:latin typeface="Times New Roman"/>
               </a:rPr>
@@ -2943,7 +2943,7 @@
         <p:spPr>
           <a:xfrm>
             <a:off x="685800" y="1143000"/>
-            <a:ext cx="5485320" cy="3085200"/>
+            <a:ext cx="5484600" cy="3084480"/>
           </a:xfrm>
           <a:prstGeom prst="rect">
             <a:avLst/>
@@ -2966,7 +2966,7 @@
         <p:spPr>
           <a:xfrm>
             <a:off x="685800" y="4400640"/>
-            <a:ext cx="5485320" cy="3599280"/>
+            <a:ext cx="5484600" cy="3598560"/>
           </a:xfrm>
           <a:prstGeom prst="rect">
             <a:avLst/>
@@ -3000,7 +3000,7 @@
         <p:spPr>
           <a:xfrm>
             <a:off x="3884760" y="8685360"/>
-            <a:ext cx="2970720" cy="457560"/>
+            <a:ext cx="2970000" cy="456840"/>
           </a:xfrm>
           <a:prstGeom prst="rect">
             <a:avLst/>
@@ -3032,7 +3032,7 @@
               </a:lnSpc>
               <a:buNone/>
             </a:pPr>
-            <a:fld id="{A701DD23-57AD-41D9-BB0B-F7F0C2A22EC6}" type="slidenum">
+            <a:fld id="{2EAF9425-7F3C-40B5-B1CF-05FAD1685061}" type="slidenum">
               <a:rPr b="0" lang="en-US" sz="1200" spc="-1" strike="noStrike">
                 <a:latin typeface="Times New Roman"/>
               </a:rPr>
@@ -4876,7 +4876,7 @@
         <p:spPr>
           <a:xfrm>
             <a:off x="0" y="0"/>
-            <a:ext cx="12191040" cy="6856920"/>
+            <a:ext cx="12190320" cy="6856200"/>
           </a:xfrm>
           <a:prstGeom prst="roundRect">
             <a:avLst>
@@ -4908,7 +4908,7 @@
         <p:spPr>
           <a:xfrm>
             <a:off x="0" y="0"/>
-            <a:ext cx="12191040" cy="6856920"/>
+            <a:ext cx="12190320" cy="6856200"/>
           </a:xfrm>
           <a:custGeom>
             <a:avLst/>
@@ -4971,7 +4971,7 @@
         <p:spPr>
           <a:xfrm>
             <a:off x="5667480" y="1276200"/>
-            <a:ext cx="856080" cy="570600"/>
+            <a:ext cx="855360" cy="569880"/>
           </a:xfrm>
           <a:prstGeom prst="rect">
             <a:avLst/>
@@ -5009,11 +5009,7 @@
               </a:rPr>
               <a:t>👾</a:t>
             </a:r>
-            <a:endParaRPr b="1" lang="en-HK" sz="4500" spc="-1" strike="noStrike" u="sng">
-              <a:solidFill>
-                <a:srgbClr val="ffff00"/>
-              </a:solidFill>
-              <a:uFillTx/>
+            <a:endParaRPr b="0" lang="en-HK" sz="4500" spc="-1" strike="noStrike">
               <a:latin typeface="Arial"/>
             </a:endParaRPr>
           </a:p>
@@ -5028,7 +5024,7 @@
         <p:spPr>
           <a:xfrm>
             <a:off x="3164400" y="2305080"/>
-            <a:ext cx="5866200" cy="913320"/>
+            <a:ext cx="5865480" cy="912600"/>
           </a:xfrm>
           <a:prstGeom prst="rect">
             <a:avLst/>
@@ -5056,7 +5052,7 @@
               <a:buNone/>
             </a:pPr>
             <a:r>
-              <a:rPr b="1" i="1" lang="en-US" sz="7200" spc="-1" strike="noStrike" u="sng">
+              <a:rPr b="0" i="1" lang="en-US" sz="7200" spc="-1" strike="noStrike" u="sng">
                 <a:solidFill>
                   <a:srgbClr val="ffff00"/>
                 </a:solidFill>
@@ -5064,9 +5060,31 @@
                 <a:latin typeface="Jersey 20 Charted"/>
                 <a:ea typeface="Jersey 20 Charted"/>
               </a:rPr>
-              <a:t>THE GOLDEN AGE</a:t>
-            </a:r>
-            <a:endParaRPr b="1" lang="en-HK" sz="7200" spc="-1" strike="noStrike" u="sng">
+              <a:t>THE </a:t>
+            </a:r>
+            <a:r>
+              <a:rPr b="0" lang="en-US" sz="7200" spc="-1" strike="noStrike" u="sng">
+                <a:solidFill>
+                  <a:srgbClr val="ffff00"/>
+                </a:solidFill>
+                <a:uFillTx/>
+                <a:latin typeface="Jersey 20 Charted"/>
+                <a:ea typeface="Jersey 20 Charted"/>
+              </a:rPr>
+              <a:t>GOLDEN</a:t>
+            </a:r>
+            <a:r>
+              <a:rPr b="0" i="1" lang="en-US" sz="7200" spc="-1" strike="noStrike" u="sng">
+                <a:solidFill>
+                  <a:srgbClr val="ffff00"/>
+                </a:solidFill>
+                <a:uFillTx/>
+                <a:latin typeface="Jersey 20 Charted"/>
+                <a:ea typeface="Jersey 20 Charted"/>
+              </a:rPr>
+              <a:t> AGE</a:t>
+            </a:r>
+            <a:endParaRPr b="0" lang="en-HK" sz="7200" spc="-1" strike="noStrike" u="sng">
               <a:solidFill>
                 <a:srgbClr val="ffff00"/>
               </a:solidFill>
@@ -5085,7 +5103,7 @@
         <p:spPr>
           <a:xfrm>
             <a:off x="4154040" y="3448080"/>
-            <a:ext cx="3885120" cy="570600"/>
+            <a:ext cx="3884400" cy="569880"/>
           </a:xfrm>
           <a:prstGeom prst="rect">
             <a:avLst/>
@@ -5123,11 +5141,7 @@
               </a:rPr>
               <a:t>OF ARCADE GAMES</a:t>
             </a:r>
-            <a:endParaRPr b="1" lang="en-HK" sz="4500" spc="-1" strike="noStrike" u="sng">
-              <a:solidFill>
-                <a:srgbClr val="ffff00"/>
-              </a:solidFill>
-              <a:uFillTx/>
+            <a:endParaRPr b="0" lang="en-HK" sz="4500" spc="-1" strike="noStrike">
               <a:latin typeface="Arial"/>
             </a:endParaRPr>
           </a:p>
@@ -5142,7 +5156,7 @@
         <p:spPr>
           <a:xfrm>
             <a:off x="5486400" y="4324320"/>
-            <a:ext cx="1218240" cy="75240"/>
+            <a:ext cx="1217520" cy="74520"/>
           </a:xfrm>
           <a:custGeom>
             <a:avLst/>
@@ -5193,7 +5207,7 @@
         <p:spPr>
           <a:xfrm>
             <a:off x="5400720" y="4705200"/>
-            <a:ext cx="1389600" cy="379800"/>
+            <a:ext cx="1388880" cy="379080"/>
           </a:xfrm>
           <a:prstGeom prst="rect">
             <a:avLst/>
@@ -5221,21 +5235,19 @@
               <a:buNone/>
             </a:pPr>
             <a:r>
-              <a:rPr b="1" lang="en-US" sz="2700" spc="-1" strike="noStrike" u="sng">
+              <a:rPr b="0" lang="en-US" sz="2700" spc="-1" strike="noStrike">
                 <a:solidFill>
                   <a:srgbClr val="ffff00"/>
                 </a:solidFill>
-                <a:uFillTx/>
                 <a:latin typeface="Jersey 15"/>
                 <a:ea typeface="Jersey 15"/>
               </a:rPr>
               <a:t>1978-1983</a:t>
             </a:r>
-            <a:endParaRPr b="1" lang="en-HK" sz="2700" spc="-1" strike="noStrike" u="sng">
+            <a:endParaRPr b="0" lang="en-HK" sz="2700" spc="-1" strike="noStrike">
               <a:solidFill>
                 <a:srgbClr val="ffff00"/>
               </a:solidFill>
-              <a:uFillTx/>
               <a:latin typeface="Arial"/>
             </a:endParaRPr>
           </a:p>
@@ -5250,7 +5262,7 @@
         <p:spPr>
           <a:xfrm>
             <a:off x="4384080" y="5238720"/>
-            <a:ext cx="3418560" cy="342000"/>
+            <a:ext cx="3417840" cy="341280"/>
           </a:xfrm>
           <a:prstGeom prst="rect">
             <a:avLst/>
@@ -5286,13 +5298,37 @@
                 <a:latin typeface="Jersey 15"/>
                 <a:ea typeface="Jersey 15"/>
               </a:rPr>
-              <a:t>When Quarters Ruled the World</a:t>
-            </a:r>
-            <a:endParaRPr b="1" lang="en-HK" sz="2250" spc="-1" strike="noStrike" u="sng">
+              <a:t>When </a:t>
+            </a:r>
+            <a:r>
+              <a:rPr b="0" i="1" lang="en-US" sz="2250" spc="-1" strike="noStrike" u="sng">
+                <a:solidFill>
+                  <a:srgbClr val="ffff00"/>
+                </a:solidFill>
+                <a:highlight>
+                  <a:srgbClr val="ffff00"/>
+                </a:highlight>
+                <a:uFillTx/>
+                <a:latin typeface="Jersey 15"/>
+                <a:ea typeface="Jersey 15"/>
+              </a:rPr>
+              <a:t>Quarters</a:t>
+            </a:r>
+            <a:r>
+              <a:rPr b="1" lang="en-US" sz="2250" spc="-1" strike="noStrike" u="sng">
+                <a:solidFill>
+                  <a:srgbClr val="ffff00"/>
+                </a:solidFill>
+                <a:uFillTx/>
+                <a:latin typeface="Jersey 15"/>
+                <a:ea typeface="Jersey 15"/>
+              </a:rPr>
+              <a:t> Ruled the World</a:t>
+            </a:r>
+            <a:endParaRPr b="0" lang="en-HK" sz="2250" spc="-1" strike="noStrike">
               <a:solidFill>
                 <a:srgbClr val="ffff00"/>
               </a:solidFill>
-              <a:uFillTx/>
               <a:latin typeface="Arial"/>
             </a:endParaRPr>
           </a:p>
@@ -5307,7 +5343,7 @@
         <p:spPr>
           <a:xfrm>
             <a:off x="5715000" y="5867280"/>
-            <a:ext cx="151200" cy="151200"/>
+            <a:ext cx="150480" cy="150480"/>
           </a:xfrm>
           <a:custGeom>
             <a:avLst/>
@@ -5358,7 +5394,7 @@
         <p:spPr>
           <a:xfrm>
             <a:off x="6019920" y="5867280"/>
-            <a:ext cx="151200" cy="151200"/>
+            <a:ext cx="150480" cy="150480"/>
           </a:xfrm>
           <a:custGeom>
             <a:avLst/>
@@ -5409,7 +5445,7 @@
         <p:spPr>
           <a:xfrm>
             <a:off x="6324480" y="5867280"/>
-            <a:ext cx="151200" cy="151200"/>
+            <a:ext cx="150480" cy="150480"/>
           </a:xfrm>
           <a:custGeom>
             <a:avLst/>
@@ -5492,7 +5528,7 @@
         <p:spPr>
           <a:xfrm>
             <a:off x="0" y="0"/>
-            <a:ext cx="12191040" cy="6856920"/>
+            <a:ext cx="12190320" cy="6856200"/>
           </a:xfrm>
           <a:custGeom>
             <a:avLst/>
@@ -5555,7 +5591,7 @@
         <p:spPr>
           <a:xfrm>
             <a:off x="380880" y="380880"/>
-            <a:ext cx="11657520" cy="456120"/>
+            <a:ext cx="11656800" cy="455400"/>
           </a:xfrm>
           <a:prstGeom prst="rect">
             <a:avLst/>
@@ -5607,7 +5643,7 @@
         <p:spPr>
           <a:xfrm>
             <a:off x="380880" y="952560"/>
-            <a:ext cx="11543400" cy="303840"/>
+            <a:ext cx="11542680" cy="303120"/>
           </a:xfrm>
           <a:prstGeom prst="rect">
             <a:avLst/>
@@ -5659,7 +5695,7 @@
         <p:spPr>
           <a:xfrm>
             <a:off x="380880" y="1371600"/>
-            <a:ext cx="913320" cy="37080"/>
+            <a:ext cx="912600" cy="36360"/>
           </a:xfrm>
           <a:custGeom>
             <a:avLst/>
@@ -5710,7 +5746,7 @@
         <p:spPr>
           <a:xfrm>
             <a:off x="395280" y="1576440"/>
-            <a:ext cx="5609160" cy="751320"/>
+            <a:ext cx="5608440" cy="750600"/>
           </a:xfrm>
           <a:custGeom>
             <a:avLst/>
@@ -5766,7 +5802,7 @@
         <p:spPr>
           <a:xfrm>
             <a:off x="523800" y="1762200"/>
-            <a:ext cx="398880" cy="379800"/>
+            <a:ext cx="398160" cy="379080"/>
           </a:xfrm>
           <a:prstGeom prst="rect">
             <a:avLst/>
@@ -5818,7 +5854,7 @@
         <p:spPr>
           <a:xfrm>
             <a:off x="905040" y="1704960"/>
-            <a:ext cx="5066280" cy="265680"/>
+            <a:ext cx="5065560" cy="264960"/>
           </a:xfrm>
           <a:prstGeom prst="rect">
             <a:avLst/>
@@ -5870,7 +5906,7 @@
         <p:spPr>
           <a:xfrm>
             <a:off x="905040" y="1971720"/>
-            <a:ext cx="5047200" cy="227520"/>
+            <a:ext cx="5046480" cy="226800"/>
           </a:xfrm>
           <a:prstGeom prst="rect">
             <a:avLst/>
@@ -5924,7 +5960,7 @@
         <p:spPr>
           <a:xfrm>
             <a:off x="395280" y="2471760"/>
-            <a:ext cx="5609160" cy="751320"/>
+            <a:ext cx="5608440" cy="750600"/>
           </a:xfrm>
           <a:custGeom>
             <a:avLst/>
@@ -5980,7 +6016,7 @@
         <p:spPr>
           <a:xfrm>
             <a:off x="523800" y="2657520"/>
-            <a:ext cx="465480" cy="379800"/>
+            <a:ext cx="464760" cy="379080"/>
           </a:xfrm>
           <a:prstGeom prst="rect">
             <a:avLst/>
@@ -6032,7 +6068,7 @@
         <p:spPr>
           <a:xfrm>
             <a:off x="968400" y="2600280"/>
-            <a:ext cx="4999680" cy="265680"/>
+            <a:ext cx="4998960" cy="264960"/>
           </a:xfrm>
           <a:prstGeom prst="rect">
             <a:avLst/>
@@ -6084,7 +6120,7 @@
         <p:spPr>
           <a:xfrm>
             <a:off x="968400" y="2867040"/>
-            <a:ext cx="4980600" cy="227520"/>
+            <a:ext cx="4979880" cy="226800"/>
           </a:xfrm>
           <a:prstGeom prst="rect">
             <a:avLst/>
@@ -6138,7 +6174,7 @@
         <p:spPr>
           <a:xfrm>
             <a:off x="395280" y="3367080"/>
-            <a:ext cx="5609160" cy="751320"/>
+            <a:ext cx="5608440" cy="750600"/>
           </a:xfrm>
           <a:custGeom>
             <a:avLst/>
@@ -6194,7 +6230,7 @@
         <p:spPr>
           <a:xfrm>
             <a:off x="523800" y="3552840"/>
-            <a:ext cx="465480" cy="379800"/>
+            <a:ext cx="464760" cy="379080"/>
           </a:xfrm>
           <a:prstGeom prst="rect">
             <a:avLst/>
@@ -6246,7 +6282,7 @@
         <p:spPr>
           <a:xfrm>
             <a:off x="968400" y="3495600"/>
-            <a:ext cx="4999680" cy="265680"/>
+            <a:ext cx="4998960" cy="264960"/>
           </a:xfrm>
           <a:prstGeom prst="rect">
             <a:avLst/>
@@ -6298,7 +6334,7 @@
         <p:spPr>
           <a:xfrm>
             <a:off x="968400" y="3762360"/>
-            <a:ext cx="4980600" cy="227520"/>
+            <a:ext cx="4979880" cy="226800"/>
           </a:xfrm>
           <a:prstGeom prst="rect">
             <a:avLst/>
@@ -6352,7 +6388,7 @@
         <p:spPr>
           <a:xfrm>
             <a:off x="395280" y="4262400"/>
-            <a:ext cx="5609160" cy="751320"/>
+            <a:ext cx="5608440" cy="750600"/>
           </a:xfrm>
           <a:custGeom>
             <a:avLst/>
@@ -6408,7 +6444,7 @@
         <p:spPr>
           <a:xfrm>
             <a:off x="523800" y="4448160"/>
-            <a:ext cx="446760" cy="379800"/>
+            <a:ext cx="446040" cy="379080"/>
           </a:xfrm>
           <a:prstGeom prst="rect">
             <a:avLst/>
@@ -6460,7 +6496,7 @@
         <p:spPr>
           <a:xfrm>
             <a:off x="955800" y="4390920"/>
-            <a:ext cx="5018760" cy="265680"/>
+            <a:ext cx="5018040" cy="264960"/>
           </a:xfrm>
           <a:prstGeom prst="rect">
             <a:avLst/>
@@ -6512,7 +6548,7 @@
         <p:spPr>
           <a:xfrm>
             <a:off x="955800" y="4657680"/>
-            <a:ext cx="4999680" cy="227520"/>
+            <a:ext cx="4998960" cy="226800"/>
           </a:xfrm>
           <a:prstGeom prst="rect">
             <a:avLst/>
@@ -6566,7 +6602,7 @@
         <p:spPr>
           <a:xfrm>
             <a:off x="395280" y="5157720"/>
-            <a:ext cx="5609160" cy="751320"/>
+            <a:ext cx="5608440" cy="750600"/>
           </a:xfrm>
           <a:custGeom>
             <a:avLst/>
@@ -6622,7 +6658,7 @@
         <p:spPr>
           <a:xfrm>
             <a:off x="523800" y="5343480"/>
-            <a:ext cx="446760" cy="379800"/>
+            <a:ext cx="446040" cy="379080"/>
           </a:xfrm>
           <a:prstGeom prst="rect">
             <a:avLst/>
@@ -6674,7 +6710,7 @@
         <p:spPr>
           <a:xfrm>
             <a:off x="955800" y="5286240"/>
-            <a:ext cx="5018760" cy="265680"/>
+            <a:ext cx="5018040" cy="264960"/>
           </a:xfrm>
           <a:prstGeom prst="rect">
             <a:avLst/>
@@ -6726,7 +6762,7 @@
         <p:spPr>
           <a:xfrm>
             <a:off x="955800" y="5553000"/>
-            <a:ext cx="4999680" cy="227520"/>
+            <a:ext cx="4998960" cy="226800"/>
           </a:xfrm>
           <a:prstGeom prst="rect">
             <a:avLst/>
@@ -6780,7 +6816,7 @@
         <p:spPr>
           <a:xfrm>
             <a:off x="6186600" y="1576440"/>
-            <a:ext cx="5609160" cy="751320"/>
+            <a:ext cx="5608440" cy="750600"/>
           </a:xfrm>
           <a:custGeom>
             <a:avLst/>
@@ -6836,7 +6872,7 @@
         <p:spPr>
           <a:xfrm>
             <a:off x="6315120" y="1762200"/>
-            <a:ext cx="465480" cy="379800"/>
+            <a:ext cx="464760" cy="379080"/>
           </a:xfrm>
           <a:prstGeom prst="rect">
             <a:avLst/>
@@ -6888,7 +6924,7 @@
         <p:spPr>
           <a:xfrm>
             <a:off x="6759720" y="1704960"/>
-            <a:ext cx="4999680" cy="265680"/>
+            <a:ext cx="4998960" cy="264960"/>
           </a:xfrm>
           <a:prstGeom prst="rect">
             <a:avLst/>
@@ -6940,7 +6976,7 @@
         <p:spPr>
           <a:xfrm>
             <a:off x="6759720" y="1971720"/>
-            <a:ext cx="4980600" cy="227520"/>
+            <a:ext cx="4979880" cy="226800"/>
           </a:xfrm>
           <a:prstGeom prst="rect">
             <a:avLst/>
@@ -6994,7 +7030,7 @@
         <p:spPr>
           <a:xfrm>
             <a:off x="6186600" y="2471760"/>
-            <a:ext cx="5609160" cy="751320"/>
+            <a:ext cx="5608440" cy="750600"/>
           </a:xfrm>
           <a:custGeom>
             <a:avLst/>
@@ -7050,7 +7086,7 @@
         <p:spPr>
           <a:xfrm>
             <a:off x="6315120" y="2657520"/>
-            <a:ext cx="446760" cy="379800"/>
+            <a:ext cx="446040" cy="379080"/>
           </a:xfrm>
           <a:prstGeom prst="rect">
             <a:avLst/>
@@ -7102,7 +7138,7 @@
         <p:spPr>
           <a:xfrm>
             <a:off x="6746760" y="2600280"/>
-            <a:ext cx="5018760" cy="265680"/>
+            <a:ext cx="5018040" cy="264960"/>
           </a:xfrm>
           <a:prstGeom prst="rect">
             <a:avLst/>
@@ -7154,7 +7190,7 @@
         <p:spPr>
           <a:xfrm>
             <a:off x="6746760" y="2867040"/>
-            <a:ext cx="4999680" cy="227520"/>
+            <a:ext cx="4998960" cy="226800"/>
           </a:xfrm>
           <a:prstGeom prst="rect">
             <a:avLst/>
@@ -7208,7 +7244,7 @@
         <p:spPr>
           <a:xfrm>
             <a:off x="6186600" y="3367080"/>
-            <a:ext cx="5609160" cy="751320"/>
+            <a:ext cx="5608440" cy="750600"/>
           </a:xfrm>
           <a:custGeom>
             <a:avLst/>
@@ -7264,7 +7300,7 @@
         <p:spPr>
           <a:xfrm>
             <a:off x="6315120" y="3552840"/>
-            <a:ext cx="465480" cy="379800"/>
+            <a:ext cx="464760" cy="379080"/>
           </a:xfrm>
           <a:prstGeom prst="rect">
             <a:avLst/>
@@ -7316,7 +7352,7 @@
         <p:spPr>
           <a:xfrm>
             <a:off x="6759720" y="3495600"/>
-            <a:ext cx="4999680" cy="265680"/>
+            <a:ext cx="4998960" cy="264960"/>
           </a:xfrm>
           <a:prstGeom prst="rect">
             <a:avLst/>
@@ -7368,7 +7404,7 @@
         <p:spPr>
           <a:xfrm>
             <a:off x="6759720" y="3762360"/>
-            <a:ext cx="4980600" cy="227520"/>
+            <a:ext cx="4979880" cy="226800"/>
           </a:xfrm>
           <a:prstGeom prst="rect">
             <a:avLst/>
@@ -7422,7 +7458,7 @@
         <p:spPr>
           <a:xfrm>
             <a:off x="6186600" y="4262400"/>
-            <a:ext cx="5609160" cy="751320"/>
+            <a:ext cx="5608440" cy="750600"/>
           </a:xfrm>
           <a:custGeom>
             <a:avLst/>
@@ -7478,7 +7514,7 @@
         <p:spPr>
           <a:xfrm>
             <a:off x="6315120" y="4448160"/>
-            <a:ext cx="465480" cy="379800"/>
+            <a:ext cx="464760" cy="379080"/>
           </a:xfrm>
           <a:prstGeom prst="rect">
             <a:avLst/>
@@ -7530,7 +7566,7 @@
         <p:spPr>
           <a:xfrm>
             <a:off x="6759720" y="4390920"/>
-            <a:ext cx="4999680" cy="265680"/>
+            <a:ext cx="4998960" cy="264960"/>
           </a:xfrm>
           <a:prstGeom prst="rect">
             <a:avLst/>
@@ -7582,7 +7618,7 @@
         <p:spPr>
           <a:xfrm>
             <a:off x="6759720" y="4657680"/>
-            <a:ext cx="4980600" cy="227520"/>
+            <a:ext cx="4979880" cy="226800"/>
           </a:xfrm>
           <a:prstGeom prst="rect">
             <a:avLst/>
@@ -7636,7 +7672,7 @@
         <p:spPr>
           <a:xfrm>
             <a:off x="6186600" y="5157720"/>
-            <a:ext cx="5609160" cy="751320"/>
+            <a:ext cx="5608440" cy="750600"/>
           </a:xfrm>
           <a:custGeom>
             <a:avLst/>
@@ -7692,7 +7728,7 @@
         <p:spPr>
           <a:xfrm>
             <a:off x="6315120" y="5343480"/>
-            <a:ext cx="398880" cy="379800"/>
+            <a:ext cx="398160" cy="379080"/>
           </a:xfrm>
           <a:prstGeom prst="rect">
             <a:avLst/>
@@ -7744,7 +7780,7 @@
         <p:spPr>
           <a:xfrm>
             <a:off x="6696000" y="5286240"/>
-            <a:ext cx="5066280" cy="265680"/>
+            <a:ext cx="5065560" cy="264960"/>
           </a:xfrm>
           <a:prstGeom prst="rect">
             <a:avLst/>
@@ -7796,7 +7832,7 @@
         <p:spPr>
           <a:xfrm>
             <a:off x="6696000" y="5553000"/>
-            <a:ext cx="5047200" cy="227520"/>
+            <a:ext cx="5046480" cy="226800"/>
           </a:xfrm>
           <a:prstGeom prst="rect">
             <a:avLst/>
@@ -7850,7 +7886,7 @@
         <p:spPr>
           <a:xfrm>
             <a:off x="395280" y="6091200"/>
-            <a:ext cx="11400480" cy="599040"/>
+            <a:ext cx="11399760" cy="598320"/>
           </a:xfrm>
           <a:custGeom>
             <a:avLst/>
@@ -7906,7 +7942,7 @@
         <p:spPr>
           <a:xfrm>
             <a:off x="514440" y="6257880"/>
-            <a:ext cx="11162160" cy="265680"/>
+            <a:ext cx="11161440" cy="264960"/>
           </a:xfrm>
           <a:prstGeom prst="rect">
             <a:avLst/>
@@ -8010,7 +8046,7 @@
         <p:spPr>
           <a:xfrm>
             <a:off x="0" y="0"/>
-            <a:ext cx="12191040" cy="6856920"/>
+            <a:ext cx="12190320" cy="6856200"/>
           </a:xfrm>
           <a:prstGeom prst="roundRect">
             <a:avLst>
@@ -8042,7 +8078,7 @@
         <p:spPr>
           <a:xfrm>
             <a:off x="0" y="0"/>
-            <a:ext cx="12191040" cy="6856920"/>
+            <a:ext cx="12190320" cy="6856200"/>
           </a:xfrm>
           <a:custGeom>
             <a:avLst/>
@@ -8105,7 +8141,7 @@
         <p:spPr>
           <a:xfrm>
             <a:off x="380880" y="1542960"/>
-            <a:ext cx="1865880" cy="608400"/>
+            <a:ext cx="1865160" cy="607680"/>
           </a:xfrm>
           <a:custGeom>
             <a:avLst/>
@@ -8156,7 +8192,7 @@
         <p:spPr>
           <a:xfrm>
             <a:off x="609480" y="1676520"/>
-            <a:ext cx="1580040" cy="342000"/>
+            <a:ext cx="1579320" cy="341280"/>
           </a:xfrm>
           <a:prstGeom prst="rect">
             <a:avLst/>
@@ -8208,7 +8244,7 @@
         <p:spPr>
           <a:xfrm>
             <a:off x="380880" y="2381400"/>
-            <a:ext cx="11772000" cy="1713600"/>
+            <a:ext cx="11771280" cy="1712880"/>
           </a:xfrm>
           <a:prstGeom prst="rect">
             <a:avLst/>
@@ -8281,7 +8317,7 @@
         <p:spPr>
           <a:xfrm>
             <a:off x="380880" y="4324320"/>
-            <a:ext cx="1522800" cy="75240"/>
+            <a:ext cx="1522080" cy="74520"/>
           </a:xfrm>
           <a:custGeom>
             <a:avLst/>
@@ -8332,7 +8368,7 @@
         <p:spPr>
           <a:xfrm>
             <a:off x="380880" y="4629240"/>
-            <a:ext cx="7457040" cy="684720"/>
+            <a:ext cx="7456320" cy="684000"/>
           </a:xfrm>
           <a:prstGeom prst="rect">
             <a:avLst/>
@@ -8405,7 +8441,7 @@
         <p:spPr>
           <a:xfrm>
             <a:off x="10591920" y="5867280"/>
-            <a:ext cx="151200" cy="151200"/>
+            <a:ext cx="150480" cy="150480"/>
           </a:xfrm>
           <a:custGeom>
             <a:avLst/>
@@ -8456,7 +8492,7 @@
         <p:spPr>
           <a:xfrm>
             <a:off x="10896480" y="5867280"/>
-            <a:ext cx="151200" cy="151200"/>
+            <a:ext cx="150480" cy="150480"/>
           </a:xfrm>
           <a:custGeom>
             <a:avLst/>
@@ -8507,7 +8543,7 @@
         <p:spPr>
           <a:xfrm>
             <a:off x="11201400" y="5867280"/>
-            <a:ext cx="151200" cy="151200"/>
+            <a:ext cx="150480" cy="150480"/>
           </a:xfrm>
           <a:custGeom>
             <a:avLst/>
@@ -8590,7 +8626,7 @@
         <p:spPr>
           <a:xfrm>
             <a:off x="0" y="0"/>
-            <a:ext cx="12191040" cy="6854760"/>
+            <a:ext cx="12190320" cy="6854040"/>
           </a:xfrm>
           <a:custGeom>
             <a:avLst/>
@@ -8653,7 +8689,7 @@
         <p:spPr>
           <a:xfrm>
             <a:off x="345240" y="345240"/>
-            <a:ext cx="11707560" cy="413280"/>
+            <a:ext cx="11706840" cy="412560"/>
           </a:xfrm>
           <a:prstGeom prst="rect">
             <a:avLst/>
@@ -8705,7 +8741,7 @@
         <p:spPr>
           <a:xfrm>
             <a:off x="345240" y="863280"/>
-            <a:ext cx="11603880" cy="275400"/>
+            <a:ext cx="11603160" cy="274680"/>
           </a:xfrm>
           <a:prstGeom prst="rect">
             <a:avLst/>
@@ -8757,7 +8793,7 @@
         <p:spPr>
           <a:xfrm>
             <a:off x="345240" y="1243440"/>
-            <a:ext cx="828000" cy="33480"/>
+            <a:ext cx="827280" cy="32760"/>
           </a:xfrm>
           <a:custGeom>
             <a:avLst/>
@@ -8808,7 +8844,7 @@
         <p:spPr>
           <a:xfrm>
             <a:off x="358200" y="1429200"/>
-            <a:ext cx="5619960" cy="2753280"/>
+            <a:ext cx="5619240" cy="2752560"/>
           </a:xfrm>
           <a:custGeom>
             <a:avLst/>
@@ -8864,7 +8900,7 @@
         <p:spPr>
           <a:xfrm>
             <a:off x="492120" y="1614600"/>
-            <a:ext cx="5352480" cy="275400"/>
+            <a:ext cx="5351760" cy="274680"/>
           </a:xfrm>
           <a:prstGeom prst="rect">
             <a:avLst/>
@@ -8916,7 +8952,7 @@
         <p:spPr>
           <a:xfrm>
             <a:off x="440280" y="2028960"/>
-            <a:ext cx="5455800" cy="413280"/>
+            <a:ext cx="5455080" cy="412560"/>
           </a:xfrm>
           <a:prstGeom prst="rect">
             <a:avLst/>
@@ -8968,7 +9004,7 @@
         <p:spPr>
           <a:xfrm>
             <a:off x="505080" y="2478240"/>
-            <a:ext cx="5326560" cy="240840"/>
+            <a:ext cx="5325840" cy="240120"/>
           </a:xfrm>
           <a:prstGeom prst="rect">
             <a:avLst/>
@@ -9020,7 +9056,7 @@
         <p:spPr>
           <a:xfrm>
             <a:off x="543960" y="2858040"/>
-            <a:ext cx="5248800" cy="413280"/>
+            <a:ext cx="5248080" cy="412560"/>
           </a:xfrm>
           <a:custGeom>
             <a:avLst/>
@@ -9073,7 +9109,7 @@
         <p:spPr>
           <a:xfrm>
             <a:off x="613080" y="2961720"/>
-            <a:ext cx="5110560" cy="206280"/>
+            <a:ext cx="5109840" cy="205560"/>
           </a:xfrm>
           <a:prstGeom prst="rect">
             <a:avLst/>
@@ -9145,7 +9181,7 @@
         <p:spPr>
           <a:xfrm>
             <a:off x="543960" y="3410640"/>
-            <a:ext cx="2571840" cy="586080"/>
+            <a:ext cx="2571120" cy="585360"/>
           </a:xfrm>
           <a:custGeom>
             <a:avLst/>
@@ -9198,7 +9234,7 @@
         <p:spPr>
           <a:xfrm>
             <a:off x="561240" y="3479760"/>
-            <a:ext cx="2537640" cy="275400"/>
+            <a:ext cx="2536920" cy="274680"/>
           </a:xfrm>
           <a:prstGeom prst="rect">
             <a:avLst/>
@@ -9250,7 +9286,7 @@
         <p:spPr>
           <a:xfrm>
             <a:off x="582840" y="3755880"/>
-            <a:ext cx="2494440" cy="171720"/>
+            <a:ext cx="2493720" cy="171000"/>
           </a:xfrm>
           <a:prstGeom prst="rect">
             <a:avLst/>
@@ -9302,7 +9338,7 @@
         <p:spPr>
           <a:xfrm>
             <a:off x="3219840" y="3410640"/>
-            <a:ext cx="2571840" cy="586080"/>
+            <a:ext cx="2571120" cy="585360"/>
           </a:xfrm>
           <a:custGeom>
             <a:avLst/>
@@ -9355,7 +9391,7 @@
         <p:spPr>
           <a:xfrm>
             <a:off x="3237120" y="3479760"/>
-            <a:ext cx="2537640" cy="275400"/>
+            <a:ext cx="2536920" cy="274680"/>
           </a:xfrm>
           <a:prstGeom prst="rect">
             <a:avLst/>
@@ -9407,7 +9443,7 @@
         <p:spPr>
           <a:xfrm>
             <a:off x="3258360" y="3755880"/>
-            <a:ext cx="2494440" cy="171720"/>
+            <a:ext cx="2493720" cy="171000"/>
           </a:xfrm>
           <a:prstGeom prst="rect">
             <a:avLst/>
@@ -9459,7 +9495,7 @@
         <p:spPr>
           <a:xfrm>
             <a:off x="6210720" y="1429200"/>
-            <a:ext cx="5619960" cy="2753280"/>
+            <a:ext cx="5619240" cy="2752560"/>
           </a:xfrm>
           <a:custGeom>
             <a:avLst/>
@@ -9515,7 +9551,7 @@
         <p:spPr>
           <a:xfrm>
             <a:off x="6344280" y="1614600"/>
-            <a:ext cx="5352480" cy="275400"/>
+            <a:ext cx="5351760" cy="274680"/>
           </a:xfrm>
           <a:prstGeom prst="rect">
             <a:avLst/>
@@ -9567,7 +9603,7 @@
         <p:spPr>
           <a:xfrm>
             <a:off x="6292800" y="2028960"/>
-            <a:ext cx="5455800" cy="413280"/>
+            <a:ext cx="5455080" cy="412560"/>
           </a:xfrm>
           <a:prstGeom prst="rect">
             <a:avLst/>
@@ -9619,7 +9655,7 @@
         <p:spPr>
           <a:xfrm>
             <a:off x="6357240" y="2478240"/>
-            <a:ext cx="5326560" cy="240840"/>
+            <a:ext cx="5325840" cy="240120"/>
           </a:xfrm>
           <a:prstGeom prst="rect">
             <a:avLst/>
@@ -9671,7 +9707,7 @@
         <p:spPr>
           <a:xfrm>
             <a:off x="6396120" y="2858040"/>
-            <a:ext cx="5248800" cy="413280"/>
+            <a:ext cx="5248080" cy="412560"/>
           </a:xfrm>
           <a:custGeom>
             <a:avLst/>
@@ -9724,7 +9760,7 @@
         <p:spPr>
           <a:xfrm>
             <a:off x="6465240" y="2961720"/>
-            <a:ext cx="5110560" cy="206280"/>
+            <a:ext cx="5109840" cy="205560"/>
           </a:xfrm>
           <a:prstGeom prst="rect">
             <a:avLst/>
@@ -9786,7 +9822,7 @@
         <p:spPr>
           <a:xfrm>
             <a:off x="6396120" y="3410640"/>
-            <a:ext cx="2571840" cy="586080"/>
+            <a:ext cx="2571120" cy="585360"/>
           </a:xfrm>
           <a:custGeom>
             <a:avLst/>
@@ -9839,7 +9875,7 @@
         <p:spPr>
           <a:xfrm>
             <a:off x="6413400" y="3479760"/>
-            <a:ext cx="2537640" cy="275400"/>
+            <a:ext cx="2536920" cy="274680"/>
           </a:xfrm>
           <a:prstGeom prst="rect">
             <a:avLst/>
@@ -9891,7 +9927,7 @@
         <p:spPr>
           <a:xfrm>
             <a:off x="6435000" y="3755880"/>
-            <a:ext cx="2494440" cy="171720"/>
+            <a:ext cx="2493720" cy="171000"/>
           </a:xfrm>
           <a:prstGeom prst="rect">
             <a:avLst/>
@@ -9943,7 +9979,7 @@
         <p:spPr>
           <a:xfrm>
             <a:off x="9072000" y="3410640"/>
-            <a:ext cx="2571840" cy="586080"/>
+            <a:ext cx="2571120" cy="585360"/>
           </a:xfrm>
           <a:custGeom>
             <a:avLst/>
@@ -9996,7 +10032,7 @@
         <p:spPr>
           <a:xfrm>
             <a:off x="9089280" y="3479760"/>
-            <a:ext cx="2537640" cy="275400"/>
+            <a:ext cx="2536920" cy="274680"/>
           </a:xfrm>
           <a:prstGeom prst="rect">
             <a:avLst/>
@@ -10048,7 +10084,7 @@
         <p:spPr>
           <a:xfrm>
             <a:off x="9110880" y="3755880"/>
-            <a:ext cx="2494440" cy="171720"/>
+            <a:ext cx="2493720" cy="171000"/>
           </a:xfrm>
           <a:prstGeom prst="rect">
             <a:avLst/>
@@ -10100,7 +10136,7 @@
         <p:spPr>
           <a:xfrm>
             <a:off x="362520" y="4351680"/>
-            <a:ext cx="11465640" cy="2485800"/>
+            <a:ext cx="11464920" cy="2485080"/>
           </a:xfrm>
           <a:custGeom>
             <a:avLst/>
@@ -10156,7 +10192,7 @@
         <p:spPr>
           <a:xfrm>
             <a:off x="500760" y="4541760"/>
-            <a:ext cx="11189160" cy="275400"/>
+            <a:ext cx="11188440" cy="274680"/>
           </a:xfrm>
           <a:prstGeom prst="rect">
             <a:avLst/>
@@ -10208,7 +10244,7 @@
         <p:spPr>
           <a:xfrm>
             <a:off x="552600" y="4921560"/>
-            <a:ext cx="9946080" cy="1725840"/>
+            <a:ext cx="9945360" cy="1725120"/>
           </a:xfrm>
           <a:prstGeom prst="roundRect">
             <a:avLst>
@@ -10272,7 +10308,7 @@
         <p:spPr>
           <a:xfrm>
             <a:off x="0" y="0"/>
-            <a:ext cx="12191040" cy="6856920"/>
+            <a:ext cx="12190320" cy="6856200"/>
           </a:xfrm>
           <a:custGeom>
             <a:avLst/>
@@ -10335,7 +10371,7 @@
         <p:spPr>
           <a:xfrm>
             <a:off x="380880" y="380880"/>
-            <a:ext cx="11657520" cy="456120"/>
+            <a:ext cx="11656800" cy="455400"/>
           </a:xfrm>
           <a:prstGeom prst="rect">
             <a:avLst/>
@@ -10387,7 +10423,7 @@
         <p:spPr>
           <a:xfrm>
             <a:off x="380880" y="952560"/>
-            <a:ext cx="11543400" cy="303840"/>
+            <a:ext cx="11542680" cy="303120"/>
           </a:xfrm>
           <a:prstGeom prst="rect">
             <a:avLst/>
@@ -10439,7 +10475,7 @@
         <p:spPr>
           <a:xfrm>
             <a:off x="380880" y="1371600"/>
-            <a:ext cx="913320" cy="37080"/>
+            <a:ext cx="912600" cy="36360"/>
           </a:xfrm>
           <a:custGeom>
             <a:avLst/>
@@ -10490,7 +10526,7 @@
         <p:spPr>
           <a:xfrm>
             <a:off x="395280" y="1576440"/>
-            <a:ext cx="3675600" cy="2351520"/>
+            <a:ext cx="3674880" cy="2350800"/>
           </a:xfrm>
           <a:custGeom>
             <a:avLst/>
@@ -10546,7 +10582,7 @@
         <p:spPr>
           <a:xfrm>
             <a:off x="564480" y="1752480"/>
-            <a:ext cx="356040" cy="284760"/>
+            <a:ext cx="355320" cy="284040"/>
           </a:xfrm>
           <a:custGeom>
             <a:avLst/>
@@ -10727,7 +10763,7 @@
         <p:spPr>
           <a:xfrm>
             <a:off x="1033560" y="1743120"/>
-            <a:ext cx="551520" cy="303840"/>
+            <a:ext cx="550800" cy="303120"/>
           </a:xfrm>
           <a:prstGeom prst="rect">
             <a:avLst/>
@@ -10779,7 +10815,7 @@
         <p:spPr>
           <a:xfrm>
             <a:off x="561960" y="2200320"/>
-            <a:ext cx="701640" cy="151200"/>
+            <a:ext cx="700920" cy="150480"/>
           </a:xfrm>
           <a:prstGeom prst="rect">
             <a:avLst/>
@@ -10831,7 +10867,7 @@
         <p:spPr>
           <a:xfrm>
             <a:off x="714240" y="2467080"/>
-            <a:ext cx="3265920" cy="227520"/>
+            <a:ext cx="3265200" cy="226800"/>
           </a:xfrm>
           <a:prstGeom prst="rect">
             <a:avLst/>
@@ -10893,7 +10929,7 @@
         <p:spPr>
           <a:xfrm>
             <a:off x="714240" y="2771640"/>
-            <a:ext cx="3265920" cy="227520"/>
+            <a:ext cx="3265200" cy="226800"/>
           </a:xfrm>
           <a:prstGeom prst="rect">
             <a:avLst/>
@@ -10955,7 +10991,7 @@
         <p:spPr>
           <a:xfrm>
             <a:off x="714240" y="3076560"/>
-            <a:ext cx="3265920" cy="227520"/>
+            <a:ext cx="3265200" cy="226800"/>
           </a:xfrm>
           <a:prstGeom prst="rect">
             <a:avLst/>
@@ -11017,7 +11053,7 @@
         <p:spPr>
           <a:xfrm>
             <a:off x="561960" y="3419640"/>
-            <a:ext cx="3342240" cy="342000"/>
+            <a:ext cx="3341520" cy="341280"/>
           </a:xfrm>
           <a:custGeom>
             <a:avLst/>
@@ -11070,7 +11106,7 @@
         <p:spPr>
           <a:xfrm>
             <a:off x="604800" y="3495600"/>
-            <a:ext cx="3256560" cy="189360"/>
+            <a:ext cx="3255840" cy="188640"/>
           </a:xfrm>
           <a:prstGeom prst="rect">
             <a:avLst/>
@@ -11122,7 +11158,7 @@
         <p:spPr>
           <a:xfrm>
             <a:off x="4255920" y="1576440"/>
-            <a:ext cx="3675600" cy="2351520"/>
+            <a:ext cx="3674880" cy="2350800"/>
           </a:xfrm>
           <a:custGeom>
             <a:avLst/>
@@ -11178,7 +11214,7 @@
         <p:spPr>
           <a:xfrm>
             <a:off x="4496400" y="1752480"/>
-            <a:ext cx="213120" cy="284760"/>
+            <a:ext cx="212400" cy="284040"/>
           </a:xfrm>
           <a:custGeom>
             <a:avLst/>
@@ -11354,7 +11390,7 @@
         <p:spPr>
           <a:xfrm>
             <a:off x="4894200" y="1743120"/>
-            <a:ext cx="675360" cy="303840"/>
+            <a:ext cx="674640" cy="303120"/>
           </a:xfrm>
           <a:prstGeom prst="rect">
             <a:avLst/>
@@ -11406,7 +11442,7 @@
         <p:spPr>
           <a:xfrm>
             <a:off x="4422600" y="2200320"/>
-            <a:ext cx="701640" cy="151200"/>
+            <a:ext cx="700920" cy="150480"/>
           </a:xfrm>
           <a:prstGeom prst="rect">
             <a:avLst/>
@@ -11458,7 +11494,7 @@
         <p:spPr>
           <a:xfrm>
             <a:off x="4575240" y="2467080"/>
-            <a:ext cx="3265920" cy="227520"/>
+            <a:ext cx="3265200" cy="226800"/>
           </a:xfrm>
           <a:prstGeom prst="rect">
             <a:avLst/>
@@ -11520,7 +11556,7 @@
         <p:spPr>
           <a:xfrm>
             <a:off x="4575240" y="2771640"/>
-            <a:ext cx="3265920" cy="227520"/>
+            <a:ext cx="3265200" cy="226800"/>
           </a:xfrm>
           <a:prstGeom prst="rect">
             <a:avLst/>
@@ -11582,7 +11618,7 @@
         <p:spPr>
           <a:xfrm>
             <a:off x="4575240" y="3076560"/>
-            <a:ext cx="3265920" cy="227520"/>
+            <a:ext cx="3265200" cy="226800"/>
           </a:xfrm>
           <a:prstGeom prst="rect">
             <a:avLst/>
@@ -11644,7 +11680,7 @@
         <p:spPr>
           <a:xfrm>
             <a:off x="4422600" y="3419640"/>
-            <a:ext cx="3342240" cy="342000"/>
+            <a:ext cx="3341520" cy="341280"/>
           </a:xfrm>
           <a:custGeom>
             <a:avLst/>
@@ -11697,7 +11733,7 @@
         <p:spPr>
           <a:xfrm>
             <a:off x="4465440" y="3495600"/>
-            <a:ext cx="3256560" cy="189360"/>
+            <a:ext cx="3255840" cy="188640"/>
           </a:xfrm>
           <a:prstGeom prst="rect">
             <a:avLst/>
@@ -11749,7 +11785,7 @@
         <p:spPr>
           <a:xfrm>
             <a:off x="8116920" y="1576440"/>
-            <a:ext cx="3675600" cy="2351520"/>
+            <a:ext cx="3674880" cy="2350800"/>
           </a:xfrm>
           <a:custGeom>
             <a:avLst/>
@@ -11805,7 +11841,7 @@
         <p:spPr>
           <a:xfrm>
             <a:off x="8321760" y="1752480"/>
-            <a:ext cx="284760" cy="284760"/>
+            <a:ext cx="284040" cy="284040"/>
           </a:xfrm>
           <a:custGeom>
             <a:avLst/>
@@ -11929,7 +11965,7 @@
         <p:spPr>
           <a:xfrm>
             <a:off x="8755200" y="1743120"/>
-            <a:ext cx="541800" cy="303840"/>
+            <a:ext cx="541080" cy="303120"/>
           </a:xfrm>
           <a:prstGeom prst="rect">
             <a:avLst/>
@@ -11981,7 +12017,7 @@
         <p:spPr>
           <a:xfrm>
             <a:off x="8283600" y="2200320"/>
-            <a:ext cx="701640" cy="151200"/>
+            <a:ext cx="700920" cy="150480"/>
           </a:xfrm>
           <a:prstGeom prst="rect">
             <a:avLst/>
@@ -12033,7 +12069,7 @@
         <p:spPr>
           <a:xfrm>
             <a:off x="8435880" y="2467080"/>
-            <a:ext cx="3265920" cy="227520"/>
+            <a:ext cx="3265200" cy="226800"/>
           </a:xfrm>
           <a:prstGeom prst="rect">
             <a:avLst/>
@@ -12095,7 +12131,7 @@
         <p:spPr>
           <a:xfrm>
             <a:off x="8435880" y="2771640"/>
-            <a:ext cx="3265920" cy="227520"/>
+            <a:ext cx="3265200" cy="226800"/>
           </a:xfrm>
           <a:prstGeom prst="rect">
             <a:avLst/>
@@ -12157,7 +12193,7 @@
         <p:spPr>
           <a:xfrm>
             <a:off x="8435880" y="3076560"/>
-            <a:ext cx="3265920" cy="227520"/>
+            <a:ext cx="3265200" cy="226800"/>
           </a:xfrm>
           <a:prstGeom prst="rect">
             <a:avLst/>
@@ -12219,7 +12255,7 @@
         <p:spPr>
           <a:xfrm>
             <a:off x="8283600" y="3419640"/>
-            <a:ext cx="3342240" cy="342000"/>
+            <a:ext cx="3341520" cy="341280"/>
           </a:xfrm>
           <a:custGeom>
             <a:avLst/>
@@ -12272,7 +12308,7 @@
         <p:spPr>
           <a:xfrm>
             <a:off x="8326440" y="3495600"/>
-            <a:ext cx="3256560" cy="189360"/>
+            <a:ext cx="3255840" cy="188640"/>
           </a:xfrm>
           <a:prstGeom prst="rect">
             <a:avLst/>
@@ -12324,7 +12360,7 @@
         <p:spPr>
           <a:xfrm>
             <a:off x="395280" y="4110120"/>
-            <a:ext cx="3675600" cy="2351520"/>
+            <a:ext cx="3674880" cy="2350800"/>
           </a:xfrm>
           <a:custGeom>
             <a:avLst/>
@@ -12380,7 +12416,7 @@
         <p:spPr>
           <a:xfrm>
             <a:off x="600120" y="4286160"/>
-            <a:ext cx="284760" cy="284760"/>
+            <a:ext cx="284040" cy="284040"/>
           </a:xfrm>
           <a:custGeom>
             <a:avLst/>
@@ -12493,7 +12529,7 @@
         <p:spPr>
           <a:xfrm>
             <a:off x="1033560" y="4276800"/>
-            <a:ext cx="875160" cy="303840"/>
+            <a:ext cx="874440" cy="303120"/>
           </a:xfrm>
           <a:prstGeom prst="rect">
             <a:avLst/>
@@ -12545,7 +12581,7 @@
         <p:spPr>
           <a:xfrm>
             <a:off x="561960" y="4734000"/>
-            <a:ext cx="701640" cy="151200"/>
+            <a:ext cx="700920" cy="150480"/>
           </a:xfrm>
           <a:prstGeom prst="rect">
             <a:avLst/>
@@ -12597,7 +12633,7 @@
         <p:spPr>
           <a:xfrm>
             <a:off x="714240" y="5000760"/>
-            <a:ext cx="3265920" cy="227520"/>
+            <a:ext cx="3265200" cy="226800"/>
           </a:xfrm>
           <a:prstGeom prst="rect">
             <a:avLst/>
@@ -12659,7 +12695,7 @@
         <p:spPr>
           <a:xfrm>
             <a:off x="714240" y="5305320"/>
-            <a:ext cx="3265920" cy="227520"/>
+            <a:ext cx="3265200" cy="226800"/>
           </a:xfrm>
           <a:prstGeom prst="rect">
             <a:avLst/>
@@ -12721,7 +12757,7 @@
         <p:spPr>
           <a:xfrm>
             <a:off x="714240" y="5610240"/>
-            <a:ext cx="3265920" cy="227520"/>
+            <a:ext cx="3265200" cy="226800"/>
           </a:xfrm>
           <a:prstGeom prst="rect">
             <a:avLst/>
@@ -12783,7 +12819,7 @@
         <p:spPr>
           <a:xfrm>
             <a:off x="561960" y="5952960"/>
-            <a:ext cx="3342240" cy="342000"/>
+            <a:ext cx="3341520" cy="341280"/>
           </a:xfrm>
           <a:custGeom>
             <a:avLst/>
@@ -12836,7 +12872,7 @@
         <p:spPr>
           <a:xfrm>
             <a:off x="604800" y="6029280"/>
-            <a:ext cx="3256560" cy="189360"/>
+            <a:ext cx="3255840" cy="188640"/>
           </a:xfrm>
           <a:prstGeom prst="rect">
             <a:avLst/>
@@ -12888,7 +12924,7 @@
         <p:spPr>
           <a:xfrm>
             <a:off x="4255920" y="4110120"/>
-            <a:ext cx="3675600" cy="2351520"/>
+            <a:ext cx="3674880" cy="2350800"/>
           </a:xfrm>
           <a:custGeom>
             <a:avLst/>
@@ -12944,7 +12980,7 @@
         <p:spPr>
           <a:xfrm>
             <a:off x="4443120" y="4286160"/>
-            <a:ext cx="320400" cy="284760"/>
+            <a:ext cx="319680" cy="284040"/>
           </a:xfrm>
           <a:custGeom>
             <a:avLst/>
@@ -13141,7 +13177,7 @@
         <p:spPr>
           <a:xfrm>
             <a:off x="4894200" y="4276800"/>
-            <a:ext cx="761040" cy="303840"/>
+            <a:ext cx="760320" cy="303120"/>
           </a:xfrm>
           <a:prstGeom prst="rect">
             <a:avLst/>
@@ -13193,7 +13229,7 @@
         <p:spPr>
           <a:xfrm>
             <a:off x="4422600" y="4734000"/>
-            <a:ext cx="701640" cy="151200"/>
+            <a:ext cx="700920" cy="150480"/>
           </a:xfrm>
           <a:prstGeom prst="rect">
             <a:avLst/>
@@ -13245,7 +13281,7 @@
         <p:spPr>
           <a:xfrm>
             <a:off x="4575240" y="5000760"/>
-            <a:ext cx="3265920" cy="227520"/>
+            <a:ext cx="3265200" cy="226800"/>
           </a:xfrm>
           <a:prstGeom prst="rect">
             <a:avLst/>
@@ -13307,7 +13343,7 @@
         <p:spPr>
           <a:xfrm>
             <a:off x="4575240" y="5305320"/>
-            <a:ext cx="3265920" cy="227520"/>
+            <a:ext cx="3265200" cy="226800"/>
           </a:xfrm>
           <a:prstGeom prst="rect">
             <a:avLst/>
@@ -13369,7 +13405,7 @@
         <p:spPr>
           <a:xfrm>
             <a:off x="4575240" y="5610240"/>
-            <a:ext cx="3265920" cy="227520"/>
+            <a:ext cx="3265200" cy="226800"/>
           </a:xfrm>
           <a:prstGeom prst="rect">
             <a:avLst/>
@@ -13431,7 +13467,7 @@
         <p:spPr>
           <a:xfrm>
             <a:off x="4422600" y="5952960"/>
-            <a:ext cx="3342240" cy="342000"/>
+            <a:ext cx="3341520" cy="341280"/>
           </a:xfrm>
           <a:custGeom>
             <a:avLst/>
@@ -13484,7 +13520,7 @@
         <p:spPr>
           <a:xfrm>
             <a:off x="4465440" y="6029280"/>
-            <a:ext cx="3256560" cy="189360"/>
+            <a:ext cx="3255840" cy="188640"/>
           </a:xfrm>
           <a:prstGeom prst="rect">
             <a:avLst/>
@@ -13536,7 +13572,7 @@
         <p:spPr>
           <a:xfrm>
             <a:off x="8116920" y="4110120"/>
-            <a:ext cx="3675600" cy="2351520"/>
+            <a:ext cx="3674880" cy="2350800"/>
           </a:xfrm>
           <a:custGeom>
             <a:avLst/>
@@ -13592,7 +13628,7 @@
         <p:spPr>
           <a:xfrm>
             <a:off x="8321760" y="4286160"/>
-            <a:ext cx="284760" cy="284760"/>
+            <a:ext cx="284040" cy="284040"/>
           </a:xfrm>
           <a:custGeom>
             <a:avLst/>
@@ -13690,7 +13726,7 @@
         <p:spPr>
           <a:xfrm>
             <a:off x="8755200" y="4276800"/>
-            <a:ext cx="865800" cy="303840"/>
+            <a:ext cx="865080" cy="303120"/>
           </a:xfrm>
           <a:prstGeom prst="rect">
             <a:avLst/>
@@ -13742,7 +13778,7 @@
         <p:spPr>
           <a:xfrm>
             <a:off x="8283600" y="4734000"/>
-            <a:ext cx="701640" cy="151200"/>
+            <a:ext cx="700920" cy="150480"/>
           </a:xfrm>
           <a:prstGeom prst="rect">
             <a:avLst/>
@@ -13794,7 +13830,7 @@
         <p:spPr>
           <a:xfrm>
             <a:off x="8435880" y="5000760"/>
-            <a:ext cx="3265920" cy="227520"/>
+            <a:ext cx="3265200" cy="226800"/>
           </a:xfrm>
           <a:prstGeom prst="rect">
             <a:avLst/>
@@ -13856,7 +13892,7 @@
         <p:spPr>
           <a:xfrm>
             <a:off x="8435880" y="5305320"/>
-            <a:ext cx="3265920" cy="227520"/>
+            <a:ext cx="3265200" cy="226800"/>
           </a:xfrm>
           <a:prstGeom prst="rect">
             <a:avLst/>
@@ -13918,7 +13954,7 @@
         <p:spPr>
           <a:xfrm>
             <a:off x="8435880" y="5610240"/>
-            <a:ext cx="3265920" cy="227520"/>
+            <a:ext cx="3265200" cy="226800"/>
           </a:xfrm>
           <a:prstGeom prst="rect">
             <a:avLst/>
@@ -13980,7 +14016,7 @@
         <p:spPr>
           <a:xfrm>
             <a:off x="8283600" y="5952960"/>
-            <a:ext cx="3342240" cy="342000"/>
+            <a:ext cx="3341520" cy="341280"/>
           </a:xfrm>
           <a:custGeom>
             <a:avLst/>
@@ -14033,7 +14069,7 @@
         <p:spPr>
           <a:xfrm>
             <a:off x="8326440" y="6029280"/>
-            <a:ext cx="3256560" cy="189360"/>
+            <a:ext cx="3255840" cy="188640"/>
           </a:xfrm>
           <a:prstGeom prst="rect">
             <a:avLst/>
@@ -14117,7 +14153,7 @@
         <p:spPr>
           <a:xfrm>
             <a:off x="0" y="0"/>
-            <a:ext cx="12191040" cy="6856920"/>
+            <a:ext cx="12190320" cy="6856200"/>
           </a:xfrm>
           <a:prstGeom prst="roundRect">
             <a:avLst>
@@ -14149,7 +14185,7 @@
         <p:spPr>
           <a:xfrm>
             <a:off x="0" y="0"/>
-            <a:ext cx="12191040" cy="6856920"/>
+            <a:ext cx="12190320" cy="6856200"/>
           </a:xfrm>
           <a:custGeom>
             <a:avLst/>
@@ -14212,7 +14248,7 @@
         <p:spPr>
           <a:xfrm>
             <a:off x="380880" y="1542960"/>
-            <a:ext cx="1856160" cy="608400"/>
+            <a:ext cx="1855440" cy="607680"/>
           </a:xfrm>
           <a:custGeom>
             <a:avLst/>
@@ -14263,7 +14299,7 @@
         <p:spPr>
           <a:xfrm>
             <a:off x="609480" y="1676520"/>
-            <a:ext cx="1567440" cy="342000"/>
+            <a:ext cx="1566720" cy="341280"/>
           </a:xfrm>
           <a:prstGeom prst="rect">
             <a:avLst/>
@@ -14315,7 +14351,7 @@
         <p:spPr>
           <a:xfrm>
             <a:off x="380880" y="2381400"/>
-            <a:ext cx="11772000" cy="1713600"/>
+            <a:ext cx="11771280" cy="1712880"/>
           </a:xfrm>
           <a:prstGeom prst="rect">
             <a:avLst/>
@@ -14388,7 +14424,7 @@
         <p:spPr>
           <a:xfrm>
             <a:off x="380880" y="4324320"/>
-            <a:ext cx="1522800" cy="75240"/>
+            <a:ext cx="1522080" cy="74520"/>
           </a:xfrm>
           <a:custGeom>
             <a:avLst/>
@@ -14439,7 +14475,7 @@
         <p:spPr>
           <a:xfrm>
             <a:off x="380880" y="4629240"/>
-            <a:ext cx="7457040" cy="684720"/>
+            <a:ext cx="7456320" cy="684000"/>
           </a:xfrm>
           <a:prstGeom prst="rect">
             <a:avLst/>
@@ -14512,7 +14548,7 @@
         <p:spPr>
           <a:xfrm>
             <a:off x="10591920" y="5867280"/>
-            <a:ext cx="151200" cy="151200"/>
+            <a:ext cx="150480" cy="150480"/>
           </a:xfrm>
           <a:custGeom>
             <a:avLst/>
@@ -14563,7 +14599,7 @@
         <p:spPr>
           <a:xfrm>
             <a:off x="10896480" y="5867280"/>
-            <a:ext cx="151200" cy="151200"/>
+            <a:ext cx="150480" cy="150480"/>
           </a:xfrm>
           <a:custGeom>
             <a:avLst/>
@@ -14614,7 +14650,7 @@
         <p:spPr>
           <a:xfrm>
             <a:off x="11201400" y="5867280"/>
-            <a:ext cx="151200" cy="151200"/>
+            <a:ext cx="150480" cy="150480"/>
           </a:xfrm>
           <a:custGeom>
             <a:avLst/>
@@ -14697,7 +14733,7 @@
         <p:spPr>
           <a:xfrm>
             <a:off x="0" y="0"/>
-            <a:ext cx="12191040" cy="6854760"/>
+            <a:ext cx="12190320" cy="6854040"/>
           </a:xfrm>
           <a:custGeom>
             <a:avLst/>
@@ -14760,7 +14796,7 @@
         <p:spPr>
           <a:xfrm>
             <a:off x="353520" y="353520"/>
-            <a:ext cx="11696040" cy="423000"/>
+            <a:ext cx="11695320" cy="422280"/>
           </a:xfrm>
           <a:prstGeom prst="rect">
             <a:avLst/>
@@ -14812,7 +14848,7 @@
         <p:spPr>
           <a:xfrm>
             <a:off x="353520" y="883440"/>
-            <a:ext cx="11590200" cy="281520"/>
+            <a:ext cx="11589480" cy="280800"/>
           </a:xfrm>
           <a:prstGeom prst="rect">
             <a:avLst/>
@@ -14864,7 +14900,7 @@
         <p:spPr>
           <a:xfrm>
             <a:off x="353520" y="1272240"/>
-            <a:ext cx="847080" cy="34200"/>
+            <a:ext cx="846360" cy="33480"/>
           </a:xfrm>
           <a:custGeom>
             <a:avLst/>
@@ -14915,7 +14951,7 @@
         <p:spPr>
           <a:xfrm>
             <a:off x="366480" y="1462320"/>
-            <a:ext cx="3709440" cy="2110320"/>
+            <a:ext cx="3708720" cy="2109600"/>
           </a:xfrm>
           <a:custGeom>
             <a:avLst/>
@@ -14971,7 +15007,7 @@
         <p:spPr>
           <a:xfrm>
             <a:off x="1954800" y="1652040"/>
-            <a:ext cx="528840" cy="423000"/>
+            <a:ext cx="528120" cy="422280"/>
           </a:xfrm>
           <a:custGeom>
             <a:avLst/>
@@ -15187,7 +15223,7 @@
         <p:spPr>
           <a:xfrm>
             <a:off x="503640" y="2217600"/>
-            <a:ext cx="3435480" cy="281520"/>
+            <a:ext cx="3434760" cy="280800"/>
           </a:xfrm>
           <a:prstGeom prst="rect">
             <a:avLst/>
@@ -15239,7 +15275,7 @@
         <p:spPr>
           <a:xfrm>
             <a:off x="516960" y="2606400"/>
-            <a:ext cx="3409200" cy="776520"/>
+            <a:ext cx="3408480" cy="775800"/>
           </a:xfrm>
           <a:prstGeom prst="rect">
             <a:avLst/>
@@ -15311,7 +15347,7 @@
         <p:spPr>
           <a:xfrm>
             <a:off x="4240800" y="1462320"/>
-            <a:ext cx="3709440" cy="2110320"/>
+            <a:ext cx="3708720" cy="2109600"/>
           </a:xfrm>
           <a:custGeom>
             <a:avLst/>
@@ -15367,7 +15403,7 @@
         <p:spPr>
           <a:xfrm>
             <a:off x="5882040" y="1652040"/>
-            <a:ext cx="423000" cy="423000"/>
+            <a:ext cx="422280" cy="422280"/>
           </a:xfrm>
           <a:custGeom>
             <a:avLst/>
@@ -15544,7 +15580,7 @@
         <p:spPr>
           <a:xfrm>
             <a:off x="4377600" y="2217600"/>
-            <a:ext cx="3435480" cy="281520"/>
+            <a:ext cx="3434760" cy="280800"/>
           </a:xfrm>
           <a:prstGeom prst="rect">
             <a:avLst/>
@@ -15596,7 +15632,7 @@
         <p:spPr>
           <a:xfrm>
             <a:off x="4390920" y="2606400"/>
-            <a:ext cx="3409200" cy="776520"/>
+            <a:ext cx="3408480" cy="775800"/>
           </a:xfrm>
           <a:prstGeom prst="rect">
             <a:avLst/>
@@ -15668,7 +15704,7 @@
         <p:spPr>
           <a:xfrm>
             <a:off x="8115120" y="1462320"/>
-            <a:ext cx="3709440" cy="2110320"/>
+            <a:ext cx="3708720" cy="2109600"/>
           </a:xfrm>
           <a:custGeom>
             <a:avLst/>
@@ -15724,7 +15760,7 @@
         <p:spPr>
           <a:xfrm>
             <a:off x="9756000" y="1652040"/>
-            <a:ext cx="423000" cy="423000"/>
+            <a:ext cx="422280" cy="422280"/>
           </a:xfrm>
           <a:custGeom>
             <a:avLst/>
@@ -15845,7 +15881,7 @@
         <p:spPr>
           <a:xfrm>
             <a:off x="8251920" y="2217600"/>
-            <a:ext cx="3435480" cy="281520"/>
+            <a:ext cx="3434760" cy="280800"/>
           </a:xfrm>
           <a:prstGeom prst="rect">
             <a:avLst/>
@@ -15897,7 +15933,7 @@
         <p:spPr>
           <a:xfrm>
             <a:off x="8265240" y="2606400"/>
-            <a:ext cx="3409200" cy="520200"/>
+            <a:ext cx="3408480" cy="519480"/>
           </a:xfrm>
           <a:prstGeom prst="rect">
             <a:avLst/>
@@ -15969,7 +16005,7 @@
         <p:spPr>
           <a:xfrm>
             <a:off x="366480" y="3739320"/>
-            <a:ext cx="5609160" cy="3099960"/>
+            <a:ext cx="5608440" cy="3099240"/>
           </a:xfrm>
           <a:custGeom>
             <a:avLst/>
@@ -16025,7 +16061,7 @@
         <p:spPr>
           <a:xfrm>
             <a:off x="503640" y="3929400"/>
-            <a:ext cx="5335200" cy="281520"/>
+            <a:ext cx="5334480" cy="280800"/>
           </a:xfrm>
           <a:prstGeom prst="rect">
             <a:avLst/>
@@ -16077,7 +16113,7 @@
         <p:spPr>
           <a:xfrm>
             <a:off x="556560" y="4353480"/>
-            <a:ext cx="5229000" cy="493560"/>
+            <a:ext cx="5228280" cy="492840"/>
           </a:xfrm>
           <a:custGeom>
             <a:avLst/>
@@ -16130,7 +16166,7 @@
         <p:spPr>
           <a:xfrm>
             <a:off x="662760" y="4476960"/>
-            <a:ext cx="1624680" cy="246240"/>
+            <a:ext cx="1623960" cy="245520"/>
           </a:xfrm>
           <a:prstGeom prst="rect">
             <a:avLst/>
@@ -16182,7 +16218,7 @@
         <p:spPr>
           <a:xfrm>
             <a:off x="5293800" y="4459320"/>
-            <a:ext cx="493560" cy="281520"/>
+            <a:ext cx="492840" cy="280800"/>
           </a:xfrm>
           <a:prstGeom prst="rect">
             <a:avLst/>
@@ -16234,7 +16270,7 @@
         <p:spPr>
           <a:xfrm>
             <a:off x="556560" y="4953960"/>
-            <a:ext cx="5229000" cy="493560"/>
+            <a:ext cx="5228280" cy="492840"/>
           </a:xfrm>
           <a:custGeom>
             <a:avLst/>
@@ -16287,7 +16323,7 @@
         <p:spPr>
           <a:xfrm>
             <a:off x="662760" y="5077800"/>
-            <a:ext cx="1624680" cy="246240"/>
+            <a:ext cx="1623960" cy="245520"/>
           </a:xfrm>
           <a:prstGeom prst="rect">
             <a:avLst/>
@@ -16339,7 +16375,7 @@
         <p:spPr>
           <a:xfrm>
             <a:off x="5136840" y="5060160"/>
-            <a:ext cx="643680" cy="281520"/>
+            <a:ext cx="642960" cy="280800"/>
           </a:xfrm>
           <a:prstGeom prst="rect">
             <a:avLst/>
@@ -16391,7 +16427,7 @@
         <p:spPr>
           <a:xfrm>
             <a:off x="556560" y="5554800"/>
-            <a:ext cx="5229000" cy="493560"/>
+            <a:ext cx="5228280" cy="492840"/>
           </a:xfrm>
           <a:custGeom>
             <a:avLst/>
@@ -16444,7 +16480,7 @@
         <p:spPr>
           <a:xfrm>
             <a:off x="662760" y="5678640"/>
-            <a:ext cx="1156320" cy="246240"/>
+            <a:ext cx="1155600" cy="245520"/>
           </a:xfrm>
           <a:prstGeom prst="rect">
             <a:avLst/>
@@ -16496,7 +16532,7 @@
         <p:spPr>
           <a:xfrm>
             <a:off x="5199840" y="5661000"/>
-            <a:ext cx="582120" cy="281520"/>
+            <a:ext cx="581400" cy="280800"/>
           </a:xfrm>
           <a:prstGeom prst="rect">
             <a:avLst/>
@@ -16548,7 +16584,7 @@
         <p:spPr>
           <a:xfrm>
             <a:off x="556560" y="6155640"/>
-            <a:ext cx="5229000" cy="493560"/>
+            <a:ext cx="5228280" cy="492840"/>
           </a:xfrm>
           <a:custGeom>
             <a:avLst/>
@@ -16601,7 +16637,7 @@
         <p:spPr>
           <a:xfrm>
             <a:off x="662760" y="6279480"/>
-            <a:ext cx="1412640" cy="246240"/>
+            <a:ext cx="1411920" cy="245520"/>
           </a:xfrm>
           <a:prstGeom prst="rect">
             <a:avLst/>
@@ -16653,7 +16689,7 @@
         <p:spPr>
           <a:xfrm>
             <a:off x="4971960" y="6261480"/>
-            <a:ext cx="811800" cy="281520"/>
+            <a:ext cx="811080" cy="280800"/>
           </a:xfrm>
           <a:prstGeom prst="rect">
             <a:avLst/>
@@ -16705,7 +16741,7 @@
         <p:spPr>
           <a:xfrm>
             <a:off x="6213240" y="3739320"/>
-            <a:ext cx="5609160" cy="3099960"/>
+            <a:ext cx="5608440" cy="3099240"/>
           </a:xfrm>
           <a:custGeom>
             <a:avLst/>
@@ -16761,7 +16797,7 @@
         <p:spPr>
           <a:xfrm>
             <a:off x="6350040" y="3929400"/>
-            <a:ext cx="5335200" cy="281520"/>
+            <a:ext cx="5334480" cy="280800"/>
           </a:xfrm>
           <a:prstGeom prst="rect">
             <a:avLst/>
@@ -16813,7 +16849,7 @@
         <p:spPr>
           <a:xfrm>
             <a:off x="6403320" y="4353480"/>
-            <a:ext cx="5229000" cy="458280"/>
+            <a:ext cx="5228280" cy="457560"/>
           </a:xfrm>
           <a:custGeom>
             <a:avLst/>
@@ -16866,7 +16902,7 @@
         <p:spPr>
           <a:xfrm>
             <a:off x="6520320" y="4494600"/>
-            <a:ext cx="197640" cy="175680"/>
+            <a:ext cx="196920" cy="174960"/>
           </a:xfrm>
           <a:custGeom>
             <a:avLst/>
@@ -16985,7 +17021,7 @@
         <p:spPr>
           <a:xfrm>
             <a:off x="6836040" y="4459320"/>
-            <a:ext cx="2419560" cy="246240"/>
+            <a:ext cx="2418840" cy="245520"/>
           </a:xfrm>
           <a:prstGeom prst="rect">
             <a:avLst/>
@@ -17047,7 +17083,7 @@
         <p:spPr>
           <a:xfrm>
             <a:off x="6403320" y="4918680"/>
-            <a:ext cx="5229000" cy="458280"/>
+            <a:ext cx="5228280" cy="457560"/>
           </a:xfrm>
           <a:custGeom>
             <a:avLst/>
@@ -17100,7 +17136,7 @@
         <p:spPr>
           <a:xfrm>
             <a:off x="6520320" y="5060160"/>
-            <a:ext cx="197640" cy="175680"/>
+            <a:ext cx="196920" cy="174960"/>
           </a:xfrm>
           <a:custGeom>
             <a:avLst/>
@@ -17225,7 +17261,7 @@
         <p:spPr>
           <a:xfrm>
             <a:off x="6836040" y="5024880"/>
-            <a:ext cx="2057400" cy="246240"/>
+            <a:ext cx="2056680" cy="245520"/>
           </a:xfrm>
           <a:prstGeom prst="rect">
             <a:avLst/>
@@ -17287,7 +17323,7 @@
         <p:spPr>
           <a:xfrm>
             <a:off x="6403320" y="5484240"/>
-            <a:ext cx="5229000" cy="458280"/>
+            <a:ext cx="5228280" cy="457560"/>
           </a:xfrm>
           <a:custGeom>
             <a:avLst/>
@@ -17340,7 +17376,7 @@
         <p:spPr>
           <a:xfrm>
             <a:off x="6520320" y="5625720"/>
-            <a:ext cx="197640" cy="175680"/>
+            <a:ext cx="196920" cy="174960"/>
           </a:xfrm>
           <a:custGeom>
             <a:avLst/>
@@ -17537,7 +17573,7 @@
         <p:spPr>
           <a:xfrm>
             <a:off x="6836040" y="5590080"/>
-            <a:ext cx="2454840" cy="246240"/>
+            <a:ext cx="2454120" cy="245520"/>
           </a:xfrm>
           <a:prstGeom prst="rect">
             <a:avLst/>
@@ -17599,7 +17635,7 @@
         <p:spPr>
           <a:xfrm>
             <a:off x="6403320" y="6049440"/>
-            <a:ext cx="5229000" cy="458280"/>
+            <a:ext cx="5228280" cy="457560"/>
           </a:xfrm>
           <a:custGeom>
             <a:avLst/>
@@ -17652,7 +17688,7 @@
         <p:spPr>
           <a:xfrm>
             <a:off x="6542280" y="6190920"/>
-            <a:ext cx="153360" cy="175680"/>
+            <a:ext cx="152640" cy="174960"/>
           </a:xfrm>
           <a:custGeom>
             <a:avLst/>
@@ -17813,7 +17849,7 @@
         <p:spPr>
           <a:xfrm>
             <a:off x="6836040" y="6155640"/>
-            <a:ext cx="2296080" cy="246240"/>
+            <a:ext cx="2295360" cy="245520"/>
           </a:xfrm>
           <a:prstGeom prst="rect">
             <a:avLst/>
@@ -17907,7 +17943,7 @@
         <p:spPr>
           <a:xfrm>
             <a:off x="0" y="0"/>
-            <a:ext cx="12191040" cy="6856920"/>
+            <a:ext cx="12190320" cy="6856200"/>
           </a:xfrm>
           <a:custGeom>
             <a:avLst/>
@@ -17970,7 +18006,7 @@
         <p:spPr>
           <a:xfrm>
             <a:off x="354240" y="354240"/>
-            <a:ext cx="11694600" cy="424080"/>
+            <a:ext cx="11693880" cy="423360"/>
           </a:xfrm>
           <a:prstGeom prst="rect">
             <a:avLst/>
@@ -18022,7 +18058,7 @@
         <p:spPr>
           <a:xfrm>
             <a:off x="354240" y="885960"/>
-            <a:ext cx="11588400" cy="282600"/>
+            <a:ext cx="11587680" cy="281880"/>
           </a:xfrm>
           <a:prstGeom prst="rect">
             <a:avLst/>
@@ -18074,7 +18110,7 @@
         <p:spPr>
           <a:xfrm>
             <a:off x="354240" y="1275840"/>
-            <a:ext cx="849600" cy="34200"/>
+            <a:ext cx="848880" cy="33480"/>
           </a:xfrm>
           <a:custGeom>
             <a:avLst/>
@@ -18125,7 +18161,7 @@
         <p:spPr>
           <a:xfrm>
             <a:off x="367560" y="1466280"/>
-            <a:ext cx="5607720" cy="3179880"/>
+            <a:ext cx="5607000" cy="3179160"/>
           </a:xfrm>
           <a:custGeom>
             <a:avLst/>
@@ -18181,7 +18217,7 @@
         <p:spPr>
           <a:xfrm>
             <a:off x="618120" y="1657080"/>
-            <a:ext cx="277920" cy="317880"/>
+            <a:ext cx="277200" cy="317160"/>
           </a:xfrm>
           <a:custGeom>
             <a:avLst/>
@@ -18468,7 +18504,7 @@
         <p:spPr>
           <a:xfrm>
             <a:off x="1063080" y="1657080"/>
-            <a:ext cx="1212840" cy="317880"/>
+            <a:ext cx="1212120" cy="317160"/>
           </a:xfrm>
           <a:prstGeom prst="rect">
             <a:avLst/>
@@ -18520,7 +18556,7 @@
         <p:spPr>
           <a:xfrm>
             <a:off x="558360" y="2117520"/>
-            <a:ext cx="5226480" cy="707760"/>
+            <a:ext cx="5225760" cy="707040"/>
           </a:xfrm>
           <a:custGeom>
             <a:avLst/>
@@ -18573,7 +18609,7 @@
         <p:spPr>
           <a:xfrm>
             <a:off x="664560" y="2224080"/>
-            <a:ext cx="5093640" cy="246960"/>
+            <a:ext cx="5092920" cy="246240"/>
           </a:xfrm>
           <a:prstGeom prst="rect">
             <a:avLst/>
@@ -18625,7 +18661,7 @@
         <p:spPr>
           <a:xfrm>
             <a:off x="664560" y="2507400"/>
-            <a:ext cx="5085000" cy="211680"/>
+            <a:ext cx="5084280" cy="210960"/>
           </a:xfrm>
           <a:prstGeom prst="rect">
             <a:avLst/>
@@ -18679,7 +18715,7 @@
         <p:spPr>
           <a:xfrm>
             <a:off x="558360" y="2932920"/>
-            <a:ext cx="5226480" cy="707760"/>
+            <a:ext cx="5225760" cy="707040"/>
           </a:xfrm>
           <a:custGeom>
             <a:avLst/>
@@ -18732,7 +18768,7 @@
         <p:spPr>
           <a:xfrm>
             <a:off x="664560" y="3039120"/>
-            <a:ext cx="5093640" cy="246960"/>
+            <a:ext cx="5092920" cy="246240"/>
           </a:xfrm>
           <a:prstGeom prst="rect">
             <a:avLst/>
@@ -18784,7 +18820,7 @@
         <p:spPr>
           <a:xfrm>
             <a:off x="664560" y="3322800"/>
-            <a:ext cx="5085000" cy="211680"/>
+            <a:ext cx="5084280" cy="210960"/>
           </a:xfrm>
           <a:prstGeom prst="rect">
             <a:avLst/>
@@ -18838,7 +18874,7 @@
         <p:spPr>
           <a:xfrm>
             <a:off x="558360" y="3747960"/>
-            <a:ext cx="5226480" cy="707760"/>
+            <a:ext cx="5225760" cy="707040"/>
           </a:xfrm>
           <a:custGeom>
             <a:avLst/>
@@ -18891,7 +18927,7 @@
         <p:spPr>
           <a:xfrm>
             <a:off x="664560" y="3854160"/>
-            <a:ext cx="5093640" cy="246960"/>
+            <a:ext cx="5092920" cy="246240"/>
           </a:xfrm>
           <a:prstGeom prst="rect">
             <a:avLst/>
@@ -18943,7 +18979,7 @@
         <p:spPr>
           <a:xfrm>
             <a:off x="664560" y="4137840"/>
-            <a:ext cx="5085000" cy="211680"/>
+            <a:ext cx="5084280" cy="210960"/>
           </a:xfrm>
           <a:prstGeom prst="rect">
             <a:avLst/>
@@ -18997,7 +19033,7 @@
         <p:spPr>
           <a:xfrm>
             <a:off x="6215760" y="1466280"/>
-            <a:ext cx="5607720" cy="1292400"/>
+            <a:ext cx="5607000" cy="1291680"/>
           </a:xfrm>
           <a:custGeom>
             <a:avLst/>
@@ -19053,7 +19089,7 @@
         <p:spPr>
           <a:xfrm>
             <a:off x="6441480" y="1665720"/>
-            <a:ext cx="264600" cy="264600"/>
+            <a:ext cx="263880" cy="263880"/>
           </a:xfrm>
           <a:custGeom>
             <a:avLst/>
@@ -19165,7 +19201,7 @@
         <p:spPr>
           <a:xfrm>
             <a:off x="6844680" y="1657080"/>
-            <a:ext cx="982440" cy="282600"/>
+            <a:ext cx="981720" cy="281880"/>
           </a:xfrm>
           <a:prstGeom prst="rect">
             <a:avLst/>
@@ -19217,7 +19253,7 @@
         <p:spPr>
           <a:xfrm>
             <a:off x="6406200" y="2046600"/>
-            <a:ext cx="5306400" cy="521640"/>
+            <a:ext cx="5305680" cy="520920"/>
           </a:xfrm>
           <a:prstGeom prst="rect">
             <a:avLst/>
@@ -19309,7 +19345,7 @@
         <p:spPr>
           <a:xfrm>
             <a:off x="6215760" y="2923920"/>
-            <a:ext cx="5607720" cy="1292400"/>
+            <a:ext cx="5607000" cy="1291680"/>
           </a:xfrm>
           <a:custGeom>
             <a:avLst/>
@@ -19365,7 +19401,7 @@
         <p:spPr>
           <a:xfrm>
             <a:off x="6408360" y="3123360"/>
-            <a:ext cx="331200" cy="264600"/>
+            <a:ext cx="330480" cy="263880"/>
           </a:xfrm>
           <a:custGeom>
             <a:avLst/>
@@ -19487,7 +19523,7 @@
         <p:spPr>
           <a:xfrm>
             <a:off x="6844680" y="3114360"/>
-            <a:ext cx="707760" cy="282600"/>
+            <a:ext cx="707040" cy="281880"/>
           </a:xfrm>
           <a:prstGeom prst="rect">
             <a:avLst/>
@@ -19539,7 +19575,7 @@
         <p:spPr>
           <a:xfrm>
             <a:off x="6406200" y="3504240"/>
-            <a:ext cx="5306400" cy="521640"/>
+            <a:ext cx="5305680" cy="520920"/>
           </a:xfrm>
           <a:prstGeom prst="rect">
             <a:avLst/>
@@ -19611,7 +19647,7 @@
         <p:spPr>
           <a:xfrm>
             <a:off x="367560" y="4815720"/>
-            <a:ext cx="2736720" cy="1266120"/>
+            <a:ext cx="2736000" cy="1265400"/>
           </a:xfrm>
           <a:custGeom>
             <a:avLst/>
@@ -19667,7 +19703,7 @@
         <p:spPr>
           <a:xfrm>
             <a:off x="1577160" y="4970880"/>
-            <a:ext cx="317880" cy="317880"/>
+            <a:ext cx="317160" cy="317160"/>
           </a:xfrm>
           <a:custGeom>
             <a:avLst/>
@@ -19910,7 +19946,7 @@
         <p:spPr>
           <a:xfrm>
             <a:off x="478440" y="5396040"/>
-            <a:ext cx="2515320" cy="246960"/>
+            <a:ext cx="2514600" cy="246240"/>
           </a:xfrm>
           <a:prstGeom prst="rect">
             <a:avLst/>
@@ -19962,7 +19998,7 @@
         <p:spPr>
           <a:xfrm>
             <a:off x="487440" y="5715000"/>
-            <a:ext cx="2497680" cy="211680"/>
+            <a:ext cx="2496960" cy="210960"/>
           </a:xfrm>
           <a:prstGeom prst="rect">
             <a:avLst/>
@@ -20014,7 +20050,7 @@
         <p:spPr>
           <a:xfrm>
             <a:off x="3273840" y="4815720"/>
-            <a:ext cx="2736720" cy="1266120"/>
+            <a:ext cx="2736000" cy="1265400"/>
           </a:xfrm>
           <a:custGeom>
             <a:avLst/>
@@ -20070,7 +20106,7 @@
         <p:spPr>
           <a:xfrm>
             <a:off x="4503240" y="4970880"/>
-            <a:ext cx="277920" cy="317880"/>
+            <a:ext cx="277200" cy="317160"/>
           </a:xfrm>
           <a:custGeom>
             <a:avLst/>
@@ -20240,7 +20276,7 @@
         <p:spPr>
           <a:xfrm>
             <a:off x="3384720" y="5396040"/>
-            <a:ext cx="2515320" cy="246960"/>
+            <a:ext cx="2514600" cy="246240"/>
           </a:xfrm>
           <a:prstGeom prst="rect">
             <a:avLst/>
@@ -20292,7 +20328,7 @@
         <p:spPr>
           <a:xfrm>
             <a:off x="3393720" y="5715000"/>
-            <a:ext cx="2497680" cy="211680"/>
+            <a:ext cx="2496960" cy="210960"/>
           </a:xfrm>
           <a:prstGeom prst="rect">
             <a:avLst/>
@@ -20344,7 +20380,7 @@
         <p:spPr>
           <a:xfrm>
             <a:off x="6180120" y="4815720"/>
-            <a:ext cx="2736720" cy="1266120"/>
+            <a:ext cx="2736000" cy="1265400"/>
           </a:xfrm>
           <a:custGeom>
             <a:avLst/>
@@ -20400,7 +20436,7 @@
         <p:spPr>
           <a:xfrm>
             <a:off x="7389720" y="4970880"/>
-            <a:ext cx="317880" cy="317880"/>
+            <a:ext cx="317160" cy="317160"/>
           </a:xfrm>
           <a:custGeom>
             <a:avLst/>
@@ -20604,7 +20640,7 @@
         <p:spPr>
           <a:xfrm>
             <a:off x="6291000" y="5396040"/>
-            <a:ext cx="2515320" cy="246960"/>
+            <a:ext cx="2514600" cy="246240"/>
           </a:xfrm>
           <a:prstGeom prst="rect">
             <a:avLst/>
@@ -20656,7 +20692,7 @@
         <p:spPr>
           <a:xfrm>
             <a:off x="6299640" y="5715000"/>
-            <a:ext cx="2497680" cy="211680"/>
+            <a:ext cx="2496960" cy="210960"/>
           </a:xfrm>
           <a:prstGeom prst="rect">
             <a:avLst/>
@@ -20708,7 +20744,7 @@
         <p:spPr>
           <a:xfrm>
             <a:off x="9086400" y="4815720"/>
-            <a:ext cx="2736720" cy="1266120"/>
+            <a:ext cx="2736000" cy="1265400"/>
           </a:xfrm>
           <a:custGeom>
             <a:avLst/>
@@ -20764,7 +20800,7 @@
         <p:spPr>
           <a:xfrm>
             <a:off x="10296000" y="4970880"/>
-            <a:ext cx="317880" cy="317880"/>
+            <a:ext cx="317160" cy="317160"/>
           </a:xfrm>
           <a:custGeom>
             <a:avLst/>
@@ -20987,7 +21023,7 @@
         <p:spPr>
           <a:xfrm>
             <a:off x="9197280" y="5396040"/>
-            <a:ext cx="2515320" cy="246960"/>
+            <a:ext cx="2514600" cy="246240"/>
           </a:xfrm>
           <a:prstGeom prst="rect">
             <a:avLst/>
@@ -21039,7 +21075,7 @@
         <p:spPr>
           <a:xfrm>
             <a:off x="9205920" y="5715000"/>
-            <a:ext cx="2497680" cy="211680"/>
+            <a:ext cx="2496960" cy="210960"/>
           </a:xfrm>
           <a:prstGeom prst="rect">
             <a:avLst/>
@@ -21091,7 +21127,7 @@
         <p:spPr>
           <a:xfrm>
             <a:off x="367560" y="6251040"/>
-            <a:ext cx="11455560" cy="592560"/>
+            <a:ext cx="11454840" cy="591840"/>
           </a:xfrm>
           <a:custGeom>
             <a:avLst/>
@@ -21147,7 +21183,7 @@
         <p:spPr>
           <a:xfrm>
             <a:off x="469440" y="6406200"/>
-            <a:ext cx="11251800" cy="282600"/>
+            <a:ext cx="11251080" cy="281880"/>
           </a:xfrm>
           <a:prstGeom prst="rect">
             <a:avLst/>
@@ -21261,7 +21297,7 @@
         <p:spPr>
           <a:xfrm>
             <a:off x="0" y="0"/>
-            <a:ext cx="12191040" cy="6856920"/>
+            <a:ext cx="12190320" cy="6856200"/>
           </a:xfrm>
           <a:prstGeom prst="roundRect">
             <a:avLst>
@@ -21293,7 +21329,7 @@
         <p:spPr>
           <a:xfrm>
             <a:off x="0" y="0"/>
-            <a:ext cx="12191040" cy="6856920"/>
+            <a:ext cx="12190320" cy="6856200"/>
           </a:xfrm>
           <a:custGeom>
             <a:avLst/>
@@ -21356,7 +21392,7 @@
         <p:spPr>
           <a:xfrm>
             <a:off x="380880" y="1714680"/>
-            <a:ext cx="1856160" cy="608400"/>
+            <a:ext cx="1855440" cy="607680"/>
           </a:xfrm>
           <a:custGeom>
             <a:avLst/>
@@ -21407,7 +21443,7 @@
         <p:spPr>
           <a:xfrm>
             <a:off x="609480" y="1847880"/>
-            <a:ext cx="1567440" cy="342000"/>
+            <a:ext cx="1566720" cy="341280"/>
           </a:xfrm>
           <a:prstGeom prst="rect">
             <a:avLst/>
@@ -21459,7 +21495,7 @@
         <p:spPr>
           <a:xfrm>
             <a:off x="380880" y="2552760"/>
-            <a:ext cx="11772000" cy="1713600"/>
+            <a:ext cx="11771280" cy="1712880"/>
           </a:xfrm>
           <a:prstGeom prst="rect">
             <a:avLst/>
@@ -21532,7 +21568,7 @@
         <p:spPr>
           <a:xfrm>
             <a:off x="380880" y="4495680"/>
-            <a:ext cx="1522800" cy="75240"/>
+            <a:ext cx="1522080" cy="74520"/>
           </a:xfrm>
           <a:custGeom>
             <a:avLst/>
@@ -21583,7 +21619,7 @@
         <p:spPr>
           <a:xfrm>
             <a:off x="380880" y="4800600"/>
-            <a:ext cx="7457040" cy="342000"/>
+            <a:ext cx="7456320" cy="341280"/>
           </a:xfrm>
           <a:prstGeom prst="rect">
             <a:avLst/>
@@ -21635,7 +21671,7 @@
         <p:spPr>
           <a:xfrm>
             <a:off x="10591920" y="5867280"/>
-            <a:ext cx="151200" cy="151200"/>
+            <a:ext cx="150480" cy="150480"/>
           </a:xfrm>
           <a:custGeom>
             <a:avLst/>
@@ -21686,7 +21722,7 @@
         <p:spPr>
           <a:xfrm>
             <a:off x="10896480" y="5867280"/>
-            <a:ext cx="151200" cy="151200"/>
+            <a:ext cx="150480" cy="150480"/>
           </a:xfrm>
           <a:custGeom>
             <a:avLst/>
@@ -21737,7 +21773,7 @@
         <p:spPr>
           <a:xfrm>
             <a:off x="11201400" y="5867280"/>
-            <a:ext cx="151200" cy="151200"/>
+            <a:ext cx="150480" cy="150480"/>
           </a:xfrm>
           <a:custGeom>
             <a:avLst/>
@@ -21820,7 +21856,7 @@
         <p:spPr>
           <a:xfrm>
             <a:off x="0" y="0"/>
-            <a:ext cx="12191040" cy="6855840"/>
+            <a:ext cx="12190320" cy="6855120"/>
           </a:xfrm>
           <a:custGeom>
             <a:avLst/>
@@ -21883,7 +21919,7 @@
         <p:spPr>
           <a:xfrm>
             <a:off x="327240" y="327240"/>
-            <a:ext cx="11732760" cy="391680"/>
+            <a:ext cx="11732040" cy="390960"/>
           </a:xfrm>
           <a:prstGeom prst="rect">
             <a:avLst/>
@@ -21935,7 +21971,7 @@
         <p:spPr>
           <a:xfrm>
             <a:off x="327240" y="818280"/>
-            <a:ext cx="11634480" cy="260640"/>
+            <a:ext cx="11633760" cy="259920"/>
           </a:xfrm>
           <a:prstGeom prst="rect">
             <a:avLst/>
@@ -21987,7 +22023,7 @@
         <p:spPr>
           <a:xfrm>
             <a:off x="327240" y="1178280"/>
-            <a:ext cx="784440" cy="31680"/>
+            <a:ext cx="783720" cy="30960"/>
           </a:xfrm>
           <a:custGeom>
             <a:avLst/>
@@ -22038,7 +22074,7 @@
         <p:spPr>
           <a:xfrm>
             <a:off x="339480" y="1354320"/>
-            <a:ext cx="5644800" cy="3492720"/>
+            <a:ext cx="5644080" cy="3492000"/>
           </a:xfrm>
           <a:custGeom>
             <a:avLst/>
@@ -22094,7 +22130,7 @@
         <p:spPr>
           <a:xfrm>
             <a:off x="453960" y="1530000"/>
-            <a:ext cx="5415840" cy="293400"/>
+            <a:ext cx="5415120" cy="292680"/>
           </a:xfrm>
           <a:prstGeom prst="rect">
             <a:avLst/>
@@ -22146,7 +22182,7 @@
         <p:spPr>
           <a:xfrm>
             <a:off x="515520" y="1955520"/>
-            <a:ext cx="5293080" cy="620640"/>
+            <a:ext cx="5292360" cy="619920"/>
           </a:xfrm>
           <a:custGeom>
             <a:avLst/>
@@ -22199,7 +22235,7 @@
         <p:spPr>
           <a:xfrm>
             <a:off x="634320" y="2086560"/>
-            <a:ext cx="162720" cy="162720"/>
+            <a:ext cx="162000" cy="162000"/>
           </a:xfrm>
           <a:custGeom>
             <a:avLst/>
@@ -22341,7 +22377,7 @@
         <p:spPr>
           <a:xfrm>
             <a:off x="916560" y="2053800"/>
-            <a:ext cx="2404440" cy="227880"/>
+            <a:ext cx="2403720" cy="227160"/>
           </a:xfrm>
           <a:prstGeom prst="rect">
             <a:avLst/>
@@ -22393,7 +22429,7 @@
         <p:spPr>
           <a:xfrm>
             <a:off x="916560" y="2282760"/>
-            <a:ext cx="2396520" cy="195480"/>
+            <a:ext cx="2395800" cy="194760"/>
           </a:xfrm>
           <a:prstGeom prst="rect">
             <a:avLst/>
@@ -22447,7 +22483,7 @@
         <p:spPr>
           <a:xfrm>
             <a:off x="515520" y="2675520"/>
-            <a:ext cx="5293080" cy="620640"/>
+            <a:ext cx="5292360" cy="619920"/>
           </a:xfrm>
           <a:custGeom>
             <a:avLst/>
@@ -22500,7 +22536,7 @@
         <p:spPr>
           <a:xfrm>
             <a:off x="634320" y="2806560"/>
-            <a:ext cx="162720" cy="162720"/>
+            <a:ext cx="162000" cy="162000"/>
           </a:xfrm>
           <a:custGeom>
             <a:avLst/>
@@ -22627,7 +22663,7 @@
         <p:spPr>
           <a:xfrm>
             <a:off x="916560" y="2773800"/>
-            <a:ext cx="2044440" cy="227880"/>
+            <a:ext cx="2043720" cy="227160"/>
           </a:xfrm>
           <a:prstGeom prst="rect">
             <a:avLst/>
@@ -22679,7 +22715,7 @@
         <p:spPr>
           <a:xfrm>
             <a:off x="916560" y="3003120"/>
-            <a:ext cx="2036520" cy="195480"/>
+            <a:ext cx="2035800" cy="194760"/>
           </a:xfrm>
           <a:prstGeom prst="rect">
             <a:avLst/>
@@ -22733,7 +22769,7 @@
         <p:spPr>
           <a:xfrm>
             <a:off x="515520" y="3395880"/>
-            <a:ext cx="5293080" cy="620640"/>
+            <a:ext cx="5292360" cy="619920"/>
           </a:xfrm>
           <a:custGeom>
             <a:avLst/>
@@ -22786,7 +22822,7 @@
         <p:spPr>
           <a:xfrm>
             <a:off x="634320" y="3526560"/>
-            <a:ext cx="162720" cy="162720"/>
+            <a:ext cx="162000" cy="162000"/>
           </a:xfrm>
           <a:custGeom>
             <a:avLst/>
@@ -22931,7 +22967,7 @@
         <p:spPr>
           <a:xfrm>
             <a:off x="916560" y="3493800"/>
-            <a:ext cx="1962720" cy="227880"/>
+            <a:ext cx="1962000" cy="227160"/>
           </a:xfrm>
           <a:prstGeom prst="rect">
             <a:avLst/>
@@ -22983,7 +23019,7 @@
         <p:spPr>
           <a:xfrm>
             <a:off x="916560" y="3723120"/>
-            <a:ext cx="1954440" cy="195480"/>
+            <a:ext cx="1953720" cy="194760"/>
           </a:xfrm>
           <a:prstGeom prst="rect">
             <a:avLst/>
@@ -23037,7 +23073,7 @@
         <p:spPr>
           <a:xfrm>
             <a:off x="6205680" y="1354320"/>
-            <a:ext cx="5644800" cy="3492720"/>
+            <a:ext cx="5644080" cy="3492000"/>
           </a:xfrm>
           <a:custGeom>
             <a:avLst/>
@@ -23093,7 +23129,7 @@
         <p:spPr>
           <a:xfrm>
             <a:off x="6320160" y="1530000"/>
-            <a:ext cx="5415840" cy="293400"/>
+            <a:ext cx="5415120" cy="292680"/>
           </a:xfrm>
           <a:prstGeom prst="rect">
             <a:avLst/>
@@ -23145,7 +23181,7 @@
         <p:spPr>
           <a:xfrm>
             <a:off x="6381360" y="1955520"/>
-            <a:ext cx="5293080" cy="1144440"/>
+            <a:ext cx="5292360" cy="1143720"/>
           </a:xfrm>
           <a:custGeom>
             <a:avLst/>
@@ -23198,7 +23234,7 @@
         <p:spPr>
           <a:xfrm>
             <a:off x="6414120" y="2086560"/>
-            <a:ext cx="5227560" cy="391680"/>
+            <a:ext cx="5226840" cy="390960"/>
           </a:xfrm>
           <a:prstGeom prst="rect">
             <a:avLst/>
@@ -23250,7 +23286,7 @@
         <p:spPr>
           <a:xfrm>
             <a:off x="6475680" y="2544840"/>
-            <a:ext cx="5104800" cy="227880"/>
+            <a:ext cx="5104080" cy="227160"/>
           </a:xfrm>
           <a:prstGeom prst="rect">
             <a:avLst/>
@@ -23302,7 +23338,7 @@
         <p:spPr>
           <a:xfrm>
             <a:off x="6479640" y="2773800"/>
-            <a:ext cx="5096520" cy="195480"/>
+            <a:ext cx="5095800" cy="194760"/>
           </a:xfrm>
           <a:prstGeom prst="rect">
             <a:avLst/>
@@ -23356,7 +23392,7 @@
         <p:spPr>
           <a:xfrm>
             <a:off x="6381360" y="3232080"/>
-            <a:ext cx="5293080" cy="653400"/>
+            <a:ext cx="5292360" cy="652680"/>
           </a:xfrm>
           <a:custGeom>
             <a:avLst/>
@@ -23409,7 +23445,7 @@
         <p:spPr>
           <a:xfrm>
             <a:off x="6479640" y="3330360"/>
-            <a:ext cx="5170320" cy="227880"/>
+            <a:ext cx="5169600" cy="227160"/>
           </a:xfrm>
           <a:prstGeom prst="rect">
             <a:avLst/>
@@ -23461,7 +23497,7 @@
         <p:spPr>
           <a:xfrm>
             <a:off x="6479640" y="3592080"/>
-            <a:ext cx="5162040" cy="195480"/>
+            <a:ext cx="5161320" cy="194760"/>
           </a:xfrm>
           <a:prstGeom prst="rect">
             <a:avLst/>
@@ -23527,7 +23563,7 @@
         <p:spPr>
           <a:xfrm>
             <a:off x="6381360" y="4017600"/>
-            <a:ext cx="5293080" cy="653400"/>
+            <a:ext cx="5292360" cy="652680"/>
           </a:xfrm>
           <a:custGeom>
             <a:avLst/>
@@ -23580,7 +23616,7 @@
         <p:spPr>
           <a:xfrm>
             <a:off x="6479640" y="4115880"/>
-            <a:ext cx="5170320" cy="227880"/>
+            <a:ext cx="5169600" cy="227160"/>
           </a:xfrm>
           <a:prstGeom prst="rect">
             <a:avLst/>
@@ -23632,7 +23668,7 @@
         <p:spPr>
           <a:xfrm>
             <a:off x="6479640" y="4377600"/>
-            <a:ext cx="5162040" cy="195480"/>
+            <a:ext cx="5161320" cy="194760"/>
           </a:xfrm>
           <a:prstGeom prst="rect">
             <a:avLst/>
@@ -23698,7 +23734,7 @@
         <p:spPr>
           <a:xfrm>
             <a:off x="339480" y="5003640"/>
-            <a:ext cx="3730320" cy="1168920"/>
+            <a:ext cx="3729600" cy="1168200"/>
           </a:xfrm>
           <a:custGeom>
             <a:avLst/>
@@ -23754,7 +23790,7 @@
         <p:spPr>
           <a:xfrm>
             <a:off x="2095920" y="5146920"/>
-            <a:ext cx="219960" cy="293400"/>
+            <a:ext cx="219240" cy="292680"/>
           </a:xfrm>
           <a:custGeom>
             <a:avLst/>
@@ -23995,7 +24031,7 @@
         <p:spPr>
           <a:xfrm>
             <a:off x="441720" y="5539680"/>
-            <a:ext cx="3525480" cy="227880"/>
+            <a:ext cx="3524760" cy="227160"/>
           </a:xfrm>
           <a:prstGeom prst="rect">
             <a:avLst/>
@@ -24047,7 +24083,7 @@
         <p:spPr>
           <a:xfrm>
             <a:off x="450000" y="5834160"/>
-            <a:ext cx="3509280" cy="195480"/>
+            <a:ext cx="3508560" cy="194760"/>
           </a:xfrm>
           <a:prstGeom prst="rect">
             <a:avLst/>
@@ -24099,7 +24135,7 @@
         <p:spPr>
           <a:xfrm>
             <a:off x="4228560" y="5003640"/>
-            <a:ext cx="3730320" cy="1168920"/>
+            <a:ext cx="3729600" cy="1168200"/>
           </a:xfrm>
           <a:custGeom>
             <a:avLst/>
@@ -24155,7 +24191,7 @@
         <p:spPr>
           <a:xfrm>
             <a:off x="5929200" y="5146920"/>
-            <a:ext cx="330480" cy="293400"/>
+            <a:ext cx="329760" cy="292680"/>
           </a:xfrm>
           <a:custGeom>
             <a:avLst/>
@@ -24258,7 +24294,7 @@
         <p:spPr>
           <a:xfrm>
             <a:off x="4330800" y="5539680"/>
-            <a:ext cx="3525480" cy="227880"/>
+            <a:ext cx="3524760" cy="227160"/>
           </a:xfrm>
           <a:prstGeom prst="rect">
             <a:avLst/>
@@ -24310,7 +24346,7 @@
         <p:spPr>
           <a:xfrm>
             <a:off x="4338720" y="5834160"/>
-            <a:ext cx="3509280" cy="195480"/>
+            <a:ext cx="3508560" cy="194760"/>
           </a:xfrm>
           <a:prstGeom prst="rect">
             <a:avLst/>
@@ -24362,7 +24398,7 @@
         <p:spPr>
           <a:xfrm>
             <a:off x="8117280" y="5003640"/>
-            <a:ext cx="3730320" cy="1168920"/>
+            <a:ext cx="3729600" cy="1168200"/>
           </a:xfrm>
           <a:custGeom>
             <a:avLst/>
@@ -24418,7 +24454,7 @@
         <p:spPr>
           <a:xfrm>
             <a:off x="9818280" y="5146920"/>
-            <a:ext cx="330480" cy="293400"/>
+            <a:ext cx="329760" cy="292680"/>
           </a:xfrm>
           <a:custGeom>
             <a:avLst/>
@@ -24608,7 +24644,7 @@
         <p:spPr>
           <a:xfrm>
             <a:off x="8219520" y="5539680"/>
-            <a:ext cx="3525480" cy="227880"/>
+            <a:ext cx="3524760" cy="227160"/>
           </a:xfrm>
           <a:prstGeom prst="rect">
             <a:avLst/>
@@ -24660,7 +24696,7 @@
         <p:spPr>
           <a:xfrm>
             <a:off x="8227800" y="5834160"/>
-            <a:ext cx="3509280" cy="195480"/>
+            <a:ext cx="3508560" cy="194760"/>
           </a:xfrm>
           <a:prstGeom prst="rect">
             <a:avLst/>
@@ -24712,7 +24748,7 @@
         <p:spPr>
           <a:xfrm>
             <a:off x="339480" y="6329160"/>
-            <a:ext cx="11511720" cy="514440"/>
+            <a:ext cx="11511000" cy="513720"/>
           </a:xfrm>
           <a:custGeom>
             <a:avLst/>
@@ -24768,7 +24804,7 @@
         <p:spPr>
           <a:xfrm>
             <a:off x="441720" y="6472440"/>
-            <a:ext cx="11307240" cy="227880"/>
+            <a:ext cx="11306520" cy="227160"/>
           </a:xfrm>
           <a:prstGeom prst="rect">
             <a:avLst/>
@@ -24872,7 +24908,7 @@
         <p:spPr>
           <a:xfrm>
             <a:off x="0" y="0"/>
-            <a:ext cx="12191040" cy="6859080"/>
+            <a:ext cx="12190320" cy="6858360"/>
           </a:xfrm>
           <a:custGeom>
             <a:avLst/>
@@ -24935,7 +24971,7 @@
         <p:spPr>
           <a:xfrm>
             <a:off x="372960" y="372960"/>
-            <a:ext cx="11669040" cy="446400"/>
+            <a:ext cx="11668320" cy="445680"/>
           </a:xfrm>
           <a:prstGeom prst="rect">
             <a:avLst/>
@@ -24987,7 +25023,7 @@
         <p:spPr>
           <a:xfrm>
             <a:off x="372960" y="932040"/>
-            <a:ext cx="11557080" cy="297360"/>
+            <a:ext cx="11556360" cy="296640"/>
           </a:xfrm>
           <a:prstGeom prst="rect">
             <a:avLst/>
@@ -25039,7 +25075,7 @@
         <p:spPr>
           <a:xfrm>
             <a:off x="372960" y="1342080"/>
-            <a:ext cx="893880" cy="36360"/>
+            <a:ext cx="893160" cy="35640"/>
           </a:xfrm>
           <a:custGeom>
             <a:avLst/>
@@ -25090,7 +25126,7 @@
         <p:spPr>
           <a:xfrm>
             <a:off x="387000" y="1542600"/>
-            <a:ext cx="5582160" cy="2012400"/>
+            <a:ext cx="5581440" cy="2011680"/>
           </a:xfrm>
           <a:custGeom>
             <a:avLst/>
@@ -25146,7 +25182,7 @@
         <p:spPr>
           <a:xfrm>
             <a:off x="587160" y="1743120"/>
-            <a:ext cx="5293440" cy="297360"/>
+            <a:ext cx="5292720" cy="296640"/>
           </a:xfrm>
           <a:prstGeom prst="rect">
             <a:avLst/>
@@ -25198,7 +25234,7 @@
         <p:spPr>
           <a:xfrm>
             <a:off x="587160" y="2153160"/>
-            <a:ext cx="5265360" cy="549000"/>
+            <a:ext cx="5264640" cy="548280"/>
           </a:xfrm>
           <a:prstGeom prst="rect">
             <a:avLst/>
@@ -25290,7 +25326,7 @@
         <p:spPr>
           <a:xfrm>
             <a:off x="587160" y="2810160"/>
-            <a:ext cx="5265360" cy="549000"/>
+            <a:ext cx="5264640" cy="548280"/>
           </a:xfrm>
           <a:prstGeom prst="rect">
             <a:avLst/>
@@ -25362,7 +25398,7 @@
         <p:spPr>
           <a:xfrm>
             <a:off x="387000" y="3733200"/>
-            <a:ext cx="5582160" cy="1928520"/>
+            <a:ext cx="5581440" cy="1927800"/>
           </a:xfrm>
           <a:custGeom>
             <a:avLst/>
@@ -25418,7 +25454,7 @@
         <p:spPr>
           <a:xfrm>
             <a:off x="587160" y="3933360"/>
-            <a:ext cx="5293440" cy="297360"/>
+            <a:ext cx="5292720" cy="296640"/>
           </a:xfrm>
           <a:prstGeom prst="rect">
             <a:avLst/>
@@ -25470,7 +25506,7 @@
         <p:spPr>
           <a:xfrm>
             <a:off x="610560" y="4380840"/>
-            <a:ext cx="166680" cy="166680"/>
+            <a:ext cx="165960" cy="165960"/>
           </a:xfrm>
           <a:custGeom>
             <a:avLst/>
@@ -25575,7 +25611,7 @@
         <p:spPr>
           <a:xfrm>
             <a:off x="908640" y="4343760"/>
-            <a:ext cx="3149280" cy="222480"/>
+            <a:ext cx="3148560" cy="221760"/>
           </a:xfrm>
           <a:prstGeom prst="rect">
             <a:avLst/>
@@ -25637,7 +25673,7 @@
         <p:spPr>
           <a:xfrm>
             <a:off x="610560" y="4679280"/>
-            <a:ext cx="166680" cy="166680"/>
+            <a:ext cx="165960" cy="165960"/>
           </a:xfrm>
           <a:custGeom>
             <a:avLst/>
@@ -25742,7 +25778,7 @@
         <p:spPr>
           <a:xfrm>
             <a:off x="908640" y="4641840"/>
-            <a:ext cx="2776680" cy="222480"/>
+            <a:ext cx="2775960" cy="221760"/>
           </a:xfrm>
           <a:prstGeom prst="rect">
             <a:avLst/>
@@ -25804,7 +25840,7 @@
         <p:spPr>
           <a:xfrm>
             <a:off x="610560" y="4977360"/>
-            <a:ext cx="166680" cy="166680"/>
+            <a:ext cx="165960" cy="165960"/>
           </a:xfrm>
           <a:custGeom>
             <a:avLst/>
@@ -25909,7 +25945,7 @@
         <p:spPr>
           <a:xfrm>
             <a:off x="908640" y="4940280"/>
-            <a:ext cx="3186720" cy="222480"/>
+            <a:ext cx="3186000" cy="221760"/>
           </a:xfrm>
           <a:prstGeom prst="rect">
             <a:avLst/>
@@ -25971,7 +26007,7 @@
         <p:spPr>
           <a:xfrm>
             <a:off x="610560" y="5275800"/>
-            <a:ext cx="166680" cy="166680"/>
+            <a:ext cx="165960" cy="165960"/>
           </a:xfrm>
           <a:custGeom>
             <a:avLst/>
@@ -26076,7 +26112,7 @@
         <p:spPr>
           <a:xfrm>
             <a:off x="908640" y="5238360"/>
-            <a:ext cx="2981520" cy="222480"/>
+            <a:ext cx="2980800" cy="221760"/>
           </a:xfrm>
           <a:prstGeom prst="rect">
             <a:avLst/>
@@ -26138,7 +26174,7 @@
         <p:spPr>
           <a:xfrm>
             <a:off x="6224040" y="1542600"/>
-            <a:ext cx="5582160" cy="3941640"/>
+            <a:ext cx="5581440" cy="3940920"/>
           </a:xfrm>
           <a:custGeom>
             <a:avLst/>
@@ -26194,7 +26230,7 @@
         <p:spPr>
           <a:xfrm>
             <a:off x="6368400" y="1743120"/>
-            <a:ext cx="5293440" cy="297360"/>
+            <a:ext cx="5292720" cy="296640"/>
           </a:xfrm>
           <a:prstGeom prst="rect">
             <a:avLst/>
@@ -26246,7 +26282,7 @@
         <p:spPr>
           <a:xfrm>
             <a:off x="6424200" y="2190600"/>
-            <a:ext cx="5181480" cy="1080000"/>
+            <a:ext cx="5180760" cy="1079280"/>
           </a:xfrm>
           <a:custGeom>
             <a:avLst/>
@@ -26299,7 +26335,7 @@
         <p:spPr>
           <a:xfrm>
             <a:off x="6461640" y="2339640"/>
-            <a:ext cx="5106960" cy="446400"/>
+            <a:ext cx="5106240" cy="445680"/>
           </a:xfrm>
           <a:prstGeom prst="rect">
             <a:avLst/>
@@ -26351,7 +26387,7 @@
         <p:spPr>
           <a:xfrm>
             <a:off x="6531480" y="2861640"/>
-            <a:ext cx="4966920" cy="259920"/>
+            <a:ext cx="4966200" cy="259200"/>
           </a:xfrm>
           <a:prstGeom prst="rect">
             <a:avLst/>
@@ -26403,7 +26439,7 @@
         <p:spPr>
           <a:xfrm>
             <a:off x="6424200" y="3420720"/>
-            <a:ext cx="5181480" cy="856440"/>
+            <a:ext cx="5180760" cy="855720"/>
           </a:xfrm>
           <a:custGeom>
             <a:avLst/>
@@ -26456,7 +26492,7 @@
         <p:spPr>
           <a:xfrm>
             <a:off x="6573240" y="3570120"/>
-            <a:ext cx="4966920" cy="259920"/>
+            <a:ext cx="4966200" cy="259200"/>
           </a:xfrm>
           <a:prstGeom prst="rect">
             <a:avLst/>
@@ -26508,7 +26544,7 @@
         <p:spPr>
           <a:xfrm>
             <a:off x="6573240" y="3905640"/>
-            <a:ext cx="4957920" cy="222480"/>
+            <a:ext cx="4957200" cy="221760"/>
           </a:xfrm>
           <a:prstGeom prst="rect">
             <a:avLst/>
@@ -26562,7 +26598,7 @@
         <p:spPr>
           <a:xfrm>
             <a:off x="6424200" y="4427640"/>
-            <a:ext cx="5181480" cy="856440"/>
+            <a:ext cx="5180760" cy="855720"/>
           </a:xfrm>
           <a:custGeom>
             <a:avLst/>
@@ -26615,7 +26651,7 @@
         <p:spPr>
           <a:xfrm>
             <a:off x="6573240" y="4576680"/>
-            <a:ext cx="4966920" cy="259920"/>
+            <a:ext cx="4966200" cy="259200"/>
           </a:xfrm>
           <a:prstGeom prst="rect">
             <a:avLst/>
@@ -26667,7 +26703,7 @@
         <p:spPr>
           <a:xfrm>
             <a:off x="6573240" y="4912200"/>
-            <a:ext cx="4957920" cy="222480"/>
+            <a:ext cx="4957200" cy="221760"/>
           </a:xfrm>
           <a:prstGeom prst="rect">
             <a:avLst/>
@@ -26721,7 +26757,7 @@
         <p:spPr>
           <a:xfrm>
             <a:off x="6224040" y="5662440"/>
-            <a:ext cx="5582160" cy="1182600"/>
+            <a:ext cx="5581440" cy="1181880"/>
           </a:xfrm>
           <a:custGeom>
             <a:avLst/>
@@ -26777,7 +26813,7 @@
         <p:spPr>
           <a:xfrm>
             <a:off x="6340320" y="5825520"/>
-            <a:ext cx="5349240" cy="259920"/>
+            <a:ext cx="5348520" cy="259200"/>
           </a:xfrm>
           <a:prstGeom prst="rect">
             <a:avLst/>
@@ -26829,7 +26865,7 @@
         <p:spPr>
           <a:xfrm>
             <a:off x="6349680" y="6198480"/>
-            <a:ext cx="5330520" cy="483480"/>
+            <a:ext cx="5329800" cy="482760"/>
           </a:xfrm>
           <a:prstGeom prst="rect">
             <a:avLst/>
@@ -26953,7 +26989,7 @@
         <p:spPr>
           <a:xfrm>
             <a:off x="0" y="0"/>
-            <a:ext cx="12191040" cy="6856920"/>
+            <a:ext cx="12190320" cy="6856200"/>
           </a:xfrm>
           <a:custGeom>
             <a:avLst/>
@@ -27016,7 +27052,7 @@
         <p:spPr>
           <a:xfrm>
             <a:off x="380880" y="380880"/>
-            <a:ext cx="11714760" cy="570600"/>
+            <a:ext cx="11714040" cy="569880"/>
           </a:xfrm>
           <a:prstGeom prst="rect">
             <a:avLst/>
@@ -27068,7 +27104,7 @@
         <p:spPr>
           <a:xfrm>
             <a:off x="380880" y="1104840"/>
-            <a:ext cx="913320" cy="75240"/>
+            <a:ext cx="912600" cy="74520"/>
           </a:xfrm>
           <a:custGeom>
             <a:avLst/>
@@ -27119,7 +27155,7 @@
         <p:spPr>
           <a:xfrm>
             <a:off x="399960" y="1504800"/>
-            <a:ext cx="5447160" cy="1342080"/>
+            <a:ext cx="5446440" cy="1341360"/>
           </a:xfrm>
           <a:custGeom>
             <a:avLst/>
@@ -27175,7 +27211,7 @@
         <p:spPr>
           <a:xfrm>
             <a:off x="647640" y="1752480"/>
-            <a:ext cx="665640" cy="570600"/>
+            <a:ext cx="664920" cy="569880"/>
           </a:xfrm>
           <a:prstGeom prst="rect">
             <a:avLst/>
@@ -27227,7 +27263,7 @@
         <p:spPr>
           <a:xfrm>
             <a:off x="1257480" y="1752480"/>
-            <a:ext cx="4485240" cy="342000"/>
+            <a:ext cx="4484520" cy="341280"/>
           </a:xfrm>
           <a:prstGeom prst="rect">
             <a:avLst/>
@@ -27279,7 +27315,7 @@
         <p:spPr>
           <a:xfrm>
             <a:off x="1257480" y="2171880"/>
-            <a:ext cx="4437720" cy="265680"/>
+            <a:ext cx="4437000" cy="264960"/>
           </a:xfrm>
           <a:prstGeom prst="rect">
             <a:avLst/>
@@ -27333,7 +27369,7 @@
         <p:spPr>
           <a:xfrm>
             <a:off x="6343560" y="1504800"/>
-            <a:ext cx="5447160" cy="1342080"/>
+            <a:ext cx="5446440" cy="1341360"/>
           </a:xfrm>
           <a:custGeom>
             <a:avLst/>
@@ -27389,7 +27425,7 @@
         <p:spPr>
           <a:xfrm>
             <a:off x="6591240" y="1752480"/>
-            <a:ext cx="770400" cy="570600"/>
+            <a:ext cx="769680" cy="569880"/>
           </a:xfrm>
           <a:prstGeom prst="rect">
             <a:avLst/>
@@ -27441,7 +27477,7 @@
         <p:spPr>
           <a:xfrm>
             <a:off x="7306920" y="1752480"/>
-            <a:ext cx="4380480" cy="342000"/>
+            <a:ext cx="4379760" cy="341280"/>
           </a:xfrm>
           <a:prstGeom prst="rect">
             <a:avLst/>
@@ -27493,7 +27529,7 @@
         <p:spPr>
           <a:xfrm>
             <a:off x="7306920" y="2171880"/>
-            <a:ext cx="4332960" cy="265680"/>
+            <a:ext cx="4332240" cy="264960"/>
           </a:xfrm>
           <a:prstGeom prst="rect">
             <a:avLst/>
@@ -27547,7 +27583,7 @@
         <p:spPr>
           <a:xfrm>
             <a:off x="399960" y="3117960"/>
-            <a:ext cx="5447160" cy="1342080"/>
+            <a:ext cx="5446440" cy="1341360"/>
           </a:xfrm>
           <a:custGeom>
             <a:avLst/>
@@ -27603,7 +27639,7 @@
         <p:spPr>
           <a:xfrm>
             <a:off x="647640" y="3365280"/>
-            <a:ext cx="770400" cy="570600"/>
+            <a:ext cx="769680" cy="569880"/>
           </a:xfrm>
           <a:prstGeom prst="rect">
             <a:avLst/>
@@ -27655,7 +27691,7 @@
         <p:spPr>
           <a:xfrm>
             <a:off x="1363320" y="3365280"/>
-            <a:ext cx="4380480" cy="342000"/>
+            <a:ext cx="4379760" cy="341280"/>
           </a:xfrm>
           <a:prstGeom prst="rect">
             <a:avLst/>
@@ -27707,7 +27743,7 @@
         <p:spPr>
           <a:xfrm>
             <a:off x="1363320" y="3784680"/>
-            <a:ext cx="4332960" cy="265680"/>
+            <a:ext cx="4332240" cy="264960"/>
           </a:xfrm>
           <a:prstGeom prst="rect">
             <a:avLst/>
@@ -27761,7 +27797,7 @@
         <p:spPr>
           <a:xfrm>
             <a:off x="6343560" y="3117960"/>
-            <a:ext cx="5447160" cy="1342080"/>
+            <a:ext cx="5446440" cy="1341360"/>
           </a:xfrm>
           <a:custGeom>
             <a:avLst/>
@@ -27817,7 +27853,7 @@
         <p:spPr>
           <a:xfrm>
             <a:off x="6591240" y="3365280"/>
-            <a:ext cx="751320" cy="570600"/>
+            <a:ext cx="750600" cy="569880"/>
           </a:xfrm>
           <a:prstGeom prst="rect">
             <a:avLst/>
@@ -27869,7 +27905,7 @@
         <p:spPr>
           <a:xfrm>
             <a:off x="7285680" y="3365280"/>
-            <a:ext cx="4399560" cy="342000"/>
+            <a:ext cx="4398840" cy="341280"/>
           </a:xfrm>
           <a:prstGeom prst="rect">
             <a:avLst/>
@@ -27921,7 +27957,7 @@
         <p:spPr>
           <a:xfrm>
             <a:off x="7285680" y="3784680"/>
-            <a:ext cx="4351680" cy="265680"/>
+            <a:ext cx="4350960" cy="264960"/>
           </a:xfrm>
           <a:prstGeom prst="rect">
             <a:avLst/>
@@ -27975,7 +28011,7 @@
         <p:spPr>
           <a:xfrm>
             <a:off x="399960" y="4730760"/>
-            <a:ext cx="11390760" cy="1342080"/>
+            <a:ext cx="11390040" cy="1341360"/>
           </a:xfrm>
           <a:custGeom>
             <a:avLst/>
@@ -28031,7 +28067,7 @@
         <p:spPr>
           <a:xfrm>
             <a:off x="647640" y="4978440"/>
-            <a:ext cx="751320" cy="570600"/>
+            <a:ext cx="750600" cy="569880"/>
           </a:xfrm>
           <a:prstGeom prst="rect">
             <a:avLst/>
@@ -28083,7 +28119,7 @@
         <p:spPr>
           <a:xfrm>
             <a:off x="1342080" y="4978440"/>
-            <a:ext cx="10343160" cy="342000"/>
+            <a:ext cx="10342440" cy="341280"/>
           </a:xfrm>
           <a:prstGeom prst="rect">
             <a:avLst/>
@@ -28135,7 +28171,7 @@
         <p:spPr>
           <a:xfrm>
             <a:off x="1342080" y="5397480"/>
-            <a:ext cx="10295280" cy="265680"/>
+            <a:ext cx="10294560" cy="264960"/>
           </a:xfrm>
           <a:prstGeom prst="rect">
             <a:avLst/>
@@ -28189,7 +28225,7 @@
         <p:spPr>
           <a:xfrm>
             <a:off x="5715000" y="6324480"/>
-            <a:ext cx="151200" cy="151200"/>
+            <a:ext cx="150480" cy="150480"/>
           </a:xfrm>
           <a:custGeom>
             <a:avLst/>
@@ -28240,7 +28276,7 @@
         <p:spPr>
           <a:xfrm>
             <a:off x="6019920" y="6324480"/>
-            <a:ext cx="151200" cy="151200"/>
+            <a:ext cx="150480" cy="150480"/>
           </a:xfrm>
           <a:custGeom>
             <a:avLst/>
@@ -28291,7 +28327,7 @@
         <p:spPr>
           <a:xfrm>
             <a:off x="6324480" y="6324480"/>
-            <a:ext cx="151200" cy="151200"/>
+            <a:ext cx="150480" cy="150480"/>
           </a:xfrm>
           <a:custGeom>
             <a:avLst/>
@@ -28374,7 +28410,7 @@
         <p:spPr>
           <a:xfrm>
             <a:off x="0" y="0"/>
-            <a:ext cx="12191040" cy="6855120"/>
+            <a:ext cx="12190320" cy="6854400"/>
           </a:xfrm>
           <a:prstGeom prst="roundRect">
             <a:avLst>
@@ -28406,7 +28442,7 @@
         <p:spPr>
           <a:xfrm>
             <a:off x="0" y="0"/>
-            <a:ext cx="12191040" cy="6855120"/>
+            <a:ext cx="12190320" cy="6854400"/>
           </a:xfrm>
           <a:custGeom>
             <a:avLst/>
@@ -28469,7 +28505,7 @@
         <p:spPr>
           <a:xfrm>
             <a:off x="5608440" y="-186840"/>
-            <a:ext cx="970560" cy="646920"/>
+            <a:ext cx="969840" cy="646200"/>
           </a:xfrm>
           <a:prstGeom prst="rect">
             <a:avLst/>
@@ -28521,7 +28557,7 @@
         <p:spPr>
           <a:xfrm>
             <a:off x="4541400" y="821160"/>
-            <a:ext cx="3103200" cy="1618560"/>
+            <a:ext cx="3102480" cy="1617840"/>
           </a:xfrm>
           <a:prstGeom prst="rect">
             <a:avLst/>
@@ -28594,7 +28630,7 @@
         <p:spPr>
           <a:xfrm>
             <a:off x="5374800" y="2656440"/>
-            <a:ext cx="1438560" cy="360"/>
+            <a:ext cx="1437840" cy="360"/>
           </a:xfrm>
           <a:custGeom>
             <a:avLst/>
@@ -28645,7 +28681,7 @@
         <p:spPr>
           <a:xfrm>
             <a:off x="2201400" y="2944440"/>
-            <a:ext cx="7782120" cy="349920"/>
+            <a:ext cx="7781400" cy="349200"/>
           </a:xfrm>
           <a:prstGeom prst="rect">
             <a:avLst/>
@@ -28697,7 +28733,7 @@
         <p:spPr>
           <a:xfrm>
             <a:off x="2268720" y="3524760"/>
-            <a:ext cx="3741840" cy="943560"/>
+            <a:ext cx="3741120" cy="942840"/>
           </a:xfrm>
           <a:custGeom>
             <a:avLst/>
@@ -28753,7 +28789,7 @@
         <p:spPr>
           <a:xfrm>
             <a:off x="4006080" y="3682440"/>
-            <a:ext cx="268920" cy="268920"/>
+            <a:ext cx="268200" cy="268200"/>
           </a:xfrm>
           <a:custGeom>
             <a:avLst/>
@@ -28930,7 +28966,7 @@
         <p:spPr>
           <a:xfrm>
             <a:off x="2385720" y="4060080"/>
-            <a:ext cx="3508200" cy="250920"/>
+            <a:ext cx="3507480" cy="250200"/>
           </a:xfrm>
           <a:prstGeom prst="rect">
             <a:avLst/>
@@ -28982,7 +29018,7 @@
         <p:spPr>
           <a:xfrm>
             <a:off x="6179760" y="3524760"/>
-            <a:ext cx="3741840" cy="943560"/>
+            <a:ext cx="3741120" cy="942840"/>
           </a:xfrm>
           <a:custGeom>
             <a:avLst/>
@@ -29038,7 +29074,7 @@
         <p:spPr>
           <a:xfrm>
             <a:off x="7883640" y="3682440"/>
-            <a:ext cx="336240" cy="268920"/>
+            <a:ext cx="335520" cy="268200"/>
           </a:xfrm>
           <a:custGeom>
             <a:avLst/>
@@ -29254,7 +29290,7 @@
         <p:spPr>
           <a:xfrm>
             <a:off x="6296760" y="4060080"/>
-            <a:ext cx="3508200" cy="250920"/>
+            <a:ext cx="3507480" cy="250200"/>
           </a:xfrm>
           <a:prstGeom prst="rect">
             <a:avLst/>
@@ -29306,7 +29342,7 @@
         <p:spPr>
           <a:xfrm>
             <a:off x="2268720" y="4640760"/>
-            <a:ext cx="3741840" cy="943560"/>
+            <a:ext cx="3741120" cy="942840"/>
           </a:xfrm>
           <a:custGeom>
             <a:avLst/>
@@ -29362,7 +29398,7 @@
         <p:spPr>
           <a:xfrm>
             <a:off x="4039920" y="4798080"/>
-            <a:ext cx="201240" cy="268920"/>
+            <a:ext cx="200520" cy="268200"/>
           </a:xfrm>
           <a:custGeom>
             <a:avLst/>
@@ -29538,7 +29574,7 @@
         <p:spPr>
           <a:xfrm>
             <a:off x="2385720" y="5176080"/>
-            <a:ext cx="3508200" cy="250920"/>
+            <a:ext cx="3507480" cy="250200"/>
           </a:xfrm>
           <a:prstGeom prst="rect">
             <a:avLst/>
@@ -29590,7 +29626,7 @@
         <p:spPr>
           <a:xfrm>
             <a:off x="6179760" y="4640760"/>
-            <a:ext cx="3741840" cy="943560"/>
+            <a:ext cx="3741120" cy="942840"/>
           </a:xfrm>
           <a:custGeom>
             <a:avLst/>
@@ -29646,7 +29682,7 @@
         <p:spPr>
           <a:xfrm>
             <a:off x="7917120" y="4798080"/>
-            <a:ext cx="268920" cy="268920"/>
+            <a:ext cx="268200" cy="268200"/>
           </a:xfrm>
           <a:custGeom>
             <a:avLst/>
@@ -29737,7 +29773,7 @@
         <p:spPr>
           <a:xfrm>
             <a:off x="6296760" y="5176080"/>
-            <a:ext cx="3508200" cy="250920"/>
+            <a:ext cx="3507480" cy="250200"/>
           </a:xfrm>
           <a:prstGeom prst="rect">
             <a:avLst/>
@@ -29789,7 +29825,7 @@
         <p:spPr>
           <a:xfrm>
             <a:off x="2210400" y="5814720"/>
-            <a:ext cx="7764120" cy="295920"/>
+            <a:ext cx="7763400" cy="295200"/>
           </a:xfrm>
           <a:prstGeom prst="rect">
             <a:avLst/>
@@ -29861,7 +29897,7 @@
         <p:spPr>
           <a:xfrm>
             <a:off x="2187720" y="6395040"/>
-            <a:ext cx="7809120" cy="322920"/>
+            <a:ext cx="7808400" cy="322200"/>
           </a:xfrm>
           <a:prstGeom prst="rect">
             <a:avLst/>
@@ -29913,7 +29949,7 @@
         <p:spPr>
           <a:xfrm>
             <a:off x="2210400" y="6791040"/>
-            <a:ext cx="7764120" cy="250920"/>
+            <a:ext cx="7763400" cy="250200"/>
           </a:xfrm>
           <a:prstGeom prst="rect">
             <a:avLst/>
@@ -29965,7 +30001,7 @@
         <p:spPr>
           <a:xfrm>
             <a:off x="5734440" y="5920560"/>
-            <a:ext cx="142920" cy="142920"/>
+            <a:ext cx="142200" cy="142200"/>
           </a:xfrm>
           <a:custGeom>
             <a:avLst/>
@@ -30016,7 +30052,7 @@
         <p:spPr>
           <a:xfrm>
             <a:off x="6022440" y="5920560"/>
-            <a:ext cx="142920" cy="142920"/>
+            <a:ext cx="142200" cy="142200"/>
           </a:xfrm>
           <a:custGeom>
             <a:avLst/>
@@ -30067,7 +30103,7 @@
         <p:spPr>
           <a:xfrm>
             <a:off x="6310440" y="5920560"/>
-            <a:ext cx="142920" cy="142920"/>
+            <a:ext cx="142200" cy="142200"/>
           </a:xfrm>
           <a:custGeom>
             <a:avLst/>
@@ -30150,7 +30186,7 @@
         <p:spPr>
           <a:xfrm>
             <a:off x="0" y="0"/>
-            <a:ext cx="12191040" cy="6856920"/>
+            <a:ext cx="12190320" cy="6856200"/>
           </a:xfrm>
           <a:prstGeom prst="roundRect">
             <a:avLst>
@@ -30182,7 +30218,7 @@
         <p:spPr>
           <a:xfrm>
             <a:off x="0" y="0"/>
-            <a:ext cx="12191040" cy="6856920"/>
+            <a:ext cx="12190320" cy="6856200"/>
           </a:xfrm>
           <a:custGeom>
             <a:avLst/>
@@ -30245,7 +30281,7 @@
         <p:spPr>
           <a:xfrm>
             <a:off x="380880" y="1542960"/>
-            <a:ext cx="1799280" cy="608400"/>
+            <a:ext cx="1798560" cy="607680"/>
           </a:xfrm>
           <a:custGeom>
             <a:avLst/>
@@ -30296,7 +30332,7 @@
         <p:spPr>
           <a:xfrm>
             <a:off x="609480" y="1676520"/>
-            <a:ext cx="1516680" cy="342000"/>
+            <a:ext cx="1515960" cy="341280"/>
           </a:xfrm>
           <a:prstGeom prst="rect">
             <a:avLst/>
@@ -30348,7 +30384,7 @@
         <p:spPr>
           <a:xfrm>
             <a:off x="380880" y="2381400"/>
-            <a:ext cx="11772000" cy="1713600"/>
+            <a:ext cx="11771280" cy="1712880"/>
           </a:xfrm>
           <a:prstGeom prst="rect">
             <a:avLst/>
@@ -30421,7 +30457,7 @@
         <p:spPr>
           <a:xfrm>
             <a:off x="380880" y="4324320"/>
-            <a:ext cx="1522800" cy="75240"/>
+            <a:ext cx="1522080" cy="74520"/>
           </a:xfrm>
           <a:custGeom>
             <a:avLst/>
@@ -30472,7 +30508,7 @@
         <p:spPr>
           <a:xfrm>
             <a:off x="380880" y="4629240"/>
-            <a:ext cx="7457040" cy="684720"/>
+            <a:ext cx="7456320" cy="684000"/>
           </a:xfrm>
           <a:prstGeom prst="rect">
             <a:avLst/>
@@ -30545,7 +30581,7 @@
         <p:spPr>
           <a:xfrm>
             <a:off x="10591920" y="5867280"/>
-            <a:ext cx="151200" cy="151200"/>
+            <a:ext cx="150480" cy="150480"/>
           </a:xfrm>
           <a:custGeom>
             <a:avLst/>
@@ -30596,7 +30632,7 @@
         <p:spPr>
           <a:xfrm>
             <a:off x="10896480" y="5867280"/>
-            <a:ext cx="151200" cy="151200"/>
+            <a:ext cx="150480" cy="150480"/>
           </a:xfrm>
           <a:custGeom>
             <a:avLst/>
@@ -30647,7 +30683,7 @@
         <p:spPr>
           <a:xfrm>
             <a:off x="11201400" y="5867280"/>
-            <a:ext cx="151200" cy="151200"/>
+            <a:ext cx="150480" cy="150480"/>
           </a:xfrm>
           <a:custGeom>
             <a:avLst/>
@@ -30730,7 +30766,7 @@
         <p:spPr>
           <a:xfrm>
             <a:off x="0" y="0"/>
-            <a:ext cx="12191040" cy="6856920"/>
+            <a:ext cx="12190320" cy="6856200"/>
           </a:xfrm>
           <a:custGeom>
             <a:avLst/>
@@ -30793,7 +30829,7 @@
         <p:spPr>
           <a:xfrm>
             <a:off x="380880" y="380880"/>
-            <a:ext cx="11657520" cy="456120"/>
+            <a:ext cx="11656800" cy="455400"/>
           </a:xfrm>
           <a:prstGeom prst="rect">
             <a:avLst/>
@@ -30845,7 +30881,7 @@
         <p:spPr>
           <a:xfrm>
             <a:off x="380880" y="952560"/>
-            <a:ext cx="11543400" cy="303840"/>
+            <a:ext cx="11542680" cy="303120"/>
           </a:xfrm>
           <a:prstGeom prst="rect">
             <a:avLst/>
@@ -30897,7 +30933,7 @@
         <p:spPr>
           <a:xfrm>
             <a:off x="380880" y="1371600"/>
-            <a:ext cx="913320" cy="37080"/>
+            <a:ext cx="912600" cy="36360"/>
           </a:xfrm>
           <a:custGeom>
             <a:avLst/>
@@ -30948,7 +30984,7 @@
         <p:spPr>
           <a:xfrm>
             <a:off x="395280" y="1576440"/>
-            <a:ext cx="5609160" cy="1665720"/>
+            <a:ext cx="5608440" cy="1665000"/>
           </a:xfrm>
           <a:custGeom>
             <a:avLst/>
@@ -31004,7 +31040,7 @@
         <p:spPr>
           <a:xfrm>
             <a:off x="600120" y="1781280"/>
-            <a:ext cx="5313960" cy="303840"/>
+            <a:ext cx="5313240" cy="303120"/>
           </a:xfrm>
           <a:prstGeom prst="rect">
             <a:avLst/>
@@ -31056,7 +31092,7 @@
         <p:spPr>
           <a:xfrm>
             <a:off x="600120" y="2200320"/>
-            <a:ext cx="5285160" cy="837000"/>
+            <a:ext cx="5284440" cy="836280"/>
           </a:xfrm>
           <a:prstGeom prst="rect">
             <a:avLst/>
@@ -31128,7 +31164,7 @@
         <p:spPr>
           <a:xfrm>
             <a:off x="6186600" y="1576440"/>
-            <a:ext cx="5609160" cy="1665720"/>
+            <a:ext cx="5608440" cy="1665000"/>
           </a:xfrm>
           <a:custGeom>
             <a:avLst/>
@@ -31184,7 +31220,7 @@
         <p:spPr>
           <a:xfrm>
             <a:off x="6391440" y="1781280"/>
-            <a:ext cx="5313960" cy="303840"/>
+            <a:ext cx="5313240" cy="303120"/>
           </a:xfrm>
           <a:prstGeom prst="rect">
             <a:avLst/>
@@ -31236,7 +31272,7 @@
         <p:spPr>
           <a:xfrm>
             <a:off x="6391440" y="2200320"/>
-            <a:ext cx="5285160" cy="560880"/>
+            <a:ext cx="5284440" cy="560160"/>
           </a:xfrm>
           <a:prstGeom prst="rect">
             <a:avLst/>
@@ -31298,7 +31334,7 @@
         <p:spPr>
           <a:xfrm>
             <a:off x="399960" y="3426480"/>
-            <a:ext cx="11390760" cy="3313800"/>
+            <a:ext cx="11390040" cy="3313080"/>
           </a:xfrm>
           <a:custGeom>
             <a:avLst/>
@@ -31354,7 +31390,7 @@
         <p:spPr>
           <a:xfrm>
             <a:off x="552600" y="3636000"/>
-            <a:ext cx="11086200" cy="303840"/>
+            <a:ext cx="11085480" cy="303120"/>
           </a:xfrm>
           <a:prstGeom prst="rect">
             <a:avLst/>
@@ -31406,7 +31442,7 @@
         <p:spPr>
           <a:xfrm>
             <a:off x="609480" y="4055400"/>
-            <a:ext cx="10971720" cy="2475360"/>
+            <a:ext cx="10971000" cy="2474640"/>
           </a:xfrm>
           <a:prstGeom prst="roundRect">
             <a:avLst>
@@ -31470,7 +31506,7 @@
         <p:spPr>
           <a:xfrm>
             <a:off x="0" y="0"/>
-            <a:ext cx="12191040" cy="6854760"/>
+            <a:ext cx="12190320" cy="6854040"/>
           </a:xfrm>
           <a:custGeom>
             <a:avLst/>
@@ -31533,7 +31569,7 @@
         <p:spPr>
           <a:xfrm>
             <a:off x="349200" y="349200"/>
-            <a:ext cx="11701800" cy="417960"/>
+            <a:ext cx="11701080" cy="417240"/>
           </a:xfrm>
           <a:prstGeom prst="rect">
             <a:avLst/>
@@ -31585,7 +31621,7 @@
         <p:spPr>
           <a:xfrm>
             <a:off x="349200" y="873360"/>
-            <a:ext cx="11597040" cy="278280"/>
+            <a:ext cx="11596320" cy="277560"/>
           </a:xfrm>
           <a:prstGeom prst="rect">
             <a:avLst/>
@@ -31637,7 +31673,7 @@
         <p:spPr>
           <a:xfrm>
             <a:off x="349200" y="1257480"/>
-            <a:ext cx="837360" cy="33840"/>
+            <a:ext cx="836640" cy="33120"/>
           </a:xfrm>
           <a:custGeom>
             <a:avLst/>
@@ -31688,7 +31724,7 @@
         <p:spPr>
           <a:xfrm>
             <a:off x="362520" y="1445400"/>
-            <a:ext cx="5046840" cy="4191120"/>
+            <a:ext cx="5046120" cy="4190400"/>
           </a:xfrm>
           <a:custGeom>
             <a:avLst/>
@@ -31744,7 +31780,7 @@
         <p:spPr>
           <a:xfrm>
             <a:off x="515160" y="1598400"/>
-            <a:ext cx="4741200" cy="1675800"/>
+            <a:ext cx="4740480" cy="1675080"/>
           </a:xfrm>
           <a:prstGeom prst="roundRect">
             <a:avLst>
@@ -31776,7 +31812,7 @@
         <p:spPr>
           <a:xfrm>
             <a:off x="384120" y="3380040"/>
-            <a:ext cx="5003280" cy="523080"/>
+            <a:ext cx="5002560" cy="522360"/>
           </a:xfrm>
           <a:prstGeom prst="rect">
             <a:avLst/>
@@ -31828,7 +31864,7 @@
         <p:spPr>
           <a:xfrm>
             <a:off x="471600" y="3973680"/>
-            <a:ext cx="4828680" cy="243360"/>
+            <a:ext cx="4827960" cy="242640"/>
           </a:xfrm>
           <a:prstGeom prst="rect">
             <a:avLst/>
@@ -31880,7 +31916,7 @@
         <p:spPr>
           <a:xfrm>
             <a:off x="362520" y="5801400"/>
-            <a:ext cx="5046840" cy="1038240"/>
+            <a:ext cx="5046120" cy="1037520"/>
           </a:xfrm>
           <a:custGeom>
             <a:avLst/>
@@ -31936,7 +31972,7 @@
         <p:spPr>
           <a:xfrm>
             <a:off x="410400" y="5954040"/>
-            <a:ext cx="4950720" cy="417960"/>
+            <a:ext cx="4950000" cy="417240"/>
           </a:xfrm>
           <a:prstGeom prst="rect">
             <a:avLst/>
@@ -31988,7 +32024,7 @@
         <p:spPr>
           <a:xfrm>
             <a:off x="475920" y="6443280"/>
-            <a:ext cx="4819680" cy="243360"/>
+            <a:ext cx="4818960" cy="242640"/>
           </a:xfrm>
           <a:prstGeom prst="rect">
             <a:avLst/>
@@ -32040,7 +32076,7 @@
         <p:spPr>
           <a:xfrm>
             <a:off x="5648040" y="1445400"/>
-            <a:ext cx="6173640" cy="1885320"/>
+            <a:ext cx="6172920" cy="1884600"/>
           </a:xfrm>
           <a:custGeom>
             <a:avLst/>
@@ -32096,7 +32132,7 @@
         <p:spPr>
           <a:xfrm>
             <a:off x="5835600" y="1633320"/>
-            <a:ext cx="5902920" cy="278280"/>
+            <a:ext cx="5902200" cy="277560"/>
           </a:xfrm>
           <a:prstGeom prst="rect">
             <a:avLst/>
@@ -32148,7 +32184,7 @@
         <p:spPr>
           <a:xfrm>
             <a:off x="5835600" y="2017440"/>
-            <a:ext cx="5876640" cy="514080"/>
+            <a:ext cx="5875920" cy="513360"/>
           </a:xfrm>
           <a:prstGeom prst="rect">
             <a:avLst/>
@@ -32230,7 +32266,7 @@
         <p:spPr>
           <a:xfrm>
             <a:off x="5835600" y="2633040"/>
-            <a:ext cx="5876640" cy="514080"/>
+            <a:ext cx="5875920" cy="513360"/>
           </a:xfrm>
           <a:prstGeom prst="rect">
             <a:avLst/>
@@ -32282,7 +32318,7 @@
         <p:spPr>
           <a:xfrm>
             <a:off x="5648040" y="3497760"/>
-            <a:ext cx="6173640" cy="1527120"/>
+            <a:ext cx="6172920" cy="1526400"/>
           </a:xfrm>
           <a:custGeom>
             <a:avLst/>
@@ -32338,7 +32374,7 @@
         <p:spPr>
           <a:xfrm>
             <a:off x="5835600" y="3685680"/>
-            <a:ext cx="5902920" cy="278280"/>
+            <a:ext cx="5902200" cy="277560"/>
           </a:xfrm>
           <a:prstGeom prst="rect">
             <a:avLst/>
@@ -32390,7 +32426,7 @@
         <p:spPr>
           <a:xfrm>
             <a:off x="5835600" y="4069800"/>
-            <a:ext cx="5876640" cy="767520"/>
+            <a:ext cx="5875920" cy="766800"/>
           </a:xfrm>
           <a:prstGeom prst="rect">
             <a:avLst/>
@@ -32462,7 +32498,7 @@
         <p:spPr>
           <a:xfrm>
             <a:off x="5643720" y="5185440"/>
-            <a:ext cx="3029400" cy="767520"/>
+            <a:ext cx="3028680" cy="766800"/>
           </a:xfrm>
           <a:custGeom>
             <a:avLst/>
@@ -32518,7 +32554,7 @@
         <p:spPr>
           <a:xfrm>
             <a:off x="7030800" y="5299200"/>
-            <a:ext cx="261000" cy="261000"/>
+            <a:ext cx="260280" cy="260280"/>
           </a:xfrm>
           <a:custGeom>
             <a:avLst/>
@@ -32695,7 +32731,7 @@
         <p:spPr>
           <a:xfrm>
             <a:off x="5722200" y="5631120"/>
-            <a:ext cx="2872080" cy="208440"/>
+            <a:ext cx="2871360" cy="207720"/>
           </a:xfrm>
           <a:prstGeom prst="rect">
             <a:avLst/>
@@ -32747,7 +32783,7 @@
         <p:spPr>
           <a:xfrm>
             <a:off x="8798040" y="5185440"/>
-            <a:ext cx="3029400" cy="767520"/>
+            <a:ext cx="3028680" cy="766800"/>
           </a:xfrm>
           <a:custGeom>
             <a:avLst/>
@@ -32803,7 +32839,7 @@
         <p:spPr>
           <a:xfrm>
             <a:off x="10185120" y="5299200"/>
-            <a:ext cx="261000" cy="261000"/>
+            <a:ext cx="260280" cy="260280"/>
           </a:xfrm>
           <a:custGeom>
             <a:avLst/>
@@ -32894,7 +32930,7 @@
         <p:spPr>
           <a:xfrm>
             <a:off x="8876520" y="5631120"/>
-            <a:ext cx="2872080" cy="208440"/>
+            <a:ext cx="2871360" cy="207720"/>
           </a:xfrm>
           <a:prstGeom prst="rect">
             <a:avLst/>
@@ -32946,7 +32982,7 @@
         <p:spPr>
           <a:xfrm>
             <a:off x="5643720" y="6076440"/>
-            <a:ext cx="3029400" cy="767520"/>
+            <a:ext cx="3028680" cy="766800"/>
           </a:xfrm>
           <a:custGeom>
             <a:avLst/>
@@ -33002,7 +33038,7 @@
         <p:spPr>
           <a:xfrm>
             <a:off x="7030800" y="6189840"/>
-            <a:ext cx="261000" cy="261000"/>
+            <a:ext cx="260280" cy="260280"/>
           </a:xfrm>
           <a:custGeom>
             <a:avLst/>
@@ -33100,7 +33136,7 @@
         <p:spPr>
           <a:xfrm>
             <a:off x="5722200" y="6521760"/>
-            <a:ext cx="2872080" cy="208440"/>
+            <a:ext cx="2871360" cy="207720"/>
           </a:xfrm>
           <a:prstGeom prst="rect">
             <a:avLst/>
@@ -33152,7 +33188,7 @@
         <p:spPr>
           <a:xfrm>
             <a:off x="8798040" y="6076440"/>
-            <a:ext cx="3029400" cy="767520"/>
+            <a:ext cx="3028680" cy="766800"/>
           </a:xfrm>
           <a:custGeom>
             <a:avLst/>
@@ -33208,7 +33244,7 @@
         <p:spPr>
           <a:xfrm>
             <a:off x="10185120" y="6189840"/>
-            <a:ext cx="261000" cy="261000"/>
+            <a:ext cx="260280" cy="260280"/>
           </a:xfrm>
           <a:custGeom>
             <a:avLst/>
@@ -33320,7 +33356,7 @@
         <p:spPr>
           <a:xfrm>
             <a:off x="8876520" y="6521760"/>
-            <a:ext cx="2872080" cy="208440"/>
+            <a:ext cx="2871360" cy="207720"/>
           </a:xfrm>
           <a:prstGeom prst="rect">
             <a:avLst/>
@@ -33404,7 +33440,7 @@
         <p:spPr>
           <a:xfrm>
             <a:off x="0" y="0"/>
-            <a:ext cx="12191040" cy="6857640"/>
+            <a:ext cx="12190320" cy="6856920"/>
           </a:xfrm>
           <a:custGeom>
             <a:avLst/>
@@ -33467,7 +33503,7 @@
         <p:spPr>
           <a:xfrm>
             <a:off x="369720" y="369720"/>
-            <a:ext cx="11673360" cy="442440"/>
+            <a:ext cx="11672640" cy="441720"/>
           </a:xfrm>
           <a:prstGeom prst="rect">
             <a:avLst/>
@@ -33519,7 +33555,7 @@
         <p:spPr>
           <a:xfrm>
             <a:off x="369720" y="924480"/>
-            <a:ext cx="11562480" cy="294840"/>
+            <a:ext cx="11561760" cy="294120"/>
           </a:xfrm>
           <a:prstGeom prst="rect">
             <a:avLst/>
@@ -33571,7 +33607,7 @@
         <p:spPr>
           <a:xfrm>
             <a:off x="369720" y="1330920"/>
-            <a:ext cx="886320" cy="36000"/>
+            <a:ext cx="885600" cy="35280"/>
           </a:xfrm>
           <a:custGeom>
             <a:avLst/>
@@ -33622,7 +33658,7 @@
         <p:spPr>
           <a:xfrm>
             <a:off x="383760" y="1529640"/>
-            <a:ext cx="5591160" cy="2836800"/>
+            <a:ext cx="5590440" cy="2836080"/>
           </a:xfrm>
           <a:custGeom>
             <a:avLst/>
@@ -33678,7 +33714,7 @@
         <p:spPr>
           <a:xfrm>
             <a:off x="527040" y="1728360"/>
-            <a:ext cx="5304600" cy="294840"/>
+            <a:ext cx="5303880" cy="294120"/>
           </a:xfrm>
           <a:prstGeom prst="rect">
             <a:avLst/>
@@ -33730,7 +33766,7 @@
         <p:spPr>
           <a:xfrm>
             <a:off x="582480" y="2246040"/>
-            <a:ext cx="109800" cy="109800"/>
+            <a:ext cx="109080" cy="109080"/>
           </a:xfrm>
           <a:custGeom>
             <a:avLst/>
@@ -33781,7 +33817,7 @@
         <p:spPr>
           <a:xfrm>
             <a:off x="804240" y="2172240"/>
-            <a:ext cx="1875240" cy="257760"/>
+            <a:ext cx="1874520" cy="257040"/>
           </a:xfrm>
           <a:prstGeom prst="rect">
             <a:avLst/>
@@ -33833,7 +33869,7 @@
         <p:spPr>
           <a:xfrm>
             <a:off x="582480" y="2615760"/>
-            <a:ext cx="109800" cy="109800"/>
+            <a:ext cx="109080" cy="109080"/>
           </a:xfrm>
           <a:custGeom>
             <a:avLst/>
@@ -33884,7 +33920,7 @@
         <p:spPr>
           <a:xfrm>
             <a:off x="804240" y="2541960"/>
-            <a:ext cx="1459440" cy="257760"/>
+            <a:ext cx="1458720" cy="257040"/>
           </a:xfrm>
           <a:prstGeom prst="rect">
             <a:avLst/>
@@ -33936,7 +33972,7 @@
         <p:spPr>
           <a:xfrm>
             <a:off x="582480" y="2985480"/>
-            <a:ext cx="109800" cy="109800"/>
+            <a:ext cx="109080" cy="109080"/>
           </a:xfrm>
           <a:custGeom>
             <a:avLst/>
@@ -33987,7 +34023,7 @@
         <p:spPr>
           <a:xfrm>
             <a:off x="804240" y="2911680"/>
-            <a:ext cx="1218960" cy="257760"/>
+            <a:ext cx="1218240" cy="257040"/>
           </a:xfrm>
           <a:prstGeom prst="rect">
             <a:avLst/>
@@ -34039,7 +34075,7 @@
         <p:spPr>
           <a:xfrm>
             <a:off x="582480" y="3355200"/>
-            <a:ext cx="109800" cy="109800"/>
+            <a:ext cx="109080" cy="109080"/>
           </a:xfrm>
           <a:custGeom>
             <a:avLst/>
@@ -34090,7 +34126,7 @@
         <p:spPr>
           <a:xfrm>
             <a:off x="804240" y="3281400"/>
-            <a:ext cx="1921680" cy="257760"/>
+            <a:ext cx="1920960" cy="257040"/>
           </a:xfrm>
           <a:prstGeom prst="rect">
             <a:avLst/>
@@ -34142,7 +34178,7 @@
         <p:spPr>
           <a:xfrm>
             <a:off x="582480" y="3688200"/>
-            <a:ext cx="5193720" cy="479520"/>
+            <a:ext cx="5193000" cy="478800"/>
           </a:xfrm>
           <a:custGeom>
             <a:avLst/>
@@ -34195,7 +34231,7 @@
         <p:spPr>
           <a:xfrm>
             <a:off x="646920" y="3799080"/>
-            <a:ext cx="5064120" cy="257760"/>
+            <a:ext cx="5063400" cy="257040"/>
           </a:xfrm>
           <a:prstGeom prst="rect">
             <a:avLst/>
@@ -34247,7 +34283,7 @@
         <p:spPr>
           <a:xfrm>
             <a:off x="6221160" y="1529640"/>
-            <a:ext cx="5591160" cy="2836800"/>
+            <a:ext cx="5590440" cy="2836080"/>
           </a:xfrm>
           <a:custGeom>
             <a:avLst/>
@@ -34303,7 +34339,7 @@
         <p:spPr>
           <a:xfrm>
             <a:off x="6364440" y="1728360"/>
-            <a:ext cx="5304600" cy="294840"/>
+            <a:ext cx="5303880" cy="294120"/>
           </a:xfrm>
           <a:prstGeom prst="rect">
             <a:avLst/>
@@ -34355,7 +34391,7 @@
         <p:spPr>
           <a:xfrm>
             <a:off x="6419880" y="2246040"/>
-            <a:ext cx="109800" cy="109800"/>
+            <a:ext cx="109080" cy="109080"/>
           </a:xfrm>
           <a:custGeom>
             <a:avLst/>
@@ -34406,7 +34442,7 @@
         <p:spPr>
           <a:xfrm>
             <a:off x="6642000" y="2172240"/>
-            <a:ext cx="1856880" cy="257760"/>
+            <a:ext cx="1856160" cy="257040"/>
           </a:xfrm>
           <a:prstGeom prst="rect">
             <a:avLst/>
@@ -34468,7 +34504,7 @@
         <p:spPr>
           <a:xfrm>
             <a:off x="6419880" y="2615760"/>
-            <a:ext cx="109800" cy="109800"/>
+            <a:ext cx="109080" cy="109080"/>
           </a:xfrm>
           <a:custGeom>
             <a:avLst/>
@@ -34519,7 +34555,7 @@
         <p:spPr>
           <a:xfrm>
             <a:off x="6642000" y="2541960"/>
-            <a:ext cx="1653480" cy="257760"/>
+            <a:ext cx="1652760" cy="257040"/>
           </a:xfrm>
           <a:prstGeom prst="rect">
             <a:avLst/>
@@ -34581,7 +34617,7 @@
         <p:spPr>
           <a:xfrm>
             <a:off x="6419880" y="2985480"/>
-            <a:ext cx="109800" cy="109800"/>
+            <a:ext cx="109080" cy="109080"/>
           </a:xfrm>
           <a:custGeom>
             <a:avLst/>
@@ -34632,7 +34668,7 @@
         <p:spPr>
           <a:xfrm>
             <a:off x="6642000" y="2957760"/>
-            <a:ext cx="1314720" cy="165240"/>
+            <a:ext cx="1314000" cy="164520"/>
           </a:xfrm>
           <a:prstGeom prst="rect">
             <a:avLst/>
@@ -34684,7 +34720,7 @@
         <p:spPr>
           <a:xfrm>
             <a:off x="6419880" y="3355200"/>
-            <a:ext cx="109800" cy="109800"/>
+            <a:ext cx="109080" cy="109080"/>
           </a:xfrm>
           <a:custGeom>
             <a:avLst/>
@@ -34735,7 +34771,7 @@
         <p:spPr>
           <a:xfrm>
             <a:off x="6642000" y="3281400"/>
-            <a:ext cx="1487160" cy="257760"/>
+            <a:ext cx="1486440" cy="257040"/>
           </a:xfrm>
           <a:prstGeom prst="rect">
             <a:avLst/>
@@ -34797,7 +34833,7 @@
         <p:spPr>
           <a:xfrm>
             <a:off x="6419880" y="3688200"/>
-            <a:ext cx="5193720" cy="479520"/>
+            <a:ext cx="5193000" cy="478800"/>
           </a:xfrm>
           <a:custGeom>
             <a:avLst/>
@@ -34850,7 +34886,7 @@
         <p:spPr>
           <a:xfrm>
             <a:off x="6484680" y="3799080"/>
-            <a:ext cx="5064120" cy="257760"/>
+            <a:ext cx="5063400" cy="257040"/>
           </a:xfrm>
           <a:prstGeom prst="rect">
             <a:avLst/>
@@ -34902,7 +34938,7 @@
         <p:spPr>
           <a:xfrm>
             <a:off x="383760" y="4543200"/>
-            <a:ext cx="3687120" cy="1542600"/>
+            <a:ext cx="3686400" cy="1541880"/>
           </a:xfrm>
           <a:custGeom>
             <a:avLst/>
@@ -34958,7 +34994,7 @@
         <p:spPr>
           <a:xfrm>
             <a:off x="2062800" y="4704840"/>
-            <a:ext cx="331560" cy="331560"/>
+            <a:ext cx="330840" cy="330840"/>
           </a:xfrm>
           <a:custGeom>
             <a:avLst/>
@@ -35285,7 +35321,7 @@
         <p:spPr>
           <a:xfrm>
             <a:off x="499320" y="5148720"/>
-            <a:ext cx="3456000" cy="257760"/>
+            <a:ext cx="3455280" cy="257040"/>
           </a:xfrm>
           <a:prstGeom prst="rect">
             <a:avLst/>
@@ -35337,7 +35373,7 @@
         <p:spPr>
           <a:xfrm>
             <a:off x="508320" y="5481360"/>
-            <a:ext cx="3437280" cy="442440"/>
+            <a:ext cx="3436560" cy="441720"/>
           </a:xfrm>
           <a:prstGeom prst="rect">
             <a:avLst/>
@@ -35389,7 +35425,7 @@
         <p:spPr>
           <a:xfrm>
             <a:off x="4250880" y="4543200"/>
-            <a:ext cx="3687120" cy="1542600"/>
+            <a:ext cx="3686400" cy="1541880"/>
           </a:xfrm>
           <a:custGeom>
             <a:avLst/>
@@ -35445,7 +35481,7 @@
         <p:spPr>
           <a:xfrm>
             <a:off x="5909400" y="4704840"/>
-            <a:ext cx="373320" cy="331560"/>
+            <a:ext cx="372600" cy="330840"/>
           </a:xfrm>
           <a:custGeom>
             <a:avLst/>
@@ -35562,7 +35598,7 @@
         <p:spPr>
           <a:xfrm>
             <a:off x="4366440" y="5148720"/>
-            <a:ext cx="3456000" cy="257760"/>
+            <a:ext cx="3455280" cy="257040"/>
           </a:xfrm>
           <a:prstGeom prst="rect">
             <a:avLst/>
@@ -35614,7 +35650,7 @@
         <p:spPr>
           <a:xfrm>
             <a:off x="4375440" y="5481360"/>
-            <a:ext cx="3437280" cy="220680"/>
+            <a:ext cx="3436560" cy="219960"/>
           </a:xfrm>
           <a:prstGeom prst="rect">
             <a:avLst/>
@@ -35666,7 +35702,7 @@
         <p:spPr>
           <a:xfrm>
             <a:off x="8118000" y="4543200"/>
-            <a:ext cx="3687120" cy="1542600"/>
+            <a:ext cx="3686400" cy="1541880"/>
           </a:xfrm>
           <a:custGeom>
             <a:avLst/>
@@ -35722,7 +35758,7 @@
         <p:spPr>
           <a:xfrm>
             <a:off x="9755640" y="4704840"/>
-            <a:ext cx="414720" cy="331560"/>
+            <a:ext cx="414000" cy="330840"/>
           </a:xfrm>
           <a:custGeom>
             <a:avLst/>
@@ -35941,7 +35977,7 @@
         <p:spPr>
           <a:xfrm>
             <a:off x="8233560" y="5148720"/>
-            <a:ext cx="3456000" cy="257760"/>
+            <a:ext cx="3455280" cy="257040"/>
           </a:xfrm>
           <a:prstGeom prst="rect">
             <a:avLst/>
@@ -35993,7 +36029,7 @@
         <p:spPr>
           <a:xfrm>
             <a:off x="8242560" y="5481360"/>
-            <a:ext cx="3437280" cy="220680"/>
+            <a:ext cx="3436560" cy="219960"/>
           </a:xfrm>
           <a:prstGeom prst="rect">
             <a:avLst/>
@@ -36045,7 +36081,7 @@
         <p:spPr>
           <a:xfrm>
             <a:off x="383760" y="6262560"/>
-            <a:ext cx="11423880" cy="581400"/>
+            <a:ext cx="11423160" cy="580680"/>
           </a:xfrm>
           <a:custGeom>
             <a:avLst/>
@@ -36101,7 +36137,7 @@
         <p:spPr>
           <a:xfrm>
             <a:off x="499320" y="6424200"/>
-            <a:ext cx="11192760" cy="257760"/>
+            <a:ext cx="11192040" cy="257040"/>
           </a:xfrm>
           <a:prstGeom prst="rect">
             <a:avLst/>
@@ -36215,7 +36251,7 @@
         <p:spPr>
           <a:xfrm>
             <a:off x="0" y="0"/>
-            <a:ext cx="12191040" cy="6856920"/>
+            <a:ext cx="12190320" cy="6856200"/>
           </a:xfrm>
           <a:prstGeom prst="roundRect">
             <a:avLst>
@@ -36247,7 +36283,7 @@
         <p:spPr>
           <a:xfrm>
             <a:off x="0" y="0"/>
-            <a:ext cx="12191040" cy="6856920"/>
+            <a:ext cx="12190320" cy="6856200"/>
           </a:xfrm>
           <a:custGeom>
             <a:avLst/>
@@ -36310,7 +36346,7 @@
         <p:spPr>
           <a:xfrm>
             <a:off x="380880" y="1114560"/>
-            <a:ext cx="1865880" cy="608400"/>
+            <a:ext cx="1865160" cy="607680"/>
           </a:xfrm>
           <a:custGeom>
             <a:avLst/>
@@ -36361,7 +36397,7 @@
         <p:spPr>
           <a:xfrm>
             <a:off x="609480" y="1247760"/>
-            <a:ext cx="1580040" cy="342000"/>
+            <a:ext cx="1579320" cy="341280"/>
           </a:xfrm>
           <a:prstGeom prst="rect">
             <a:avLst/>
@@ -36413,7 +36449,7 @@
         <p:spPr>
           <a:xfrm>
             <a:off x="380880" y="1952640"/>
-            <a:ext cx="11772000" cy="2570760"/>
+            <a:ext cx="11771280" cy="2570040"/>
           </a:xfrm>
           <a:prstGeom prst="rect">
             <a:avLst/>
@@ -36507,7 +36543,7 @@
         <p:spPr>
           <a:xfrm>
             <a:off x="380880" y="4753080"/>
-            <a:ext cx="1522800" cy="75240"/>
+            <a:ext cx="1522080" cy="74520"/>
           </a:xfrm>
           <a:custGeom>
             <a:avLst/>
@@ -36558,7 +36594,7 @@
         <p:spPr>
           <a:xfrm>
             <a:off x="380880" y="5057640"/>
-            <a:ext cx="7457040" cy="684720"/>
+            <a:ext cx="7456320" cy="684000"/>
           </a:xfrm>
           <a:prstGeom prst="rect">
             <a:avLst/>
@@ -36631,7 +36667,7 @@
         <p:spPr>
           <a:xfrm>
             <a:off x="10591920" y="5867280"/>
-            <a:ext cx="151200" cy="151200"/>
+            <a:ext cx="150480" cy="150480"/>
           </a:xfrm>
           <a:custGeom>
             <a:avLst/>
@@ -36682,7 +36718,7 @@
         <p:spPr>
           <a:xfrm>
             <a:off x="10896480" y="5867280"/>
-            <a:ext cx="151200" cy="151200"/>
+            <a:ext cx="150480" cy="150480"/>
           </a:xfrm>
           <a:custGeom>
             <a:avLst/>
@@ -36733,7 +36769,7 @@
         <p:spPr>
           <a:xfrm>
             <a:off x="11201400" y="5867280"/>
-            <a:ext cx="151200" cy="151200"/>
+            <a:ext cx="150480" cy="150480"/>
           </a:xfrm>
           <a:custGeom>
             <a:avLst/>
@@ -36816,7 +36852,7 @@
         <p:spPr>
           <a:xfrm>
             <a:off x="0" y="0"/>
-            <a:ext cx="12191040" cy="6857640"/>
+            <a:ext cx="12190320" cy="6856920"/>
           </a:xfrm>
           <a:custGeom>
             <a:avLst/>
@@ -36879,7 +36915,7 @@
         <p:spPr>
           <a:xfrm>
             <a:off x="379080" y="379080"/>
-            <a:ext cx="11660400" cy="453600"/>
+            <a:ext cx="11659680" cy="452880"/>
           </a:xfrm>
           <a:prstGeom prst="rect">
             <a:avLst/>
@@ -36931,7 +36967,7 @@
         <p:spPr>
           <a:xfrm>
             <a:off x="379080" y="947160"/>
-            <a:ext cx="11546640" cy="302040"/>
+            <a:ext cx="11545920" cy="301320"/>
           </a:xfrm>
           <a:prstGeom prst="rect">
             <a:avLst/>
@@ -36983,7 +37019,7 @@
         <p:spPr>
           <a:xfrm>
             <a:off x="379080" y="1364040"/>
-            <a:ext cx="908280" cy="36720"/>
+            <a:ext cx="907560" cy="36000"/>
           </a:xfrm>
           <a:custGeom>
             <a:avLst/>
@@ -37034,7 +37070,7 @@
         <p:spPr>
           <a:xfrm>
             <a:off x="393120" y="1567800"/>
-            <a:ext cx="4451400" cy="4233600"/>
+            <a:ext cx="4450680" cy="4232880"/>
           </a:xfrm>
           <a:custGeom>
             <a:avLst/>
@@ -37090,7 +37126,7 @@
         <p:spPr>
           <a:xfrm>
             <a:off x="559080" y="1733760"/>
-            <a:ext cx="4119840" cy="2120760"/>
+            <a:ext cx="4119120" cy="2120040"/>
           </a:xfrm>
           <a:prstGeom prst="roundRect">
             <a:avLst>
@@ -37122,7 +37158,7 @@
         <p:spPr>
           <a:xfrm>
             <a:off x="416880" y="3969360"/>
-            <a:ext cx="4403880" cy="567360"/>
+            <a:ext cx="4403160" cy="566640"/>
           </a:xfrm>
           <a:prstGeom prst="rect">
             <a:avLst/>
@@ -37174,7 +37210,7 @@
         <p:spPr>
           <a:xfrm>
             <a:off x="511560" y="4613400"/>
-            <a:ext cx="4214520" cy="264240"/>
+            <a:ext cx="4213800" cy="263520"/>
           </a:xfrm>
           <a:prstGeom prst="rect">
             <a:avLst/>
@@ -37226,7 +37262,7 @@
         <p:spPr>
           <a:xfrm>
             <a:off x="520920" y="4954320"/>
-            <a:ext cx="4195440" cy="226440"/>
+            <a:ext cx="4194720" cy="225720"/>
           </a:xfrm>
           <a:prstGeom prst="rect">
             <a:avLst/>
@@ -37280,7 +37316,7 @@
         <p:spPr>
           <a:xfrm>
             <a:off x="393120" y="5982480"/>
-            <a:ext cx="4451400" cy="861120"/>
+            <a:ext cx="4450680" cy="860400"/>
           </a:xfrm>
           <a:custGeom>
             <a:avLst/>
@@ -37336,7 +37372,7 @@
         <p:spPr>
           <a:xfrm>
             <a:off x="516240" y="6148080"/>
-            <a:ext cx="4205160" cy="264240"/>
+            <a:ext cx="4204440" cy="263520"/>
           </a:xfrm>
           <a:prstGeom prst="rect">
             <a:avLst/>
@@ -37398,7 +37434,7 @@
         <p:spPr>
           <a:xfrm>
             <a:off x="516240" y="6413400"/>
-            <a:ext cx="4205160" cy="264240"/>
+            <a:ext cx="4204440" cy="263520"/>
           </a:xfrm>
           <a:prstGeom prst="rect">
             <a:avLst/>
@@ -37460,7 +37496,7 @@
         <p:spPr>
           <a:xfrm>
             <a:off x="5103720" y="1567800"/>
-            <a:ext cx="6696360" cy="2045160"/>
+            <a:ext cx="6695640" cy="2044440"/>
           </a:xfrm>
           <a:custGeom>
             <a:avLst/>
@@ -37516,7 +37552,7 @@
         <p:spPr>
           <a:xfrm>
             <a:off x="5307120" y="1771560"/>
-            <a:ext cx="6402960" cy="302040"/>
+            <a:ext cx="6402240" cy="301320"/>
           </a:xfrm>
           <a:prstGeom prst="rect">
             <a:avLst/>
@@ -37568,7 +37604,7 @@
         <p:spPr>
           <a:xfrm>
             <a:off x="5307120" y="2188440"/>
-            <a:ext cx="6374520" cy="558000"/>
+            <a:ext cx="6373800" cy="557280"/>
           </a:xfrm>
           <a:prstGeom prst="rect">
             <a:avLst/>
@@ -37640,7 +37676,7 @@
         <p:spPr>
           <a:xfrm>
             <a:off x="5307120" y="2856240"/>
-            <a:ext cx="6374520" cy="558000"/>
+            <a:ext cx="6373800" cy="557280"/>
           </a:xfrm>
           <a:prstGeom prst="rect">
             <a:avLst/>
@@ -37712,7 +37748,7 @@
         <p:spPr>
           <a:xfrm>
             <a:off x="5103720" y="3794040"/>
-            <a:ext cx="6696360" cy="2045160"/>
+            <a:ext cx="6695640" cy="2044440"/>
           </a:xfrm>
           <a:custGeom>
             <a:avLst/>
@@ -37768,7 +37804,7 @@
         <p:spPr>
           <a:xfrm>
             <a:off x="5307120" y="3997800"/>
-            <a:ext cx="6402960" cy="302040"/>
+            <a:ext cx="6402240" cy="301320"/>
           </a:xfrm>
           <a:prstGeom prst="rect">
             <a:avLst/>
@@ -37820,7 +37856,7 @@
         <p:spPr>
           <a:xfrm>
             <a:off x="5307120" y="4414680"/>
-            <a:ext cx="6374520" cy="558000"/>
+            <a:ext cx="6373800" cy="557280"/>
           </a:xfrm>
           <a:prstGeom prst="rect">
             <a:avLst/>
@@ -37912,7 +37948,7 @@
         <p:spPr>
           <a:xfrm>
             <a:off x="5307120" y="5082480"/>
-            <a:ext cx="6374520" cy="558000"/>
+            <a:ext cx="6373800" cy="557280"/>
           </a:xfrm>
           <a:prstGeom prst="rect">
             <a:avLst/>
@@ -37984,7 +38020,7 @@
         <p:spPr>
           <a:xfrm>
             <a:off x="5099040" y="6015600"/>
-            <a:ext cx="2149200" cy="832680"/>
+            <a:ext cx="2148480" cy="831960"/>
           </a:xfrm>
           <a:custGeom>
             <a:avLst/>
@@ -38040,7 +38076,7 @@
         <p:spPr>
           <a:xfrm>
             <a:off x="6068160" y="6138720"/>
-            <a:ext cx="212040" cy="282960"/>
+            <a:ext cx="211320" cy="282240"/>
           </a:xfrm>
           <a:custGeom>
             <a:avLst/>
@@ -38187,7 +38223,7 @@
         <p:spPr>
           <a:xfrm>
             <a:off x="5184000" y="6498720"/>
-            <a:ext cx="1978920" cy="226440"/>
+            <a:ext cx="1978200" cy="225720"/>
           </a:xfrm>
           <a:prstGeom prst="rect">
             <a:avLst/>
@@ -38239,7 +38275,7 @@
         <p:spPr>
           <a:xfrm>
             <a:off x="7378200" y="6015600"/>
-            <a:ext cx="2149200" cy="832680"/>
+            <a:ext cx="2148480" cy="831960"/>
           </a:xfrm>
           <a:custGeom>
             <a:avLst/>
@@ -38295,7 +38331,7 @@
         <p:spPr>
           <a:xfrm>
             <a:off x="8276400" y="6138720"/>
-            <a:ext cx="354240" cy="282960"/>
+            <a:ext cx="353520" cy="282240"/>
           </a:xfrm>
           <a:custGeom>
             <a:avLst/>
@@ -38511,7 +38547,7 @@
         <p:spPr>
           <a:xfrm>
             <a:off x="7463520" y="6498720"/>
-            <a:ext cx="1978920" cy="226440"/>
+            <a:ext cx="1978200" cy="225720"/>
           </a:xfrm>
           <a:prstGeom prst="rect">
             <a:avLst/>
@@ -38563,7 +38599,7 @@
         <p:spPr>
           <a:xfrm>
             <a:off x="9657720" y="6015600"/>
-            <a:ext cx="2149200" cy="832680"/>
+            <a:ext cx="2148480" cy="831960"/>
           </a:xfrm>
           <a:custGeom>
             <a:avLst/>
@@ -38619,7 +38655,7 @@
         <p:spPr>
           <a:xfrm>
             <a:off x="10591560" y="6138720"/>
-            <a:ext cx="282960" cy="282960"/>
+            <a:ext cx="282240" cy="282240"/>
           </a:xfrm>
           <a:custGeom>
             <a:avLst/>
@@ -38796,7 +38832,7 @@
         <p:spPr>
           <a:xfrm>
             <a:off x="9743040" y="6498720"/>
-            <a:ext cx="1978920" cy="226440"/>
+            <a:ext cx="1978200" cy="225720"/>
           </a:xfrm>
           <a:prstGeom prst="rect">
             <a:avLst/>
@@ -38880,7 +38916,7 @@
         <p:spPr>
           <a:xfrm>
             <a:off x="0" y="0"/>
-            <a:ext cx="12191040" cy="6856920"/>
+            <a:ext cx="12190320" cy="6856200"/>
           </a:xfrm>
           <a:custGeom>
             <a:avLst/>
@@ -38943,7 +38979,7 @@
         <p:spPr>
           <a:xfrm>
             <a:off x="334800" y="334800"/>
-            <a:ext cx="11721960" cy="400680"/>
+            <a:ext cx="11721240" cy="399960"/>
           </a:xfrm>
           <a:prstGeom prst="rect">
             <a:avLst/>
@@ -38995,7 +39031,7 @@
         <p:spPr>
           <a:xfrm>
             <a:off x="334800" y="837360"/>
-            <a:ext cx="11621520" cy="266760"/>
+            <a:ext cx="11620800" cy="266040"/>
           </a:xfrm>
           <a:prstGeom prst="rect">
             <a:avLst/>
@@ -39047,7 +39083,7 @@
         <p:spPr>
           <a:xfrm>
             <a:off x="334800" y="1205640"/>
-            <a:ext cx="802800" cy="32400"/>
+            <a:ext cx="802080" cy="31680"/>
           </a:xfrm>
           <a:custGeom>
             <a:avLst/>
@@ -39098,7 +39134,7 @@
         <p:spPr>
           <a:xfrm>
             <a:off x="347400" y="1386000"/>
-            <a:ext cx="5064840" cy="4319640"/>
+            <a:ext cx="5064120" cy="4318920"/>
           </a:xfrm>
           <a:custGeom>
             <a:avLst/>
@@ -39154,7 +39190,7 @@
         <p:spPr>
           <a:xfrm>
             <a:off x="493920" y="1532520"/>
-            <a:ext cx="4771800" cy="1740600"/>
+            <a:ext cx="4771080" cy="1739880"/>
           </a:xfrm>
           <a:prstGeom prst="roundRect">
             <a:avLst>
@@ -39186,7 +39222,7 @@
         <p:spPr>
           <a:xfrm>
             <a:off x="368280" y="3374640"/>
-            <a:ext cx="5023080" cy="501480"/>
+            <a:ext cx="5022360" cy="500760"/>
           </a:xfrm>
           <a:prstGeom prst="rect">
             <a:avLst/>
@@ -39238,7 +39274,7 @@
         <p:spPr>
           <a:xfrm>
             <a:off x="452160" y="3943800"/>
-            <a:ext cx="4855680" cy="233280"/>
+            <a:ext cx="4854960" cy="232560"/>
           </a:xfrm>
           <a:prstGeom prst="rect">
             <a:avLst/>
@@ -39290,7 +39326,7 @@
         <p:spPr>
           <a:xfrm>
             <a:off x="460440" y="4245480"/>
-            <a:ext cx="4838760" cy="199800"/>
+            <a:ext cx="4838040" cy="199080"/>
           </a:xfrm>
           <a:prstGeom prst="rect">
             <a:avLst/>
@@ -39344,7 +39380,7 @@
         <p:spPr>
           <a:xfrm>
             <a:off x="347400" y="5867640"/>
-            <a:ext cx="5064840" cy="761040"/>
+            <a:ext cx="5064120" cy="760320"/>
           </a:xfrm>
           <a:custGeom>
             <a:avLst/>
@@ -39400,7 +39436,7 @@
         <p:spPr>
           <a:xfrm>
             <a:off x="456480" y="6014520"/>
-            <a:ext cx="4847400" cy="233280"/>
+            <a:ext cx="4846680" cy="232560"/>
           </a:xfrm>
           <a:prstGeom prst="rect">
             <a:avLst/>
@@ -39462,7 +39498,7 @@
         <p:spPr>
           <a:xfrm>
             <a:off x="456480" y="6248880"/>
-            <a:ext cx="4847400" cy="233280"/>
+            <a:ext cx="4846680" cy="232560"/>
           </a:xfrm>
           <a:prstGeom prst="rect">
             <a:avLst/>
@@ -39524,7 +39560,7 @@
         <p:spPr>
           <a:xfrm>
             <a:off x="5643000" y="1386000"/>
-            <a:ext cx="6203880" cy="1807560"/>
+            <a:ext cx="6203160" cy="1806840"/>
           </a:xfrm>
           <a:custGeom>
             <a:avLst/>
@@ -39580,7 +39616,7 @@
         <p:spPr>
           <a:xfrm>
             <a:off x="5823000" y="1566000"/>
-            <a:ext cx="5944320" cy="266760"/>
+            <a:ext cx="5943600" cy="266040"/>
           </a:xfrm>
           <a:prstGeom prst="rect">
             <a:avLst/>
@@ -39632,7 +39668,7 @@
         <p:spPr>
           <a:xfrm>
             <a:off x="5823000" y="1934280"/>
-            <a:ext cx="5919120" cy="492840"/>
+            <a:ext cx="5918400" cy="492120"/>
           </a:xfrm>
           <a:prstGeom prst="rect">
             <a:avLst/>
@@ -39724,7 +39760,7 @@
         <p:spPr>
           <a:xfrm>
             <a:off x="5823000" y="2524680"/>
-            <a:ext cx="5919120" cy="492840"/>
+            <a:ext cx="5918400" cy="492120"/>
           </a:xfrm>
           <a:prstGeom prst="rect">
             <a:avLst/>
@@ -39796,7 +39832,7 @@
         <p:spPr>
           <a:xfrm>
             <a:off x="5643000" y="3353760"/>
-            <a:ext cx="6203880" cy="2050560"/>
+            <a:ext cx="6203160" cy="2049840"/>
           </a:xfrm>
           <a:custGeom>
             <a:avLst/>
@@ -39852,7 +39888,7 @@
         <p:spPr>
           <a:xfrm>
             <a:off x="5823000" y="3533760"/>
-            <a:ext cx="5944320" cy="266760"/>
+            <a:ext cx="5943600" cy="266040"/>
           </a:xfrm>
           <a:prstGeom prst="rect">
             <a:avLst/>
@@ -39904,7 +39940,7 @@
         <p:spPr>
           <a:xfrm>
             <a:off x="5823000" y="3902040"/>
-            <a:ext cx="5919120" cy="735840"/>
+            <a:ext cx="5918400" cy="735120"/>
           </a:xfrm>
           <a:prstGeom prst="rect">
             <a:avLst/>
@@ -39976,7 +40012,7 @@
         <p:spPr>
           <a:xfrm>
             <a:off x="5823000" y="4737240"/>
-            <a:ext cx="5919120" cy="492840"/>
+            <a:ext cx="5918400" cy="492120"/>
           </a:xfrm>
           <a:prstGeom prst="rect">
             <a:avLst/>
@@ -40038,7 +40074,7 @@
         <p:spPr>
           <a:xfrm>
             <a:off x="5643000" y="5566320"/>
-            <a:ext cx="6203880" cy="1062360"/>
+            <a:ext cx="6203160" cy="1061640"/>
           </a:xfrm>
           <a:custGeom>
             <a:avLst/>
@@ -40094,7 +40130,7 @@
         <p:spPr>
           <a:xfrm>
             <a:off x="5789520" y="5712840"/>
-            <a:ext cx="5994360" cy="233280"/>
+            <a:ext cx="5993640" cy="232560"/>
           </a:xfrm>
           <a:prstGeom prst="rect">
             <a:avLst/>
@@ -40146,7 +40182,7 @@
         <p:spPr>
           <a:xfrm>
             <a:off x="5789520" y="6048000"/>
-            <a:ext cx="5977800" cy="434520"/>
+            <a:ext cx="5977080" cy="433800"/>
           </a:xfrm>
           <a:prstGeom prst="rect">
             <a:avLst/>

--- a/assets/libreoffice_impr_njc/12fd9a81-7fdf-4f21-b6ce-7388cd2f840c/The Golden Age of Arcade Games.pptx
+++ b/assets/libreoffice_impr_njc/12fd9a81-7fdf-4f21-b6ce-7388cd2f840c/The Golden Age of Arcade Games.pptx
@@ -311,7 +311,7 @@
             <a:pPr algn="r">
               <a:buNone/>
             </a:pPr>
-            <a:fld id="{4C16F46D-1F36-40E9-9935-64F3CEB9101B}" type="slidenum">
+            <a:fld id="{9C0A4556-D76C-4DCF-9EB9-62DE1E61AF34}" type="slidenum">
               <a:rPr b="0" lang="en-HK" sz="1400" spc="-1" strike="noStrike">
                 <a:latin typeface="Times New Roman"/>
               </a:rPr>
@@ -359,7 +359,7 @@
         <p:spPr>
           <a:xfrm>
             <a:off x="685800" y="1143000"/>
-            <a:ext cx="5484600" cy="3084480"/>
+            <a:ext cx="5482800" cy="3082680"/>
           </a:xfrm>
           <a:prstGeom prst="rect">
             <a:avLst/>
@@ -382,7 +382,7 @@
         <p:spPr>
           <a:xfrm>
             <a:off x="685800" y="4400640"/>
-            <a:ext cx="5484600" cy="3598560"/>
+            <a:ext cx="5482800" cy="3596760"/>
           </a:xfrm>
           <a:prstGeom prst="rect">
             <a:avLst/>
@@ -416,7 +416,7 @@
         <p:spPr>
           <a:xfrm>
             <a:off x="3884760" y="8685360"/>
-            <a:ext cx="2970000" cy="456840"/>
+            <a:ext cx="2968200" cy="455040"/>
           </a:xfrm>
           <a:prstGeom prst="rect">
             <a:avLst/>
@@ -448,7 +448,7 @@
               </a:lnSpc>
               <a:buNone/>
             </a:pPr>
-            <a:fld id="{DC41B31C-21BA-41CC-AB48-E5D1BCED4E3F}" type="slidenum">
+            <a:fld id="{4390A34A-B5D3-4B14-B5DE-552F65444617}" type="slidenum">
               <a:rPr b="0" lang="en-US" sz="1200" spc="-1" strike="noStrike">
                 <a:latin typeface="Times New Roman"/>
               </a:rPr>
@@ -495,7 +495,7 @@
         <p:spPr>
           <a:xfrm>
             <a:off x="685800" y="1143000"/>
-            <a:ext cx="5484600" cy="3084480"/>
+            <a:ext cx="5482800" cy="3082680"/>
           </a:xfrm>
           <a:prstGeom prst="rect">
             <a:avLst/>
@@ -518,7 +518,7 @@
         <p:spPr>
           <a:xfrm>
             <a:off x="685800" y="4400640"/>
-            <a:ext cx="5484600" cy="3598560"/>
+            <a:ext cx="5482800" cy="3596760"/>
           </a:xfrm>
           <a:prstGeom prst="rect">
             <a:avLst/>
@@ -552,7 +552,7 @@
         <p:spPr>
           <a:xfrm>
             <a:off x="3884760" y="8685360"/>
-            <a:ext cx="2970000" cy="456840"/>
+            <a:ext cx="2968200" cy="455040"/>
           </a:xfrm>
           <a:prstGeom prst="rect">
             <a:avLst/>
@@ -584,7 +584,7 @@
               </a:lnSpc>
               <a:buNone/>
             </a:pPr>
-            <a:fld id="{0F6D0104-3151-4552-92C2-DAD45454C123}" type="slidenum">
+            <a:fld id="{590A7556-8450-44CA-A310-7B39BDC2DDB2}" type="slidenum">
               <a:rPr b="0" lang="en-US" sz="1200" spc="-1" strike="noStrike">
                 <a:latin typeface="Times New Roman"/>
               </a:rPr>
@@ -631,7 +631,7 @@
         <p:spPr>
           <a:xfrm>
             <a:off x="685800" y="1143000"/>
-            <a:ext cx="5484600" cy="3084480"/>
+            <a:ext cx="5482800" cy="3082680"/>
           </a:xfrm>
           <a:prstGeom prst="rect">
             <a:avLst/>
@@ -654,7 +654,7 @@
         <p:spPr>
           <a:xfrm>
             <a:off x="685800" y="4400640"/>
-            <a:ext cx="5484600" cy="3598560"/>
+            <a:ext cx="5482800" cy="3596760"/>
           </a:xfrm>
           <a:prstGeom prst="rect">
             <a:avLst/>
@@ -688,7 +688,7 @@
         <p:spPr>
           <a:xfrm>
             <a:off x="3884760" y="8685360"/>
-            <a:ext cx="2970000" cy="456840"/>
+            <a:ext cx="2968200" cy="455040"/>
           </a:xfrm>
           <a:prstGeom prst="rect">
             <a:avLst/>
@@ -720,7 +720,7 @@
               </a:lnSpc>
               <a:buNone/>
             </a:pPr>
-            <a:fld id="{454B4653-49DE-499D-96B2-AD896B0E1E91}" type="slidenum">
+            <a:fld id="{FE1AE58D-57A9-4D03-8CDC-5C4797A4A0E7}" type="slidenum">
               <a:rPr b="0" lang="en-US" sz="1200" spc="-1" strike="noStrike">
                 <a:latin typeface="Times New Roman"/>
               </a:rPr>
@@ -767,7 +767,7 @@
         <p:spPr>
           <a:xfrm>
             <a:off x="685800" y="1143000"/>
-            <a:ext cx="5484600" cy="3084480"/>
+            <a:ext cx="5482800" cy="3082680"/>
           </a:xfrm>
           <a:prstGeom prst="rect">
             <a:avLst/>
@@ -790,7 +790,7 @@
         <p:spPr>
           <a:xfrm>
             <a:off x="685800" y="4400640"/>
-            <a:ext cx="5484600" cy="3598560"/>
+            <a:ext cx="5482800" cy="3596760"/>
           </a:xfrm>
           <a:prstGeom prst="rect">
             <a:avLst/>
@@ -824,7 +824,7 @@
         <p:spPr>
           <a:xfrm>
             <a:off x="3884760" y="8685360"/>
-            <a:ext cx="2970000" cy="456840"/>
+            <a:ext cx="2968200" cy="455040"/>
           </a:xfrm>
           <a:prstGeom prst="rect">
             <a:avLst/>
@@ -856,7 +856,7 @@
               </a:lnSpc>
               <a:buNone/>
             </a:pPr>
-            <a:fld id="{E3DE2C35-4166-43B3-B263-92A5A6E94A2E}" type="slidenum">
+            <a:fld id="{E26E9B2E-5C6B-4908-A118-AD101D503798}" type="slidenum">
               <a:rPr b="0" lang="en-US" sz="1200" spc="-1" strike="noStrike">
                 <a:latin typeface="Times New Roman"/>
               </a:rPr>
@@ -903,7 +903,7 @@
         <p:spPr>
           <a:xfrm>
             <a:off x="685800" y="1143000"/>
-            <a:ext cx="5484600" cy="3084480"/>
+            <a:ext cx="5482800" cy="3082680"/>
           </a:xfrm>
           <a:prstGeom prst="rect">
             <a:avLst/>
@@ -926,7 +926,7 @@
         <p:spPr>
           <a:xfrm>
             <a:off x="685800" y="4400640"/>
-            <a:ext cx="5484600" cy="3598560"/>
+            <a:ext cx="5482800" cy="3596760"/>
           </a:xfrm>
           <a:prstGeom prst="rect">
             <a:avLst/>
@@ -960,7 +960,7 @@
         <p:spPr>
           <a:xfrm>
             <a:off x="3884760" y="8685360"/>
-            <a:ext cx="2970000" cy="456840"/>
+            <a:ext cx="2968200" cy="455040"/>
           </a:xfrm>
           <a:prstGeom prst="rect">
             <a:avLst/>
@@ -992,7 +992,7 @@
               </a:lnSpc>
               <a:buNone/>
             </a:pPr>
-            <a:fld id="{5C8EEE3F-8D14-46F5-8C52-8B91F591F46C}" type="slidenum">
+            <a:fld id="{FC287162-6E73-4F7A-98C5-8EBA8E045869}" type="slidenum">
               <a:rPr b="0" lang="en-US" sz="1200" spc="-1" strike="noStrike">
                 <a:latin typeface="Times New Roman"/>
               </a:rPr>
@@ -1039,7 +1039,7 @@
         <p:spPr>
           <a:xfrm>
             <a:off x="685800" y="1143000"/>
-            <a:ext cx="5484600" cy="3084480"/>
+            <a:ext cx="5482800" cy="3082680"/>
           </a:xfrm>
           <a:prstGeom prst="rect">
             <a:avLst/>
@@ -1062,7 +1062,7 @@
         <p:spPr>
           <a:xfrm>
             <a:off x="685800" y="4400640"/>
-            <a:ext cx="5484600" cy="3598560"/>
+            <a:ext cx="5482800" cy="3596760"/>
           </a:xfrm>
           <a:prstGeom prst="rect">
             <a:avLst/>
@@ -1096,7 +1096,7 @@
         <p:spPr>
           <a:xfrm>
             <a:off x="3884760" y="8685360"/>
-            <a:ext cx="2970000" cy="456840"/>
+            <a:ext cx="2968200" cy="455040"/>
           </a:xfrm>
           <a:prstGeom prst="rect">
             <a:avLst/>
@@ -1128,7 +1128,7 @@
               </a:lnSpc>
               <a:buNone/>
             </a:pPr>
-            <a:fld id="{0964F61D-548C-46C2-9781-F564069B1382}" type="slidenum">
+            <a:fld id="{5891A17D-C874-4628-AC90-3CFAC3ED2F96}" type="slidenum">
               <a:rPr b="0" lang="en-US" sz="1200" spc="-1" strike="noStrike">
                 <a:latin typeface="Times New Roman"/>
               </a:rPr>
@@ -1175,7 +1175,7 @@
         <p:spPr>
           <a:xfrm>
             <a:off x="685800" y="1143000"/>
-            <a:ext cx="5484600" cy="3084480"/>
+            <a:ext cx="5482800" cy="3082680"/>
           </a:xfrm>
           <a:prstGeom prst="rect">
             <a:avLst/>
@@ -1198,7 +1198,7 @@
         <p:spPr>
           <a:xfrm>
             <a:off x="685800" y="4400640"/>
-            <a:ext cx="5484600" cy="3598560"/>
+            <a:ext cx="5482800" cy="3596760"/>
           </a:xfrm>
           <a:prstGeom prst="rect">
             <a:avLst/>
@@ -1232,7 +1232,7 @@
         <p:spPr>
           <a:xfrm>
             <a:off x="3884760" y="8685360"/>
-            <a:ext cx="2970000" cy="456840"/>
+            <a:ext cx="2968200" cy="455040"/>
           </a:xfrm>
           <a:prstGeom prst="rect">
             <a:avLst/>
@@ -1264,7 +1264,7 @@
               </a:lnSpc>
               <a:buNone/>
             </a:pPr>
-            <a:fld id="{70ECDED6-17AA-4F29-A056-C9904ED4A2E2}" type="slidenum">
+            <a:fld id="{67AF07F9-4646-45C9-86F2-8456FC70F7CD}" type="slidenum">
               <a:rPr b="0" lang="en-US" sz="1200" spc="-1" strike="noStrike">
                 <a:latin typeface="Times New Roman"/>
               </a:rPr>
@@ -1311,7 +1311,7 @@
         <p:spPr>
           <a:xfrm>
             <a:off x="685800" y="1143000"/>
-            <a:ext cx="5484600" cy="3084480"/>
+            <a:ext cx="5482800" cy="3082680"/>
           </a:xfrm>
           <a:prstGeom prst="rect">
             <a:avLst/>
@@ -1334,7 +1334,7 @@
         <p:spPr>
           <a:xfrm>
             <a:off x="685800" y="4400640"/>
-            <a:ext cx="5484600" cy="3598560"/>
+            <a:ext cx="5482800" cy="3596760"/>
           </a:xfrm>
           <a:prstGeom prst="rect">
             <a:avLst/>
@@ -1368,7 +1368,7 @@
         <p:spPr>
           <a:xfrm>
             <a:off x="3884760" y="8685360"/>
-            <a:ext cx="2970000" cy="456840"/>
+            <a:ext cx="2968200" cy="455040"/>
           </a:xfrm>
           <a:prstGeom prst="rect">
             <a:avLst/>
@@ -1400,7 +1400,7 @@
               </a:lnSpc>
               <a:buNone/>
             </a:pPr>
-            <a:fld id="{E99AB686-AF25-4E46-9F7F-4DB8221C770E}" type="slidenum">
+            <a:fld id="{E667C76B-34D0-428B-B6BE-A4F87475265F}" type="slidenum">
               <a:rPr b="0" lang="en-US" sz="1200" spc="-1" strike="noStrike">
                 <a:latin typeface="Times New Roman"/>
               </a:rPr>
@@ -1447,7 +1447,7 @@
         <p:spPr>
           <a:xfrm>
             <a:off x="685800" y="1143000"/>
-            <a:ext cx="5484600" cy="3084480"/>
+            <a:ext cx="5482800" cy="3082680"/>
           </a:xfrm>
           <a:prstGeom prst="rect">
             <a:avLst/>
@@ -1470,7 +1470,7 @@
         <p:spPr>
           <a:xfrm>
             <a:off x="685800" y="4400640"/>
-            <a:ext cx="5484600" cy="3598560"/>
+            <a:ext cx="5482800" cy="3596760"/>
           </a:xfrm>
           <a:prstGeom prst="rect">
             <a:avLst/>
@@ -1504,7 +1504,7 @@
         <p:spPr>
           <a:xfrm>
             <a:off x="3884760" y="8685360"/>
-            <a:ext cx="2970000" cy="456840"/>
+            <a:ext cx="2968200" cy="455040"/>
           </a:xfrm>
           <a:prstGeom prst="rect">
             <a:avLst/>
@@ -1536,7 +1536,7 @@
               </a:lnSpc>
               <a:buNone/>
             </a:pPr>
-            <a:fld id="{BB566932-6D24-4013-B792-6950CD841723}" type="slidenum">
+            <a:fld id="{7C45B329-0AC1-4FF8-87B3-EA55EC969F3D}" type="slidenum">
               <a:rPr b="0" lang="en-US" sz="1200" spc="-1" strike="noStrike">
                 <a:latin typeface="Times New Roman"/>
               </a:rPr>
@@ -1583,7 +1583,7 @@
         <p:spPr>
           <a:xfrm>
             <a:off x="685800" y="1143000"/>
-            <a:ext cx="5484600" cy="3084480"/>
+            <a:ext cx="5482800" cy="3082680"/>
           </a:xfrm>
           <a:prstGeom prst="rect">
             <a:avLst/>
@@ -1606,7 +1606,7 @@
         <p:spPr>
           <a:xfrm>
             <a:off x="685800" y="4400640"/>
-            <a:ext cx="5484600" cy="3598560"/>
+            <a:ext cx="5482800" cy="3596760"/>
           </a:xfrm>
           <a:prstGeom prst="rect">
             <a:avLst/>
@@ -1640,7 +1640,7 @@
         <p:spPr>
           <a:xfrm>
             <a:off x="3884760" y="8685360"/>
-            <a:ext cx="2970000" cy="456840"/>
+            <a:ext cx="2968200" cy="455040"/>
           </a:xfrm>
           <a:prstGeom prst="rect">
             <a:avLst/>
@@ -1672,7 +1672,7 @@
               </a:lnSpc>
               <a:buNone/>
             </a:pPr>
-            <a:fld id="{13CBC57C-20EE-4684-9000-1439DB58B5D1}" type="slidenum">
+            <a:fld id="{7480A8AA-1D87-4D7F-957D-FF2CFAA311B1}" type="slidenum">
               <a:rPr b="0" lang="en-US" sz="1200" spc="-1" strike="noStrike">
                 <a:latin typeface="Times New Roman"/>
               </a:rPr>
@@ -1719,7 +1719,7 @@
         <p:spPr>
           <a:xfrm>
             <a:off x="685800" y="1143000"/>
-            <a:ext cx="5484600" cy="3084480"/>
+            <a:ext cx="5482800" cy="3082680"/>
           </a:xfrm>
           <a:prstGeom prst="rect">
             <a:avLst/>
@@ -1742,7 +1742,7 @@
         <p:spPr>
           <a:xfrm>
             <a:off x="685800" y="4400640"/>
-            <a:ext cx="5484600" cy="3598560"/>
+            <a:ext cx="5482800" cy="3596760"/>
           </a:xfrm>
           <a:prstGeom prst="rect">
             <a:avLst/>
@@ -1776,7 +1776,7 @@
         <p:spPr>
           <a:xfrm>
             <a:off x="3884760" y="8685360"/>
-            <a:ext cx="2970000" cy="456840"/>
+            <a:ext cx="2968200" cy="455040"/>
           </a:xfrm>
           <a:prstGeom prst="rect">
             <a:avLst/>
@@ -1808,7 +1808,7 @@
               </a:lnSpc>
               <a:buNone/>
             </a:pPr>
-            <a:fld id="{B8BD5A2E-2FA1-41AE-B834-C759D04C2350}" type="slidenum">
+            <a:fld id="{EBB11D6E-29C0-45BB-BD52-D498510D759B}" type="slidenum">
               <a:rPr b="0" lang="en-US" sz="1200" spc="-1" strike="noStrike">
                 <a:latin typeface="Times New Roman"/>
               </a:rPr>
@@ -1855,7 +1855,7 @@
         <p:spPr>
           <a:xfrm>
             <a:off x="685800" y="1143000"/>
-            <a:ext cx="5484600" cy="3084480"/>
+            <a:ext cx="5482800" cy="3082680"/>
           </a:xfrm>
           <a:prstGeom prst="rect">
             <a:avLst/>
@@ -1878,7 +1878,7 @@
         <p:spPr>
           <a:xfrm>
             <a:off x="685800" y="4400640"/>
-            <a:ext cx="5484600" cy="3598560"/>
+            <a:ext cx="5482800" cy="3596760"/>
           </a:xfrm>
           <a:prstGeom prst="rect">
             <a:avLst/>
@@ -1912,7 +1912,7 @@
         <p:spPr>
           <a:xfrm>
             <a:off x="3884760" y="8685360"/>
-            <a:ext cx="2970000" cy="456840"/>
+            <a:ext cx="2968200" cy="455040"/>
           </a:xfrm>
           <a:prstGeom prst="rect">
             <a:avLst/>
@@ -1944,7 +1944,7 @@
               </a:lnSpc>
               <a:buNone/>
             </a:pPr>
-            <a:fld id="{33CB2960-66E5-4456-9E60-E2B4CCD0536C}" type="slidenum">
+            <a:fld id="{EE736309-7C10-4D82-878E-EAFBF1AB6E96}" type="slidenum">
               <a:rPr b="0" lang="en-US" sz="1200" spc="-1" strike="noStrike">
                 <a:latin typeface="Times New Roman"/>
               </a:rPr>
@@ -1991,7 +1991,7 @@
         <p:spPr>
           <a:xfrm>
             <a:off x="685800" y="1143000"/>
-            <a:ext cx="5484600" cy="3084480"/>
+            <a:ext cx="5482800" cy="3082680"/>
           </a:xfrm>
           <a:prstGeom prst="rect">
             <a:avLst/>
@@ -2014,7 +2014,7 @@
         <p:spPr>
           <a:xfrm>
             <a:off x="685800" y="4400640"/>
-            <a:ext cx="5484600" cy="3598560"/>
+            <a:ext cx="5482800" cy="3596760"/>
           </a:xfrm>
           <a:prstGeom prst="rect">
             <a:avLst/>
@@ -2048,7 +2048,7 @@
         <p:spPr>
           <a:xfrm>
             <a:off x="3884760" y="8685360"/>
-            <a:ext cx="2970000" cy="456840"/>
+            <a:ext cx="2968200" cy="455040"/>
           </a:xfrm>
           <a:prstGeom prst="rect">
             <a:avLst/>
@@ -2080,7 +2080,7 @@
               </a:lnSpc>
               <a:buNone/>
             </a:pPr>
-            <a:fld id="{006814EB-055D-4B84-AC0F-AFF3B2121147}" type="slidenum">
+            <a:fld id="{EE2D326F-C6E4-42E2-B453-67900398A524}" type="slidenum">
               <a:rPr b="0" lang="en-US" sz="1200" spc="-1" strike="noStrike">
                 <a:latin typeface="Times New Roman"/>
               </a:rPr>
@@ -2127,7 +2127,7 @@
         <p:spPr>
           <a:xfrm>
             <a:off x="685800" y="1143000"/>
-            <a:ext cx="5484600" cy="3084480"/>
+            <a:ext cx="5482800" cy="3082680"/>
           </a:xfrm>
           <a:prstGeom prst="rect">
             <a:avLst/>
@@ -2150,7 +2150,7 @@
         <p:spPr>
           <a:xfrm>
             <a:off x="685800" y="4400640"/>
-            <a:ext cx="5484600" cy="3598560"/>
+            <a:ext cx="5482800" cy="3596760"/>
           </a:xfrm>
           <a:prstGeom prst="rect">
             <a:avLst/>
@@ -2184,7 +2184,7 @@
         <p:spPr>
           <a:xfrm>
             <a:off x="3884760" y="8685360"/>
-            <a:ext cx="2970000" cy="456840"/>
+            <a:ext cx="2968200" cy="455040"/>
           </a:xfrm>
           <a:prstGeom prst="rect">
             <a:avLst/>
@@ -2216,7 +2216,7 @@
               </a:lnSpc>
               <a:buNone/>
             </a:pPr>
-            <a:fld id="{C5B6FA06-B952-42CA-A770-6A0F91BCF657}" type="slidenum">
+            <a:fld id="{46A71C64-6214-4828-B01C-3FFEE5454D33}" type="slidenum">
               <a:rPr b="0" lang="en-US" sz="1200" spc="-1" strike="noStrike">
                 <a:latin typeface="Times New Roman"/>
               </a:rPr>
@@ -2263,7 +2263,7 @@
         <p:spPr>
           <a:xfrm>
             <a:off x="685800" y="1143000"/>
-            <a:ext cx="5484600" cy="3084480"/>
+            <a:ext cx="5482800" cy="3082680"/>
           </a:xfrm>
           <a:prstGeom prst="rect">
             <a:avLst/>
@@ -2286,7 +2286,7 @@
         <p:spPr>
           <a:xfrm>
             <a:off x="685800" y="4400640"/>
-            <a:ext cx="5484600" cy="3598560"/>
+            <a:ext cx="5482800" cy="3596760"/>
           </a:xfrm>
           <a:prstGeom prst="rect">
             <a:avLst/>
@@ -2320,7 +2320,7 @@
         <p:spPr>
           <a:xfrm>
             <a:off x="3884760" y="8685360"/>
-            <a:ext cx="2970000" cy="456840"/>
+            <a:ext cx="2968200" cy="455040"/>
           </a:xfrm>
           <a:prstGeom prst="rect">
             <a:avLst/>
@@ -2352,7 +2352,7 @@
               </a:lnSpc>
               <a:buNone/>
             </a:pPr>
-            <a:fld id="{4CABB6F6-8DB1-48A2-8724-B8E1D18544DD}" type="slidenum">
+            <a:fld id="{0F0C4700-2089-4014-9433-BA636FFEBDDF}" type="slidenum">
               <a:rPr b="0" lang="en-US" sz="1200" spc="-1" strike="noStrike">
                 <a:latin typeface="Times New Roman"/>
               </a:rPr>
@@ -2399,7 +2399,7 @@
         <p:spPr>
           <a:xfrm>
             <a:off x="685800" y="1143000"/>
-            <a:ext cx="5484600" cy="3084480"/>
+            <a:ext cx="5482800" cy="3082680"/>
           </a:xfrm>
           <a:prstGeom prst="rect">
             <a:avLst/>
@@ -2422,7 +2422,7 @@
         <p:spPr>
           <a:xfrm>
             <a:off x="685800" y="4400640"/>
-            <a:ext cx="5484600" cy="3598560"/>
+            <a:ext cx="5482800" cy="3596760"/>
           </a:xfrm>
           <a:prstGeom prst="rect">
             <a:avLst/>
@@ -2456,7 +2456,7 @@
         <p:spPr>
           <a:xfrm>
             <a:off x="3884760" y="8685360"/>
-            <a:ext cx="2970000" cy="456840"/>
+            <a:ext cx="2968200" cy="455040"/>
           </a:xfrm>
           <a:prstGeom prst="rect">
             <a:avLst/>
@@ -2488,7 +2488,7 @@
               </a:lnSpc>
               <a:buNone/>
             </a:pPr>
-            <a:fld id="{5F43F71E-39D3-47E8-BD15-C34034813DE6}" type="slidenum">
+            <a:fld id="{C42DF025-7E74-405B-98F4-7342B4EF2927}" type="slidenum">
               <a:rPr b="0" lang="en-US" sz="1200" spc="-1" strike="noStrike">
                 <a:latin typeface="Times New Roman"/>
               </a:rPr>
@@ -2535,7 +2535,7 @@
         <p:spPr>
           <a:xfrm>
             <a:off x="685800" y="1143000"/>
-            <a:ext cx="5484600" cy="3084480"/>
+            <a:ext cx="5482800" cy="3082680"/>
           </a:xfrm>
           <a:prstGeom prst="rect">
             <a:avLst/>
@@ -2558,7 +2558,7 @@
         <p:spPr>
           <a:xfrm>
             <a:off x="685800" y="4400640"/>
-            <a:ext cx="5484600" cy="3598560"/>
+            <a:ext cx="5482800" cy="3596760"/>
           </a:xfrm>
           <a:prstGeom prst="rect">
             <a:avLst/>
@@ -2592,7 +2592,7 @@
         <p:spPr>
           <a:xfrm>
             <a:off x="3884760" y="8685360"/>
-            <a:ext cx="2970000" cy="456840"/>
+            <a:ext cx="2968200" cy="455040"/>
           </a:xfrm>
           <a:prstGeom prst="rect">
             <a:avLst/>
@@ -2624,7 +2624,7 @@
               </a:lnSpc>
               <a:buNone/>
             </a:pPr>
-            <a:fld id="{A5127634-D1EA-4948-AC10-134E6EEDAC23}" type="slidenum">
+            <a:fld id="{D006DBB2-7BA1-472B-98B6-143E4DB55128}" type="slidenum">
               <a:rPr b="0" lang="en-US" sz="1200" spc="-1" strike="noStrike">
                 <a:latin typeface="Times New Roman"/>
               </a:rPr>
@@ -2671,7 +2671,7 @@
         <p:spPr>
           <a:xfrm>
             <a:off x="685800" y="1143000"/>
-            <a:ext cx="5484600" cy="3084480"/>
+            <a:ext cx="5482800" cy="3082680"/>
           </a:xfrm>
           <a:prstGeom prst="rect">
             <a:avLst/>
@@ -2694,7 +2694,7 @@
         <p:spPr>
           <a:xfrm>
             <a:off x="685800" y="4400640"/>
-            <a:ext cx="5484600" cy="3598560"/>
+            <a:ext cx="5482800" cy="3596760"/>
           </a:xfrm>
           <a:prstGeom prst="rect">
             <a:avLst/>
@@ -2728,7 +2728,7 @@
         <p:spPr>
           <a:xfrm>
             <a:off x="3884760" y="8685360"/>
-            <a:ext cx="2970000" cy="456840"/>
+            <a:ext cx="2968200" cy="455040"/>
           </a:xfrm>
           <a:prstGeom prst="rect">
             <a:avLst/>
@@ -2760,7 +2760,7 @@
               </a:lnSpc>
               <a:buNone/>
             </a:pPr>
-            <a:fld id="{FA709C96-0368-4108-8B32-6F53F1E524A9}" type="slidenum">
+            <a:fld id="{5525341B-69DB-47F5-AC05-2A53BEF8E7CE}" type="slidenum">
               <a:rPr b="0" lang="en-US" sz="1200" spc="-1" strike="noStrike">
                 <a:latin typeface="Times New Roman"/>
               </a:rPr>
@@ -2807,7 +2807,7 @@
         <p:spPr>
           <a:xfrm>
             <a:off x="685800" y="1143000"/>
-            <a:ext cx="5484600" cy="3084480"/>
+            <a:ext cx="5482800" cy="3082680"/>
           </a:xfrm>
           <a:prstGeom prst="rect">
             <a:avLst/>
@@ -2830,7 +2830,7 @@
         <p:spPr>
           <a:xfrm>
             <a:off x="685800" y="4400640"/>
-            <a:ext cx="5484600" cy="3598560"/>
+            <a:ext cx="5482800" cy="3596760"/>
           </a:xfrm>
           <a:prstGeom prst="rect">
             <a:avLst/>
@@ -2864,7 +2864,7 @@
         <p:spPr>
           <a:xfrm>
             <a:off x="3884760" y="8685360"/>
-            <a:ext cx="2970000" cy="456840"/>
+            <a:ext cx="2968200" cy="455040"/>
           </a:xfrm>
           <a:prstGeom prst="rect">
             <a:avLst/>
@@ -2896,7 +2896,7 @@
               </a:lnSpc>
               <a:buNone/>
             </a:pPr>
-            <a:fld id="{567715E9-A064-4998-8ADF-D26A7A83BD69}" type="slidenum">
+            <a:fld id="{3BE58A94-E705-43AE-91C9-BA16B9D7BE7B}" type="slidenum">
               <a:rPr b="0" lang="en-US" sz="1200" spc="-1" strike="noStrike">
                 <a:latin typeface="Times New Roman"/>
               </a:rPr>
@@ -2943,7 +2943,7 @@
         <p:spPr>
           <a:xfrm>
             <a:off x="685800" y="1143000"/>
-            <a:ext cx="5484600" cy="3084480"/>
+            <a:ext cx="5482800" cy="3082680"/>
           </a:xfrm>
           <a:prstGeom prst="rect">
             <a:avLst/>
@@ -2966,7 +2966,7 @@
         <p:spPr>
           <a:xfrm>
             <a:off x="685800" y="4400640"/>
-            <a:ext cx="5484600" cy="3598560"/>
+            <a:ext cx="5482800" cy="3596760"/>
           </a:xfrm>
           <a:prstGeom prst="rect">
             <a:avLst/>
@@ -3000,7 +3000,7 @@
         <p:spPr>
           <a:xfrm>
             <a:off x="3884760" y="8685360"/>
-            <a:ext cx="2970000" cy="456840"/>
+            <a:ext cx="2968200" cy="455040"/>
           </a:xfrm>
           <a:prstGeom prst="rect">
             <a:avLst/>
@@ -3032,7 +3032,7 @@
               </a:lnSpc>
               <a:buNone/>
             </a:pPr>
-            <a:fld id="{2EAF9425-7F3C-40B5-B1CF-05FAD1685061}" type="slidenum">
+            <a:fld id="{BA3D0BA7-BABB-420C-894B-9DC24A29CF57}" type="slidenum">
               <a:rPr b="0" lang="en-US" sz="1200" spc="-1" strike="noStrike">
                 <a:latin typeface="Times New Roman"/>
               </a:rPr>
@@ -4876,7 +4876,7 @@
         <p:spPr>
           <a:xfrm>
             <a:off x="0" y="0"/>
-            <a:ext cx="12190320" cy="6856200"/>
+            <a:ext cx="12188520" cy="6854400"/>
           </a:xfrm>
           <a:prstGeom prst="roundRect">
             <a:avLst>
@@ -4908,7 +4908,7 @@
         <p:spPr>
           <a:xfrm>
             <a:off x="0" y="0"/>
-            <a:ext cx="12190320" cy="6856200"/>
+            <a:ext cx="12188520" cy="6854400"/>
           </a:xfrm>
           <a:custGeom>
             <a:avLst/>
@@ -4971,7 +4971,7 @@
         <p:spPr>
           <a:xfrm>
             <a:off x="5667480" y="1276200"/>
-            <a:ext cx="855360" cy="569880"/>
+            <a:ext cx="853560" cy="568080"/>
           </a:xfrm>
           <a:prstGeom prst="rect">
             <a:avLst/>
@@ -5003,13 +5003,20 @@
                 <a:solidFill>
                   <a:srgbClr val="ffff00"/>
                 </a:solidFill>
+                <a:highlight>
+                  <a:srgbClr val="ffff00"/>
+                </a:highlight>
                 <a:uFillTx/>
                 <a:latin typeface="Jersey 15"/>
                 <a:ea typeface="Jersey 15"/>
               </a:rPr>
               <a:t>👾</a:t>
             </a:r>
-            <a:endParaRPr b="0" lang="en-HK" sz="4500" spc="-1" strike="noStrike">
+            <a:endParaRPr b="1" lang="en-HK" sz="4500" spc="-1" strike="noStrike" u="sng">
+              <a:highlight>
+                <a:srgbClr val="ffff00"/>
+              </a:highlight>
+              <a:uFillTx/>
               <a:latin typeface="Arial"/>
             </a:endParaRPr>
           </a:p>
@@ -5024,7 +5031,7 @@
         <p:spPr>
           <a:xfrm>
             <a:off x="3164400" y="2305080"/>
-            <a:ext cx="5865480" cy="912600"/>
+            <a:ext cx="5863680" cy="910800"/>
           </a:xfrm>
           <a:prstGeom prst="rect">
             <a:avLst/>
@@ -5052,10 +5059,13 @@
               <a:buNone/>
             </a:pPr>
             <a:r>
-              <a:rPr b="0" i="1" lang="en-US" sz="7200" spc="-1" strike="noStrike" u="sng">
+              <a:rPr b="1" i="1" lang="en-US" sz="7200" spc="-1" strike="noStrike" u="sng">
                 <a:solidFill>
                   <a:srgbClr val="ffff00"/>
                 </a:solidFill>
+                <a:highlight>
+                  <a:srgbClr val="ffff00"/>
+                </a:highlight>
                 <a:uFillTx/>
                 <a:latin typeface="Jersey 20 Charted"/>
                 <a:ea typeface="Jersey 20 Charted"/>
@@ -5063,10 +5073,13 @@
               <a:t>THE </a:t>
             </a:r>
             <a:r>
-              <a:rPr b="0" lang="en-US" sz="7200" spc="-1" strike="noStrike" u="sng">
+              <a:rPr b="1" i="1" lang="en-US" sz="7200" spc="-1" strike="noStrike" u="sng">
                 <a:solidFill>
                   <a:srgbClr val="ffff00"/>
                 </a:solidFill>
+                <a:highlight>
+                  <a:srgbClr val="ffff00"/>
+                </a:highlight>
                 <a:uFillTx/>
                 <a:latin typeface="Jersey 20 Charted"/>
                 <a:ea typeface="Jersey 20 Charted"/>
@@ -5074,20 +5087,23 @@
               <a:t>GOLDEN</a:t>
             </a:r>
             <a:r>
-              <a:rPr b="0" i="1" lang="en-US" sz="7200" spc="-1" strike="noStrike" u="sng">
+              <a:rPr b="1" i="1" lang="en-US" sz="7200" spc="-1" strike="noStrike" u="sng">
                 <a:solidFill>
                   <a:srgbClr val="ffff00"/>
                 </a:solidFill>
+                <a:highlight>
+                  <a:srgbClr val="ffff00"/>
+                </a:highlight>
                 <a:uFillTx/>
                 <a:latin typeface="Jersey 20 Charted"/>
                 <a:ea typeface="Jersey 20 Charted"/>
               </a:rPr>
               <a:t> AGE</a:t>
             </a:r>
-            <a:endParaRPr b="0" lang="en-HK" sz="7200" spc="-1" strike="noStrike" u="sng">
-              <a:solidFill>
+            <a:endParaRPr b="1" lang="en-HK" sz="7200" spc="-1" strike="noStrike" u="sng">
+              <a:highlight>
                 <a:srgbClr val="ffff00"/>
-              </a:solidFill>
+              </a:highlight>
               <a:uFillTx/>
               <a:latin typeface="Arial"/>
             </a:endParaRPr>
@@ -5103,7 +5119,7 @@
         <p:spPr>
           <a:xfrm>
             <a:off x="4154040" y="3448080"/>
-            <a:ext cx="3884400" cy="569880"/>
+            <a:ext cx="3882600" cy="568080"/>
           </a:xfrm>
           <a:prstGeom prst="rect">
             <a:avLst/>
@@ -5135,13 +5151,20 @@
                 <a:solidFill>
                   <a:srgbClr val="ffff00"/>
                 </a:solidFill>
+                <a:highlight>
+                  <a:srgbClr val="ffff00"/>
+                </a:highlight>
                 <a:uFillTx/>
                 <a:latin typeface="Jersey 15"/>
                 <a:ea typeface="Jersey 15"/>
               </a:rPr>
               <a:t>OF ARCADE GAMES</a:t>
             </a:r>
-            <a:endParaRPr b="0" lang="en-HK" sz="4500" spc="-1" strike="noStrike">
+            <a:endParaRPr b="1" lang="en-HK" sz="4500" spc="-1" strike="noStrike" u="sng">
+              <a:highlight>
+                <a:srgbClr val="ffff00"/>
+              </a:highlight>
+              <a:uFillTx/>
               <a:latin typeface="Arial"/>
             </a:endParaRPr>
           </a:p>
@@ -5156,7 +5179,7 @@
         <p:spPr>
           <a:xfrm>
             <a:off x="5486400" y="4324320"/>
-            <a:ext cx="1217520" cy="74520"/>
+            <a:ext cx="1215720" cy="72720"/>
           </a:xfrm>
           <a:custGeom>
             <a:avLst/>
@@ -5207,7 +5230,7 @@
         <p:spPr>
           <a:xfrm>
             <a:off x="5400720" y="4705200"/>
-            <a:ext cx="1388880" cy="379080"/>
+            <a:ext cx="1387080" cy="377280"/>
           </a:xfrm>
           <a:prstGeom prst="rect">
             <a:avLst/>
@@ -5235,19 +5258,52 @@
               <a:buNone/>
             </a:pPr>
             <a:r>
-              <a:rPr b="0" lang="en-US" sz="2700" spc="-1" strike="noStrike">
+              <a:rPr b="1" lang="en-US" sz="2700" spc="-1" strike="noStrike" u="sng">
                 <a:solidFill>
                   <a:srgbClr val="ffff00"/>
                 </a:solidFill>
+                <a:highlight>
+                  <a:srgbClr val="ffff00"/>
+                </a:highlight>
+                <a:uFillTx/>
                 <a:latin typeface="Jersey 15"/>
                 <a:ea typeface="Jersey 15"/>
               </a:rPr>
-              <a:t>1978-1983</a:t>
-            </a:r>
-            <a:endParaRPr b="0" lang="en-HK" sz="2700" spc="-1" strike="noStrike">
-              <a:solidFill>
+              <a:t>1</a:t>
+            </a:r>
+            <a:r>
+              <a:rPr b="1" lang="en-US" sz="2700" spc="-1" strike="noStrike" u="sng">
+                <a:solidFill>
+                  <a:srgbClr val="ffff00"/>
+                </a:solidFill>
+                <a:highlight>
+                  <a:srgbClr val="ffff00"/>
+                </a:highlight>
+                <a:uFillTx/>
+                <a:latin typeface="Jersey 15"/>
+                <a:ea typeface="Jersey 15"/>
+              </a:rPr>
+              <a:t>978</a:t>
+            </a:r>
+            <a:r>
+              <a:rPr b="1" lang="en-US" sz="2700" spc="-1" strike="noStrike" u="sng">
+                <a:solidFill>
+                  <a:srgbClr val="ffff00"/>
+                </a:solidFill>
+                <a:highlight>
+                  <a:srgbClr val="ffff00"/>
+                </a:highlight>
+                <a:uFillTx/>
+                <a:latin typeface="Jersey 15"/>
+                <a:ea typeface="Jersey 15"/>
+              </a:rPr>
+              <a:t>-1983</a:t>
+            </a:r>
+            <a:endParaRPr b="1" lang="en-HK" sz="2700" spc="-1" strike="noStrike" u="sng">
+              <a:highlight>
                 <a:srgbClr val="ffff00"/>
-              </a:solidFill>
+              </a:highlight>
+              <a:uFillTx/>
               <a:latin typeface="Arial"/>
             </a:endParaRPr>
           </a:p>
@@ -5262,7 +5318,7 @@
         <p:spPr>
           <a:xfrm>
             <a:off x="4384080" y="5238720"/>
-            <a:ext cx="3417840" cy="341280"/>
+            <a:ext cx="3416040" cy="339480"/>
           </a:xfrm>
           <a:prstGeom prst="rect">
             <a:avLst/>
@@ -5294,17 +5350,6 @@
                 <a:solidFill>
                   <a:srgbClr val="ffff00"/>
                 </a:solidFill>
-                <a:uFillTx/>
-                <a:latin typeface="Jersey 15"/>
-                <a:ea typeface="Jersey 15"/>
-              </a:rPr>
-              <a:t>When </a:t>
-            </a:r>
-            <a:r>
-              <a:rPr b="0" i="1" lang="en-US" sz="2250" spc="-1" strike="noStrike" u="sng">
-                <a:solidFill>
-                  <a:srgbClr val="ffff00"/>
-                </a:solidFill>
                 <a:highlight>
                   <a:srgbClr val="ffff00"/>
                 </a:highlight>
@@ -5312,23 +5357,13 @@
                 <a:latin typeface="Jersey 15"/>
                 <a:ea typeface="Jersey 15"/>
               </a:rPr>
-              <a:t>Quarters</a:t>
-            </a:r>
-            <a:r>
-              <a:rPr b="1" lang="en-US" sz="2250" spc="-1" strike="noStrike" u="sng">
-                <a:solidFill>
-                  <a:srgbClr val="ffff00"/>
-                </a:solidFill>
-                <a:uFillTx/>
-                <a:latin typeface="Jersey 15"/>
-                <a:ea typeface="Jersey 15"/>
-              </a:rPr>
-              <a:t> Ruled the World</a:t>
-            </a:r>
-            <a:endParaRPr b="0" lang="en-HK" sz="2250" spc="-1" strike="noStrike">
-              <a:solidFill>
+              <a:t>When Quarters Ruled the World</a:t>
+            </a:r>
+            <a:endParaRPr b="1" lang="en-HK" sz="2250" spc="-1" strike="noStrike" u="sng">
+              <a:highlight>
                 <a:srgbClr val="ffff00"/>
-              </a:solidFill>
+              </a:highlight>
+              <a:uFillTx/>
               <a:latin typeface="Arial"/>
             </a:endParaRPr>
           </a:p>
@@ -5343,7 +5378,7 @@
         <p:spPr>
           <a:xfrm>
             <a:off x="5715000" y="5867280"/>
-            <a:ext cx="150480" cy="150480"/>
+            <a:ext cx="148680" cy="148680"/>
           </a:xfrm>
           <a:custGeom>
             <a:avLst/>
@@ -5394,7 +5429,7 @@
         <p:spPr>
           <a:xfrm>
             <a:off x="6019920" y="5867280"/>
-            <a:ext cx="150480" cy="150480"/>
+            <a:ext cx="148680" cy="148680"/>
           </a:xfrm>
           <a:custGeom>
             <a:avLst/>
@@ -5445,7 +5480,7 @@
         <p:spPr>
           <a:xfrm>
             <a:off x="6324480" y="5867280"/>
-            <a:ext cx="150480" cy="150480"/>
+            <a:ext cx="148680" cy="148680"/>
           </a:xfrm>
           <a:custGeom>
             <a:avLst/>
@@ -5528,7 +5563,7 @@
         <p:spPr>
           <a:xfrm>
             <a:off x="0" y="0"/>
-            <a:ext cx="12190320" cy="6856200"/>
+            <a:ext cx="12188520" cy="6854400"/>
           </a:xfrm>
           <a:custGeom>
             <a:avLst/>
@@ -5591,7 +5626,7 @@
         <p:spPr>
           <a:xfrm>
             <a:off x="380880" y="380880"/>
-            <a:ext cx="11656800" cy="455400"/>
+            <a:ext cx="11655000" cy="453600"/>
           </a:xfrm>
           <a:prstGeom prst="rect">
             <a:avLst/>
@@ -5643,7 +5678,7 @@
         <p:spPr>
           <a:xfrm>
             <a:off x="380880" y="952560"/>
-            <a:ext cx="11542680" cy="303120"/>
+            <a:ext cx="11540880" cy="301320"/>
           </a:xfrm>
           <a:prstGeom prst="rect">
             <a:avLst/>
@@ -5695,7 +5730,7 @@
         <p:spPr>
           <a:xfrm>
             <a:off x="380880" y="1371600"/>
-            <a:ext cx="912600" cy="36360"/>
+            <a:ext cx="910800" cy="34560"/>
           </a:xfrm>
           <a:custGeom>
             <a:avLst/>
@@ -5746,7 +5781,7 @@
         <p:spPr>
           <a:xfrm>
             <a:off x="395280" y="1576440"/>
-            <a:ext cx="5608440" cy="750600"/>
+            <a:ext cx="5606640" cy="748800"/>
           </a:xfrm>
           <a:custGeom>
             <a:avLst/>
@@ -5802,7 +5837,7 @@
         <p:spPr>
           <a:xfrm>
             <a:off x="523800" y="1762200"/>
-            <a:ext cx="398160" cy="379080"/>
+            <a:ext cx="396360" cy="377280"/>
           </a:xfrm>
           <a:prstGeom prst="rect">
             <a:avLst/>
@@ -5854,7 +5889,7 @@
         <p:spPr>
           <a:xfrm>
             <a:off x="905040" y="1704960"/>
-            <a:ext cx="5065560" cy="264960"/>
+            <a:ext cx="5063760" cy="263160"/>
           </a:xfrm>
           <a:prstGeom prst="rect">
             <a:avLst/>
@@ -5906,7 +5941,7 @@
         <p:spPr>
           <a:xfrm>
             <a:off x="905040" y="1971720"/>
-            <a:ext cx="5046480" cy="226800"/>
+            <a:ext cx="5044680" cy="225000"/>
           </a:xfrm>
           <a:prstGeom prst="rect">
             <a:avLst/>
@@ -5960,7 +5995,7 @@
         <p:spPr>
           <a:xfrm>
             <a:off x="395280" y="2471760"/>
-            <a:ext cx="5608440" cy="750600"/>
+            <a:ext cx="5606640" cy="748800"/>
           </a:xfrm>
           <a:custGeom>
             <a:avLst/>
@@ -6016,7 +6051,7 @@
         <p:spPr>
           <a:xfrm>
             <a:off x="523800" y="2657520"/>
-            <a:ext cx="464760" cy="379080"/>
+            <a:ext cx="462960" cy="377280"/>
           </a:xfrm>
           <a:prstGeom prst="rect">
             <a:avLst/>
@@ -6068,7 +6103,7 @@
         <p:spPr>
           <a:xfrm>
             <a:off x="968400" y="2600280"/>
-            <a:ext cx="4998960" cy="264960"/>
+            <a:ext cx="4997160" cy="263160"/>
           </a:xfrm>
           <a:prstGeom prst="rect">
             <a:avLst/>
@@ -6120,7 +6155,7 @@
         <p:spPr>
           <a:xfrm>
             <a:off x="968400" y="2867040"/>
-            <a:ext cx="4979880" cy="226800"/>
+            <a:ext cx="4978080" cy="225000"/>
           </a:xfrm>
           <a:prstGeom prst="rect">
             <a:avLst/>
@@ -6174,7 +6209,7 @@
         <p:spPr>
           <a:xfrm>
             <a:off x="395280" y="3367080"/>
-            <a:ext cx="5608440" cy="750600"/>
+            <a:ext cx="5606640" cy="748800"/>
           </a:xfrm>
           <a:custGeom>
             <a:avLst/>
@@ -6230,7 +6265,7 @@
         <p:spPr>
           <a:xfrm>
             <a:off x="523800" y="3552840"/>
-            <a:ext cx="464760" cy="379080"/>
+            <a:ext cx="462960" cy="377280"/>
           </a:xfrm>
           <a:prstGeom prst="rect">
             <a:avLst/>
@@ -6282,7 +6317,7 @@
         <p:spPr>
           <a:xfrm>
             <a:off x="968400" y="3495600"/>
-            <a:ext cx="4998960" cy="264960"/>
+            <a:ext cx="4997160" cy="263160"/>
           </a:xfrm>
           <a:prstGeom prst="rect">
             <a:avLst/>
@@ -6334,7 +6369,7 @@
         <p:spPr>
           <a:xfrm>
             <a:off x="968400" y="3762360"/>
-            <a:ext cx="4979880" cy="226800"/>
+            <a:ext cx="4978080" cy="225000"/>
           </a:xfrm>
           <a:prstGeom prst="rect">
             <a:avLst/>
@@ -6388,7 +6423,7 @@
         <p:spPr>
           <a:xfrm>
             <a:off x="395280" y="4262400"/>
-            <a:ext cx="5608440" cy="750600"/>
+            <a:ext cx="5606640" cy="748800"/>
           </a:xfrm>
           <a:custGeom>
             <a:avLst/>
@@ -6444,7 +6479,7 @@
         <p:spPr>
           <a:xfrm>
             <a:off x="523800" y="4448160"/>
-            <a:ext cx="446040" cy="379080"/>
+            <a:ext cx="444240" cy="377280"/>
           </a:xfrm>
           <a:prstGeom prst="rect">
             <a:avLst/>
@@ -6496,7 +6531,7 @@
         <p:spPr>
           <a:xfrm>
             <a:off x="955800" y="4390920"/>
-            <a:ext cx="5018040" cy="264960"/>
+            <a:ext cx="5016240" cy="263160"/>
           </a:xfrm>
           <a:prstGeom prst="rect">
             <a:avLst/>
@@ -6548,7 +6583,7 @@
         <p:spPr>
           <a:xfrm>
             <a:off x="955800" y="4657680"/>
-            <a:ext cx="4998960" cy="226800"/>
+            <a:ext cx="4997160" cy="225000"/>
           </a:xfrm>
           <a:prstGeom prst="rect">
             <a:avLst/>
@@ -6602,7 +6637,7 @@
         <p:spPr>
           <a:xfrm>
             <a:off x="395280" y="5157720"/>
-            <a:ext cx="5608440" cy="750600"/>
+            <a:ext cx="5606640" cy="748800"/>
           </a:xfrm>
           <a:custGeom>
             <a:avLst/>
@@ -6658,7 +6693,7 @@
         <p:spPr>
           <a:xfrm>
             <a:off x="523800" y="5343480"/>
-            <a:ext cx="446040" cy="379080"/>
+            <a:ext cx="444240" cy="377280"/>
           </a:xfrm>
           <a:prstGeom prst="rect">
             <a:avLst/>
@@ -6710,7 +6745,7 @@
         <p:spPr>
           <a:xfrm>
             <a:off x="955800" y="5286240"/>
-            <a:ext cx="5018040" cy="264960"/>
+            <a:ext cx="5016240" cy="263160"/>
           </a:xfrm>
           <a:prstGeom prst="rect">
             <a:avLst/>
@@ -6762,7 +6797,7 @@
         <p:spPr>
           <a:xfrm>
             <a:off x="955800" y="5553000"/>
-            <a:ext cx="4998960" cy="226800"/>
+            <a:ext cx="4997160" cy="225000"/>
           </a:xfrm>
           <a:prstGeom prst="rect">
             <a:avLst/>
@@ -6816,7 +6851,7 @@
         <p:spPr>
           <a:xfrm>
             <a:off x="6186600" y="1576440"/>
-            <a:ext cx="5608440" cy="750600"/>
+            <a:ext cx="5606640" cy="748800"/>
           </a:xfrm>
           <a:custGeom>
             <a:avLst/>
@@ -6872,7 +6907,7 @@
         <p:spPr>
           <a:xfrm>
             <a:off x="6315120" y="1762200"/>
-            <a:ext cx="464760" cy="379080"/>
+            <a:ext cx="462960" cy="377280"/>
           </a:xfrm>
           <a:prstGeom prst="rect">
             <a:avLst/>
@@ -6924,7 +6959,7 @@
         <p:spPr>
           <a:xfrm>
             <a:off x="6759720" y="1704960"/>
-            <a:ext cx="4998960" cy="264960"/>
+            <a:ext cx="4997160" cy="263160"/>
           </a:xfrm>
           <a:prstGeom prst="rect">
             <a:avLst/>
@@ -6976,7 +7011,7 @@
         <p:spPr>
           <a:xfrm>
             <a:off x="6759720" y="1971720"/>
-            <a:ext cx="4979880" cy="226800"/>
+            <a:ext cx="4978080" cy="225000"/>
           </a:xfrm>
           <a:prstGeom prst="rect">
             <a:avLst/>
@@ -7030,7 +7065,7 @@
         <p:spPr>
           <a:xfrm>
             <a:off x="6186600" y="2471760"/>
-            <a:ext cx="5608440" cy="750600"/>
+            <a:ext cx="5606640" cy="748800"/>
           </a:xfrm>
           <a:custGeom>
             <a:avLst/>
@@ -7086,7 +7121,7 @@
         <p:spPr>
           <a:xfrm>
             <a:off x="6315120" y="2657520"/>
-            <a:ext cx="446040" cy="379080"/>
+            <a:ext cx="444240" cy="377280"/>
           </a:xfrm>
           <a:prstGeom prst="rect">
             <a:avLst/>
@@ -7138,7 +7173,7 @@
         <p:spPr>
           <a:xfrm>
             <a:off x="6746760" y="2600280"/>
-            <a:ext cx="5018040" cy="264960"/>
+            <a:ext cx="5016240" cy="263160"/>
           </a:xfrm>
           <a:prstGeom prst="rect">
             <a:avLst/>
@@ -7190,7 +7225,7 @@
         <p:spPr>
           <a:xfrm>
             <a:off x="6746760" y="2867040"/>
-            <a:ext cx="4998960" cy="226800"/>
+            <a:ext cx="4997160" cy="225000"/>
           </a:xfrm>
           <a:prstGeom prst="rect">
             <a:avLst/>
@@ -7244,7 +7279,7 @@
         <p:spPr>
           <a:xfrm>
             <a:off x="6186600" y="3367080"/>
-            <a:ext cx="5608440" cy="750600"/>
+            <a:ext cx="5606640" cy="748800"/>
           </a:xfrm>
           <a:custGeom>
             <a:avLst/>
@@ -7300,7 +7335,7 @@
         <p:spPr>
           <a:xfrm>
             <a:off x="6315120" y="3552840"/>
-            <a:ext cx="464760" cy="379080"/>
+            <a:ext cx="462960" cy="377280"/>
           </a:xfrm>
           <a:prstGeom prst="rect">
             <a:avLst/>
@@ -7352,7 +7387,7 @@
         <p:spPr>
           <a:xfrm>
             <a:off x="6759720" y="3495600"/>
-            <a:ext cx="4998960" cy="264960"/>
+            <a:ext cx="4997160" cy="263160"/>
           </a:xfrm>
           <a:prstGeom prst="rect">
             <a:avLst/>
@@ -7404,7 +7439,7 @@
         <p:spPr>
           <a:xfrm>
             <a:off x="6759720" y="3762360"/>
-            <a:ext cx="4979880" cy="226800"/>
+            <a:ext cx="4978080" cy="225000"/>
           </a:xfrm>
           <a:prstGeom prst="rect">
             <a:avLst/>
@@ -7458,7 +7493,7 @@
         <p:spPr>
           <a:xfrm>
             <a:off x="6186600" y="4262400"/>
-            <a:ext cx="5608440" cy="750600"/>
+            <a:ext cx="5606640" cy="748800"/>
           </a:xfrm>
           <a:custGeom>
             <a:avLst/>
@@ -7514,7 +7549,7 @@
         <p:spPr>
           <a:xfrm>
             <a:off x="6315120" y="4448160"/>
-            <a:ext cx="464760" cy="379080"/>
+            <a:ext cx="462960" cy="377280"/>
           </a:xfrm>
           <a:prstGeom prst="rect">
             <a:avLst/>
@@ -7566,7 +7601,7 @@
         <p:spPr>
           <a:xfrm>
             <a:off x="6759720" y="4390920"/>
-            <a:ext cx="4998960" cy="264960"/>
+            <a:ext cx="4997160" cy="263160"/>
           </a:xfrm>
           <a:prstGeom prst="rect">
             <a:avLst/>
@@ -7618,7 +7653,7 @@
         <p:spPr>
           <a:xfrm>
             <a:off x="6759720" y="4657680"/>
-            <a:ext cx="4979880" cy="226800"/>
+            <a:ext cx="4978080" cy="225000"/>
           </a:xfrm>
           <a:prstGeom prst="rect">
             <a:avLst/>
@@ -7672,7 +7707,7 @@
         <p:spPr>
           <a:xfrm>
             <a:off x="6186600" y="5157720"/>
-            <a:ext cx="5608440" cy="750600"/>
+            <a:ext cx="5606640" cy="748800"/>
           </a:xfrm>
           <a:custGeom>
             <a:avLst/>
@@ -7728,7 +7763,7 @@
         <p:spPr>
           <a:xfrm>
             <a:off x="6315120" y="5343480"/>
-            <a:ext cx="398160" cy="379080"/>
+            <a:ext cx="396360" cy="377280"/>
           </a:xfrm>
           <a:prstGeom prst="rect">
             <a:avLst/>
@@ -7780,7 +7815,7 @@
         <p:spPr>
           <a:xfrm>
             <a:off x="6696000" y="5286240"/>
-            <a:ext cx="5065560" cy="264960"/>
+            <a:ext cx="5063760" cy="263160"/>
           </a:xfrm>
           <a:prstGeom prst="rect">
             <a:avLst/>
@@ -7832,7 +7867,7 @@
         <p:spPr>
           <a:xfrm>
             <a:off x="6696000" y="5553000"/>
-            <a:ext cx="5046480" cy="226800"/>
+            <a:ext cx="5044680" cy="225000"/>
           </a:xfrm>
           <a:prstGeom prst="rect">
             <a:avLst/>
@@ -7886,7 +7921,7 @@
         <p:spPr>
           <a:xfrm>
             <a:off x="395280" y="6091200"/>
-            <a:ext cx="11399760" cy="598320"/>
+            <a:ext cx="11397960" cy="596520"/>
           </a:xfrm>
           <a:custGeom>
             <a:avLst/>
@@ -7942,7 +7977,7 @@
         <p:spPr>
           <a:xfrm>
             <a:off x="514440" y="6257880"/>
-            <a:ext cx="11161440" cy="264960"/>
+            <a:ext cx="11159640" cy="263160"/>
           </a:xfrm>
           <a:prstGeom prst="rect">
             <a:avLst/>
@@ -8046,7 +8081,7 @@
         <p:spPr>
           <a:xfrm>
             <a:off x="0" y="0"/>
-            <a:ext cx="12190320" cy="6856200"/>
+            <a:ext cx="12188520" cy="6854400"/>
           </a:xfrm>
           <a:prstGeom prst="roundRect">
             <a:avLst>
@@ -8078,7 +8113,7 @@
         <p:spPr>
           <a:xfrm>
             <a:off x="0" y="0"/>
-            <a:ext cx="12190320" cy="6856200"/>
+            <a:ext cx="12188520" cy="6854400"/>
           </a:xfrm>
           <a:custGeom>
             <a:avLst/>
@@ -8141,7 +8176,7 @@
         <p:spPr>
           <a:xfrm>
             <a:off x="380880" y="1542960"/>
-            <a:ext cx="1865160" cy="607680"/>
+            <a:ext cx="1863360" cy="605880"/>
           </a:xfrm>
           <a:custGeom>
             <a:avLst/>
@@ -8192,7 +8227,7 @@
         <p:spPr>
           <a:xfrm>
             <a:off x="609480" y="1676520"/>
-            <a:ext cx="1579320" cy="341280"/>
+            <a:ext cx="1577520" cy="339480"/>
           </a:xfrm>
           <a:prstGeom prst="rect">
             <a:avLst/>
@@ -8244,7 +8279,7 @@
         <p:spPr>
           <a:xfrm>
             <a:off x="380880" y="2381400"/>
-            <a:ext cx="11771280" cy="1712880"/>
+            <a:ext cx="11769480" cy="1711080"/>
           </a:xfrm>
           <a:prstGeom prst="rect">
             <a:avLst/>
@@ -8317,7 +8352,7 @@
         <p:spPr>
           <a:xfrm>
             <a:off x="380880" y="4324320"/>
-            <a:ext cx="1522080" cy="74520"/>
+            <a:ext cx="1520280" cy="72720"/>
           </a:xfrm>
           <a:custGeom>
             <a:avLst/>
@@ -8368,7 +8403,7 @@
         <p:spPr>
           <a:xfrm>
             <a:off x="380880" y="4629240"/>
-            <a:ext cx="7456320" cy="684000"/>
+            <a:ext cx="7454520" cy="682200"/>
           </a:xfrm>
           <a:prstGeom prst="rect">
             <a:avLst/>
@@ -8441,7 +8476,7 @@
         <p:spPr>
           <a:xfrm>
             <a:off x="10591920" y="5867280"/>
-            <a:ext cx="150480" cy="150480"/>
+            <a:ext cx="148680" cy="148680"/>
           </a:xfrm>
           <a:custGeom>
             <a:avLst/>
@@ -8492,7 +8527,7 @@
         <p:spPr>
           <a:xfrm>
             <a:off x="10896480" y="5867280"/>
-            <a:ext cx="150480" cy="150480"/>
+            <a:ext cx="148680" cy="148680"/>
           </a:xfrm>
           <a:custGeom>
             <a:avLst/>
@@ -8543,7 +8578,7 @@
         <p:spPr>
           <a:xfrm>
             <a:off x="11201400" y="5867280"/>
-            <a:ext cx="150480" cy="150480"/>
+            <a:ext cx="148680" cy="148680"/>
           </a:xfrm>
           <a:custGeom>
             <a:avLst/>
@@ -8626,7 +8661,7 @@
         <p:spPr>
           <a:xfrm>
             <a:off x="0" y="0"/>
-            <a:ext cx="12190320" cy="6854040"/>
+            <a:ext cx="12188520" cy="6852240"/>
           </a:xfrm>
           <a:custGeom>
             <a:avLst/>
@@ -8689,7 +8724,7 @@
         <p:spPr>
           <a:xfrm>
             <a:off x="345240" y="345240"/>
-            <a:ext cx="11706840" cy="412560"/>
+            <a:ext cx="11705040" cy="410760"/>
           </a:xfrm>
           <a:prstGeom prst="rect">
             <a:avLst/>
@@ -8741,7 +8776,7 @@
         <p:spPr>
           <a:xfrm>
             <a:off x="345240" y="863280"/>
-            <a:ext cx="11603160" cy="274680"/>
+            <a:ext cx="11601360" cy="272880"/>
           </a:xfrm>
           <a:prstGeom prst="rect">
             <a:avLst/>
@@ -8793,7 +8828,7 @@
         <p:spPr>
           <a:xfrm>
             <a:off x="345240" y="1243440"/>
-            <a:ext cx="827280" cy="32760"/>
+            <a:ext cx="825480" cy="30960"/>
           </a:xfrm>
           <a:custGeom>
             <a:avLst/>
@@ -8844,7 +8879,7 @@
         <p:spPr>
           <a:xfrm>
             <a:off x="358200" y="1429200"/>
-            <a:ext cx="5619240" cy="2752560"/>
+            <a:ext cx="5617440" cy="2750760"/>
           </a:xfrm>
           <a:custGeom>
             <a:avLst/>
@@ -8900,7 +8935,7 @@
         <p:spPr>
           <a:xfrm>
             <a:off x="492120" y="1614600"/>
-            <a:ext cx="5351760" cy="274680"/>
+            <a:ext cx="5349960" cy="272880"/>
           </a:xfrm>
           <a:prstGeom prst="rect">
             <a:avLst/>
@@ -8952,7 +8987,7 @@
         <p:spPr>
           <a:xfrm>
             <a:off x="440280" y="2028960"/>
-            <a:ext cx="5455080" cy="412560"/>
+            <a:ext cx="5453280" cy="410760"/>
           </a:xfrm>
           <a:prstGeom prst="rect">
             <a:avLst/>
@@ -9004,7 +9039,7 @@
         <p:spPr>
           <a:xfrm>
             <a:off x="505080" y="2478240"/>
-            <a:ext cx="5325840" cy="240120"/>
+            <a:ext cx="5324040" cy="238320"/>
           </a:xfrm>
           <a:prstGeom prst="rect">
             <a:avLst/>
@@ -9056,7 +9091,7 @@
         <p:spPr>
           <a:xfrm>
             <a:off x="543960" y="2858040"/>
-            <a:ext cx="5248080" cy="412560"/>
+            <a:ext cx="5246280" cy="410760"/>
           </a:xfrm>
           <a:custGeom>
             <a:avLst/>
@@ -9109,7 +9144,7 @@
         <p:spPr>
           <a:xfrm>
             <a:off x="613080" y="2961720"/>
-            <a:ext cx="5109840" cy="205560"/>
+            <a:ext cx="5108040" cy="203760"/>
           </a:xfrm>
           <a:prstGeom prst="rect">
             <a:avLst/>
@@ -9181,7 +9216,7 @@
         <p:spPr>
           <a:xfrm>
             <a:off x="543960" y="3410640"/>
-            <a:ext cx="2571120" cy="585360"/>
+            <a:ext cx="2569320" cy="583560"/>
           </a:xfrm>
           <a:custGeom>
             <a:avLst/>
@@ -9234,7 +9269,7 @@
         <p:spPr>
           <a:xfrm>
             <a:off x="561240" y="3479760"/>
-            <a:ext cx="2536920" cy="274680"/>
+            <a:ext cx="2535120" cy="272880"/>
           </a:xfrm>
           <a:prstGeom prst="rect">
             <a:avLst/>
@@ -9286,7 +9321,7 @@
         <p:spPr>
           <a:xfrm>
             <a:off x="582840" y="3755880"/>
-            <a:ext cx="2493720" cy="171000"/>
+            <a:ext cx="2491920" cy="169200"/>
           </a:xfrm>
           <a:prstGeom prst="rect">
             <a:avLst/>
@@ -9338,7 +9373,7 @@
         <p:spPr>
           <a:xfrm>
             <a:off x="3219840" y="3410640"/>
-            <a:ext cx="2571120" cy="585360"/>
+            <a:ext cx="2569320" cy="583560"/>
           </a:xfrm>
           <a:custGeom>
             <a:avLst/>
@@ -9391,7 +9426,7 @@
         <p:spPr>
           <a:xfrm>
             <a:off x="3237120" y="3479760"/>
-            <a:ext cx="2536920" cy="274680"/>
+            <a:ext cx="2535120" cy="272880"/>
           </a:xfrm>
           <a:prstGeom prst="rect">
             <a:avLst/>
@@ -9443,7 +9478,7 @@
         <p:spPr>
           <a:xfrm>
             <a:off x="3258360" y="3755880"/>
-            <a:ext cx="2493720" cy="171000"/>
+            <a:ext cx="2491920" cy="169200"/>
           </a:xfrm>
           <a:prstGeom prst="rect">
             <a:avLst/>
@@ -9495,7 +9530,7 @@
         <p:spPr>
           <a:xfrm>
             <a:off x="6210720" y="1429200"/>
-            <a:ext cx="5619240" cy="2752560"/>
+            <a:ext cx="5617440" cy="2750760"/>
           </a:xfrm>
           <a:custGeom>
             <a:avLst/>
@@ -9551,7 +9586,7 @@
         <p:spPr>
           <a:xfrm>
             <a:off x="6344280" y="1614600"/>
-            <a:ext cx="5351760" cy="274680"/>
+            <a:ext cx="5349960" cy="272880"/>
           </a:xfrm>
           <a:prstGeom prst="rect">
             <a:avLst/>
@@ -9603,7 +9638,7 @@
         <p:spPr>
           <a:xfrm>
             <a:off x="6292800" y="2028960"/>
-            <a:ext cx="5455080" cy="412560"/>
+            <a:ext cx="5453280" cy="410760"/>
           </a:xfrm>
           <a:prstGeom prst="rect">
             <a:avLst/>
@@ -9655,7 +9690,7 @@
         <p:spPr>
           <a:xfrm>
             <a:off x="6357240" y="2478240"/>
-            <a:ext cx="5325840" cy="240120"/>
+            <a:ext cx="5324040" cy="238320"/>
           </a:xfrm>
           <a:prstGeom prst="rect">
             <a:avLst/>
@@ -9707,7 +9742,7 @@
         <p:spPr>
           <a:xfrm>
             <a:off x="6396120" y="2858040"/>
-            <a:ext cx="5248080" cy="412560"/>
+            <a:ext cx="5246280" cy="410760"/>
           </a:xfrm>
           <a:custGeom>
             <a:avLst/>
@@ -9760,7 +9795,7 @@
         <p:spPr>
           <a:xfrm>
             <a:off x="6465240" y="2961720"/>
-            <a:ext cx="5109840" cy="205560"/>
+            <a:ext cx="5108040" cy="203760"/>
           </a:xfrm>
           <a:prstGeom prst="rect">
             <a:avLst/>
@@ -9822,7 +9857,7 @@
         <p:spPr>
           <a:xfrm>
             <a:off x="6396120" y="3410640"/>
-            <a:ext cx="2571120" cy="585360"/>
+            <a:ext cx="2569320" cy="583560"/>
           </a:xfrm>
           <a:custGeom>
             <a:avLst/>
@@ -9875,7 +9910,7 @@
         <p:spPr>
           <a:xfrm>
             <a:off x="6413400" y="3479760"/>
-            <a:ext cx="2536920" cy="274680"/>
+            <a:ext cx="2535120" cy="272880"/>
           </a:xfrm>
           <a:prstGeom prst="rect">
             <a:avLst/>
@@ -9927,7 +9962,7 @@
         <p:spPr>
           <a:xfrm>
             <a:off x="6435000" y="3755880"/>
-            <a:ext cx="2493720" cy="171000"/>
+            <a:ext cx="2491920" cy="169200"/>
           </a:xfrm>
           <a:prstGeom prst="rect">
             <a:avLst/>
@@ -9979,7 +10014,7 @@
         <p:spPr>
           <a:xfrm>
             <a:off x="9072000" y="3410640"/>
-            <a:ext cx="2571120" cy="585360"/>
+            <a:ext cx="2569320" cy="583560"/>
           </a:xfrm>
           <a:custGeom>
             <a:avLst/>
@@ -10032,7 +10067,7 @@
         <p:spPr>
           <a:xfrm>
             <a:off x="9089280" y="3479760"/>
-            <a:ext cx="2536920" cy="274680"/>
+            <a:ext cx="2535120" cy="272880"/>
           </a:xfrm>
           <a:prstGeom prst="rect">
             <a:avLst/>
@@ -10084,7 +10119,7 @@
         <p:spPr>
           <a:xfrm>
             <a:off x="9110880" y="3755880"/>
-            <a:ext cx="2493720" cy="171000"/>
+            <a:ext cx="2491920" cy="169200"/>
           </a:xfrm>
           <a:prstGeom prst="rect">
             <a:avLst/>
@@ -10136,7 +10171,7 @@
         <p:spPr>
           <a:xfrm>
             <a:off x="362520" y="4351680"/>
-            <a:ext cx="11464920" cy="2485080"/>
+            <a:ext cx="11463120" cy="2483280"/>
           </a:xfrm>
           <a:custGeom>
             <a:avLst/>
@@ -10192,7 +10227,7 @@
         <p:spPr>
           <a:xfrm>
             <a:off x="500760" y="4541760"/>
-            <a:ext cx="11188440" cy="274680"/>
+            <a:ext cx="11186640" cy="272880"/>
           </a:xfrm>
           <a:prstGeom prst="rect">
             <a:avLst/>
@@ -10244,7 +10279,7 @@
         <p:spPr>
           <a:xfrm>
             <a:off x="552600" y="4921560"/>
-            <a:ext cx="9945360" cy="1725120"/>
+            <a:ext cx="9943560" cy="1723320"/>
           </a:xfrm>
           <a:prstGeom prst="roundRect">
             <a:avLst>
@@ -10308,7 +10343,7 @@
         <p:spPr>
           <a:xfrm>
             <a:off x="0" y="0"/>
-            <a:ext cx="12190320" cy="6856200"/>
+            <a:ext cx="12188520" cy="6854400"/>
           </a:xfrm>
           <a:custGeom>
             <a:avLst/>
@@ -10371,7 +10406,7 @@
         <p:spPr>
           <a:xfrm>
             <a:off x="380880" y="380880"/>
-            <a:ext cx="11656800" cy="455400"/>
+            <a:ext cx="11655000" cy="453600"/>
           </a:xfrm>
           <a:prstGeom prst="rect">
             <a:avLst/>
@@ -10423,7 +10458,7 @@
         <p:spPr>
           <a:xfrm>
             <a:off x="380880" y="952560"/>
-            <a:ext cx="11542680" cy="303120"/>
+            <a:ext cx="11540880" cy="301320"/>
           </a:xfrm>
           <a:prstGeom prst="rect">
             <a:avLst/>
@@ -10475,7 +10510,7 @@
         <p:spPr>
           <a:xfrm>
             <a:off x="380880" y="1371600"/>
-            <a:ext cx="912600" cy="36360"/>
+            <a:ext cx="910800" cy="34560"/>
           </a:xfrm>
           <a:custGeom>
             <a:avLst/>
@@ -10526,7 +10561,7 @@
         <p:spPr>
           <a:xfrm>
             <a:off x="395280" y="1576440"/>
-            <a:ext cx="3674880" cy="2350800"/>
+            <a:ext cx="3673080" cy="2349000"/>
           </a:xfrm>
           <a:custGeom>
             <a:avLst/>
@@ -10582,7 +10617,7 @@
         <p:spPr>
           <a:xfrm>
             <a:off x="564480" y="1752480"/>
-            <a:ext cx="355320" cy="284040"/>
+            <a:ext cx="353520" cy="282240"/>
           </a:xfrm>
           <a:custGeom>
             <a:avLst/>
@@ -10763,7 +10798,7 @@
         <p:spPr>
           <a:xfrm>
             <a:off x="1033560" y="1743120"/>
-            <a:ext cx="550800" cy="303120"/>
+            <a:ext cx="549000" cy="301320"/>
           </a:xfrm>
           <a:prstGeom prst="rect">
             <a:avLst/>
@@ -10815,7 +10850,7 @@
         <p:spPr>
           <a:xfrm>
             <a:off x="561960" y="2200320"/>
-            <a:ext cx="700920" cy="150480"/>
+            <a:ext cx="699120" cy="148680"/>
           </a:xfrm>
           <a:prstGeom prst="rect">
             <a:avLst/>
@@ -10867,7 +10902,7 @@
         <p:spPr>
           <a:xfrm>
             <a:off x="714240" y="2467080"/>
-            <a:ext cx="3265200" cy="226800"/>
+            <a:ext cx="3263400" cy="225000"/>
           </a:xfrm>
           <a:prstGeom prst="rect">
             <a:avLst/>
@@ -10929,7 +10964,7 @@
         <p:spPr>
           <a:xfrm>
             <a:off x="714240" y="2771640"/>
-            <a:ext cx="3265200" cy="226800"/>
+            <a:ext cx="3263400" cy="225000"/>
           </a:xfrm>
           <a:prstGeom prst="rect">
             <a:avLst/>
@@ -10991,7 +11026,7 @@
         <p:spPr>
           <a:xfrm>
             <a:off x="714240" y="3076560"/>
-            <a:ext cx="3265200" cy="226800"/>
+            <a:ext cx="3263400" cy="225000"/>
           </a:xfrm>
           <a:prstGeom prst="rect">
             <a:avLst/>
@@ -11053,7 +11088,7 @@
         <p:spPr>
           <a:xfrm>
             <a:off x="561960" y="3419640"/>
-            <a:ext cx="3341520" cy="341280"/>
+            <a:ext cx="3339720" cy="339480"/>
           </a:xfrm>
           <a:custGeom>
             <a:avLst/>
@@ -11106,7 +11141,7 @@
         <p:spPr>
           <a:xfrm>
             <a:off x="604800" y="3495600"/>
-            <a:ext cx="3255840" cy="188640"/>
+            <a:ext cx="3254040" cy="186840"/>
           </a:xfrm>
           <a:prstGeom prst="rect">
             <a:avLst/>
@@ -11158,7 +11193,7 @@
         <p:spPr>
           <a:xfrm>
             <a:off x="4255920" y="1576440"/>
-            <a:ext cx="3674880" cy="2350800"/>
+            <a:ext cx="3673080" cy="2349000"/>
           </a:xfrm>
           <a:custGeom>
             <a:avLst/>
@@ -11214,7 +11249,7 @@
         <p:spPr>
           <a:xfrm>
             <a:off x="4496400" y="1752480"/>
-            <a:ext cx="212400" cy="284040"/>
+            <a:ext cx="210600" cy="282240"/>
           </a:xfrm>
           <a:custGeom>
             <a:avLst/>
@@ -11390,7 +11425,7 @@
         <p:spPr>
           <a:xfrm>
             <a:off x="4894200" y="1743120"/>
-            <a:ext cx="674640" cy="303120"/>
+            <a:ext cx="672840" cy="301320"/>
           </a:xfrm>
           <a:prstGeom prst="rect">
             <a:avLst/>
@@ -11442,7 +11477,7 @@
         <p:spPr>
           <a:xfrm>
             <a:off x="4422600" y="2200320"/>
-            <a:ext cx="700920" cy="150480"/>
+            <a:ext cx="699120" cy="148680"/>
           </a:xfrm>
           <a:prstGeom prst="rect">
             <a:avLst/>
@@ -11494,7 +11529,7 @@
         <p:spPr>
           <a:xfrm>
             <a:off x="4575240" y="2467080"/>
-            <a:ext cx="3265200" cy="226800"/>
+            <a:ext cx="3263400" cy="225000"/>
           </a:xfrm>
           <a:prstGeom prst="rect">
             <a:avLst/>
@@ -11556,7 +11591,7 @@
         <p:spPr>
           <a:xfrm>
             <a:off x="4575240" y="2771640"/>
-            <a:ext cx="3265200" cy="226800"/>
+            <a:ext cx="3263400" cy="225000"/>
           </a:xfrm>
           <a:prstGeom prst="rect">
             <a:avLst/>
@@ -11618,7 +11653,7 @@
         <p:spPr>
           <a:xfrm>
             <a:off x="4575240" y="3076560"/>
-            <a:ext cx="3265200" cy="226800"/>
+            <a:ext cx="3263400" cy="225000"/>
           </a:xfrm>
           <a:prstGeom prst="rect">
             <a:avLst/>
@@ -11680,7 +11715,7 @@
         <p:spPr>
           <a:xfrm>
             <a:off x="4422600" y="3419640"/>
-            <a:ext cx="3341520" cy="341280"/>
+            <a:ext cx="3339720" cy="339480"/>
           </a:xfrm>
           <a:custGeom>
             <a:avLst/>
@@ -11733,7 +11768,7 @@
         <p:spPr>
           <a:xfrm>
             <a:off x="4465440" y="3495600"/>
-            <a:ext cx="3255840" cy="188640"/>
+            <a:ext cx="3254040" cy="186840"/>
           </a:xfrm>
           <a:prstGeom prst="rect">
             <a:avLst/>
@@ -11785,7 +11820,7 @@
         <p:spPr>
           <a:xfrm>
             <a:off x="8116920" y="1576440"/>
-            <a:ext cx="3674880" cy="2350800"/>
+            <a:ext cx="3673080" cy="2349000"/>
           </a:xfrm>
           <a:custGeom>
             <a:avLst/>
@@ -11841,7 +11876,7 @@
         <p:spPr>
           <a:xfrm>
             <a:off x="8321760" y="1752480"/>
-            <a:ext cx="284040" cy="284040"/>
+            <a:ext cx="282240" cy="282240"/>
           </a:xfrm>
           <a:custGeom>
             <a:avLst/>
@@ -11965,7 +12000,7 @@
         <p:spPr>
           <a:xfrm>
             <a:off x="8755200" y="1743120"/>
-            <a:ext cx="541080" cy="303120"/>
+            <a:ext cx="539280" cy="301320"/>
           </a:xfrm>
           <a:prstGeom prst="rect">
             <a:avLst/>
@@ -12017,7 +12052,7 @@
         <p:spPr>
           <a:xfrm>
             <a:off x="8283600" y="2200320"/>
-            <a:ext cx="700920" cy="150480"/>
+            <a:ext cx="699120" cy="148680"/>
           </a:xfrm>
           <a:prstGeom prst="rect">
             <a:avLst/>
@@ -12069,7 +12104,7 @@
         <p:spPr>
           <a:xfrm>
             <a:off x="8435880" y="2467080"/>
-            <a:ext cx="3265200" cy="226800"/>
+            <a:ext cx="3263400" cy="225000"/>
           </a:xfrm>
           <a:prstGeom prst="rect">
             <a:avLst/>
@@ -12131,7 +12166,7 @@
         <p:spPr>
           <a:xfrm>
             <a:off x="8435880" y="2771640"/>
-            <a:ext cx="3265200" cy="226800"/>
+            <a:ext cx="3263400" cy="225000"/>
           </a:xfrm>
           <a:prstGeom prst="rect">
             <a:avLst/>
@@ -12193,7 +12228,7 @@
         <p:spPr>
           <a:xfrm>
             <a:off x="8435880" y="3076560"/>
-            <a:ext cx="3265200" cy="226800"/>
+            <a:ext cx="3263400" cy="225000"/>
           </a:xfrm>
           <a:prstGeom prst="rect">
             <a:avLst/>
@@ -12255,7 +12290,7 @@
         <p:spPr>
           <a:xfrm>
             <a:off x="8283600" y="3419640"/>
-            <a:ext cx="3341520" cy="341280"/>
+            <a:ext cx="3339720" cy="339480"/>
           </a:xfrm>
           <a:custGeom>
             <a:avLst/>
@@ -12308,7 +12343,7 @@
         <p:spPr>
           <a:xfrm>
             <a:off x="8326440" y="3495600"/>
-            <a:ext cx="3255840" cy="188640"/>
+            <a:ext cx="3254040" cy="186840"/>
           </a:xfrm>
           <a:prstGeom prst="rect">
             <a:avLst/>
@@ -12360,7 +12395,7 @@
         <p:spPr>
           <a:xfrm>
             <a:off x="395280" y="4110120"/>
-            <a:ext cx="3674880" cy="2350800"/>
+            <a:ext cx="3673080" cy="2349000"/>
           </a:xfrm>
           <a:custGeom>
             <a:avLst/>
@@ -12416,7 +12451,7 @@
         <p:spPr>
           <a:xfrm>
             <a:off x="600120" y="4286160"/>
-            <a:ext cx="284040" cy="284040"/>
+            <a:ext cx="282240" cy="282240"/>
           </a:xfrm>
           <a:custGeom>
             <a:avLst/>
@@ -12529,7 +12564,7 @@
         <p:spPr>
           <a:xfrm>
             <a:off x="1033560" y="4276800"/>
-            <a:ext cx="874440" cy="303120"/>
+            <a:ext cx="872640" cy="301320"/>
           </a:xfrm>
           <a:prstGeom prst="rect">
             <a:avLst/>
@@ -12581,7 +12616,7 @@
         <p:spPr>
           <a:xfrm>
             <a:off x="561960" y="4734000"/>
-            <a:ext cx="700920" cy="150480"/>
+            <a:ext cx="699120" cy="148680"/>
           </a:xfrm>
           <a:prstGeom prst="rect">
             <a:avLst/>
@@ -12633,7 +12668,7 @@
         <p:spPr>
           <a:xfrm>
             <a:off x="714240" y="5000760"/>
-            <a:ext cx="3265200" cy="226800"/>
+            <a:ext cx="3263400" cy="225000"/>
           </a:xfrm>
           <a:prstGeom prst="rect">
             <a:avLst/>
@@ -12695,7 +12730,7 @@
         <p:spPr>
           <a:xfrm>
             <a:off x="714240" y="5305320"/>
-            <a:ext cx="3265200" cy="226800"/>
+            <a:ext cx="3263400" cy="225000"/>
           </a:xfrm>
           <a:prstGeom prst="rect">
             <a:avLst/>
@@ -12757,7 +12792,7 @@
         <p:spPr>
           <a:xfrm>
             <a:off x="714240" y="5610240"/>
-            <a:ext cx="3265200" cy="226800"/>
+            <a:ext cx="3263400" cy="225000"/>
           </a:xfrm>
           <a:prstGeom prst="rect">
             <a:avLst/>
@@ -12819,7 +12854,7 @@
         <p:spPr>
           <a:xfrm>
             <a:off x="561960" y="5952960"/>
-            <a:ext cx="3341520" cy="341280"/>
+            <a:ext cx="3339720" cy="339480"/>
           </a:xfrm>
           <a:custGeom>
             <a:avLst/>
@@ -12872,7 +12907,7 @@
         <p:spPr>
           <a:xfrm>
             <a:off x="604800" y="6029280"/>
-            <a:ext cx="3255840" cy="188640"/>
+            <a:ext cx="3254040" cy="186840"/>
           </a:xfrm>
           <a:prstGeom prst="rect">
             <a:avLst/>
@@ -12924,7 +12959,7 @@
         <p:spPr>
           <a:xfrm>
             <a:off x="4255920" y="4110120"/>
-            <a:ext cx="3674880" cy="2350800"/>
+            <a:ext cx="3673080" cy="2349000"/>
           </a:xfrm>
           <a:custGeom>
             <a:avLst/>
@@ -12980,7 +13015,7 @@
         <p:spPr>
           <a:xfrm>
             <a:off x="4443120" y="4286160"/>
-            <a:ext cx="319680" cy="284040"/>
+            <a:ext cx="317880" cy="282240"/>
           </a:xfrm>
           <a:custGeom>
             <a:avLst/>
@@ -13177,7 +13212,7 @@
         <p:spPr>
           <a:xfrm>
             <a:off x="4894200" y="4276800"/>
-            <a:ext cx="760320" cy="303120"/>
+            <a:ext cx="758520" cy="301320"/>
           </a:xfrm>
           <a:prstGeom prst="rect">
             <a:avLst/>
@@ -13229,7 +13264,7 @@
         <p:spPr>
           <a:xfrm>
             <a:off x="4422600" y="4734000"/>
-            <a:ext cx="700920" cy="150480"/>
+            <a:ext cx="699120" cy="148680"/>
           </a:xfrm>
           <a:prstGeom prst="rect">
             <a:avLst/>
@@ -13281,7 +13316,7 @@
         <p:spPr>
           <a:xfrm>
             <a:off x="4575240" y="5000760"/>
-            <a:ext cx="3265200" cy="226800"/>
+            <a:ext cx="3263400" cy="225000"/>
           </a:xfrm>
           <a:prstGeom prst="rect">
             <a:avLst/>
@@ -13343,7 +13378,7 @@
         <p:spPr>
           <a:xfrm>
             <a:off x="4575240" y="5305320"/>
-            <a:ext cx="3265200" cy="226800"/>
+            <a:ext cx="3263400" cy="225000"/>
           </a:xfrm>
           <a:prstGeom prst="rect">
             <a:avLst/>
@@ -13405,7 +13440,7 @@
         <p:spPr>
           <a:xfrm>
             <a:off x="4575240" y="5610240"/>
-            <a:ext cx="3265200" cy="226800"/>
+            <a:ext cx="3263400" cy="225000"/>
           </a:xfrm>
           <a:prstGeom prst="rect">
             <a:avLst/>
@@ -13467,7 +13502,7 @@
         <p:spPr>
           <a:xfrm>
             <a:off x="4422600" y="5952960"/>
-            <a:ext cx="3341520" cy="341280"/>
+            <a:ext cx="3339720" cy="339480"/>
           </a:xfrm>
           <a:custGeom>
             <a:avLst/>
@@ -13520,7 +13555,7 @@
         <p:spPr>
           <a:xfrm>
             <a:off x="4465440" y="6029280"/>
-            <a:ext cx="3255840" cy="188640"/>
+            <a:ext cx="3254040" cy="186840"/>
           </a:xfrm>
           <a:prstGeom prst="rect">
             <a:avLst/>
@@ -13572,7 +13607,7 @@
         <p:spPr>
           <a:xfrm>
             <a:off x="8116920" y="4110120"/>
-            <a:ext cx="3674880" cy="2350800"/>
+            <a:ext cx="3673080" cy="2349000"/>
           </a:xfrm>
           <a:custGeom>
             <a:avLst/>
@@ -13628,7 +13663,7 @@
         <p:spPr>
           <a:xfrm>
             <a:off x="8321760" y="4286160"/>
-            <a:ext cx="284040" cy="284040"/>
+            <a:ext cx="282240" cy="282240"/>
           </a:xfrm>
           <a:custGeom>
             <a:avLst/>
@@ -13726,7 +13761,7 @@
         <p:spPr>
           <a:xfrm>
             <a:off x="8755200" y="4276800"/>
-            <a:ext cx="865080" cy="303120"/>
+            <a:ext cx="863280" cy="301320"/>
           </a:xfrm>
           <a:prstGeom prst="rect">
             <a:avLst/>
@@ -13778,7 +13813,7 @@
         <p:spPr>
           <a:xfrm>
             <a:off x="8283600" y="4734000"/>
-            <a:ext cx="700920" cy="150480"/>
+            <a:ext cx="699120" cy="148680"/>
           </a:xfrm>
           <a:prstGeom prst="rect">
             <a:avLst/>
@@ -13830,7 +13865,7 @@
         <p:spPr>
           <a:xfrm>
             <a:off x="8435880" y="5000760"/>
-            <a:ext cx="3265200" cy="226800"/>
+            <a:ext cx="3263400" cy="225000"/>
           </a:xfrm>
           <a:prstGeom prst="rect">
             <a:avLst/>
@@ -13892,7 +13927,7 @@
         <p:spPr>
           <a:xfrm>
             <a:off x="8435880" y="5305320"/>
-            <a:ext cx="3265200" cy="226800"/>
+            <a:ext cx="3263400" cy="225000"/>
           </a:xfrm>
           <a:prstGeom prst="rect">
             <a:avLst/>
@@ -13954,7 +13989,7 @@
         <p:spPr>
           <a:xfrm>
             <a:off x="8435880" y="5610240"/>
-            <a:ext cx="3265200" cy="226800"/>
+            <a:ext cx="3263400" cy="225000"/>
           </a:xfrm>
           <a:prstGeom prst="rect">
             <a:avLst/>
@@ -14016,7 +14051,7 @@
         <p:spPr>
           <a:xfrm>
             <a:off x="8283600" y="5952960"/>
-            <a:ext cx="3341520" cy="341280"/>
+            <a:ext cx="3339720" cy="339480"/>
           </a:xfrm>
           <a:custGeom>
             <a:avLst/>
@@ -14069,7 +14104,7 @@
         <p:spPr>
           <a:xfrm>
             <a:off x="8326440" y="6029280"/>
-            <a:ext cx="3255840" cy="188640"/>
+            <a:ext cx="3254040" cy="186840"/>
           </a:xfrm>
           <a:prstGeom prst="rect">
             <a:avLst/>
@@ -14153,7 +14188,7 @@
         <p:spPr>
           <a:xfrm>
             <a:off x="0" y="0"/>
-            <a:ext cx="12190320" cy="6856200"/>
+            <a:ext cx="12188520" cy="6854400"/>
           </a:xfrm>
           <a:prstGeom prst="roundRect">
             <a:avLst>
@@ -14185,7 +14220,7 @@
         <p:spPr>
           <a:xfrm>
             <a:off x="0" y="0"/>
-            <a:ext cx="12190320" cy="6856200"/>
+            <a:ext cx="12188520" cy="6854400"/>
           </a:xfrm>
           <a:custGeom>
             <a:avLst/>
@@ -14248,7 +14283,7 @@
         <p:spPr>
           <a:xfrm>
             <a:off x="380880" y="1542960"/>
-            <a:ext cx="1855440" cy="607680"/>
+            <a:ext cx="1853640" cy="605880"/>
           </a:xfrm>
           <a:custGeom>
             <a:avLst/>
@@ -14299,7 +14334,7 @@
         <p:spPr>
           <a:xfrm>
             <a:off x="609480" y="1676520"/>
-            <a:ext cx="1566720" cy="341280"/>
+            <a:ext cx="1564920" cy="339480"/>
           </a:xfrm>
           <a:prstGeom prst="rect">
             <a:avLst/>
@@ -14351,7 +14386,7 @@
         <p:spPr>
           <a:xfrm>
             <a:off x="380880" y="2381400"/>
-            <a:ext cx="11771280" cy="1712880"/>
+            <a:ext cx="11769480" cy="1711080"/>
           </a:xfrm>
           <a:prstGeom prst="rect">
             <a:avLst/>
@@ -14424,7 +14459,7 @@
         <p:spPr>
           <a:xfrm>
             <a:off x="380880" y="4324320"/>
-            <a:ext cx="1522080" cy="74520"/>
+            <a:ext cx="1520280" cy="72720"/>
           </a:xfrm>
           <a:custGeom>
             <a:avLst/>
@@ -14475,7 +14510,7 @@
         <p:spPr>
           <a:xfrm>
             <a:off x="380880" y="4629240"/>
-            <a:ext cx="7456320" cy="684000"/>
+            <a:ext cx="7454520" cy="682200"/>
           </a:xfrm>
           <a:prstGeom prst="rect">
             <a:avLst/>
@@ -14548,7 +14583,7 @@
         <p:spPr>
           <a:xfrm>
             <a:off x="10591920" y="5867280"/>
-            <a:ext cx="150480" cy="150480"/>
+            <a:ext cx="148680" cy="148680"/>
           </a:xfrm>
           <a:custGeom>
             <a:avLst/>
@@ -14599,7 +14634,7 @@
         <p:spPr>
           <a:xfrm>
             <a:off x="10896480" y="5867280"/>
-            <a:ext cx="150480" cy="150480"/>
+            <a:ext cx="148680" cy="148680"/>
           </a:xfrm>
           <a:custGeom>
             <a:avLst/>
@@ -14650,7 +14685,7 @@
         <p:spPr>
           <a:xfrm>
             <a:off x="11201400" y="5867280"/>
-            <a:ext cx="150480" cy="150480"/>
+            <a:ext cx="148680" cy="148680"/>
           </a:xfrm>
           <a:custGeom>
             <a:avLst/>
@@ -14733,7 +14768,7 @@
         <p:spPr>
           <a:xfrm>
             <a:off x="0" y="0"/>
-            <a:ext cx="12190320" cy="6854040"/>
+            <a:ext cx="12188520" cy="6852240"/>
           </a:xfrm>
           <a:custGeom>
             <a:avLst/>
@@ -14796,7 +14831,7 @@
         <p:spPr>
           <a:xfrm>
             <a:off x="353520" y="353520"/>
-            <a:ext cx="11695320" cy="422280"/>
+            <a:ext cx="11693520" cy="420480"/>
           </a:xfrm>
           <a:prstGeom prst="rect">
             <a:avLst/>
@@ -14848,7 +14883,7 @@
         <p:spPr>
           <a:xfrm>
             <a:off x="353520" y="883440"/>
-            <a:ext cx="11589480" cy="280800"/>
+            <a:ext cx="11587680" cy="279000"/>
           </a:xfrm>
           <a:prstGeom prst="rect">
             <a:avLst/>
@@ -14900,7 +14935,7 @@
         <p:spPr>
           <a:xfrm>
             <a:off x="353520" y="1272240"/>
-            <a:ext cx="846360" cy="33480"/>
+            <a:ext cx="844560" cy="31680"/>
           </a:xfrm>
           <a:custGeom>
             <a:avLst/>
@@ -14951,7 +14986,7 @@
         <p:spPr>
           <a:xfrm>
             <a:off x="366480" y="1462320"/>
-            <a:ext cx="3708720" cy="2109600"/>
+            <a:ext cx="3706920" cy="2107800"/>
           </a:xfrm>
           <a:custGeom>
             <a:avLst/>
@@ -15007,7 +15042,7 @@
         <p:spPr>
           <a:xfrm>
             <a:off x="1954800" y="1652040"/>
-            <a:ext cx="528120" cy="422280"/>
+            <a:ext cx="526320" cy="420480"/>
           </a:xfrm>
           <a:custGeom>
             <a:avLst/>
@@ -15223,7 +15258,7 @@
         <p:spPr>
           <a:xfrm>
             <a:off x="503640" y="2217600"/>
-            <a:ext cx="3434760" cy="280800"/>
+            <a:ext cx="3432960" cy="279000"/>
           </a:xfrm>
           <a:prstGeom prst="rect">
             <a:avLst/>
@@ -15275,7 +15310,7 @@
         <p:spPr>
           <a:xfrm>
             <a:off x="516960" y="2606400"/>
-            <a:ext cx="3408480" cy="775800"/>
+            <a:ext cx="3406680" cy="774000"/>
           </a:xfrm>
           <a:prstGeom prst="rect">
             <a:avLst/>
@@ -15347,7 +15382,7 @@
         <p:spPr>
           <a:xfrm>
             <a:off x="4240800" y="1462320"/>
-            <a:ext cx="3708720" cy="2109600"/>
+            <a:ext cx="3706920" cy="2107800"/>
           </a:xfrm>
           <a:custGeom>
             <a:avLst/>
@@ -15403,7 +15438,7 @@
         <p:spPr>
           <a:xfrm>
             <a:off x="5882040" y="1652040"/>
-            <a:ext cx="422280" cy="422280"/>
+            <a:ext cx="420480" cy="420480"/>
           </a:xfrm>
           <a:custGeom>
             <a:avLst/>
@@ -15580,7 +15615,7 @@
         <p:spPr>
           <a:xfrm>
             <a:off x="4377600" y="2217600"/>
-            <a:ext cx="3434760" cy="280800"/>
+            <a:ext cx="3432960" cy="279000"/>
           </a:xfrm>
           <a:prstGeom prst="rect">
             <a:avLst/>
@@ -15632,7 +15667,7 @@
         <p:spPr>
           <a:xfrm>
             <a:off x="4390920" y="2606400"/>
-            <a:ext cx="3408480" cy="775800"/>
+            <a:ext cx="3406680" cy="774000"/>
           </a:xfrm>
           <a:prstGeom prst="rect">
             <a:avLst/>
@@ -15704,7 +15739,7 @@
         <p:spPr>
           <a:xfrm>
             <a:off x="8115120" y="1462320"/>
-            <a:ext cx="3708720" cy="2109600"/>
+            <a:ext cx="3706920" cy="2107800"/>
           </a:xfrm>
           <a:custGeom>
             <a:avLst/>
@@ -15760,7 +15795,7 @@
         <p:spPr>
           <a:xfrm>
             <a:off x="9756000" y="1652040"/>
-            <a:ext cx="422280" cy="422280"/>
+            <a:ext cx="420480" cy="420480"/>
           </a:xfrm>
           <a:custGeom>
             <a:avLst/>
@@ -15881,7 +15916,7 @@
         <p:spPr>
           <a:xfrm>
             <a:off x="8251920" y="2217600"/>
-            <a:ext cx="3434760" cy="280800"/>
+            <a:ext cx="3432960" cy="279000"/>
           </a:xfrm>
           <a:prstGeom prst="rect">
             <a:avLst/>
@@ -15933,7 +15968,7 @@
         <p:spPr>
           <a:xfrm>
             <a:off x="8265240" y="2606400"/>
-            <a:ext cx="3408480" cy="519480"/>
+            <a:ext cx="3406680" cy="517680"/>
           </a:xfrm>
           <a:prstGeom prst="rect">
             <a:avLst/>
@@ -16005,7 +16040,7 @@
         <p:spPr>
           <a:xfrm>
             <a:off x="366480" y="3739320"/>
-            <a:ext cx="5608440" cy="3099240"/>
+            <a:ext cx="5606640" cy="3097440"/>
           </a:xfrm>
           <a:custGeom>
             <a:avLst/>
@@ -16061,7 +16096,7 @@
         <p:spPr>
           <a:xfrm>
             <a:off x="503640" y="3929400"/>
-            <a:ext cx="5334480" cy="280800"/>
+            <a:ext cx="5332680" cy="279000"/>
           </a:xfrm>
           <a:prstGeom prst="rect">
             <a:avLst/>
@@ -16113,7 +16148,7 @@
         <p:spPr>
           <a:xfrm>
             <a:off x="556560" y="4353480"/>
-            <a:ext cx="5228280" cy="492840"/>
+            <a:ext cx="5226480" cy="491040"/>
           </a:xfrm>
           <a:custGeom>
             <a:avLst/>
@@ -16166,7 +16201,7 @@
         <p:spPr>
           <a:xfrm>
             <a:off x="662760" y="4476960"/>
-            <a:ext cx="1623960" cy="245520"/>
+            <a:ext cx="1622160" cy="243720"/>
           </a:xfrm>
           <a:prstGeom prst="rect">
             <a:avLst/>
@@ -16218,7 +16253,7 @@
         <p:spPr>
           <a:xfrm>
             <a:off x="5293800" y="4459320"/>
-            <a:ext cx="492840" cy="280800"/>
+            <a:ext cx="491040" cy="279000"/>
           </a:xfrm>
           <a:prstGeom prst="rect">
             <a:avLst/>
@@ -16270,7 +16305,7 @@
         <p:spPr>
           <a:xfrm>
             <a:off x="556560" y="4953960"/>
-            <a:ext cx="5228280" cy="492840"/>
+            <a:ext cx="5226480" cy="491040"/>
           </a:xfrm>
           <a:custGeom>
             <a:avLst/>
@@ -16323,7 +16358,7 @@
         <p:spPr>
           <a:xfrm>
             <a:off x="662760" y="5077800"/>
-            <a:ext cx="1623960" cy="245520"/>
+            <a:ext cx="1622160" cy="243720"/>
           </a:xfrm>
           <a:prstGeom prst="rect">
             <a:avLst/>
@@ -16375,7 +16410,7 @@
         <p:spPr>
           <a:xfrm>
             <a:off x="5136840" y="5060160"/>
-            <a:ext cx="642960" cy="280800"/>
+            <a:ext cx="641160" cy="279000"/>
           </a:xfrm>
           <a:prstGeom prst="rect">
             <a:avLst/>
@@ -16427,7 +16462,7 @@
         <p:spPr>
           <a:xfrm>
             <a:off x="556560" y="5554800"/>
-            <a:ext cx="5228280" cy="492840"/>
+            <a:ext cx="5226480" cy="491040"/>
           </a:xfrm>
           <a:custGeom>
             <a:avLst/>
@@ -16480,7 +16515,7 @@
         <p:spPr>
           <a:xfrm>
             <a:off x="662760" y="5678640"/>
-            <a:ext cx="1155600" cy="245520"/>
+            <a:ext cx="1153800" cy="243720"/>
           </a:xfrm>
           <a:prstGeom prst="rect">
             <a:avLst/>
@@ -16532,7 +16567,7 @@
         <p:spPr>
           <a:xfrm>
             <a:off x="5199840" y="5661000"/>
-            <a:ext cx="581400" cy="280800"/>
+            <a:ext cx="579600" cy="279000"/>
           </a:xfrm>
           <a:prstGeom prst="rect">
             <a:avLst/>
@@ -16584,7 +16619,7 @@
         <p:spPr>
           <a:xfrm>
             <a:off x="556560" y="6155640"/>
-            <a:ext cx="5228280" cy="492840"/>
+            <a:ext cx="5226480" cy="491040"/>
           </a:xfrm>
           <a:custGeom>
             <a:avLst/>
@@ -16637,7 +16672,7 @@
         <p:spPr>
           <a:xfrm>
             <a:off x="662760" y="6279480"/>
-            <a:ext cx="1411920" cy="245520"/>
+            <a:ext cx="1410120" cy="243720"/>
           </a:xfrm>
           <a:prstGeom prst="rect">
             <a:avLst/>
@@ -16689,7 +16724,7 @@
         <p:spPr>
           <a:xfrm>
             <a:off x="4971960" y="6261480"/>
-            <a:ext cx="811080" cy="280800"/>
+            <a:ext cx="809280" cy="279000"/>
           </a:xfrm>
           <a:prstGeom prst="rect">
             <a:avLst/>
@@ -16741,7 +16776,7 @@
         <p:spPr>
           <a:xfrm>
             <a:off x="6213240" y="3739320"/>
-            <a:ext cx="5608440" cy="3099240"/>
+            <a:ext cx="5606640" cy="3097440"/>
           </a:xfrm>
           <a:custGeom>
             <a:avLst/>
@@ -16797,7 +16832,7 @@
         <p:spPr>
           <a:xfrm>
             <a:off x="6350040" y="3929400"/>
-            <a:ext cx="5334480" cy="280800"/>
+            <a:ext cx="5332680" cy="279000"/>
           </a:xfrm>
           <a:prstGeom prst="rect">
             <a:avLst/>
@@ -16849,7 +16884,7 @@
         <p:spPr>
           <a:xfrm>
             <a:off x="6403320" y="4353480"/>
-            <a:ext cx="5228280" cy="457560"/>
+            <a:ext cx="5226480" cy="455760"/>
           </a:xfrm>
           <a:custGeom>
             <a:avLst/>
@@ -16902,7 +16937,7 @@
         <p:spPr>
           <a:xfrm>
             <a:off x="6520320" y="4494600"/>
-            <a:ext cx="196920" cy="174960"/>
+            <a:ext cx="195120" cy="173160"/>
           </a:xfrm>
           <a:custGeom>
             <a:avLst/>
@@ -17021,7 +17056,7 @@
         <p:spPr>
           <a:xfrm>
             <a:off x="6836040" y="4459320"/>
-            <a:ext cx="2418840" cy="245520"/>
+            <a:ext cx="2417040" cy="243720"/>
           </a:xfrm>
           <a:prstGeom prst="rect">
             <a:avLst/>
@@ -17083,7 +17118,7 @@
         <p:spPr>
           <a:xfrm>
             <a:off x="6403320" y="4918680"/>
-            <a:ext cx="5228280" cy="457560"/>
+            <a:ext cx="5226480" cy="455760"/>
           </a:xfrm>
           <a:custGeom>
             <a:avLst/>
@@ -17136,7 +17171,7 @@
         <p:spPr>
           <a:xfrm>
             <a:off x="6520320" y="5060160"/>
-            <a:ext cx="196920" cy="174960"/>
+            <a:ext cx="195120" cy="173160"/>
           </a:xfrm>
           <a:custGeom>
             <a:avLst/>
@@ -17261,7 +17296,7 @@
         <p:spPr>
           <a:xfrm>
             <a:off x="6836040" y="5024880"/>
-            <a:ext cx="2056680" cy="245520"/>
+            <a:ext cx="2054880" cy="243720"/>
           </a:xfrm>
           <a:prstGeom prst="rect">
             <a:avLst/>
@@ -17323,7 +17358,7 @@
         <p:spPr>
           <a:xfrm>
             <a:off x="6403320" y="5484240"/>
-            <a:ext cx="5228280" cy="457560"/>
+            <a:ext cx="5226480" cy="455760"/>
           </a:xfrm>
           <a:custGeom>
             <a:avLst/>
@@ -17376,7 +17411,7 @@
         <p:spPr>
           <a:xfrm>
             <a:off x="6520320" y="5625720"/>
-            <a:ext cx="196920" cy="174960"/>
+            <a:ext cx="195120" cy="173160"/>
           </a:xfrm>
           <a:custGeom>
             <a:avLst/>
@@ -17573,7 +17608,7 @@
         <p:spPr>
           <a:xfrm>
             <a:off x="6836040" y="5590080"/>
-            <a:ext cx="2454120" cy="245520"/>
+            <a:ext cx="2452320" cy="243720"/>
           </a:xfrm>
           <a:prstGeom prst="rect">
             <a:avLst/>
@@ -17635,7 +17670,7 @@
         <p:spPr>
           <a:xfrm>
             <a:off x="6403320" y="6049440"/>
-            <a:ext cx="5228280" cy="457560"/>
+            <a:ext cx="5226480" cy="455760"/>
           </a:xfrm>
           <a:custGeom>
             <a:avLst/>
@@ -17688,7 +17723,7 @@
         <p:spPr>
           <a:xfrm>
             <a:off x="6542280" y="6190920"/>
-            <a:ext cx="152640" cy="174960"/>
+            <a:ext cx="150840" cy="173160"/>
           </a:xfrm>
           <a:custGeom>
             <a:avLst/>
@@ -17849,7 +17884,7 @@
         <p:spPr>
           <a:xfrm>
             <a:off x="6836040" y="6155640"/>
-            <a:ext cx="2295360" cy="245520"/>
+            <a:ext cx="2293560" cy="243720"/>
           </a:xfrm>
           <a:prstGeom prst="rect">
             <a:avLst/>
@@ -17943,7 +17978,7 @@
         <p:spPr>
           <a:xfrm>
             <a:off x="0" y="0"/>
-            <a:ext cx="12190320" cy="6856200"/>
+            <a:ext cx="12188520" cy="6854400"/>
           </a:xfrm>
           <a:custGeom>
             <a:avLst/>
@@ -18006,7 +18041,7 @@
         <p:spPr>
           <a:xfrm>
             <a:off x="354240" y="354240"/>
-            <a:ext cx="11693880" cy="423360"/>
+            <a:ext cx="11692080" cy="421560"/>
           </a:xfrm>
           <a:prstGeom prst="rect">
             <a:avLst/>
@@ -18058,7 +18093,7 @@
         <p:spPr>
           <a:xfrm>
             <a:off x="354240" y="885960"/>
-            <a:ext cx="11587680" cy="281880"/>
+            <a:ext cx="11585880" cy="280080"/>
           </a:xfrm>
           <a:prstGeom prst="rect">
             <a:avLst/>
@@ -18110,7 +18145,7 @@
         <p:spPr>
           <a:xfrm>
             <a:off x="354240" y="1275840"/>
-            <a:ext cx="848880" cy="33480"/>
+            <a:ext cx="847080" cy="31680"/>
           </a:xfrm>
           <a:custGeom>
             <a:avLst/>
@@ -18161,7 +18196,7 @@
         <p:spPr>
           <a:xfrm>
             <a:off x="367560" y="1466280"/>
-            <a:ext cx="5607000" cy="3179160"/>
+            <a:ext cx="5605200" cy="3177360"/>
           </a:xfrm>
           <a:custGeom>
             <a:avLst/>
@@ -18217,7 +18252,7 @@
         <p:spPr>
           <a:xfrm>
             <a:off x="618120" y="1657080"/>
-            <a:ext cx="277200" cy="317160"/>
+            <a:ext cx="275400" cy="315360"/>
           </a:xfrm>
           <a:custGeom>
             <a:avLst/>
@@ -18504,7 +18539,7 @@
         <p:spPr>
           <a:xfrm>
             <a:off x="1063080" y="1657080"/>
-            <a:ext cx="1212120" cy="317160"/>
+            <a:ext cx="1210320" cy="315360"/>
           </a:xfrm>
           <a:prstGeom prst="rect">
             <a:avLst/>
@@ -18556,7 +18591,7 @@
         <p:spPr>
           <a:xfrm>
             <a:off x="558360" y="2117520"/>
-            <a:ext cx="5225760" cy="707040"/>
+            <a:ext cx="5223960" cy="705240"/>
           </a:xfrm>
           <a:custGeom>
             <a:avLst/>
@@ -18609,7 +18644,7 @@
         <p:spPr>
           <a:xfrm>
             <a:off x="664560" y="2224080"/>
-            <a:ext cx="5092920" cy="246240"/>
+            <a:ext cx="5091120" cy="244440"/>
           </a:xfrm>
           <a:prstGeom prst="rect">
             <a:avLst/>
@@ -18661,7 +18696,7 @@
         <p:spPr>
           <a:xfrm>
             <a:off x="664560" y="2507400"/>
-            <a:ext cx="5084280" cy="210960"/>
+            <a:ext cx="5082480" cy="209160"/>
           </a:xfrm>
           <a:prstGeom prst="rect">
             <a:avLst/>
@@ -18715,7 +18750,7 @@
         <p:spPr>
           <a:xfrm>
             <a:off x="558360" y="2932920"/>
-            <a:ext cx="5225760" cy="707040"/>
+            <a:ext cx="5223960" cy="705240"/>
           </a:xfrm>
           <a:custGeom>
             <a:avLst/>
@@ -18768,7 +18803,7 @@
         <p:spPr>
           <a:xfrm>
             <a:off x="664560" y="3039120"/>
-            <a:ext cx="5092920" cy="246240"/>
+            <a:ext cx="5091120" cy="244440"/>
           </a:xfrm>
           <a:prstGeom prst="rect">
             <a:avLst/>
@@ -18820,7 +18855,7 @@
         <p:spPr>
           <a:xfrm>
             <a:off x="664560" y="3322800"/>
-            <a:ext cx="5084280" cy="210960"/>
+            <a:ext cx="5082480" cy="209160"/>
           </a:xfrm>
           <a:prstGeom prst="rect">
             <a:avLst/>
@@ -18874,7 +18909,7 @@
         <p:spPr>
           <a:xfrm>
             <a:off x="558360" y="3747960"/>
-            <a:ext cx="5225760" cy="707040"/>
+            <a:ext cx="5223960" cy="705240"/>
           </a:xfrm>
           <a:custGeom>
             <a:avLst/>
@@ -18927,7 +18962,7 @@
         <p:spPr>
           <a:xfrm>
             <a:off x="664560" y="3854160"/>
-            <a:ext cx="5092920" cy="246240"/>
+            <a:ext cx="5091120" cy="244440"/>
           </a:xfrm>
           <a:prstGeom prst="rect">
             <a:avLst/>
@@ -18979,7 +19014,7 @@
         <p:spPr>
           <a:xfrm>
             <a:off x="664560" y="4137840"/>
-            <a:ext cx="5084280" cy="210960"/>
+            <a:ext cx="5082480" cy="209160"/>
           </a:xfrm>
           <a:prstGeom prst="rect">
             <a:avLst/>
@@ -19033,7 +19068,7 @@
         <p:spPr>
           <a:xfrm>
             <a:off x="6215760" y="1466280"/>
-            <a:ext cx="5607000" cy="1291680"/>
+            <a:ext cx="5605200" cy="1289880"/>
           </a:xfrm>
           <a:custGeom>
             <a:avLst/>
@@ -19089,7 +19124,7 @@
         <p:spPr>
           <a:xfrm>
             <a:off x="6441480" y="1665720"/>
-            <a:ext cx="263880" cy="263880"/>
+            <a:ext cx="262080" cy="262080"/>
           </a:xfrm>
           <a:custGeom>
             <a:avLst/>
@@ -19201,7 +19236,7 @@
         <p:spPr>
           <a:xfrm>
             <a:off x="6844680" y="1657080"/>
-            <a:ext cx="981720" cy="281880"/>
+            <a:ext cx="979920" cy="280080"/>
           </a:xfrm>
           <a:prstGeom prst="rect">
             <a:avLst/>
@@ -19253,7 +19288,7 @@
         <p:spPr>
           <a:xfrm>
             <a:off x="6406200" y="2046600"/>
-            <a:ext cx="5305680" cy="520920"/>
+            <a:ext cx="5303880" cy="519120"/>
           </a:xfrm>
           <a:prstGeom prst="rect">
             <a:avLst/>
@@ -19345,7 +19380,7 @@
         <p:spPr>
           <a:xfrm>
             <a:off x="6215760" y="2923920"/>
-            <a:ext cx="5607000" cy="1291680"/>
+            <a:ext cx="5605200" cy="1289880"/>
           </a:xfrm>
           <a:custGeom>
             <a:avLst/>
@@ -19401,7 +19436,7 @@
         <p:spPr>
           <a:xfrm>
             <a:off x="6408360" y="3123360"/>
-            <a:ext cx="330480" cy="263880"/>
+            <a:ext cx="328680" cy="262080"/>
           </a:xfrm>
           <a:custGeom>
             <a:avLst/>
@@ -19523,7 +19558,7 @@
         <p:spPr>
           <a:xfrm>
             <a:off x="6844680" y="3114360"/>
-            <a:ext cx="707040" cy="281880"/>
+            <a:ext cx="705240" cy="280080"/>
           </a:xfrm>
           <a:prstGeom prst="rect">
             <a:avLst/>
@@ -19575,7 +19610,7 @@
         <p:spPr>
           <a:xfrm>
             <a:off x="6406200" y="3504240"/>
-            <a:ext cx="5305680" cy="520920"/>
+            <a:ext cx="5303880" cy="519120"/>
           </a:xfrm>
           <a:prstGeom prst="rect">
             <a:avLst/>
@@ -19647,7 +19682,7 @@
         <p:spPr>
           <a:xfrm>
             <a:off x="367560" y="4815720"/>
-            <a:ext cx="2736000" cy="1265400"/>
+            <a:ext cx="2734200" cy="1263600"/>
           </a:xfrm>
           <a:custGeom>
             <a:avLst/>
@@ -19703,7 +19738,7 @@
         <p:spPr>
           <a:xfrm>
             <a:off x="1577160" y="4970880"/>
-            <a:ext cx="317160" cy="317160"/>
+            <a:ext cx="315360" cy="315360"/>
           </a:xfrm>
           <a:custGeom>
             <a:avLst/>
@@ -19946,7 +19981,7 @@
         <p:spPr>
           <a:xfrm>
             <a:off x="478440" y="5396040"/>
-            <a:ext cx="2514600" cy="246240"/>
+            <a:ext cx="2512800" cy="244440"/>
           </a:xfrm>
           <a:prstGeom prst="rect">
             <a:avLst/>
@@ -19998,7 +20033,7 @@
         <p:spPr>
           <a:xfrm>
             <a:off x="487440" y="5715000"/>
-            <a:ext cx="2496960" cy="210960"/>
+            <a:ext cx="2495160" cy="209160"/>
           </a:xfrm>
           <a:prstGeom prst="rect">
             <a:avLst/>
@@ -20050,7 +20085,7 @@
         <p:spPr>
           <a:xfrm>
             <a:off x="3273840" y="4815720"/>
-            <a:ext cx="2736000" cy="1265400"/>
+            <a:ext cx="2734200" cy="1263600"/>
           </a:xfrm>
           <a:custGeom>
             <a:avLst/>
@@ -20106,7 +20141,7 @@
         <p:spPr>
           <a:xfrm>
             <a:off x="4503240" y="4970880"/>
-            <a:ext cx="277200" cy="317160"/>
+            <a:ext cx="275400" cy="315360"/>
           </a:xfrm>
           <a:custGeom>
             <a:avLst/>
@@ -20276,7 +20311,7 @@
         <p:spPr>
           <a:xfrm>
             <a:off x="3384720" y="5396040"/>
-            <a:ext cx="2514600" cy="246240"/>
+            <a:ext cx="2512800" cy="244440"/>
           </a:xfrm>
           <a:prstGeom prst="rect">
             <a:avLst/>
@@ -20328,7 +20363,7 @@
         <p:spPr>
           <a:xfrm>
             <a:off x="3393720" y="5715000"/>
-            <a:ext cx="2496960" cy="210960"/>
+            <a:ext cx="2495160" cy="209160"/>
           </a:xfrm>
           <a:prstGeom prst="rect">
             <a:avLst/>
@@ -20380,7 +20415,7 @@
         <p:spPr>
           <a:xfrm>
             <a:off x="6180120" y="4815720"/>
-            <a:ext cx="2736000" cy="1265400"/>
+            <a:ext cx="2734200" cy="1263600"/>
           </a:xfrm>
           <a:custGeom>
             <a:avLst/>
@@ -20436,7 +20471,7 @@
         <p:spPr>
           <a:xfrm>
             <a:off x="7389720" y="4970880"/>
-            <a:ext cx="317160" cy="317160"/>
+            <a:ext cx="315360" cy="315360"/>
           </a:xfrm>
           <a:custGeom>
             <a:avLst/>
@@ -20640,7 +20675,7 @@
         <p:spPr>
           <a:xfrm>
             <a:off x="6291000" y="5396040"/>
-            <a:ext cx="2514600" cy="246240"/>
+            <a:ext cx="2512800" cy="244440"/>
           </a:xfrm>
           <a:prstGeom prst="rect">
             <a:avLst/>
@@ -20692,7 +20727,7 @@
         <p:spPr>
           <a:xfrm>
             <a:off x="6299640" y="5715000"/>
-            <a:ext cx="2496960" cy="210960"/>
+            <a:ext cx="2495160" cy="209160"/>
           </a:xfrm>
           <a:prstGeom prst="rect">
             <a:avLst/>
@@ -20744,7 +20779,7 @@
         <p:spPr>
           <a:xfrm>
             <a:off x="9086400" y="4815720"/>
-            <a:ext cx="2736000" cy="1265400"/>
+            <a:ext cx="2734200" cy="1263600"/>
           </a:xfrm>
           <a:custGeom>
             <a:avLst/>
@@ -20800,7 +20835,7 @@
         <p:spPr>
           <a:xfrm>
             <a:off x="10296000" y="4970880"/>
-            <a:ext cx="317160" cy="317160"/>
+            <a:ext cx="315360" cy="315360"/>
           </a:xfrm>
           <a:custGeom>
             <a:avLst/>
@@ -21023,7 +21058,7 @@
         <p:spPr>
           <a:xfrm>
             <a:off x="9197280" y="5396040"/>
-            <a:ext cx="2514600" cy="246240"/>
+            <a:ext cx="2512800" cy="244440"/>
           </a:xfrm>
           <a:prstGeom prst="rect">
             <a:avLst/>
@@ -21075,7 +21110,7 @@
         <p:spPr>
           <a:xfrm>
             <a:off x="9205920" y="5715000"/>
-            <a:ext cx="2496960" cy="210960"/>
+            <a:ext cx="2495160" cy="209160"/>
           </a:xfrm>
           <a:prstGeom prst="rect">
             <a:avLst/>
@@ -21127,7 +21162,7 @@
         <p:spPr>
           <a:xfrm>
             <a:off x="367560" y="6251040"/>
-            <a:ext cx="11454840" cy="591840"/>
+            <a:ext cx="11453040" cy="590040"/>
           </a:xfrm>
           <a:custGeom>
             <a:avLst/>
@@ -21183,7 +21218,7 @@
         <p:spPr>
           <a:xfrm>
             <a:off x="469440" y="6406200"/>
-            <a:ext cx="11251080" cy="281880"/>
+            <a:ext cx="11249280" cy="280080"/>
           </a:xfrm>
           <a:prstGeom prst="rect">
             <a:avLst/>
@@ -21297,7 +21332,7 @@
         <p:spPr>
           <a:xfrm>
             <a:off x="0" y="0"/>
-            <a:ext cx="12190320" cy="6856200"/>
+            <a:ext cx="12188520" cy="6854400"/>
           </a:xfrm>
           <a:prstGeom prst="roundRect">
             <a:avLst>
@@ -21329,7 +21364,7 @@
         <p:spPr>
           <a:xfrm>
             <a:off x="0" y="0"/>
-            <a:ext cx="12190320" cy="6856200"/>
+            <a:ext cx="12188520" cy="6854400"/>
           </a:xfrm>
           <a:custGeom>
             <a:avLst/>
@@ -21392,7 +21427,7 @@
         <p:spPr>
           <a:xfrm>
             <a:off x="380880" y="1714680"/>
-            <a:ext cx="1855440" cy="607680"/>
+            <a:ext cx="1853640" cy="605880"/>
           </a:xfrm>
           <a:custGeom>
             <a:avLst/>
@@ -21443,7 +21478,7 @@
         <p:spPr>
           <a:xfrm>
             <a:off x="609480" y="1847880"/>
-            <a:ext cx="1566720" cy="341280"/>
+            <a:ext cx="1564920" cy="339480"/>
           </a:xfrm>
           <a:prstGeom prst="rect">
             <a:avLst/>
@@ -21495,7 +21530,7 @@
         <p:spPr>
           <a:xfrm>
             <a:off x="380880" y="2552760"/>
-            <a:ext cx="11771280" cy="1712880"/>
+            <a:ext cx="11769480" cy="1711080"/>
           </a:xfrm>
           <a:prstGeom prst="rect">
             <a:avLst/>
@@ -21568,7 +21603,7 @@
         <p:spPr>
           <a:xfrm>
             <a:off x="380880" y="4495680"/>
-            <a:ext cx="1522080" cy="74520"/>
+            <a:ext cx="1520280" cy="72720"/>
           </a:xfrm>
           <a:custGeom>
             <a:avLst/>
@@ -21619,7 +21654,7 @@
         <p:spPr>
           <a:xfrm>
             <a:off x="380880" y="4800600"/>
-            <a:ext cx="7456320" cy="341280"/>
+            <a:ext cx="7454520" cy="339480"/>
           </a:xfrm>
           <a:prstGeom prst="rect">
             <a:avLst/>
@@ -21671,7 +21706,7 @@
         <p:spPr>
           <a:xfrm>
             <a:off x="10591920" y="5867280"/>
-            <a:ext cx="150480" cy="150480"/>
+            <a:ext cx="148680" cy="148680"/>
           </a:xfrm>
           <a:custGeom>
             <a:avLst/>
@@ -21722,7 +21757,7 @@
         <p:spPr>
           <a:xfrm>
             <a:off x="10896480" y="5867280"/>
-            <a:ext cx="150480" cy="150480"/>
+            <a:ext cx="148680" cy="148680"/>
           </a:xfrm>
           <a:custGeom>
             <a:avLst/>
@@ -21773,7 +21808,7 @@
         <p:spPr>
           <a:xfrm>
             <a:off x="11201400" y="5867280"/>
-            <a:ext cx="150480" cy="150480"/>
+            <a:ext cx="148680" cy="148680"/>
           </a:xfrm>
           <a:custGeom>
             <a:avLst/>
@@ -21856,7 +21891,7 @@
         <p:spPr>
           <a:xfrm>
             <a:off x="0" y="0"/>
-            <a:ext cx="12190320" cy="6855120"/>
+            <a:ext cx="12188520" cy="6853320"/>
           </a:xfrm>
           <a:custGeom>
             <a:avLst/>
@@ -21919,7 +21954,7 @@
         <p:spPr>
           <a:xfrm>
             <a:off x="327240" y="327240"/>
-            <a:ext cx="11732040" cy="390960"/>
+            <a:ext cx="11730240" cy="389160"/>
           </a:xfrm>
           <a:prstGeom prst="rect">
             <a:avLst/>
@@ -21971,7 +22006,7 @@
         <p:spPr>
           <a:xfrm>
             <a:off x="327240" y="818280"/>
-            <a:ext cx="11633760" cy="259920"/>
+            <a:ext cx="11631960" cy="258120"/>
           </a:xfrm>
           <a:prstGeom prst="rect">
             <a:avLst/>
@@ -22023,7 +22058,7 @@
         <p:spPr>
           <a:xfrm>
             <a:off x="327240" y="1178280"/>
-            <a:ext cx="783720" cy="30960"/>
+            <a:ext cx="781920" cy="29160"/>
           </a:xfrm>
           <a:custGeom>
             <a:avLst/>
@@ -22074,7 +22109,7 @@
         <p:spPr>
           <a:xfrm>
             <a:off x="339480" y="1354320"/>
-            <a:ext cx="5644080" cy="3492000"/>
+            <a:ext cx="5642280" cy="3490200"/>
           </a:xfrm>
           <a:custGeom>
             <a:avLst/>
@@ -22130,7 +22165,7 @@
         <p:spPr>
           <a:xfrm>
             <a:off x="453960" y="1530000"/>
-            <a:ext cx="5415120" cy="292680"/>
+            <a:ext cx="5413320" cy="290880"/>
           </a:xfrm>
           <a:prstGeom prst="rect">
             <a:avLst/>
@@ -22182,7 +22217,7 @@
         <p:spPr>
           <a:xfrm>
             <a:off x="515520" y="1955520"/>
-            <a:ext cx="5292360" cy="619920"/>
+            <a:ext cx="5290560" cy="618120"/>
           </a:xfrm>
           <a:custGeom>
             <a:avLst/>
@@ -22235,7 +22270,7 @@
         <p:spPr>
           <a:xfrm>
             <a:off x="634320" y="2086560"/>
-            <a:ext cx="162000" cy="162000"/>
+            <a:ext cx="160200" cy="160200"/>
           </a:xfrm>
           <a:custGeom>
             <a:avLst/>
@@ -22377,7 +22412,7 @@
         <p:spPr>
           <a:xfrm>
             <a:off x="916560" y="2053800"/>
-            <a:ext cx="2403720" cy="227160"/>
+            <a:ext cx="2401920" cy="225360"/>
           </a:xfrm>
           <a:prstGeom prst="rect">
             <a:avLst/>
@@ -22429,7 +22464,7 @@
         <p:spPr>
           <a:xfrm>
             <a:off x="916560" y="2282760"/>
-            <a:ext cx="2395800" cy="194760"/>
+            <a:ext cx="2394000" cy="192960"/>
           </a:xfrm>
           <a:prstGeom prst="rect">
             <a:avLst/>
@@ -22483,7 +22518,7 @@
         <p:spPr>
           <a:xfrm>
             <a:off x="515520" y="2675520"/>
-            <a:ext cx="5292360" cy="619920"/>
+            <a:ext cx="5290560" cy="618120"/>
           </a:xfrm>
           <a:custGeom>
             <a:avLst/>
@@ -22536,7 +22571,7 @@
         <p:spPr>
           <a:xfrm>
             <a:off x="634320" y="2806560"/>
-            <a:ext cx="162000" cy="162000"/>
+            <a:ext cx="160200" cy="160200"/>
           </a:xfrm>
           <a:custGeom>
             <a:avLst/>
@@ -22663,7 +22698,7 @@
         <p:spPr>
           <a:xfrm>
             <a:off x="916560" y="2773800"/>
-            <a:ext cx="2043720" cy="227160"/>
+            <a:ext cx="2041920" cy="225360"/>
           </a:xfrm>
           <a:prstGeom prst="rect">
             <a:avLst/>
@@ -22715,7 +22750,7 @@
         <p:spPr>
           <a:xfrm>
             <a:off x="916560" y="3003120"/>
-            <a:ext cx="2035800" cy="194760"/>
+            <a:ext cx="2034000" cy="192960"/>
           </a:xfrm>
           <a:prstGeom prst="rect">
             <a:avLst/>
@@ -22769,7 +22804,7 @@
         <p:spPr>
           <a:xfrm>
             <a:off x="515520" y="3395880"/>
-            <a:ext cx="5292360" cy="619920"/>
+            <a:ext cx="5290560" cy="618120"/>
           </a:xfrm>
           <a:custGeom>
             <a:avLst/>
@@ -22822,7 +22857,7 @@
         <p:spPr>
           <a:xfrm>
             <a:off x="634320" y="3526560"/>
-            <a:ext cx="162000" cy="162000"/>
+            <a:ext cx="160200" cy="160200"/>
           </a:xfrm>
           <a:custGeom>
             <a:avLst/>
@@ -22967,7 +23002,7 @@
         <p:spPr>
           <a:xfrm>
             <a:off x="916560" y="3493800"/>
-            <a:ext cx="1962000" cy="227160"/>
+            <a:ext cx="1960200" cy="225360"/>
           </a:xfrm>
           <a:prstGeom prst="rect">
             <a:avLst/>
@@ -23019,7 +23054,7 @@
         <p:spPr>
           <a:xfrm>
             <a:off x="916560" y="3723120"/>
-            <a:ext cx="1953720" cy="194760"/>
+            <a:ext cx="1951920" cy="192960"/>
           </a:xfrm>
           <a:prstGeom prst="rect">
             <a:avLst/>
@@ -23073,7 +23108,7 @@
         <p:spPr>
           <a:xfrm>
             <a:off x="6205680" y="1354320"/>
-            <a:ext cx="5644080" cy="3492000"/>
+            <a:ext cx="5642280" cy="3490200"/>
           </a:xfrm>
           <a:custGeom>
             <a:avLst/>
@@ -23129,7 +23164,7 @@
         <p:spPr>
           <a:xfrm>
             <a:off x="6320160" y="1530000"/>
-            <a:ext cx="5415120" cy="292680"/>
+            <a:ext cx="5413320" cy="290880"/>
           </a:xfrm>
           <a:prstGeom prst="rect">
             <a:avLst/>
@@ -23181,7 +23216,7 @@
         <p:spPr>
           <a:xfrm>
             <a:off x="6381360" y="1955520"/>
-            <a:ext cx="5292360" cy="1143720"/>
+            <a:ext cx="5290560" cy="1141920"/>
           </a:xfrm>
           <a:custGeom>
             <a:avLst/>
@@ -23234,7 +23269,7 @@
         <p:spPr>
           <a:xfrm>
             <a:off x="6414120" y="2086560"/>
-            <a:ext cx="5226840" cy="390960"/>
+            <a:ext cx="5225040" cy="389160"/>
           </a:xfrm>
           <a:prstGeom prst="rect">
             <a:avLst/>
@@ -23286,7 +23321,7 @@
         <p:spPr>
           <a:xfrm>
             <a:off x="6475680" y="2544840"/>
-            <a:ext cx="5104080" cy="227160"/>
+            <a:ext cx="5102280" cy="225360"/>
           </a:xfrm>
           <a:prstGeom prst="rect">
             <a:avLst/>
@@ -23338,7 +23373,7 @@
         <p:spPr>
           <a:xfrm>
             <a:off x="6479640" y="2773800"/>
-            <a:ext cx="5095800" cy="194760"/>
+            <a:ext cx="5094000" cy="192960"/>
           </a:xfrm>
           <a:prstGeom prst="rect">
             <a:avLst/>
@@ -23392,7 +23427,7 @@
         <p:spPr>
           <a:xfrm>
             <a:off x="6381360" y="3232080"/>
-            <a:ext cx="5292360" cy="652680"/>
+            <a:ext cx="5290560" cy="650880"/>
           </a:xfrm>
           <a:custGeom>
             <a:avLst/>
@@ -23445,7 +23480,7 @@
         <p:spPr>
           <a:xfrm>
             <a:off x="6479640" y="3330360"/>
-            <a:ext cx="5169600" cy="227160"/>
+            <a:ext cx="5167800" cy="225360"/>
           </a:xfrm>
           <a:prstGeom prst="rect">
             <a:avLst/>
@@ -23497,7 +23532,7 @@
         <p:spPr>
           <a:xfrm>
             <a:off x="6479640" y="3592080"/>
-            <a:ext cx="5161320" cy="194760"/>
+            <a:ext cx="5159520" cy="192960"/>
           </a:xfrm>
           <a:prstGeom prst="rect">
             <a:avLst/>
@@ -23563,7 +23598,7 @@
         <p:spPr>
           <a:xfrm>
             <a:off x="6381360" y="4017600"/>
-            <a:ext cx="5292360" cy="652680"/>
+            <a:ext cx="5290560" cy="650880"/>
           </a:xfrm>
           <a:custGeom>
             <a:avLst/>
@@ -23616,7 +23651,7 @@
         <p:spPr>
           <a:xfrm>
             <a:off x="6479640" y="4115880"/>
-            <a:ext cx="5169600" cy="227160"/>
+            <a:ext cx="5167800" cy="225360"/>
           </a:xfrm>
           <a:prstGeom prst="rect">
             <a:avLst/>
@@ -23668,7 +23703,7 @@
         <p:spPr>
           <a:xfrm>
             <a:off x="6479640" y="4377600"/>
-            <a:ext cx="5161320" cy="194760"/>
+            <a:ext cx="5159520" cy="192960"/>
           </a:xfrm>
           <a:prstGeom prst="rect">
             <a:avLst/>
@@ -23734,7 +23769,7 @@
         <p:spPr>
           <a:xfrm>
             <a:off x="339480" y="5003640"/>
-            <a:ext cx="3729600" cy="1168200"/>
+            <a:ext cx="3727800" cy="1166400"/>
           </a:xfrm>
           <a:custGeom>
             <a:avLst/>
@@ -23790,7 +23825,7 @@
         <p:spPr>
           <a:xfrm>
             <a:off x="2095920" y="5146920"/>
-            <a:ext cx="219240" cy="292680"/>
+            <a:ext cx="217440" cy="290880"/>
           </a:xfrm>
           <a:custGeom>
             <a:avLst/>
@@ -24031,7 +24066,7 @@
         <p:spPr>
           <a:xfrm>
             <a:off x="441720" y="5539680"/>
-            <a:ext cx="3524760" cy="227160"/>
+            <a:ext cx="3522960" cy="225360"/>
           </a:xfrm>
           <a:prstGeom prst="rect">
             <a:avLst/>
@@ -24083,7 +24118,7 @@
         <p:spPr>
           <a:xfrm>
             <a:off x="450000" y="5834160"/>
-            <a:ext cx="3508560" cy="194760"/>
+            <a:ext cx="3506760" cy="192960"/>
           </a:xfrm>
           <a:prstGeom prst="rect">
             <a:avLst/>
@@ -24135,7 +24170,7 @@
         <p:spPr>
           <a:xfrm>
             <a:off x="4228560" y="5003640"/>
-            <a:ext cx="3729600" cy="1168200"/>
+            <a:ext cx="3727800" cy="1166400"/>
           </a:xfrm>
           <a:custGeom>
             <a:avLst/>
@@ -24191,7 +24226,7 @@
         <p:spPr>
           <a:xfrm>
             <a:off x="5929200" y="5146920"/>
-            <a:ext cx="329760" cy="292680"/>
+            <a:ext cx="327960" cy="290880"/>
           </a:xfrm>
           <a:custGeom>
             <a:avLst/>
@@ -24294,7 +24329,7 @@
         <p:spPr>
           <a:xfrm>
             <a:off x="4330800" y="5539680"/>
-            <a:ext cx="3524760" cy="227160"/>
+            <a:ext cx="3522960" cy="225360"/>
           </a:xfrm>
           <a:prstGeom prst="rect">
             <a:avLst/>
@@ -24346,7 +24381,7 @@
         <p:spPr>
           <a:xfrm>
             <a:off x="4338720" y="5834160"/>
-            <a:ext cx="3508560" cy="194760"/>
+            <a:ext cx="3506760" cy="192960"/>
           </a:xfrm>
           <a:prstGeom prst="rect">
             <a:avLst/>
@@ -24398,7 +24433,7 @@
         <p:spPr>
           <a:xfrm>
             <a:off x="8117280" y="5003640"/>
-            <a:ext cx="3729600" cy="1168200"/>
+            <a:ext cx="3727800" cy="1166400"/>
           </a:xfrm>
           <a:custGeom>
             <a:avLst/>
@@ -24454,7 +24489,7 @@
         <p:spPr>
           <a:xfrm>
             <a:off x="9818280" y="5146920"/>
-            <a:ext cx="329760" cy="292680"/>
+            <a:ext cx="327960" cy="290880"/>
           </a:xfrm>
           <a:custGeom>
             <a:avLst/>
@@ -24644,7 +24679,7 @@
         <p:spPr>
           <a:xfrm>
             <a:off x="8219520" y="5539680"/>
-            <a:ext cx="3524760" cy="227160"/>
+            <a:ext cx="3522960" cy="225360"/>
           </a:xfrm>
           <a:prstGeom prst="rect">
             <a:avLst/>
@@ -24696,7 +24731,7 @@
         <p:spPr>
           <a:xfrm>
             <a:off x="8227800" y="5834160"/>
-            <a:ext cx="3508560" cy="194760"/>
+            <a:ext cx="3506760" cy="192960"/>
           </a:xfrm>
           <a:prstGeom prst="rect">
             <a:avLst/>
@@ -24748,7 +24783,7 @@
         <p:spPr>
           <a:xfrm>
             <a:off x="339480" y="6329160"/>
-            <a:ext cx="11511000" cy="513720"/>
+            <a:ext cx="11509200" cy="511920"/>
           </a:xfrm>
           <a:custGeom>
             <a:avLst/>
@@ -24804,7 +24839,7 @@
         <p:spPr>
           <a:xfrm>
             <a:off x="441720" y="6472440"/>
-            <a:ext cx="11306520" cy="227160"/>
+            <a:ext cx="11304720" cy="225360"/>
           </a:xfrm>
           <a:prstGeom prst="rect">
             <a:avLst/>
@@ -24908,7 +24943,7 @@
         <p:spPr>
           <a:xfrm>
             <a:off x="0" y="0"/>
-            <a:ext cx="12190320" cy="6858360"/>
+            <a:ext cx="12188520" cy="6856560"/>
           </a:xfrm>
           <a:custGeom>
             <a:avLst/>
@@ -24971,7 +25006,7 @@
         <p:spPr>
           <a:xfrm>
             <a:off x="372960" y="372960"/>
-            <a:ext cx="11668320" cy="445680"/>
+            <a:ext cx="11666520" cy="443880"/>
           </a:xfrm>
           <a:prstGeom prst="rect">
             <a:avLst/>
@@ -25023,7 +25058,7 @@
         <p:spPr>
           <a:xfrm>
             <a:off x="372960" y="932040"/>
-            <a:ext cx="11556360" cy="296640"/>
+            <a:ext cx="11554560" cy="294840"/>
           </a:xfrm>
           <a:prstGeom prst="rect">
             <a:avLst/>
@@ -25075,7 +25110,7 @@
         <p:spPr>
           <a:xfrm>
             <a:off x="372960" y="1342080"/>
-            <a:ext cx="893160" cy="35640"/>
+            <a:ext cx="891360" cy="33840"/>
           </a:xfrm>
           <a:custGeom>
             <a:avLst/>
@@ -25126,7 +25161,7 @@
         <p:spPr>
           <a:xfrm>
             <a:off x="387000" y="1542600"/>
-            <a:ext cx="5581440" cy="2011680"/>
+            <a:ext cx="5579640" cy="2009880"/>
           </a:xfrm>
           <a:custGeom>
             <a:avLst/>
@@ -25182,7 +25217,7 @@
         <p:spPr>
           <a:xfrm>
             <a:off x="587160" y="1743120"/>
-            <a:ext cx="5292720" cy="296640"/>
+            <a:ext cx="5290920" cy="294840"/>
           </a:xfrm>
           <a:prstGeom prst="rect">
             <a:avLst/>
@@ -25234,7 +25269,7 @@
         <p:spPr>
           <a:xfrm>
             <a:off x="587160" y="2153160"/>
-            <a:ext cx="5264640" cy="548280"/>
+            <a:ext cx="5262840" cy="546480"/>
           </a:xfrm>
           <a:prstGeom prst="rect">
             <a:avLst/>
@@ -25326,7 +25361,7 @@
         <p:spPr>
           <a:xfrm>
             <a:off x="587160" y="2810160"/>
-            <a:ext cx="5264640" cy="548280"/>
+            <a:ext cx="5262840" cy="546480"/>
           </a:xfrm>
           <a:prstGeom prst="rect">
             <a:avLst/>
@@ -25398,7 +25433,7 @@
         <p:spPr>
           <a:xfrm>
             <a:off x="387000" y="3733200"/>
-            <a:ext cx="5581440" cy="1927800"/>
+            <a:ext cx="5579640" cy="1926000"/>
           </a:xfrm>
           <a:custGeom>
             <a:avLst/>
@@ -25454,7 +25489,7 @@
         <p:spPr>
           <a:xfrm>
             <a:off x="587160" y="3933360"/>
-            <a:ext cx="5292720" cy="296640"/>
+            <a:ext cx="5290920" cy="294840"/>
           </a:xfrm>
           <a:prstGeom prst="rect">
             <a:avLst/>
@@ -25506,7 +25541,7 @@
         <p:spPr>
           <a:xfrm>
             <a:off x="610560" y="4380840"/>
-            <a:ext cx="165960" cy="165960"/>
+            <a:ext cx="164160" cy="164160"/>
           </a:xfrm>
           <a:custGeom>
             <a:avLst/>
@@ -25611,7 +25646,7 @@
         <p:spPr>
           <a:xfrm>
             <a:off x="908640" y="4343760"/>
-            <a:ext cx="3148560" cy="221760"/>
+            <a:ext cx="3146760" cy="219960"/>
           </a:xfrm>
           <a:prstGeom prst="rect">
             <a:avLst/>
@@ -25673,7 +25708,7 @@
         <p:spPr>
           <a:xfrm>
             <a:off x="610560" y="4679280"/>
-            <a:ext cx="165960" cy="165960"/>
+            <a:ext cx="164160" cy="164160"/>
           </a:xfrm>
           <a:custGeom>
             <a:avLst/>
@@ -25778,7 +25813,7 @@
         <p:spPr>
           <a:xfrm>
             <a:off x="908640" y="4641840"/>
-            <a:ext cx="2775960" cy="221760"/>
+            <a:ext cx="2774160" cy="219960"/>
           </a:xfrm>
           <a:prstGeom prst="rect">
             <a:avLst/>
@@ -25840,7 +25875,7 @@
         <p:spPr>
           <a:xfrm>
             <a:off x="610560" y="4977360"/>
-            <a:ext cx="165960" cy="165960"/>
+            <a:ext cx="164160" cy="164160"/>
           </a:xfrm>
           <a:custGeom>
             <a:avLst/>
@@ -25945,7 +25980,7 @@
         <p:spPr>
           <a:xfrm>
             <a:off x="908640" y="4940280"/>
-            <a:ext cx="3186000" cy="221760"/>
+            <a:ext cx="3184200" cy="219960"/>
           </a:xfrm>
           <a:prstGeom prst="rect">
             <a:avLst/>
@@ -26007,7 +26042,7 @@
         <p:spPr>
           <a:xfrm>
             <a:off x="610560" y="5275800"/>
-            <a:ext cx="165960" cy="165960"/>
+            <a:ext cx="164160" cy="164160"/>
           </a:xfrm>
           <a:custGeom>
             <a:avLst/>
@@ -26112,7 +26147,7 @@
         <p:spPr>
           <a:xfrm>
             <a:off x="908640" y="5238360"/>
-            <a:ext cx="2980800" cy="221760"/>
+            <a:ext cx="2979000" cy="219960"/>
           </a:xfrm>
           <a:prstGeom prst="rect">
             <a:avLst/>
@@ -26174,7 +26209,7 @@
         <p:spPr>
           <a:xfrm>
             <a:off x="6224040" y="1542600"/>
-            <a:ext cx="5581440" cy="3940920"/>
+            <a:ext cx="5579640" cy="3939120"/>
           </a:xfrm>
           <a:custGeom>
             <a:avLst/>
@@ -26230,7 +26265,7 @@
         <p:spPr>
           <a:xfrm>
             <a:off x="6368400" y="1743120"/>
-            <a:ext cx="5292720" cy="296640"/>
+            <a:ext cx="5290920" cy="294840"/>
           </a:xfrm>
           <a:prstGeom prst="rect">
             <a:avLst/>
@@ -26282,7 +26317,7 @@
         <p:spPr>
           <a:xfrm>
             <a:off x="6424200" y="2190600"/>
-            <a:ext cx="5180760" cy="1079280"/>
+            <a:ext cx="5178960" cy="1077480"/>
           </a:xfrm>
           <a:custGeom>
             <a:avLst/>
@@ -26335,7 +26370,7 @@
         <p:spPr>
           <a:xfrm>
             <a:off x="6461640" y="2339640"/>
-            <a:ext cx="5106240" cy="445680"/>
+            <a:ext cx="5104440" cy="443880"/>
           </a:xfrm>
           <a:prstGeom prst="rect">
             <a:avLst/>
@@ -26387,7 +26422,7 @@
         <p:spPr>
           <a:xfrm>
             <a:off x="6531480" y="2861640"/>
-            <a:ext cx="4966200" cy="259200"/>
+            <a:ext cx="4964400" cy="257400"/>
           </a:xfrm>
           <a:prstGeom prst="rect">
             <a:avLst/>
@@ -26439,7 +26474,7 @@
         <p:spPr>
           <a:xfrm>
             <a:off x="6424200" y="3420720"/>
-            <a:ext cx="5180760" cy="855720"/>
+            <a:ext cx="5178960" cy="853920"/>
           </a:xfrm>
           <a:custGeom>
             <a:avLst/>
@@ -26492,7 +26527,7 @@
         <p:spPr>
           <a:xfrm>
             <a:off x="6573240" y="3570120"/>
-            <a:ext cx="4966200" cy="259200"/>
+            <a:ext cx="4964400" cy="257400"/>
           </a:xfrm>
           <a:prstGeom prst="rect">
             <a:avLst/>
@@ -26544,7 +26579,7 @@
         <p:spPr>
           <a:xfrm>
             <a:off x="6573240" y="3905640"/>
-            <a:ext cx="4957200" cy="221760"/>
+            <a:ext cx="4955400" cy="219960"/>
           </a:xfrm>
           <a:prstGeom prst="rect">
             <a:avLst/>
@@ -26598,7 +26633,7 @@
         <p:spPr>
           <a:xfrm>
             <a:off x="6424200" y="4427640"/>
-            <a:ext cx="5180760" cy="855720"/>
+            <a:ext cx="5178960" cy="853920"/>
           </a:xfrm>
           <a:custGeom>
             <a:avLst/>
@@ -26651,7 +26686,7 @@
         <p:spPr>
           <a:xfrm>
             <a:off x="6573240" y="4576680"/>
-            <a:ext cx="4966200" cy="259200"/>
+            <a:ext cx="4964400" cy="257400"/>
           </a:xfrm>
           <a:prstGeom prst="rect">
             <a:avLst/>
@@ -26703,7 +26738,7 @@
         <p:spPr>
           <a:xfrm>
             <a:off x="6573240" y="4912200"/>
-            <a:ext cx="4957200" cy="221760"/>
+            <a:ext cx="4955400" cy="219960"/>
           </a:xfrm>
           <a:prstGeom prst="rect">
             <a:avLst/>
@@ -26757,7 +26792,7 @@
         <p:spPr>
           <a:xfrm>
             <a:off x="6224040" y="5662440"/>
-            <a:ext cx="5581440" cy="1181880"/>
+            <a:ext cx="5579640" cy="1180080"/>
           </a:xfrm>
           <a:custGeom>
             <a:avLst/>
@@ -26813,7 +26848,7 @@
         <p:spPr>
           <a:xfrm>
             <a:off x="6340320" y="5825520"/>
-            <a:ext cx="5348520" cy="259200"/>
+            <a:ext cx="5346720" cy="257400"/>
           </a:xfrm>
           <a:prstGeom prst="rect">
             <a:avLst/>
@@ -26865,7 +26900,7 @@
         <p:spPr>
           <a:xfrm>
             <a:off x="6349680" y="6198480"/>
-            <a:ext cx="5329800" cy="482760"/>
+            <a:ext cx="5328000" cy="480960"/>
           </a:xfrm>
           <a:prstGeom prst="rect">
             <a:avLst/>
@@ -26989,7 +27024,7 @@
         <p:spPr>
           <a:xfrm>
             <a:off x="0" y="0"/>
-            <a:ext cx="12190320" cy="6856200"/>
+            <a:ext cx="12188520" cy="6854400"/>
           </a:xfrm>
           <a:custGeom>
             <a:avLst/>
@@ -27052,7 +27087,7 @@
         <p:spPr>
           <a:xfrm>
             <a:off x="380880" y="380880"/>
-            <a:ext cx="11714040" cy="569880"/>
+            <a:ext cx="11712240" cy="568080"/>
           </a:xfrm>
           <a:prstGeom prst="rect">
             <a:avLst/>
@@ -27104,7 +27139,7 @@
         <p:spPr>
           <a:xfrm>
             <a:off x="380880" y="1104840"/>
-            <a:ext cx="912600" cy="74520"/>
+            <a:ext cx="910800" cy="72720"/>
           </a:xfrm>
           <a:custGeom>
             <a:avLst/>
@@ -27155,7 +27190,7 @@
         <p:spPr>
           <a:xfrm>
             <a:off x="399960" y="1504800"/>
-            <a:ext cx="5446440" cy="1341360"/>
+            <a:ext cx="5444640" cy="1339560"/>
           </a:xfrm>
           <a:custGeom>
             <a:avLst/>
@@ -27211,7 +27246,7 @@
         <p:spPr>
           <a:xfrm>
             <a:off x="647640" y="1752480"/>
-            <a:ext cx="664920" cy="569880"/>
+            <a:ext cx="663120" cy="568080"/>
           </a:xfrm>
           <a:prstGeom prst="rect">
             <a:avLst/>
@@ -27263,7 +27298,7 @@
         <p:spPr>
           <a:xfrm>
             <a:off x="1257480" y="1752480"/>
-            <a:ext cx="4484520" cy="341280"/>
+            <a:ext cx="4482720" cy="339480"/>
           </a:xfrm>
           <a:prstGeom prst="rect">
             <a:avLst/>
@@ -27315,7 +27350,7 @@
         <p:spPr>
           <a:xfrm>
             <a:off x="1257480" y="2171880"/>
-            <a:ext cx="4437000" cy="264960"/>
+            <a:ext cx="4435200" cy="263160"/>
           </a:xfrm>
           <a:prstGeom prst="rect">
             <a:avLst/>
@@ -27369,7 +27404,7 @@
         <p:spPr>
           <a:xfrm>
             <a:off x="6343560" y="1504800"/>
-            <a:ext cx="5446440" cy="1341360"/>
+            <a:ext cx="5444640" cy="1339560"/>
           </a:xfrm>
           <a:custGeom>
             <a:avLst/>
@@ -27425,7 +27460,7 @@
         <p:spPr>
           <a:xfrm>
             <a:off x="6591240" y="1752480"/>
-            <a:ext cx="769680" cy="569880"/>
+            <a:ext cx="767880" cy="568080"/>
           </a:xfrm>
           <a:prstGeom prst="rect">
             <a:avLst/>
@@ -27477,7 +27512,7 @@
         <p:spPr>
           <a:xfrm>
             <a:off x="7306920" y="1752480"/>
-            <a:ext cx="4379760" cy="341280"/>
+            <a:ext cx="4377960" cy="339480"/>
           </a:xfrm>
           <a:prstGeom prst="rect">
             <a:avLst/>
@@ -27529,7 +27564,7 @@
         <p:spPr>
           <a:xfrm>
             <a:off x="7306920" y="2171880"/>
-            <a:ext cx="4332240" cy="264960"/>
+            <a:ext cx="4330440" cy="263160"/>
           </a:xfrm>
           <a:prstGeom prst="rect">
             <a:avLst/>
@@ -27583,7 +27618,7 @@
         <p:spPr>
           <a:xfrm>
             <a:off x="399960" y="3117960"/>
-            <a:ext cx="5446440" cy="1341360"/>
+            <a:ext cx="5444640" cy="1339560"/>
           </a:xfrm>
           <a:custGeom>
             <a:avLst/>
@@ -27639,7 +27674,7 @@
         <p:spPr>
           <a:xfrm>
             <a:off x="647640" y="3365280"/>
-            <a:ext cx="769680" cy="569880"/>
+            <a:ext cx="767880" cy="568080"/>
           </a:xfrm>
           <a:prstGeom prst="rect">
             <a:avLst/>
@@ -27691,7 +27726,7 @@
         <p:spPr>
           <a:xfrm>
             <a:off x="1363320" y="3365280"/>
-            <a:ext cx="4379760" cy="341280"/>
+            <a:ext cx="4377960" cy="339480"/>
           </a:xfrm>
           <a:prstGeom prst="rect">
             <a:avLst/>
@@ -27743,7 +27778,7 @@
         <p:spPr>
           <a:xfrm>
             <a:off x="1363320" y="3784680"/>
-            <a:ext cx="4332240" cy="264960"/>
+            <a:ext cx="4330440" cy="263160"/>
           </a:xfrm>
           <a:prstGeom prst="rect">
             <a:avLst/>
@@ -27797,7 +27832,7 @@
         <p:spPr>
           <a:xfrm>
             <a:off x="6343560" y="3117960"/>
-            <a:ext cx="5446440" cy="1341360"/>
+            <a:ext cx="5444640" cy="1339560"/>
           </a:xfrm>
           <a:custGeom>
             <a:avLst/>
@@ -27853,7 +27888,7 @@
         <p:spPr>
           <a:xfrm>
             <a:off x="6591240" y="3365280"/>
-            <a:ext cx="750600" cy="569880"/>
+            <a:ext cx="748800" cy="568080"/>
           </a:xfrm>
           <a:prstGeom prst="rect">
             <a:avLst/>
@@ -27905,7 +27940,7 @@
         <p:spPr>
           <a:xfrm>
             <a:off x="7285680" y="3365280"/>
-            <a:ext cx="4398840" cy="341280"/>
+            <a:ext cx="4397040" cy="339480"/>
           </a:xfrm>
           <a:prstGeom prst="rect">
             <a:avLst/>
@@ -27957,7 +27992,7 @@
         <p:spPr>
           <a:xfrm>
             <a:off x="7285680" y="3784680"/>
-            <a:ext cx="4350960" cy="264960"/>
+            <a:ext cx="4349160" cy="263160"/>
           </a:xfrm>
           <a:prstGeom prst="rect">
             <a:avLst/>
@@ -28011,7 +28046,7 @@
         <p:spPr>
           <a:xfrm>
             <a:off x="399960" y="4730760"/>
-            <a:ext cx="11390040" cy="1341360"/>
+            <a:ext cx="11388240" cy="1339560"/>
           </a:xfrm>
           <a:custGeom>
             <a:avLst/>
@@ -28067,7 +28102,7 @@
         <p:spPr>
           <a:xfrm>
             <a:off x="647640" y="4978440"/>
-            <a:ext cx="750600" cy="569880"/>
+            <a:ext cx="748800" cy="568080"/>
           </a:xfrm>
           <a:prstGeom prst="rect">
             <a:avLst/>
@@ -28119,7 +28154,7 @@
         <p:spPr>
           <a:xfrm>
             <a:off x="1342080" y="4978440"/>
-            <a:ext cx="10342440" cy="341280"/>
+            <a:ext cx="10340640" cy="339480"/>
           </a:xfrm>
           <a:prstGeom prst="rect">
             <a:avLst/>
@@ -28171,7 +28206,7 @@
         <p:spPr>
           <a:xfrm>
             <a:off x="1342080" y="5397480"/>
-            <a:ext cx="10294560" cy="264960"/>
+            <a:ext cx="10292760" cy="263160"/>
           </a:xfrm>
           <a:prstGeom prst="rect">
             <a:avLst/>
@@ -28225,7 +28260,7 @@
         <p:spPr>
           <a:xfrm>
             <a:off x="5715000" y="6324480"/>
-            <a:ext cx="150480" cy="150480"/>
+            <a:ext cx="148680" cy="148680"/>
           </a:xfrm>
           <a:custGeom>
             <a:avLst/>
@@ -28276,7 +28311,7 @@
         <p:spPr>
           <a:xfrm>
             <a:off x="6019920" y="6324480"/>
-            <a:ext cx="150480" cy="150480"/>
+            <a:ext cx="148680" cy="148680"/>
           </a:xfrm>
           <a:custGeom>
             <a:avLst/>
@@ -28327,7 +28362,7 @@
         <p:spPr>
           <a:xfrm>
             <a:off x="6324480" y="6324480"/>
-            <a:ext cx="150480" cy="150480"/>
+            <a:ext cx="148680" cy="148680"/>
           </a:xfrm>
           <a:custGeom>
             <a:avLst/>
@@ -28410,7 +28445,7 @@
         <p:spPr>
           <a:xfrm>
             <a:off x="0" y="0"/>
-            <a:ext cx="12190320" cy="6854400"/>
+            <a:ext cx="12188520" cy="6852600"/>
           </a:xfrm>
           <a:prstGeom prst="roundRect">
             <a:avLst>
@@ -28442,7 +28477,7 @@
         <p:spPr>
           <a:xfrm>
             <a:off x="0" y="0"/>
-            <a:ext cx="12190320" cy="6854400"/>
+            <a:ext cx="12188520" cy="6852600"/>
           </a:xfrm>
           <a:custGeom>
             <a:avLst/>
@@ -28505,7 +28540,7 @@
         <p:spPr>
           <a:xfrm>
             <a:off x="5608440" y="-186840"/>
-            <a:ext cx="969840" cy="646200"/>
+            <a:ext cx="968040" cy="644400"/>
           </a:xfrm>
           <a:prstGeom prst="rect">
             <a:avLst/>
@@ -28557,7 +28592,7 @@
         <p:spPr>
           <a:xfrm>
             <a:off x="4541400" y="821160"/>
-            <a:ext cx="3102480" cy="1617840"/>
+            <a:ext cx="3100680" cy="1616040"/>
           </a:xfrm>
           <a:prstGeom prst="rect">
             <a:avLst/>
@@ -28630,7 +28665,7 @@
         <p:spPr>
           <a:xfrm>
             <a:off x="5374800" y="2656440"/>
-            <a:ext cx="1437840" cy="360"/>
+            <a:ext cx="1436040" cy="360"/>
           </a:xfrm>
           <a:custGeom>
             <a:avLst/>
@@ -28681,7 +28716,7 @@
         <p:spPr>
           <a:xfrm>
             <a:off x="2201400" y="2944440"/>
-            <a:ext cx="7781400" cy="349200"/>
+            <a:ext cx="7779600" cy="347400"/>
           </a:xfrm>
           <a:prstGeom prst="rect">
             <a:avLst/>
@@ -28733,7 +28768,7 @@
         <p:spPr>
           <a:xfrm>
             <a:off x="2268720" y="3524760"/>
-            <a:ext cx="3741120" cy="942840"/>
+            <a:ext cx="3739320" cy="941040"/>
           </a:xfrm>
           <a:custGeom>
             <a:avLst/>
@@ -28789,7 +28824,7 @@
         <p:spPr>
           <a:xfrm>
             <a:off x="4006080" y="3682440"/>
-            <a:ext cx="268200" cy="268200"/>
+            <a:ext cx="266400" cy="266400"/>
           </a:xfrm>
           <a:custGeom>
             <a:avLst/>
@@ -28966,7 +29001,7 @@
         <p:spPr>
           <a:xfrm>
             <a:off x="2385720" y="4060080"/>
-            <a:ext cx="3507480" cy="250200"/>
+            <a:ext cx="3505680" cy="248400"/>
           </a:xfrm>
           <a:prstGeom prst="rect">
             <a:avLst/>
@@ -29018,7 +29053,7 @@
         <p:spPr>
           <a:xfrm>
             <a:off x="6179760" y="3524760"/>
-            <a:ext cx="3741120" cy="942840"/>
+            <a:ext cx="3739320" cy="941040"/>
           </a:xfrm>
           <a:custGeom>
             <a:avLst/>
@@ -29074,7 +29109,7 @@
         <p:spPr>
           <a:xfrm>
             <a:off x="7883640" y="3682440"/>
-            <a:ext cx="335520" cy="268200"/>
+            <a:ext cx="333720" cy="266400"/>
           </a:xfrm>
           <a:custGeom>
             <a:avLst/>
@@ -29290,7 +29325,7 @@
         <p:spPr>
           <a:xfrm>
             <a:off x="6296760" y="4060080"/>
-            <a:ext cx="3507480" cy="250200"/>
+            <a:ext cx="3505680" cy="248400"/>
           </a:xfrm>
           <a:prstGeom prst="rect">
             <a:avLst/>
@@ -29342,7 +29377,7 @@
         <p:spPr>
           <a:xfrm>
             <a:off x="2268720" y="4640760"/>
-            <a:ext cx="3741120" cy="942840"/>
+            <a:ext cx="3739320" cy="941040"/>
           </a:xfrm>
           <a:custGeom>
             <a:avLst/>
@@ -29398,7 +29433,7 @@
         <p:spPr>
           <a:xfrm>
             <a:off x="4039920" y="4798080"/>
-            <a:ext cx="200520" cy="268200"/>
+            <a:ext cx="198720" cy="266400"/>
           </a:xfrm>
           <a:custGeom>
             <a:avLst/>
@@ -29574,7 +29609,7 @@
         <p:spPr>
           <a:xfrm>
             <a:off x="2385720" y="5176080"/>
-            <a:ext cx="3507480" cy="250200"/>
+            <a:ext cx="3505680" cy="248400"/>
           </a:xfrm>
           <a:prstGeom prst="rect">
             <a:avLst/>
@@ -29626,7 +29661,7 @@
         <p:spPr>
           <a:xfrm>
             <a:off x="6179760" y="4640760"/>
-            <a:ext cx="3741120" cy="942840"/>
+            <a:ext cx="3739320" cy="941040"/>
           </a:xfrm>
           <a:custGeom>
             <a:avLst/>
@@ -29682,7 +29717,7 @@
         <p:spPr>
           <a:xfrm>
             <a:off x="7917120" y="4798080"/>
-            <a:ext cx="268200" cy="268200"/>
+            <a:ext cx="266400" cy="266400"/>
           </a:xfrm>
           <a:custGeom>
             <a:avLst/>
@@ -29773,7 +29808,7 @@
         <p:spPr>
           <a:xfrm>
             <a:off x="6296760" y="5176080"/>
-            <a:ext cx="3507480" cy="250200"/>
+            <a:ext cx="3505680" cy="248400"/>
           </a:xfrm>
           <a:prstGeom prst="rect">
             <a:avLst/>
@@ -29825,7 +29860,7 @@
         <p:spPr>
           <a:xfrm>
             <a:off x="2210400" y="5814720"/>
-            <a:ext cx="7763400" cy="295200"/>
+            <a:ext cx="7761600" cy="293400"/>
           </a:xfrm>
           <a:prstGeom prst="rect">
             <a:avLst/>
@@ -29897,7 +29932,7 @@
         <p:spPr>
           <a:xfrm>
             <a:off x="2187720" y="6395040"/>
-            <a:ext cx="7808400" cy="322200"/>
+            <a:ext cx="7806600" cy="320400"/>
           </a:xfrm>
           <a:prstGeom prst="rect">
             <a:avLst/>
@@ -29949,7 +29984,7 @@
         <p:spPr>
           <a:xfrm>
             <a:off x="2210400" y="6791040"/>
-            <a:ext cx="7763400" cy="250200"/>
+            <a:ext cx="7761600" cy="248400"/>
           </a:xfrm>
           <a:prstGeom prst="rect">
             <a:avLst/>
@@ -30001,7 +30036,7 @@
         <p:spPr>
           <a:xfrm>
             <a:off x="5734440" y="5920560"/>
-            <a:ext cx="142200" cy="142200"/>
+            <a:ext cx="140400" cy="140400"/>
           </a:xfrm>
           <a:custGeom>
             <a:avLst/>
@@ -30052,7 +30087,7 @@
         <p:spPr>
           <a:xfrm>
             <a:off x="6022440" y="5920560"/>
-            <a:ext cx="142200" cy="142200"/>
+            <a:ext cx="140400" cy="140400"/>
           </a:xfrm>
           <a:custGeom>
             <a:avLst/>
@@ -30103,7 +30138,7 @@
         <p:spPr>
           <a:xfrm>
             <a:off x="6310440" y="5920560"/>
-            <a:ext cx="142200" cy="142200"/>
+            <a:ext cx="140400" cy="140400"/>
           </a:xfrm>
           <a:custGeom>
             <a:avLst/>
@@ -30186,7 +30221,7 @@
         <p:spPr>
           <a:xfrm>
             <a:off x="0" y="0"/>
-            <a:ext cx="12190320" cy="6856200"/>
+            <a:ext cx="12188520" cy="6854400"/>
           </a:xfrm>
           <a:prstGeom prst="roundRect">
             <a:avLst>
@@ -30218,7 +30253,7 @@
         <p:spPr>
           <a:xfrm>
             <a:off x="0" y="0"/>
-            <a:ext cx="12190320" cy="6856200"/>
+            <a:ext cx="12188520" cy="6854400"/>
           </a:xfrm>
           <a:custGeom>
             <a:avLst/>
@@ -30281,7 +30316,7 @@
         <p:spPr>
           <a:xfrm>
             <a:off x="380880" y="1542960"/>
-            <a:ext cx="1798560" cy="607680"/>
+            <a:ext cx="1796760" cy="605880"/>
           </a:xfrm>
           <a:custGeom>
             <a:avLst/>
@@ -30332,7 +30367,7 @@
         <p:spPr>
           <a:xfrm>
             <a:off x="609480" y="1676520"/>
-            <a:ext cx="1515960" cy="341280"/>
+            <a:ext cx="1514160" cy="339480"/>
           </a:xfrm>
           <a:prstGeom prst="rect">
             <a:avLst/>
@@ -30384,7 +30419,7 @@
         <p:spPr>
           <a:xfrm>
             <a:off x="380880" y="2381400"/>
-            <a:ext cx="11771280" cy="1712880"/>
+            <a:ext cx="11769480" cy="1711080"/>
           </a:xfrm>
           <a:prstGeom prst="rect">
             <a:avLst/>
@@ -30457,7 +30492,7 @@
         <p:spPr>
           <a:xfrm>
             <a:off x="380880" y="4324320"/>
-            <a:ext cx="1522080" cy="74520"/>
+            <a:ext cx="1520280" cy="72720"/>
           </a:xfrm>
           <a:custGeom>
             <a:avLst/>
@@ -30508,7 +30543,7 @@
         <p:spPr>
           <a:xfrm>
             <a:off x="380880" y="4629240"/>
-            <a:ext cx="7456320" cy="684000"/>
+            <a:ext cx="7454520" cy="682200"/>
           </a:xfrm>
           <a:prstGeom prst="rect">
             <a:avLst/>
@@ -30581,7 +30616,7 @@
         <p:spPr>
           <a:xfrm>
             <a:off x="10591920" y="5867280"/>
-            <a:ext cx="150480" cy="150480"/>
+            <a:ext cx="148680" cy="148680"/>
           </a:xfrm>
           <a:custGeom>
             <a:avLst/>
@@ -30632,7 +30667,7 @@
         <p:spPr>
           <a:xfrm>
             <a:off x="10896480" y="5867280"/>
-            <a:ext cx="150480" cy="150480"/>
+            <a:ext cx="148680" cy="148680"/>
           </a:xfrm>
           <a:custGeom>
             <a:avLst/>
@@ -30683,7 +30718,7 @@
         <p:spPr>
           <a:xfrm>
             <a:off x="11201400" y="5867280"/>
-            <a:ext cx="150480" cy="150480"/>
+            <a:ext cx="148680" cy="148680"/>
           </a:xfrm>
           <a:custGeom>
             <a:avLst/>
@@ -30766,7 +30801,7 @@
         <p:spPr>
           <a:xfrm>
             <a:off x="0" y="0"/>
-            <a:ext cx="12190320" cy="6856200"/>
+            <a:ext cx="12188520" cy="6854400"/>
           </a:xfrm>
           <a:custGeom>
             <a:avLst/>
@@ -30829,7 +30864,7 @@
         <p:spPr>
           <a:xfrm>
             <a:off x="380880" y="380880"/>
-            <a:ext cx="11656800" cy="455400"/>
+            <a:ext cx="11655000" cy="453600"/>
           </a:xfrm>
           <a:prstGeom prst="rect">
             <a:avLst/>
@@ -30881,7 +30916,7 @@
         <p:spPr>
           <a:xfrm>
             <a:off x="380880" y="952560"/>
-            <a:ext cx="11542680" cy="303120"/>
+            <a:ext cx="11540880" cy="301320"/>
           </a:xfrm>
           <a:prstGeom prst="rect">
             <a:avLst/>
@@ -30933,7 +30968,7 @@
         <p:spPr>
           <a:xfrm>
             <a:off x="380880" y="1371600"/>
-            <a:ext cx="912600" cy="36360"/>
+            <a:ext cx="910800" cy="34560"/>
           </a:xfrm>
           <a:custGeom>
             <a:avLst/>
@@ -30984,7 +31019,7 @@
         <p:spPr>
           <a:xfrm>
             <a:off x="395280" y="1576440"/>
-            <a:ext cx="5608440" cy="1665000"/>
+            <a:ext cx="5606640" cy="1663200"/>
           </a:xfrm>
           <a:custGeom>
             <a:avLst/>
@@ -31040,7 +31075,7 @@
         <p:spPr>
           <a:xfrm>
             <a:off x="600120" y="1781280"/>
-            <a:ext cx="5313240" cy="303120"/>
+            <a:ext cx="5311440" cy="301320"/>
           </a:xfrm>
           <a:prstGeom prst="rect">
             <a:avLst/>
@@ -31092,7 +31127,7 @@
         <p:spPr>
           <a:xfrm>
             <a:off x="600120" y="2200320"/>
-            <a:ext cx="5284440" cy="836280"/>
+            <a:ext cx="5282640" cy="834480"/>
           </a:xfrm>
           <a:prstGeom prst="rect">
             <a:avLst/>
@@ -31164,7 +31199,7 @@
         <p:spPr>
           <a:xfrm>
             <a:off x="6186600" y="1576440"/>
-            <a:ext cx="5608440" cy="1665000"/>
+            <a:ext cx="5606640" cy="1663200"/>
           </a:xfrm>
           <a:custGeom>
             <a:avLst/>
@@ -31220,7 +31255,7 @@
         <p:spPr>
           <a:xfrm>
             <a:off x="6391440" y="1781280"/>
-            <a:ext cx="5313240" cy="303120"/>
+            <a:ext cx="5311440" cy="301320"/>
           </a:xfrm>
           <a:prstGeom prst="rect">
             <a:avLst/>
@@ -31272,7 +31307,7 @@
         <p:spPr>
           <a:xfrm>
             <a:off x="6391440" y="2200320"/>
-            <a:ext cx="5284440" cy="560160"/>
+            <a:ext cx="5282640" cy="558360"/>
           </a:xfrm>
           <a:prstGeom prst="rect">
             <a:avLst/>
@@ -31334,7 +31369,7 @@
         <p:spPr>
           <a:xfrm>
             <a:off x="399960" y="3426480"/>
-            <a:ext cx="11390040" cy="3313080"/>
+            <a:ext cx="11388240" cy="3311280"/>
           </a:xfrm>
           <a:custGeom>
             <a:avLst/>
@@ -31390,7 +31425,7 @@
         <p:spPr>
           <a:xfrm>
             <a:off x="552600" y="3636000"/>
-            <a:ext cx="11085480" cy="303120"/>
+            <a:ext cx="11083680" cy="301320"/>
           </a:xfrm>
           <a:prstGeom prst="rect">
             <a:avLst/>
@@ -31442,7 +31477,7 @@
         <p:spPr>
           <a:xfrm>
             <a:off x="609480" y="4055400"/>
-            <a:ext cx="10971000" cy="2474640"/>
+            <a:ext cx="10969200" cy="2472840"/>
           </a:xfrm>
           <a:prstGeom prst="roundRect">
             <a:avLst>
@@ -31506,7 +31541,7 @@
         <p:spPr>
           <a:xfrm>
             <a:off x="0" y="0"/>
-            <a:ext cx="12190320" cy="6854040"/>
+            <a:ext cx="12188520" cy="6852240"/>
           </a:xfrm>
           <a:custGeom>
             <a:avLst/>
@@ -31569,7 +31604,7 @@
         <p:spPr>
           <a:xfrm>
             <a:off x="349200" y="349200"/>
-            <a:ext cx="11701080" cy="417240"/>
+            <a:ext cx="11699280" cy="415440"/>
           </a:xfrm>
           <a:prstGeom prst="rect">
             <a:avLst/>
@@ -31621,7 +31656,7 @@
         <p:spPr>
           <a:xfrm>
             <a:off x="349200" y="873360"/>
-            <a:ext cx="11596320" cy="277560"/>
+            <a:ext cx="11594520" cy="275760"/>
           </a:xfrm>
           <a:prstGeom prst="rect">
             <a:avLst/>
@@ -31673,7 +31708,7 @@
         <p:spPr>
           <a:xfrm>
             <a:off x="349200" y="1257480"/>
-            <a:ext cx="836640" cy="33120"/>
+            <a:ext cx="834840" cy="31320"/>
           </a:xfrm>
           <a:custGeom>
             <a:avLst/>
@@ -31724,7 +31759,7 @@
         <p:spPr>
           <a:xfrm>
             <a:off x="362520" y="1445400"/>
-            <a:ext cx="5046120" cy="4190400"/>
+            <a:ext cx="5044320" cy="4188600"/>
           </a:xfrm>
           <a:custGeom>
             <a:avLst/>
@@ -31780,7 +31815,7 @@
         <p:spPr>
           <a:xfrm>
             <a:off x="515160" y="1598400"/>
-            <a:ext cx="4740480" cy="1675080"/>
+            <a:ext cx="4738680" cy="1673280"/>
           </a:xfrm>
           <a:prstGeom prst="roundRect">
             <a:avLst>
@@ -31812,7 +31847,7 @@
         <p:spPr>
           <a:xfrm>
             <a:off x="384120" y="3380040"/>
-            <a:ext cx="5002560" cy="522360"/>
+            <a:ext cx="5000760" cy="520560"/>
           </a:xfrm>
           <a:prstGeom prst="rect">
             <a:avLst/>
@@ -31864,7 +31899,7 @@
         <p:spPr>
           <a:xfrm>
             <a:off x="471600" y="3973680"/>
-            <a:ext cx="4827960" cy="242640"/>
+            <a:ext cx="4826160" cy="240840"/>
           </a:xfrm>
           <a:prstGeom prst="rect">
             <a:avLst/>
@@ -31916,7 +31951,7 @@
         <p:spPr>
           <a:xfrm>
             <a:off x="362520" y="5801400"/>
-            <a:ext cx="5046120" cy="1037520"/>
+            <a:ext cx="5044320" cy="1035720"/>
           </a:xfrm>
           <a:custGeom>
             <a:avLst/>
@@ -31972,7 +32007,7 @@
         <p:spPr>
           <a:xfrm>
             <a:off x="410400" y="5954040"/>
-            <a:ext cx="4950000" cy="417240"/>
+            <a:ext cx="4948200" cy="415440"/>
           </a:xfrm>
           <a:prstGeom prst="rect">
             <a:avLst/>
@@ -32024,7 +32059,7 @@
         <p:spPr>
           <a:xfrm>
             <a:off x="475920" y="6443280"/>
-            <a:ext cx="4818960" cy="242640"/>
+            <a:ext cx="4817160" cy="240840"/>
           </a:xfrm>
           <a:prstGeom prst="rect">
             <a:avLst/>
@@ -32076,7 +32111,7 @@
         <p:spPr>
           <a:xfrm>
             <a:off x="5648040" y="1445400"/>
-            <a:ext cx="6172920" cy="1884600"/>
+            <a:ext cx="6171120" cy="1882800"/>
           </a:xfrm>
           <a:custGeom>
             <a:avLst/>
@@ -32132,7 +32167,7 @@
         <p:spPr>
           <a:xfrm>
             <a:off x="5835600" y="1633320"/>
-            <a:ext cx="5902200" cy="277560"/>
+            <a:ext cx="5900400" cy="275760"/>
           </a:xfrm>
           <a:prstGeom prst="rect">
             <a:avLst/>
@@ -32184,7 +32219,7 @@
         <p:spPr>
           <a:xfrm>
             <a:off x="5835600" y="2017440"/>
-            <a:ext cx="5875920" cy="513360"/>
+            <a:ext cx="5874120" cy="511560"/>
           </a:xfrm>
           <a:prstGeom prst="rect">
             <a:avLst/>
@@ -32266,7 +32301,7 @@
         <p:spPr>
           <a:xfrm>
             <a:off x="5835600" y="2633040"/>
-            <a:ext cx="5875920" cy="513360"/>
+            <a:ext cx="5874120" cy="511560"/>
           </a:xfrm>
           <a:prstGeom prst="rect">
             <a:avLst/>
@@ -32318,7 +32353,7 @@
         <p:spPr>
           <a:xfrm>
             <a:off x="5648040" y="3497760"/>
-            <a:ext cx="6172920" cy="1526400"/>
+            <a:ext cx="6171120" cy="1524600"/>
           </a:xfrm>
           <a:custGeom>
             <a:avLst/>
@@ -32374,7 +32409,7 @@
         <p:spPr>
           <a:xfrm>
             <a:off x="5835600" y="3685680"/>
-            <a:ext cx="5902200" cy="277560"/>
+            <a:ext cx="5900400" cy="275760"/>
           </a:xfrm>
           <a:prstGeom prst="rect">
             <a:avLst/>
@@ -32426,7 +32461,7 @@
         <p:spPr>
           <a:xfrm>
             <a:off x="5835600" y="4069800"/>
-            <a:ext cx="5875920" cy="766800"/>
+            <a:ext cx="5874120" cy="765000"/>
           </a:xfrm>
           <a:prstGeom prst="rect">
             <a:avLst/>
@@ -32498,7 +32533,7 @@
         <p:spPr>
           <a:xfrm>
             <a:off x="5643720" y="5185440"/>
-            <a:ext cx="3028680" cy="766800"/>
+            <a:ext cx="3026880" cy="765000"/>
           </a:xfrm>
           <a:custGeom>
             <a:avLst/>
@@ -32554,7 +32589,7 @@
         <p:spPr>
           <a:xfrm>
             <a:off x="7030800" y="5299200"/>
-            <a:ext cx="260280" cy="260280"/>
+            <a:ext cx="258480" cy="258480"/>
           </a:xfrm>
           <a:custGeom>
             <a:avLst/>
@@ -32731,7 +32766,7 @@
         <p:spPr>
           <a:xfrm>
             <a:off x="5722200" y="5631120"/>
-            <a:ext cx="2871360" cy="207720"/>
+            <a:ext cx="2869560" cy="205920"/>
           </a:xfrm>
           <a:prstGeom prst="rect">
             <a:avLst/>
@@ -32783,7 +32818,7 @@
         <p:spPr>
           <a:xfrm>
             <a:off x="8798040" y="5185440"/>
-            <a:ext cx="3028680" cy="766800"/>
+            <a:ext cx="3026880" cy="765000"/>
           </a:xfrm>
           <a:custGeom>
             <a:avLst/>
@@ -32839,7 +32874,7 @@
         <p:spPr>
           <a:xfrm>
             <a:off x="10185120" y="5299200"/>
-            <a:ext cx="260280" cy="260280"/>
+            <a:ext cx="258480" cy="258480"/>
           </a:xfrm>
           <a:custGeom>
             <a:avLst/>
@@ -32930,7 +32965,7 @@
         <p:spPr>
           <a:xfrm>
             <a:off x="8876520" y="5631120"/>
-            <a:ext cx="2871360" cy="207720"/>
+            <a:ext cx="2869560" cy="205920"/>
           </a:xfrm>
           <a:prstGeom prst="rect">
             <a:avLst/>
@@ -32982,7 +33017,7 @@
         <p:spPr>
           <a:xfrm>
             <a:off x="5643720" y="6076440"/>
-            <a:ext cx="3028680" cy="766800"/>
+            <a:ext cx="3026880" cy="765000"/>
           </a:xfrm>
           <a:custGeom>
             <a:avLst/>
@@ -33038,7 +33073,7 @@
         <p:spPr>
           <a:xfrm>
             <a:off x="7030800" y="6189840"/>
-            <a:ext cx="260280" cy="260280"/>
+            <a:ext cx="258480" cy="258480"/>
           </a:xfrm>
           <a:custGeom>
             <a:avLst/>
@@ -33136,7 +33171,7 @@
         <p:spPr>
           <a:xfrm>
             <a:off x="5722200" y="6521760"/>
-            <a:ext cx="2871360" cy="207720"/>
+            <a:ext cx="2869560" cy="205920"/>
           </a:xfrm>
           <a:prstGeom prst="rect">
             <a:avLst/>
@@ -33188,7 +33223,7 @@
         <p:spPr>
           <a:xfrm>
             <a:off x="8798040" y="6076440"/>
-            <a:ext cx="3028680" cy="766800"/>
+            <a:ext cx="3026880" cy="765000"/>
           </a:xfrm>
           <a:custGeom>
             <a:avLst/>
@@ -33244,7 +33279,7 @@
         <p:spPr>
           <a:xfrm>
             <a:off x="10185120" y="6189840"/>
-            <a:ext cx="260280" cy="260280"/>
+            <a:ext cx="258480" cy="258480"/>
           </a:xfrm>
           <a:custGeom>
             <a:avLst/>
@@ -33356,7 +33391,7 @@
         <p:spPr>
           <a:xfrm>
             <a:off x="8876520" y="6521760"/>
-            <a:ext cx="2871360" cy="207720"/>
+            <a:ext cx="2869560" cy="205920"/>
           </a:xfrm>
           <a:prstGeom prst="rect">
             <a:avLst/>
@@ -33440,7 +33475,7 @@
         <p:spPr>
           <a:xfrm>
             <a:off x="0" y="0"/>
-            <a:ext cx="12190320" cy="6856920"/>
+            <a:ext cx="12188520" cy="6855120"/>
           </a:xfrm>
           <a:custGeom>
             <a:avLst/>
@@ -33503,7 +33538,7 @@
         <p:spPr>
           <a:xfrm>
             <a:off x="369720" y="369720"/>
-            <a:ext cx="11672640" cy="441720"/>
+            <a:ext cx="11670840" cy="439920"/>
           </a:xfrm>
           <a:prstGeom prst="rect">
             <a:avLst/>
@@ -33555,7 +33590,7 @@
         <p:spPr>
           <a:xfrm>
             <a:off x="369720" y="924480"/>
-            <a:ext cx="11561760" cy="294120"/>
+            <a:ext cx="11559960" cy="292320"/>
           </a:xfrm>
           <a:prstGeom prst="rect">
             <a:avLst/>
@@ -33607,7 +33642,7 @@
         <p:spPr>
           <a:xfrm>
             <a:off x="369720" y="1330920"/>
-            <a:ext cx="885600" cy="35280"/>
+            <a:ext cx="883800" cy="33480"/>
           </a:xfrm>
           <a:custGeom>
             <a:avLst/>
@@ -33658,7 +33693,7 @@
         <p:spPr>
           <a:xfrm>
             <a:off x="383760" y="1529640"/>
-            <a:ext cx="5590440" cy="2836080"/>
+            <a:ext cx="5588640" cy="2834280"/>
           </a:xfrm>
           <a:custGeom>
             <a:avLst/>
@@ -33714,7 +33749,7 @@
         <p:spPr>
           <a:xfrm>
             <a:off x="527040" y="1728360"/>
-            <a:ext cx="5303880" cy="294120"/>
+            <a:ext cx="5302080" cy="292320"/>
           </a:xfrm>
           <a:prstGeom prst="rect">
             <a:avLst/>
@@ -33766,7 +33801,7 @@
         <p:spPr>
           <a:xfrm>
             <a:off x="582480" y="2246040"/>
-            <a:ext cx="109080" cy="109080"/>
+            <a:ext cx="107280" cy="107280"/>
           </a:xfrm>
           <a:custGeom>
             <a:avLst/>
@@ -33817,7 +33852,7 @@
         <p:spPr>
           <a:xfrm>
             <a:off x="804240" y="2172240"/>
-            <a:ext cx="1874520" cy="257040"/>
+            <a:ext cx="1872720" cy="255240"/>
           </a:xfrm>
           <a:prstGeom prst="rect">
             <a:avLst/>
@@ -33869,7 +33904,7 @@
         <p:spPr>
           <a:xfrm>
             <a:off x="582480" y="2615760"/>
-            <a:ext cx="109080" cy="109080"/>
+            <a:ext cx="107280" cy="107280"/>
           </a:xfrm>
           <a:custGeom>
             <a:avLst/>
@@ -33920,7 +33955,7 @@
         <p:spPr>
           <a:xfrm>
             <a:off x="804240" y="2541960"/>
-            <a:ext cx="1458720" cy="257040"/>
+            <a:ext cx="1456920" cy="255240"/>
           </a:xfrm>
           <a:prstGeom prst="rect">
             <a:avLst/>
@@ -33972,7 +34007,7 @@
         <p:spPr>
           <a:xfrm>
             <a:off x="582480" y="2985480"/>
-            <a:ext cx="109080" cy="109080"/>
+            <a:ext cx="107280" cy="107280"/>
           </a:xfrm>
           <a:custGeom>
             <a:avLst/>
@@ -34023,7 +34058,7 @@
         <p:spPr>
           <a:xfrm>
             <a:off x="804240" y="2911680"/>
-            <a:ext cx="1218240" cy="257040"/>
+            <a:ext cx="1216440" cy="255240"/>
           </a:xfrm>
           <a:prstGeom prst="rect">
             <a:avLst/>
@@ -34075,7 +34110,7 @@
         <p:spPr>
           <a:xfrm>
             <a:off x="582480" y="3355200"/>
-            <a:ext cx="109080" cy="109080"/>
+            <a:ext cx="107280" cy="107280"/>
           </a:xfrm>
           <a:custGeom>
             <a:avLst/>
@@ -34126,7 +34161,7 @@
         <p:spPr>
           <a:xfrm>
             <a:off x="804240" y="3281400"/>
-            <a:ext cx="1920960" cy="257040"/>
+            <a:ext cx="1919160" cy="255240"/>
           </a:xfrm>
           <a:prstGeom prst="rect">
             <a:avLst/>
@@ -34178,7 +34213,7 @@
         <p:spPr>
           <a:xfrm>
             <a:off x="582480" y="3688200"/>
-            <a:ext cx="5193000" cy="478800"/>
+            <a:ext cx="5191200" cy="477000"/>
           </a:xfrm>
           <a:custGeom>
             <a:avLst/>
@@ -34231,7 +34266,7 @@
         <p:spPr>
           <a:xfrm>
             <a:off x="646920" y="3799080"/>
-            <a:ext cx="5063400" cy="257040"/>
+            <a:ext cx="5061600" cy="255240"/>
           </a:xfrm>
           <a:prstGeom prst="rect">
             <a:avLst/>
@@ -34283,7 +34318,7 @@
         <p:spPr>
           <a:xfrm>
             <a:off x="6221160" y="1529640"/>
-            <a:ext cx="5590440" cy="2836080"/>
+            <a:ext cx="5588640" cy="2834280"/>
           </a:xfrm>
           <a:custGeom>
             <a:avLst/>
@@ -34339,7 +34374,7 @@
         <p:spPr>
           <a:xfrm>
             <a:off x="6364440" y="1728360"/>
-            <a:ext cx="5303880" cy="294120"/>
+            <a:ext cx="5302080" cy="292320"/>
           </a:xfrm>
           <a:prstGeom prst="rect">
             <a:avLst/>
@@ -34391,7 +34426,7 @@
         <p:spPr>
           <a:xfrm>
             <a:off x="6419880" y="2246040"/>
-            <a:ext cx="109080" cy="109080"/>
+            <a:ext cx="107280" cy="107280"/>
           </a:xfrm>
           <a:custGeom>
             <a:avLst/>
@@ -34442,7 +34477,7 @@
         <p:spPr>
           <a:xfrm>
             <a:off x="6642000" y="2172240"/>
-            <a:ext cx="1856160" cy="257040"/>
+            <a:ext cx="1854360" cy="255240"/>
           </a:xfrm>
           <a:prstGeom prst="rect">
             <a:avLst/>
@@ -34504,7 +34539,7 @@
         <p:spPr>
           <a:xfrm>
             <a:off x="6419880" y="2615760"/>
-            <a:ext cx="109080" cy="109080"/>
+            <a:ext cx="107280" cy="107280"/>
           </a:xfrm>
           <a:custGeom>
             <a:avLst/>
@@ -34555,7 +34590,7 @@
         <p:spPr>
           <a:xfrm>
             <a:off x="6642000" y="2541960"/>
-            <a:ext cx="1652760" cy="257040"/>
+            <a:ext cx="1650960" cy="255240"/>
           </a:xfrm>
           <a:prstGeom prst="rect">
             <a:avLst/>
@@ -34617,7 +34652,7 @@
         <p:spPr>
           <a:xfrm>
             <a:off x="6419880" y="2985480"/>
-            <a:ext cx="109080" cy="109080"/>
+            <a:ext cx="107280" cy="107280"/>
           </a:xfrm>
           <a:custGeom>
             <a:avLst/>
@@ -34668,7 +34703,7 @@
         <p:spPr>
           <a:xfrm>
             <a:off x="6642000" y="2957760"/>
-            <a:ext cx="1314000" cy="164520"/>
+            <a:ext cx="1312200" cy="162720"/>
           </a:xfrm>
           <a:prstGeom prst="rect">
             <a:avLst/>
@@ -34720,7 +34755,7 @@
         <p:spPr>
           <a:xfrm>
             <a:off x="6419880" y="3355200"/>
-            <a:ext cx="109080" cy="109080"/>
+            <a:ext cx="107280" cy="107280"/>
           </a:xfrm>
           <a:custGeom>
             <a:avLst/>
@@ -34771,7 +34806,7 @@
         <p:spPr>
           <a:xfrm>
             <a:off x="6642000" y="3281400"/>
-            <a:ext cx="1486440" cy="257040"/>
+            <a:ext cx="1484640" cy="255240"/>
           </a:xfrm>
           <a:prstGeom prst="rect">
             <a:avLst/>
@@ -34833,7 +34868,7 @@
         <p:spPr>
           <a:xfrm>
             <a:off x="6419880" y="3688200"/>
-            <a:ext cx="5193000" cy="478800"/>
+            <a:ext cx="5191200" cy="477000"/>
           </a:xfrm>
           <a:custGeom>
             <a:avLst/>
@@ -34886,7 +34921,7 @@
         <p:spPr>
           <a:xfrm>
             <a:off x="6484680" y="3799080"/>
-            <a:ext cx="5063400" cy="257040"/>
+            <a:ext cx="5061600" cy="255240"/>
           </a:xfrm>
           <a:prstGeom prst="rect">
             <a:avLst/>
@@ -34938,7 +34973,7 @@
         <p:spPr>
           <a:xfrm>
             <a:off x="383760" y="4543200"/>
-            <a:ext cx="3686400" cy="1541880"/>
+            <a:ext cx="3684600" cy="1540080"/>
           </a:xfrm>
           <a:custGeom>
             <a:avLst/>
@@ -34994,7 +35029,7 @@
         <p:spPr>
           <a:xfrm>
             <a:off x="2062800" y="4704840"/>
-            <a:ext cx="330840" cy="330840"/>
+            <a:ext cx="329040" cy="329040"/>
           </a:xfrm>
           <a:custGeom>
             <a:avLst/>
@@ -35321,7 +35356,7 @@
         <p:spPr>
           <a:xfrm>
             <a:off x="499320" y="5148720"/>
-            <a:ext cx="3455280" cy="257040"/>
+            <a:ext cx="3453480" cy="255240"/>
           </a:xfrm>
           <a:prstGeom prst="rect">
             <a:avLst/>
@@ -35373,7 +35408,7 @@
         <p:spPr>
           <a:xfrm>
             <a:off x="508320" y="5481360"/>
-            <a:ext cx="3436560" cy="441720"/>
+            <a:ext cx="3434760" cy="439920"/>
           </a:xfrm>
           <a:prstGeom prst="rect">
             <a:avLst/>
@@ -35425,7 +35460,7 @@
         <p:spPr>
           <a:xfrm>
             <a:off x="4250880" y="4543200"/>
-            <a:ext cx="3686400" cy="1541880"/>
+            <a:ext cx="3684600" cy="1540080"/>
           </a:xfrm>
           <a:custGeom>
             <a:avLst/>
@@ -35481,7 +35516,7 @@
         <p:spPr>
           <a:xfrm>
             <a:off x="5909400" y="4704840"/>
-            <a:ext cx="372600" cy="330840"/>
+            <a:ext cx="370800" cy="329040"/>
           </a:xfrm>
           <a:custGeom>
             <a:avLst/>
@@ -35598,7 +35633,7 @@
         <p:spPr>
           <a:xfrm>
             <a:off x="4366440" y="5148720"/>
-            <a:ext cx="3455280" cy="257040"/>
+            <a:ext cx="3453480" cy="255240"/>
           </a:xfrm>
           <a:prstGeom prst="rect">
             <a:avLst/>
@@ -35650,7 +35685,7 @@
         <p:spPr>
           <a:xfrm>
             <a:off x="4375440" y="5481360"/>
-            <a:ext cx="3436560" cy="219960"/>
+            <a:ext cx="3434760" cy="218160"/>
           </a:xfrm>
           <a:prstGeom prst="rect">
             <a:avLst/>
@@ -35702,7 +35737,7 @@
         <p:spPr>
           <a:xfrm>
             <a:off x="8118000" y="4543200"/>
-            <a:ext cx="3686400" cy="1541880"/>
+            <a:ext cx="3684600" cy="1540080"/>
           </a:xfrm>
           <a:custGeom>
             <a:avLst/>
@@ -35758,7 +35793,7 @@
         <p:spPr>
           <a:xfrm>
             <a:off x="9755640" y="4704840"/>
-            <a:ext cx="414000" cy="330840"/>
+            <a:ext cx="412200" cy="329040"/>
           </a:xfrm>
           <a:custGeom>
             <a:avLst/>
@@ -35977,7 +36012,7 @@
         <p:spPr>
           <a:xfrm>
             <a:off x="8233560" y="5148720"/>
-            <a:ext cx="3455280" cy="257040"/>
+            <a:ext cx="3453480" cy="255240"/>
           </a:xfrm>
           <a:prstGeom prst="rect">
             <a:avLst/>
@@ -36029,7 +36064,7 @@
         <p:spPr>
           <a:xfrm>
             <a:off x="8242560" y="5481360"/>
-            <a:ext cx="3436560" cy="219960"/>
+            <a:ext cx="3434760" cy="218160"/>
           </a:xfrm>
           <a:prstGeom prst="rect">
             <a:avLst/>
@@ -36081,7 +36116,7 @@
         <p:spPr>
           <a:xfrm>
             <a:off x="383760" y="6262560"/>
-            <a:ext cx="11423160" cy="580680"/>
+            <a:ext cx="11421360" cy="578880"/>
           </a:xfrm>
           <a:custGeom>
             <a:avLst/>
@@ -36137,7 +36172,7 @@
         <p:spPr>
           <a:xfrm>
             <a:off x="499320" y="6424200"/>
-            <a:ext cx="11192040" cy="257040"/>
+            <a:ext cx="11190240" cy="255240"/>
           </a:xfrm>
           <a:prstGeom prst="rect">
             <a:avLst/>
@@ -36251,7 +36286,7 @@
         <p:spPr>
           <a:xfrm>
             <a:off x="0" y="0"/>
-            <a:ext cx="12190320" cy="6856200"/>
+            <a:ext cx="12188520" cy="6854400"/>
           </a:xfrm>
           <a:prstGeom prst="roundRect">
             <a:avLst>
@@ -36283,7 +36318,7 @@
         <p:spPr>
           <a:xfrm>
             <a:off x="0" y="0"/>
-            <a:ext cx="12190320" cy="6856200"/>
+            <a:ext cx="12188520" cy="6854400"/>
           </a:xfrm>
           <a:custGeom>
             <a:avLst/>
@@ -36346,7 +36381,7 @@
         <p:spPr>
           <a:xfrm>
             <a:off x="380880" y="1114560"/>
-            <a:ext cx="1865160" cy="607680"/>
+            <a:ext cx="1863360" cy="605880"/>
           </a:xfrm>
           <a:custGeom>
             <a:avLst/>
@@ -36397,7 +36432,7 @@
         <p:spPr>
           <a:xfrm>
             <a:off x="609480" y="1247760"/>
-            <a:ext cx="1579320" cy="341280"/>
+            <a:ext cx="1577520" cy="339480"/>
           </a:xfrm>
           <a:prstGeom prst="rect">
             <a:avLst/>
@@ -36449,7 +36484,7 @@
         <p:spPr>
           <a:xfrm>
             <a:off x="380880" y="1952640"/>
-            <a:ext cx="11771280" cy="2570040"/>
+            <a:ext cx="11769480" cy="2568240"/>
           </a:xfrm>
           <a:prstGeom prst="rect">
             <a:avLst/>
@@ -36543,7 +36578,7 @@
         <p:spPr>
           <a:xfrm>
             <a:off x="380880" y="4753080"/>
-            <a:ext cx="1522080" cy="74520"/>
+            <a:ext cx="1520280" cy="72720"/>
           </a:xfrm>
           <a:custGeom>
             <a:avLst/>
@@ -36594,7 +36629,7 @@
         <p:spPr>
           <a:xfrm>
             <a:off x="380880" y="5057640"/>
-            <a:ext cx="7456320" cy="684000"/>
+            <a:ext cx="7454520" cy="682200"/>
           </a:xfrm>
           <a:prstGeom prst="rect">
             <a:avLst/>
@@ -36667,7 +36702,7 @@
         <p:spPr>
           <a:xfrm>
             <a:off x="10591920" y="5867280"/>
-            <a:ext cx="150480" cy="150480"/>
+            <a:ext cx="148680" cy="148680"/>
           </a:xfrm>
           <a:custGeom>
             <a:avLst/>
@@ -36718,7 +36753,7 @@
         <p:spPr>
           <a:xfrm>
             <a:off x="10896480" y="5867280"/>
-            <a:ext cx="150480" cy="150480"/>
+            <a:ext cx="148680" cy="148680"/>
           </a:xfrm>
           <a:custGeom>
             <a:avLst/>
@@ -36769,7 +36804,7 @@
         <p:spPr>
           <a:xfrm>
             <a:off x="11201400" y="5867280"/>
-            <a:ext cx="150480" cy="150480"/>
+            <a:ext cx="148680" cy="148680"/>
           </a:xfrm>
           <a:custGeom>
             <a:avLst/>
@@ -36852,7 +36887,7 @@
         <p:spPr>
           <a:xfrm>
             <a:off x="0" y="0"/>
-            <a:ext cx="12190320" cy="6856920"/>
+            <a:ext cx="12188520" cy="6855120"/>
           </a:xfrm>
           <a:custGeom>
             <a:avLst/>
@@ -36915,7 +36950,7 @@
         <p:spPr>
           <a:xfrm>
             <a:off x="379080" y="379080"/>
-            <a:ext cx="11659680" cy="452880"/>
+            <a:ext cx="11657880" cy="451080"/>
           </a:xfrm>
           <a:prstGeom prst="rect">
             <a:avLst/>
@@ -36967,7 +37002,7 @@
         <p:spPr>
           <a:xfrm>
             <a:off x="379080" y="947160"/>
-            <a:ext cx="11545920" cy="301320"/>
+            <a:ext cx="11544120" cy="299520"/>
           </a:xfrm>
           <a:prstGeom prst="rect">
             <a:avLst/>
@@ -37019,7 +37054,7 @@
         <p:spPr>
           <a:xfrm>
             <a:off x="379080" y="1364040"/>
-            <a:ext cx="907560" cy="36000"/>
+            <a:ext cx="905760" cy="34200"/>
           </a:xfrm>
           <a:custGeom>
             <a:avLst/>
@@ -37070,7 +37105,7 @@
         <p:spPr>
           <a:xfrm>
             <a:off x="393120" y="1567800"/>
-            <a:ext cx="4450680" cy="4232880"/>
+            <a:ext cx="4448880" cy="4231080"/>
           </a:xfrm>
           <a:custGeom>
             <a:avLst/>
@@ -37126,7 +37161,7 @@
         <p:spPr>
           <a:xfrm>
             <a:off x="559080" y="1733760"/>
-            <a:ext cx="4119120" cy="2120040"/>
+            <a:ext cx="4117320" cy="2118240"/>
           </a:xfrm>
           <a:prstGeom prst="roundRect">
             <a:avLst>
@@ -37158,7 +37193,7 @@
         <p:spPr>
           <a:xfrm>
             <a:off x="416880" y="3969360"/>
-            <a:ext cx="4403160" cy="566640"/>
+            <a:ext cx="4401360" cy="564840"/>
           </a:xfrm>
           <a:prstGeom prst="rect">
             <a:avLst/>
@@ -37210,7 +37245,7 @@
         <p:spPr>
           <a:xfrm>
             <a:off x="511560" y="4613400"/>
-            <a:ext cx="4213800" cy="263520"/>
+            <a:ext cx="4212000" cy="261720"/>
           </a:xfrm>
           <a:prstGeom prst="rect">
             <a:avLst/>
@@ -37262,7 +37297,7 @@
         <p:spPr>
           <a:xfrm>
             <a:off x="520920" y="4954320"/>
-            <a:ext cx="4194720" cy="225720"/>
+            <a:ext cx="4192920" cy="223920"/>
           </a:xfrm>
           <a:prstGeom prst="rect">
             <a:avLst/>
@@ -37316,7 +37351,7 @@
         <p:spPr>
           <a:xfrm>
             <a:off x="393120" y="5982480"/>
-            <a:ext cx="4450680" cy="860400"/>
+            <a:ext cx="4448880" cy="858600"/>
           </a:xfrm>
           <a:custGeom>
             <a:avLst/>
@@ -37372,7 +37407,7 @@
         <p:spPr>
           <a:xfrm>
             <a:off x="516240" y="6148080"/>
-            <a:ext cx="4204440" cy="263520"/>
+            <a:ext cx="4202640" cy="261720"/>
           </a:xfrm>
           <a:prstGeom prst="rect">
             <a:avLst/>
@@ -37434,7 +37469,7 @@
         <p:spPr>
           <a:xfrm>
             <a:off x="516240" y="6413400"/>
-            <a:ext cx="4204440" cy="263520"/>
+            <a:ext cx="4202640" cy="261720"/>
           </a:xfrm>
           <a:prstGeom prst="rect">
             <a:avLst/>
@@ -37496,7 +37531,7 @@
         <p:spPr>
           <a:xfrm>
             <a:off x="5103720" y="1567800"/>
-            <a:ext cx="6695640" cy="2044440"/>
+            <a:ext cx="6693840" cy="2042640"/>
           </a:xfrm>
           <a:custGeom>
             <a:avLst/>
@@ -37552,7 +37587,7 @@
         <p:spPr>
           <a:xfrm>
             <a:off x="5307120" y="1771560"/>
-            <a:ext cx="6402240" cy="301320"/>
+            <a:ext cx="6400440" cy="299520"/>
           </a:xfrm>
           <a:prstGeom prst="rect">
             <a:avLst/>
@@ -37604,7 +37639,7 @@
         <p:spPr>
           <a:xfrm>
             <a:off x="5307120" y="2188440"/>
-            <a:ext cx="6373800" cy="557280"/>
+            <a:ext cx="6372000" cy="555480"/>
           </a:xfrm>
           <a:prstGeom prst="rect">
             <a:avLst/>
@@ -37676,7 +37711,7 @@
         <p:spPr>
           <a:xfrm>
             <a:off x="5307120" y="2856240"/>
-            <a:ext cx="6373800" cy="557280"/>
+            <a:ext cx="6372000" cy="555480"/>
           </a:xfrm>
           <a:prstGeom prst="rect">
             <a:avLst/>
@@ -37748,7 +37783,7 @@
         <p:spPr>
           <a:xfrm>
             <a:off x="5103720" y="3794040"/>
-            <a:ext cx="6695640" cy="2044440"/>
+            <a:ext cx="6693840" cy="2042640"/>
           </a:xfrm>
           <a:custGeom>
             <a:avLst/>
@@ -37804,7 +37839,7 @@
         <p:spPr>
           <a:xfrm>
             <a:off x="5307120" y="3997800"/>
-            <a:ext cx="6402240" cy="301320"/>
+            <a:ext cx="6400440" cy="299520"/>
           </a:xfrm>
           <a:prstGeom prst="rect">
             <a:avLst/>
@@ -37856,7 +37891,7 @@
         <p:spPr>
           <a:xfrm>
             <a:off x="5307120" y="4414680"/>
-            <a:ext cx="6373800" cy="557280"/>
+            <a:ext cx="6372000" cy="555480"/>
           </a:xfrm>
           <a:prstGeom prst="rect">
             <a:avLst/>
@@ -37948,7 +37983,7 @@
         <p:spPr>
           <a:xfrm>
             <a:off x="5307120" y="5082480"/>
-            <a:ext cx="6373800" cy="557280"/>
+            <a:ext cx="6372000" cy="555480"/>
           </a:xfrm>
           <a:prstGeom prst="rect">
             <a:avLst/>
@@ -38020,7 +38055,7 @@
         <p:spPr>
           <a:xfrm>
             <a:off x="5099040" y="6015600"/>
-            <a:ext cx="2148480" cy="831960"/>
+            <a:ext cx="2146680" cy="830160"/>
           </a:xfrm>
           <a:custGeom>
             <a:avLst/>
@@ -38076,7 +38111,7 @@
         <p:spPr>
           <a:xfrm>
             <a:off x="6068160" y="6138720"/>
-            <a:ext cx="211320" cy="282240"/>
+            <a:ext cx="209520" cy="280440"/>
           </a:xfrm>
           <a:custGeom>
             <a:avLst/>
@@ -38223,7 +38258,7 @@
         <p:spPr>
           <a:xfrm>
             <a:off x="5184000" y="6498720"/>
-            <a:ext cx="1978200" cy="225720"/>
+            <a:ext cx="1976400" cy="223920"/>
           </a:xfrm>
           <a:prstGeom prst="rect">
             <a:avLst/>
@@ -38275,7 +38310,7 @@
         <p:spPr>
           <a:xfrm>
             <a:off x="7378200" y="6015600"/>
-            <a:ext cx="2148480" cy="831960"/>
+            <a:ext cx="2146680" cy="830160"/>
           </a:xfrm>
           <a:custGeom>
             <a:avLst/>
@@ -38331,7 +38366,7 @@
         <p:spPr>
           <a:xfrm>
             <a:off x="8276400" y="6138720"/>
-            <a:ext cx="353520" cy="282240"/>
+            <a:ext cx="351720" cy="280440"/>
           </a:xfrm>
           <a:custGeom>
             <a:avLst/>
@@ -38547,7 +38582,7 @@
         <p:spPr>
           <a:xfrm>
             <a:off x="7463520" y="6498720"/>
-            <a:ext cx="1978200" cy="225720"/>
+            <a:ext cx="1976400" cy="223920"/>
           </a:xfrm>
           <a:prstGeom prst="rect">
             <a:avLst/>
@@ -38599,7 +38634,7 @@
         <p:spPr>
           <a:xfrm>
             <a:off x="9657720" y="6015600"/>
-            <a:ext cx="2148480" cy="831960"/>
+            <a:ext cx="2146680" cy="830160"/>
           </a:xfrm>
           <a:custGeom>
             <a:avLst/>
@@ -38655,7 +38690,7 @@
         <p:spPr>
           <a:xfrm>
             <a:off x="10591560" y="6138720"/>
-            <a:ext cx="282240" cy="282240"/>
+            <a:ext cx="280440" cy="280440"/>
           </a:xfrm>
           <a:custGeom>
             <a:avLst/>
@@ -38832,7 +38867,7 @@
         <p:spPr>
           <a:xfrm>
             <a:off x="9743040" y="6498720"/>
-            <a:ext cx="1978200" cy="225720"/>
+            <a:ext cx="1976400" cy="223920"/>
           </a:xfrm>
           <a:prstGeom prst="rect">
             <a:avLst/>
@@ -38916,7 +38951,7 @@
         <p:spPr>
           <a:xfrm>
             <a:off x="0" y="0"/>
-            <a:ext cx="12190320" cy="6856200"/>
+            <a:ext cx="12188520" cy="6854400"/>
           </a:xfrm>
           <a:custGeom>
             <a:avLst/>
@@ -38979,7 +39014,7 @@
         <p:spPr>
           <a:xfrm>
             <a:off x="334800" y="334800"/>
-            <a:ext cx="11721240" cy="399960"/>
+            <a:ext cx="11719440" cy="398160"/>
           </a:xfrm>
           <a:prstGeom prst="rect">
             <a:avLst/>
@@ -39031,7 +39066,7 @@
         <p:spPr>
           <a:xfrm>
             <a:off x="334800" y="837360"/>
-            <a:ext cx="11620800" cy="266040"/>
+            <a:ext cx="11619000" cy="264240"/>
           </a:xfrm>
           <a:prstGeom prst="rect">
             <a:avLst/>
@@ -39083,7 +39118,7 @@
         <p:spPr>
           <a:xfrm>
             <a:off x="334800" y="1205640"/>
-            <a:ext cx="802080" cy="31680"/>
+            <a:ext cx="800280" cy="29880"/>
           </a:xfrm>
           <a:custGeom>
             <a:avLst/>
@@ -39134,7 +39169,7 @@
         <p:spPr>
           <a:xfrm>
             <a:off x="347400" y="1386000"/>
-            <a:ext cx="5064120" cy="4318920"/>
+            <a:ext cx="5062320" cy="4317120"/>
           </a:xfrm>
           <a:custGeom>
             <a:avLst/>
@@ -39190,7 +39225,7 @@
         <p:spPr>
           <a:xfrm>
             <a:off x="493920" y="1532520"/>
-            <a:ext cx="4771080" cy="1739880"/>
+            <a:ext cx="4769280" cy="1738080"/>
           </a:xfrm>
           <a:prstGeom prst="roundRect">
             <a:avLst>
@@ -39222,7 +39257,7 @@
         <p:spPr>
           <a:xfrm>
             <a:off x="368280" y="3374640"/>
-            <a:ext cx="5022360" cy="500760"/>
+            <a:ext cx="5020560" cy="498960"/>
           </a:xfrm>
           <a:prstGeom prst="rect">
             <a:avLst/>
@@ -39274,7 +39309,7 @@
         <p:spPr>
           <a:xfrm>
             <a:off x="452160" y="3943800"/>
-            <a:ext cx="4854960" cy="232560"/>
+            <a:ext cx="4853160" cy="230760"/>
           </a:xfrm>
           <a:prstGeom prst="rect">
             <a:avLst/>
@@ -39326,7 +39361,7 @@
         <p:spPr>
           <a:xfrm>
             <a:off x="460440" y="4245480"/>
-            <a:ext cx="4838040" cy="199080"/>
+            <a:ext cx="4836240" cy="197280"/>
           </a:xfrm>
           <a:prstGeom prst="rect">
             <a:avLst/>
@@ -39380,7 +39415,7 @@
         <p:spPr>
           <a:xfrm>
             <a:off x="347400" y="5867640"/>
-            <a:ext cx="5064120" cy="760320"/>
+            <a:ext cx="5062320" cy="758520"/>
           </a:xfrm>
           <a:custGeom>
             <a:avLst/>
@@ -39436,7 +39471,7 @@
         <p:spPr>
           <a:xfrm>
             <a:off x="456480" y="6014520"/>
-            <a:ext cx="4846680" cy="232560"/>
+            <a:ext cx="4844880" cy="230760"/>
           </a:xfrm>
           <a:prstGeom prst="rect">
             <a:avLst/>
@@ -39498,7 +39533,7 @@
         <p:spPr>
           <a:xfrm>
             <a:off x="456480" y="6248880"/>
-            <a:ext cx="4846680" cy="232560"/>
+            <a:ext cx="4844880" cy="230760"/>
           </a:xfrm>
           <a:prstGeom prst="rect">
             <a:avLst/>
@@ -39560,7 +39595,7 @@
         <p:spPr>
           <a:xfrm>
             <a:off x="5643000" y="1386000"/>
-            <a:ext cx="6203160" cy="1806840"/>
+            <a:ext cx="6201360" cy="1805040"/>
           </a:xfrm>
           <a:custGeom>
             <a:avLst/>
@@ -39616,7 +39651,7 @@
         <p:spPr>
           <a:xfrm>
             <a:off x="5823000" y="1566000"/>
-            <a:ext cx="5943600" cy="266040"/>
+            <a:ext cx="5941800" cy="264240"/>
           </a:xfrm>
           <a:prstGeom prst="rect">
             <a:avLst/>
@@ -39668,7 +39703,7 @@
         <p:spPr>
           <a:xfrm>
             <a:off x="5823000" y="1934280"/>
-            <a:ext cx="5918400" cy="492120"/>
+            <a:ext cx="5916600" cy="490320"/>
           </a:xfrm>
           <a:prstGeom prst="rect">
             <a:avLst/>
@@ -39760,7 +39795,7 @@
         <p:spPr>
           <a:xfrm>
             <a:off x="5823000" y="2524680"/>
-            <a:ext cx="5918400" cy="492120"/>
+            <a:ext cx="5916600" cy="490320"/>
           </a:xfrm>
           <a:prstGeom prst="rect">
             <a:avLst/>
@@ -39832,7 +39867,7 @@
         <p:spPr>
           <a:xfrm>
             <a:off x="5643000" y="3353760"/>
-            <a:ext cx="6203160" cy="2049840"/>
+            <a:ext cx="6201360" cy="2048040"/>
           </a:xfrm>
           <a:custGeom>
             <a:avLst/>
@@ -39888,7 +39923,7 @@
         <p:spPr>
           <a:xfrm>
             <a:off x="5823000" y="3533760"/>
-            <a:ext cx="5943600" cy="266040"/>
+            <a:ext cx="5941800" cy="264240"/>
           </a:xfrm>
           <a:prstGeom prst="rect">
             <a:avLst/>
@@ -39940,7 +39975,7 @@
         <p:spPr>
           <a:xfrm>
             <a:off x="5823000" y="3902040"/>
-            <a:ext cx="5918400" cy="735120"/>
+            <a:ext cx="5916600" cy="733320"/>
           </a:xfrm>
           <a:prstGeom prst="rect">
             <a:avLst/>
@@ -40012,7 +40047,7 @@
         <p:spPr>
           <a:xfrm>
             <a:off x="5823000" y="4737240"/>
-            <a:ext cx="5918400" cy="492120"/>
+            <a:ext cx="5916600" cy="490320"/>
           </a:xfrm>
           <a:prstGeom prst="rect">
             <a:avLst/>
@@ -40074,7 +40109,7 @@
         <p:spPr>
           <a:xfrm>
             <a:off x="5643000" y="5566320"/>
-            <a:ext cx="6203160" cy="1061640"/>
+            <a:ext cx="6201360" cy="1059840"/>
           </a:xfrm>
           <a:custGeom>
             <a:avLst/>
@@ -40130,7 +40165,7 @@
         <p:spPr>
           <a:xfrm>
             <a:off x="5789520" y="5712840"/>
-            <a:ext cx="5993640" cy="232560"/>
+            <a:ext cx="5991840" cy="230760"/>
           </a:xfrm>
           <a:prstGeom prst="rect">
             <a:avLst/>
@@ -40182,7 +40217,7 @@
         <p:spPr>
           <a:xfrm>
             <a:off x="5789520" y="6048000"/>
-            <a:ext cx="5977080" cy="433800"/>
+            <a:ext cx="5975280" cy="432000"/>
           </a:xfrm>
           <a:prstGeom prst="rect">
             <a:avLst/>
